--- a/Prestentations/AI for Content Creation — The Basics.pptx
+++ b/Prestentations/AI for Content Creation — The Basics.pptx
@@ -37,6 +37,20 @@
     <p:sldId id="282" r:id="rId31"/>
     <p:sldId id="283" r:id="rId32"/>
     <p:sldId id="284" r:id="rId33"/>
+    <p:sldId id="286" r:id="rId43"/>
+    <p:sldId id="287" r:id="rId44"/>
+    <p:sldId id="288" r:id="rId45"/>
+    <p:sldId id="289" r:id="rId46"/>
+    <p:sldId id="290" r:id="rId47"/>
+    <p:sldId id="291" r:id="rId48"/>
+    <p:sldId id="292" r:id="rId49"/>
+    <p:sldId id="293" r:id="rId50"/>
+    <p:sldId id="294" r:id="rId51"/>
+    <p:sldId id="295" r:id="rId52"/>
+    <p:sldId id="296" r:id="rId53"/>
+    <p:sldId id="297" r:id="rId54"/>
+    <p:sldId id="298" r:id="rId55"/>
+    <p:sldId id="299" r:id="rId56"/>
     <p:sldId id="285" r:id="rId34"/>
   </p:sldIdLst>
   <p:sldSz cy="6858000" cx="12192000"/>
@@ -4891,20 +4905,9 @@
           </a:bodyPr>
           <a:lstStyle/>
           <a:p>
-            <a:pPr indent="0" lvl="0" marL="0" rtl="0" algn="l">
-              <a:spcBef>
-                <a:spcPts val="0"/>
-              </a:spcBef>
-              <a:spcAft>
-                <a:spcPts val="0"/>
-              </a:spcAft>
-              <a:buNone/>
-            </a:pPr>
-            <a:r>
-              <a:rPr lang="en-US"/>
-              <a:t>Set up the hands-on. Everyone works on the same fictional-style launch so results can be compared. Suggest roughly 8 to 10 minutes per step. Steps 2 to 4 happen in the same chat as step 1, so the AI remembers the caption. Share the Loop Tote brief as copyable text (chat, WhatsApp or a shared doc) so people can paste it.</a:t>
-            </a:r>
-            <a:endParaRPr/>
+            <a:r>
+              <a:t>Set up the hands-on. Everyone works on the same fictional-style launch so results can be compared. Suggest roughly 8 to 10 minutes per step. Steps 2 to 4 happen in the same chat as step 1, so the AI remembers the caption. Share the Loop Tote brief as copyable text (chat, WhatsApp or a shared doc) so people can paste it. ‹#›</a:t>
+            </a:r>
           </a:p>
         </p:txBody>
       </p:sp>
@@ -5276,6 +5279,636 @@
 </p:notes>
 </file>
 
+<file path=ppt/notesSlides/notesSlide31.xml><?xml version="1.0" encoding="utf-8"?>
+<p:notes xmlns:a="http://schemas.openxmlformats.org/drawingml/2006/main" xmlns:p="http://schemas.openxmlformats.org/presentationml/2006/main" xmlns:r="http://schemas.openxmlformats.org/officeDocument/2006/relationships">
+  <p:cSld>
+    <p:spTree>
+      <p:nvGrpSpPr>
+        <p:cNvPr id="1" name=""/>
+        <p:cNvGrpSpPr/>
+        <p:nvPr/>
+      </p:nvGrpSpPr>
+      <p:grpSpPr>
+        <a:xfrm>
+          <a:off x="0" y="0"/>
+          <a:ext cx="0" cy="0"/>
+          <a:chOff x="0" y="0"/>
+          <a:chExt cx="0" cy="0"/>
+        </a:xfrm>
+      </p:grpSpPr>
+      <p:sp>
+        <p:nvSpPr>
+          <p:cNvPr id="2" name="Slide Image Placeholder 1"/>
+          <p:cNvSpPr>
+            <a:spLocks noGrp="1"/>
+          </p:cNvSpPr>
+          <p:nvPr>
+            <p:ph type="sldImg" idx="3"/>
+          </p:nvPr>
+        </p:nvSpPr>
+        <p:spPr/>
+      </p:sp>
+      <p:sp>
+        <p:nvSpPr>
+          <p:cNvPr id="3" name="Notes Placeholder 2"/>
+          <p:cNvSpPr>
+            <a:spLocks noGrp="1"/>
+          </p:cNvSpPr>
+          <p:nvPr>
+            <p:ph type="body" idx="1"/>
+          </p:nvPr>
+        </p:nvSpPr>
+        <p:spPr/>
+        <p:txBody>
+          <a:bodyPr/>
+          <a:lstStyle/>
+          <a:p>
+            <a:r>
+              <a:t>Give participants 2 minutes to open the files before moving on. The KPI file is enough for Questions 1, 3 and 5. The caption file is needed for Question 2. The audience files are optional extras for Question 4.</a:t>
+            </a:r>
+          </a:p>
+        </p:txBody>
+      </p:sp>
+      <p:sp>
+        <p:nvSpPr>
+          <p:cNvPr id="4" name="Slide Number Placeholder 3"/>
+          <p:cNvSpPr>
+            <a:spLocks noGrp="1"/>
+          </p:cNvSpPr>
+          <p:nvPr>
+            <p:ph type="sldNum" idx="12"/>
+          </p:nvPr>
+        </p:nvSpPr>
+        <p:spPr/>
+      </p:sp>
+    </p:spTree>
+  </p:cSld>
+  <p:clrMapOvr>
+    <a:masterClrMapping/>
+  </p:clrMapOvr>
+</p:notes>
+</file>
+
+<file path=ppt/notesSlides/notesSlide32.xml><?xml version="1.0" encoding="utf-8"?>
+<p:notes xmlns:a="http://schemas.openxmlformats.org/drawingml/2006/main" xmlns:p="http://schemas.openxmlformats.org/presentationml/2006/main" xmlns:r="http://schemas.openxmlformats.org/officeDocument/2006/relationships">
+  <p:cSld>
+    <p:spTree>
+      <p:nvGrpSpPr>
+        <p:cNvPr id="1" name=""/>
+        <p:cNvGrpSpPr/>
+        <p:nvPr/>
+      </p:nvGrpSpPr>
+      <p:grpSpPr>
+        <a:xfrm>
+          <a:off x="0" y="0"/>
+          <a:ext cx="0" cy="0"/>
+          <a:chOff x="0" y="0"/>
+          <a:chExt cx="0" cy="0"/>
+        </a:xfrm>
+      </p:grpSpPr>
+      <p:sp>
+        <p:nvSpPr>
+          <p:cNvPr id="2" name="Slide Image Placeholder 1"/>
+          <p:cNvSpPr>
+            <a:spLocks noGrp="1"/>
+          </p:cNvSpPr>
+          <p:nvPr>
+            <p:ph type="sldImg" idx="3"/>
+          </p:nvPr>
+        </p:nvSpPr>
+        <p:spPr/>
+      </p:sp>
+      <p:sp>
+        <p:nvSpPr>
+          <p:cNvPr id="3" name="Notes Placeholder 2"/>
+          <p:cNvSpPr>
+            <a:spLocks noGrp="1"/>
+          </p:cNvSpPr>
+          <p:nvPr>
+            <p:ph type="body" idx="1"/>
+          </p:nvPr>
+        </p:nvSpPr>
+        <p:spPr/>
+        <p:txBody>
+          <a:bodyPr/>
+          <a:lstStyle/>
+          <a:p>
+            <a:r>
+              <a:t>~3 minutes. Get everyone to paste this before they start. "Show how many posts are behind every figure" and "say when a sample is too small" are what separate a useful analysis from a confident but misleading one. Demo: paste "Analyse my Instagram data." first. Then paste Question 1. Ask the group what they got from each. The weak prompt usually gives generic averages with no decision.</a:t>
+            </a:r>
+          </a:p>
+        </p:txBody>
+      </p:sp>
+      <p:sp>
+        <p:nvSpPr>
+          <p:cNvPr id="4" name="Slide Number Placeholder 3"/>
+          <p:cNvSpPr>
+            <a:spLocks noGrp="1"/>
+          </p:cNvSpPr>
+          <p:nvPr>
+            <p:ph type="sldNum" idx="12"/>
+          </p:nvPr>
+        </p:nvSpPr>
+        <p:spPr/>
+      </p:sp>
+    </p:spTree>
+  </p:cSld>
+  <p:clrMapOvr>
+    <a:masterClrMapping/>
+  </p:clrMapOvr>
+</p:notes>
+</file>
+
+<file path=ppt/notesSlides/notesSlide33.xml><?xml version="1.0" encoding="utf-8"?>
+<p:notes xmlns:a="http://schemas.openxmlformats.org/drawingml/2006/main" xmlns:p="http://schemas.openxmlformats.org/presentationml/2006/main" xmlns:r="http://schemas.openxmlformats.org/officeDocument/2006/relationships">
+  <p:cSld>
+    <p:spTree>
+      <p:nvGrpSpPr>
+        <p:cNvPr id="1" name=""/>
+        <p:cNvGrpSpPr/>
+        <p:nvPr/>
+      </p:nvGrpSpPr>
+      <p:grpSpPr>
+        <a:xfrm>
+          <a:off x="0" y="0"/>
+          <a:ext cx="0" cy="0"/>
+          <a:chOff x="0" y="0"/>
+          <a:chExt cx="0" cy="0"/>
+        </a:xfrm>
+      </p:grpSpPr>
+      <p:sp>
+        <p:nvSpPr>
+          <p:cNvPr id="2" name="Slide Image Placeholder 1"/>
+          <p:cNvSpPr>
+            <a:spLocks noGrp="1"/>
+          </p:cNvSpPr>
+          <p:nvPr>
+            <p:ph type="sldImg" idx="3"/>
+          </p:nvPr>
+        </p:nvSpPr>
+        <p:spPr/>
+      </p:sp>
+      <p:sp>
+        <p:nvSpPr>
+          <p:cNvPr id="3" name="Notes Placeholder 2"/>
+          <p:cNvSpPr>
+            <a:spLocks noGrp="1"/>
+          </p:cNvSpPr>
+          <p:nvPr>
+            <p:ph type="body" idx="1"/>
+          </p:nvPr>
+        </p:nvSpPr>
+        <p:spPr/>
+        <p:txBody>
+          <a:bodyPr/>
+          <a:lstStyle/>
+          <a:p>
+            <a:r>
+              <a:t>~10-12 minutes. Goal: format and pillar comparison tables. The trap is the education pillar: one viral Reel inflates the average. A good AI answer spots this. Ask participants: did yours flag it? If not, add "Check whether any average is distorted by one unusual post."</a:t>
+            </a:r>
+          </a:p>
+        </p:txBody>
+      </p:sp>
+      <p:sp>
+        <p:nvSpPr>
+          <p:cNvPr id="4" name="Slide Number Placeholder 3"/>
+          <p:cNvSpPr>
+            <a:spLocks noGrp="1"/>
+          </p:cNvSpPr>
+          <p:nvPr>
+            <p:ph type="sldNum" idx="12"/>
+          </p:nvPr>
+        </p:nvSpPr>
+        <p:spPr/>
+      </p:sp>
+    </p:spTree>
+  </p:cSld>
+  <p:clrMapOvr>
+    <a:masterClrMapping/>
+  </p:clrMapOvr>
+</p:notes>
+</file>
+
+<file path=ppt/notesSlides/notesSlide34.xml><?xml version="1.0" encoding="utf-8"?>
+<p:notes xmlns:a="http://schemas.openxmlformats.org/drawingml/2006/main" xmlns:p="http://schemas.openxmlformats.org/presentationml/2006/main" xmlns:r="http://schemas.openxmlformats.org/officeDocument/2006/relationships">
+  <p:cSld>
+    <p:spTree>
+      <p:nvGrpSpPr>
+        <p:cNvPr id="1" name=""/>
+        <p:cNvGrpSpPr/>
+        <p:nvPr/>
+      </p:nvGrpSpPr>
+      <p:grpSpPr>
+        <a:xfrm>
+          <a:off x="0" y="0"/>
+          <a:ext cx="0" cy="0"/>
+          <a:chOff x="0" y="0"/>
+          <a:chExt cx="0" cy="0"/>
+        </a:xfrm>
+      </p:grpSpPr>
+      <p:sp>
+        <p:nvSpPr>
+          <p:cNvPr id="2" name="Slide Image Placeholder 1"/>
+          <p:cNvSpPr>
+            <a:spLocks noGrp="1"/>
+          </p:cNvSpPr>
+          <p:nvPr>
+            <p:ph type="sldImg" idx="3"/>
+          </p:nvPr>
+        </p:nvSpPr>
+        <p:spPr/>
+      </p:sp>
+      <p:sp>
+        <p:nvSpPr>
+          <p:cNvPr id="3" name="Notes Placeholder 2"/>
+          <p:cNvSpPr>
+            <a:spLocks noGrp="1"/>
+          </p:cNvSpPr>
+          <p:nvPr>
+            <p:ph type="body" idx="1"/>
+          </p:nvPr>
+        </p:nvSpPr>
+        <p:spPr/>
+        <p:txBody>
+          <a:bodyPr/>
+          <a:lstStyle/>
+          <a:p>
+            <a:r>
+              <a:t>Debrief Q1. Ask 2-3 people to share one number they verified in the spreadsheet. Build the habit of spot-checking.</a:t>
+            </a:r>
+          </a:p>
+        </p:txBody>
+      </p:sp>
+      <p:sp>
+        <p:nvSpPr>
+          <p:cNvPr id="4" name="Slide Number Placeholder 3"/>
+          <p:cNvSpPr>
+            <a:spLocks noGrp="1"/>
+          </p:cNvSpPr>
+          <p:nvPr>
+            <p:ph type="sldNum" idx="12"/>
+          </p:nvPr>
+        </p:nvSpPr>
+        <p:spPr/>
+      </p:sp>
+    </p:spTree>
+  </p:cSld>
+  <p:clrMapOvr>
+    <a:masterClrMapping/>
+  </p:clrMapOvr>
+</p:notes>
+</file>
+
+<file path=ppt/notesSlides/notesSlide35.xml><?xml version="1.0" encoding="utf-8"?>
+<p:notes xmlns:a="http://schemas.openxmlformats.org/drawingml/2006/main" xmlns:p="http://schemas.openxmlformats.org/presentationml/2006/main" xmlns:r="http://schemas.openxmlformats.org/officeDocument/2006/relationships">
+  <p:cSld>
+    <p:spTree>
+      <p:nvGrpSpPr>
+        <p:cNvPr id="1" name=""/>
+        <p:cNvGrpSpPr/>
+        <p:nvPr/>
+      </p:nvGrpSpPr>
+      <p:grpSpPr>
+        <a:xfrm>
+          <a:off x="0" y="0"/>
+          <a:ext cx="0" cy="0"/>
+          <a:chOff x="0" y="0"/>
+          <a:chExt cx="0" cy="0"/>
+        </a:xfrm>
+      </p:grpSpPr>
+      <p:sp>
+        <p:nvSpPr>
+          <p:cNvPr id="2" name="Slide Image Placeholder 1"/>
+          <p:cNvSpPr>
+            <a:spLocks noGrp="1"/>
+          </p:cNvSpPr>
+          <p:nvPr>
+            <p:ph type="sldImg" idx="3"/>
+          </p:nvPr>
+        </p:nvSpPr>
+        <p:spPr/>
+      </p:sp>
+      <p:sp>
+        <p:nvSpPr>
+          <p:cNvPr id="3" name="Notes Placeholder 2"/>
+          <p:cNvSpPr>
+            <a:spLocks noGrp="1"/>
+          </p:cNvSpPr>
+          <p:nvPr>
+            <p:ph type="body" idx="1"/>
+          </p:nvPr>
+        </p:nvSpPr>
+        <p:spPr/>
+        <p:txBody>
+          <a:bodyPr/>
+          <a:lstStyle/>
+          <a:p>
+            <a:r>
+              <a:t>~10-12 minutes. Needs both files. Key trap: hashtag_count is 2 for 28 of 30 posts — cannot be tested. A good AI answer says so explicitly. Ask: did your AI tell you what it COULD NOT conclude?</a:t>
+            </a:r>
+          </a:p>
+        </p:txBody>
+      </p:sp>
+      <p:sp>
+        <p:nvSpPr>
+          <p:cNvPr id="4" name="Slide Number Placeholder 3"/>
+          <p:cNvSpPr>
+            <a:spLocks noGrp="1"/>
+          </p:cNvSpPr>
+          <p:nvPr>
+            <p:ph type="sldNum" idx="12"/>
+          </p:nvPr>
+        </p:nvSpPr>
+        <p:spPr/>
+      </p:sp>
+    </p:spTree>
+  </p:cSld>
+  <p:clrMapOvr>
+    <a:masterClrMapping/>
+  </p:clrMapOvr>
+</p:notes>
+</file>
+
+<file path=ppt/notesSlides/notesSlide36.xml><?xml version="1.0" encoding="utf-8"?>
+<p:notes xmlns:a="http://schemas.openxmlformats.org/drawingml/2006/main" xmlns:p="http://schemas.openxmlformats.org/presentationml/2006/main" xmlns:r="http://schemas.openxmlformats.org/officeDocument/2006/relationships">
+  <p:cSld>
+    <p:spTree>
+      <p:nvGrpSpPr>
+        <p:cNvPr id="1" name=""/>
+        <p:cNvGrpSpPr/>
+        <p:nvPr/>
+      </p:nvGrpSpPr>
+      <p:grpSpPr>
+        <a:xfrm>
+          <a:off x="0" y="0"/>
+          <a:ext cx="0" cy="0"/>
+          <a:chOff x="0" y="0"/>
+          <a:chExt cx="0" cy="0"/>
+        </a:xfrm>
+      </p:grpSpPr>
+      <p:sp>
+        <p:nvSpPr>
+          <p:cNvPr id="2" name="Slide Image Placeholder 1"/>
+          <p:cNvSpPr>
+            <a:spLocks noGrp="1"/>
+          </p:cNvSpPr>
+          <p:nvPr>
+            <p:ph type="sldImg" idx="3"/>
+          </p:nvPr>
+        </p:nvSpPr>
+        <p:spPr/>
+      </p:sp>
+      <p:sp>
+        <p:nvSpPr>
+          <p:cNvPr id="3" name="Notes Placeholder 2"/>
+          <p:cNvSpPr>
+            <a:spLocks noGrp="1"/>
+          </p:cNvSpPr>
+          <p:nvPr>
+            <p:ph type="body" idx="1"/>
+          </p:nvPr>
+        </p:nvSpPr>
+        <p:spPr/>
+        <p:txBody>
+          <a:bodyPr/>
+          <a:lstStyle/>
+          <a:p>
+            <a:r>
+              <a:t>Debrief Q2. Ask: how many of you got an AI answer that told you what it COULD NOT conclude? That is the quality bar.</a:t>
+            </a:r>
+          </a:p>
+        </p:txBody>
+      </p:sp>
+      <p:sp>
+        <p:nvSpPr>
+          <p:cNvPr id="4" name="Slide Number Placeholder 3"/>
+          <p:cNvSpPr>
+            <a:spLocks noGrp="1"/>
+          </p:cNvSpPr>
+          <p:nvPr>
+            <p:ph type="sldNum" idx="12"/>
+          </p:nvPr>
+        </p:nvSpPr>
+        <p:spPr/>
+      </p:sp>
+    </p:spTree>
+  </p:cSld>
+  <p:clrMapOvr>
+    <a:masterClrMapping/>
+  </p:clrMapOvr>
+</p:notes>
+</file>
+
+<file path=ppt/notesSlides/notesSlide37.xml><?xml version="1.0" encoding="utf-8"?>
+<p:notes xmlns:a="http://schemas.openxmlformats.org/drawingml/2006/main" xmlns:p="http://schemas.openxmlformats.org/presentationml/2006/main" xmlns:r="http://schemas.openxmlformats.org/officeDocument/2006/relationships">
+  <p:cSld>
+    <p:spTree>
+      <p:nvGrpSpPr>
+        <p:cNvPr id="1" name=""/>
+        <p:cNvGrpSpPr/>
+        <p:nvPr/>
+      </p:nvGrpSpPr>
+      <p:grpSpPr>
+        <a:xfrm>
+          <a:off x="0" y="0"/>
+          <a:ext cx="0" cy="0"/>
+          <a:chOff x="0" y="0"/>
+          <a:chExt cx="0" cy="0"/>
+        </a:xfrm>
+      </p:grpSpPr>
+      <p:sp>
+        <p:nvSpPr>
+          <p:cNvPr id="2" name="Slide Image Placeholder 1"/>
+          <p:cNvSpPr>
+            <a:spLocks noGrp="1"/>
+          </p:cNvSpPr>
+          <p:nvPr>
+            <p:ph type="sldImg" idx="3"/>
+          </p:nvPr>
+        </p:nvSpPr>
+        <p:spPr/>
+      </p:sp>
+      <p:sp>
+        <p:nvSpPr>
+          <p:cNvPr id="3" name="Notes Placeholder 2"/>
+          <p:cNvSpPr>
+            <a:spLocks noGrp="1"/>
+          </p:cNvSpPr>
+          <p:nvPr>
+            <p:ph type="body" idx="1"/>
+          </p:nvPr>
+        </p:nvSpPr>
+        <p:spPr/>
+        <p:txBody>
+          <a:bodyPr/>
+          <a:lstStyle/>
+          <a:p>
+            <a:r>
+              <a:t>~10-12 minutes. The "best time to post" question teams love. The answer is almost always: you cannot tell because time is mixed up with format. Nearly all Reels were posted at 08:00-09:00 and most carousels at 12:00-20:00. Ask: did your AI spot the confound?</a:t>
+            </a:r>
+          </a:p>
+        </p:txBody>
+      </p:sp>
+      <p:sp>
+        <p:nvSpPr>
+          <p:cNvPr id="4" name="Slide Number Placeholder 3"/>
+          <p:cNvSpPr>
+            <a:spLocks noGrp="1"/>
+          </p:cNvSpPr>
+          <p:nvPr>
+            <p:ph type="sldNum" idx="12"/>
+          </p:nvPr>
+        </p:nvSpPr>
+        <p:spPr/>
+      </p:sp>
+    </p:spTree>
+  </p:cSld>
+  <p:clrMapOvr>
+    <a:masterClrMapping/>
+  </p:clrMapOvr>
+</p:notes>
+</file>
+
+<file path=ppt/notesSlides/notesSlide38.xml><?xml version="1.0" encoding="utf-8"?>
+<p:notes xmlns:a="http://schemas.openxmlformats.org/drawingml/2006/main" xmlns:p="http://schemas.openxmlformats.org/presentationml/2006/main" xmlns:r="http://schemas.openxmlformats.org/officeDocument/2006/relationships">
+  <p:cSld>
+    <p:spTree>
+      <p:nvGrpSpPr>
+        <p:cNvPr id="1" name=""/>
+        <p:cNvGrpSpPr/>
+        <p:nvPr/>
+      </p:nvGrpSpPr>
+      <p:grpSpPr>
+        <a:xfrm>
+          <a:off x="0" y="0"/>
+          <a:ext cx="0" cy="0"/>
+          <a:chOff x="0" y="0"/>
+          <a:chExt cx="0" cy="0"/>
+        </a:xfrm>
+      </p:grpSpPr>
+      <p:sp>
+        <p:nvSpPr>
+          <p:cNvPr id="2" name="Slide Image Placeholder 1"/>
+          <p:cNvSpPr>
+            <a:spLocks noGrp="1"/>
+          </p:cNvSpPr>
+          <p:nvPr>
+            <p:ph type="sldImg" idx="3"/>
+          </p:nvPr>
+        </p:nvSpPr>
+        <p:spPr/>
+      </p:sp>
+      <p:sp>
+        <p:nvSpPr>
+          <p:cNvPr id="3" name="Notes Placeholder 2"/>
+          <p:cNvSpPr>
+            <a:spLocks noGrp="1"/>
+          </p:cNvSpPr>
+          <p:nvPr>
+            <p:ph type="body" idx="1"/>
+          </p:nvPr>
+        </p:nvSpPr>
+        <p:spPr/>
+        <p:txBody>
+          <a:bodyPr/>
+          <a:lstStyle/>
+          <a:p>
+            <a:r>
+              <a:t>Debrief Q3. The most common misconception in social media analytics. Ask: how many got a "best time" answer without the confound flagged?</a:t>
+            </a:r>
+          </a:p>
+        </p:txBody>
+      </p:sp>
+      <p:sp>
+        <p:nvSpPr>
+          <p:cNvPr id="4" name="Slide Number Placeholder 3"/>
+          <p:cNvSpPr>
+            <a:spLocks noGrp="1"/>
+          </p:cNvSpPr>
+          <p:nvPr>
+            <p:ph type="sldNum" idx="12"/>
+          </p:nvPr>
+        </p:nvSpPr>
+        <p:spPr/>
+      </p:sp>
+    </p:spTree>
+  </p:cSld>
+  <p:clrMapOvr>
+    <a:masterClrMapping/>
+  </p:clrMapOvr>
+</p:notes>
+</file>
+
+<file path=ppt/notesSlides/notesSlide39.xml><?xml version="1.0" encoding="utf-8"?>
+<p:notes xmlns:a="http://schemas.openxmlformats.org/drawingml/2006/main" xmlns:p="http://schemas.openxmlformats.org/presentationml/2006/main" xmlns:r="http://schemas.openxmlformats.org/officeDocument/2006/relationships">
+  <p:cSld>
+    <p:spTree>
+      <p:nvGrpSpPr>
+        <p:cNvPr id="1" name=""/>
+        <p:cNvGrpSpPr/>
+        <p:nvPr/>
+      </p:nvGrpSpPr>
+      <p:grpSpPr>
+        <a:xfrm>
+          <a:off x="0" y="0"/>
+          <a:ext cx="0" cy="0"/>
+          <a:chOff x="0" y="0"/>
+          <a:chExt cx="0" cy="0"/>
+        </a:xfrm>
+      </p:grpSpPr>
+      <p:sp>
+        <p:nvSpPr>
+          <p:cNvPr id="2" name="Slide Image Placeholder 1"/>
+          <p:cNvSpPr>
+            <a:spLocks noGrp="1"/>
+          </p:cNvSpPr>
+          <p:nvPr>
+            <p:ph type="sldImg" idx="3"/>
+          </p:nvPr>
+        </p:nvSpPr>
+        <p:spPr/>
+      </p:sp>
+      <p:sp>
+        <p:nvSpPr>
+          <p:cNvPr id="3" name="Notes Placeholder 2"/>
+          <p:cNvSpPr>
+            <a:spLocks noGrp="1"/>
+          </p:cNvSpPr>
+          <p:nvPr>
+            <p:ph type="body" idx="1"/>
+          </p:nvPr>
+        </p:nvSpPr>
+        <p:spPr/>
+        <p:txBody>
+          <a:bodyPr/>
+          <a:lstStyle/>
+          <a:p>
+            <a:r>
+              <a:t>~10-12 minutes. About the difference between real and estimated data. The modeled audience columns are estimates based on the follower base — not independent evidence. A good AI answer says so. Ask: did yours separate real from estimated?</a:t>
+            </a:r>
+          </a:p>
+        </p:txBody>
+      </p:sp>
+      <p:sp>
+        <p:nvSpPr>
+          <p:cNvPr id="4" name="Slide Number Placeholder 3"/>
+          <p:cNvSpPr>
+            <a:spLocks noGrp="1"/>
+          </p:cNvSpPr>
+          <p:nvPr>
+            <p:ph type="sldNum" idx="12"/>
+          </p:nvPr>
+        </p:nvSpPr>
+        <p:spPr/>
+      </p:sp>
+    </p:spTree>
+  </p:cSld>
+  <p:clrMapOvr>
+    <a:masterClrMapping/>
+  </p:clrMapOvr>
+</p:notes>
+</file>
+
 <file path=ppt/notesSlides/notesSlide4.xml><?xml version="1.0" encoding="utf-8"?>
 <p:notes xmlns:a="http://schemas.openxmlformats.org/drawingml/2006/main" xmlns:r="http://schemas.openxmlformats.org/officeDocument/2006/relationships" xmlns:mc="http://schemas.openxmlformats.org/markup-compatibility/2006" xmlns:mv="urn:schemas-microsoft-com:mac:vml" xmlns:p="http://schemas.openxmlformats.org/presentationml/2006/main" xmlns:c="http://schemas.openxmlformats.org/drawingml/2006/chart" xmlns:dgm="http://schemas.openxmlformats.org/drawingml/2006/diagram" xmlns:o="urn:schemas-microsoft-com:office:office" xmlns:v="urn:schemas-microsoft-com:vml" xmlns:pvml="urn:schemas-microsoft-com:office:powerpoint" xmlns:com="http://schemas.openxmlformats.org/drawingml/2006/compatibility" xmlns:p14="http://schemas.microsoft.com/office/powerpoint/2010/main" xmlns:p15="http://schemas.microsoft.com/office/powerpoint/2012/main" xmlns:ahyp="http://schemas.microsoft.com/office/drawing/2018/hyperlinkcolor" showMasterPhAnim="0" showMasterSp="0">
   <p:cSld>
@@ -5425,6 +6058,356 @@
             <a:endParaRPr/>
           </a:p>
         </p:txBody>
+      </p:sp>
+    </p:spTree>
+  </p:cSld>
+  <p:clrMapOvr>
+    <a:masterClrMapping/>
+  </p:clrMapOvr>
+</p:notes>
+</file>
+
+<file path=ppt/notesSlides/notesSlide40.xml><?xml version="1.0" encoding="utf-8"?>
+<p:notes xmlns:a="http://schemas.openxmlformats.org/drawingml/2006/main" xmlns:p="http://schemas.openxmlformats.org/presentationml/2006/main" xmlns:r="http://schemas.openxmlformats.org/officeDocument/2006/relationships">
+  <p:cSld>
+    <p:spTree>
+      <p:nvGrpSpPr>
+        <p:cNvPr id="1" name=""/>
+        <p:cNvGrpSpPr/>
+        <p:nvPr/>
+      </p:nvGrpSpPr>
+      <p:grpSpPr>
+        <a:xfrm>
+          <a:off x="0" y="0"/>
+          <a:ext cx="0" cy="0"/>
+          <a:chOff x="0" y="0"/>
+          <a:chExt cx="0" cy="0"/>
+        </a:xfrm>
+      </p:grpSpPr>
+      <p:sp>
+        <p:nvSpPr>
+          <p:cNvPr id="2" name="Slide Image Placeholder 1"/>
+          <p:cNvSpPr>
+            <a:spLocks noGrp="1"/>
+          </p:cNvSpPr>
+          <p:nvPr>
+            <p:ph type="sldImg" idx="3"/>
+          </p:nvPr>
+        </p:nvSpPr>
+        <p:spPr/>
+      </p:sp>
+      <p:sp>
+        <p:nvSpPr>
+          <p:cNvPr id="3" name="Notes Placeholder 2"/>
+          <p:cNvSpPr>
+            <a:spLocks noGrp="1"/>
+          </p:cNvSpPr>
+          <p:nvPr>
+            <p:ph type="body" idx="1"/>
+          </p:nvPr>
+        </p:nvSpPr>
+        <p:spPr/>
+        <p:txBody>
+          <a:bodyPr/>
+          <a:lstStyle/>
+          <a:p>
+            <a:r>
+              <a:t>Debrief Q4. Ask: what would you need to do to actually measure your audience composition per post? This is where the conversation about Instagram's data limits belongs.</a:t>
+            </a:r>
+          </a:p>
+        </p:txBody>
+      </p:sp>
+      <p:sp>
+        <p:nvSpPr>
+          <p:cNvPr id="4" name="Slide Number Placeholder 3"/>
+          <p:cNvSpPr>
+            <a:spLocks noGrp="1"/>
+          </p:cNvSpPr>
+          <p:nvPr>
+            <p:ph type="sldNum" idx="12"/>
+          </p:nvPr>
+        </p:nvSpPr>
+        <p:spPr/>
+      </p:sp>
+    </p:spTree>
+  </p:cSld>
+  <p:clrMapOvr>
+    <a:masterClrMapping/>
+  </p:clrMapOvr>
+</p:notes>
+</file>
+
+<file path=ppt/notesSlides/notesSlide41.xml><?xml version="1.0" encoding="utf-8"?>
+<p:notes xmlns:a="http://schemas.openxmlformats.org/drawingml/2006/main" xmlns:p="http://schemas.openxmlformats.org/presentationml/2006/main" xmlns:r="http://schemas.openxmlformats.org/officeDocument/2006/relationships">
+  <p:cSld>
+    <p:spTree>
+      <p:nvGrpSpPr>
+        <p:cNvPr id="1" name=""/>
+        <p:cNvGrpSpPr/>
+        <p:nvPr/>
+      </p:nvGrpSpPr>
+      <p:grpSpPr>
+        <a:xfrm>
+          <a:off x="0" y="0"/>
+          <a:ext cx="0" cy="0"/>
+          <a:chOff x="0" y="0"/>
+          <a:chExt cx="0" cy="0"/>
+        </a:xfrm>
+      </p:grpSpPr>
+      <p:sp>
+        <p:nvSpPr>
+          <p:cNvPr id="2" name="Slide Image Placeholder 1"/>
+          <p:cNvSpPr>
+            <a:spLocks noGrp="1"/>
+          </p:cNvSpPr>
+          <p:nvPr>
+            <p:ph type="sldImg" idx="3"/>
+          </p:nvPr>
+        </p:nvSpPr>
+        <p:spPr/>
+      </p:sp>
+      <p:sp>
+        <p:nvSpPr>
+          <p:cNvPr id="3" name="Notes Placeholder 2"/>
+          <p:cNvSpPr>
+            <a:spLocks noGrp="1"/>
+          </p:cNvSpPr>
+          <p:nvPr>
+            <p:ph type="body" idx="1"/>
+          </p:nvPr>
+        </p:nvSpPr>
+        <p:spPr/>
+        <p:txBody>
+          <a:bodyPr/>
+          <a:lstStyle/>
+          <a:p>
+            <a:r>
+              <a:t>~10-12 minutes. The synthesis question. A good answer mixes Reels (reach/new audiences) with carousels (saves/intent), links choices to real findings from Q1-Q4, marks the rest as tests, and includes a fair experiment. The key moment: ask the AI to argue against its own plan.</a:t>
+            </a:r>
+          </a:p>
+        </p:txBody>
+      </p:sp>
+      <p:sp>
+        <p:nvSpPr>
+          <p:cNvPr id="4" name="Slide Number Placeholder 3"/>
+          <p:cNvSpPr>
+            <a:spLocks noGrp="1"/>
+          </p:cNvSpPr>
+          <p:nvPr>
+            <p:ph type="sldNum" idx="12"/>
+          </p:nvPr>
+        </p:nvSpPr>
+        <p:spPr/>
+      </p:sp>
+    </p:spTree>
+  </p:cSld>
+  <p:clrMapOvr>
+    <a:masterClrMapping/>
+  </p:clrMapOvr>
+</p:notes>
+</file>
+
+<file path=ppt/notesSlides/notesSlide42.xml><?xml version="1.0" encoding="utf-8"?>
+<p:notes xmlns:a="http://schemas.openxmlformats.org/drawingml/2006/main" xmlns:p="http://schemas.openxmlformats.org/presentationml/2006/main" xmlns:r="http://schemas.openxmlformats.org/officeDocument/2006/relationships">
+  <p:cSld>
+    <p:spTree>
+      <p:nvGrpSpPr>
+        <p:cNvPr id="1" name=""/>
+        <p:cNvGrpSpPr/>
+        <p:nvPr/>
+      </p:nvGrpSpPr>
+      <p:grpSpPr>
+        <a:xfrm>
+          <a:off x="0" y="0"/>
+          <a:ext cx="0" cy="0"/>
+          <a:chOff x="0" y="0"/>
+          <a:chExt cx="0" cy="0"/>
+        </a:xfrm>
+      </p:grpSpPr>
+      <p:sp>
+        <p:nvSpPr>
+          <p:cNvPr id="2" name="Slide Image Placeholder 1"/>
+          <p:cNvSpPr>
+            <a:spLocks noGrp="1"/>
+          </p:cNvSpPr>
+          <p:nvPr>
+            <p:ph type="sldImg" idx="3"/>
+          </p:nvPr>
+        </p:nvSpPr>
+        <p:spPr/>
+      </p:sp>
+      <p:sp>
+        <p:nvSpPr>
+          <p:cNvPr id="3" name="Notes Placeholder 2"/>
+          <p:cNvSpPr>
+            <a:spLocks noGrp="1"/>
+          </p:cNvSpPr>
+          <p:nvPr>
+            <p:ph type="body" idx="1"/>
+          </p:nvPr>
+        </p:nvSpPr>
+        <p:spPr/>
+        <p:txBody>
+          <a:bodyPr/>
+          <a:lstStyle/>
+          <a:p>
+            <a:r>
+              <a:t>Debrief Q5. Ask the room: which answer would you act on tomorrow, which would you test first, and which would you ignore because the data cannot support it?</a:t>
+            </a:r>
+          </a:p>
+        </p:txBody>
+      </p:sp>
+      <p:sp>
+        <p:nvSpPr>
+          <p:cNvPr id="4" name="Slide Number Placeholder 3"/>
+          <p:cNvSpPr>
+            <a:spLocks noGrp="1"/>
+          </p:cNvSpPr>
+          <p:nvPr>
+            <p:ph type="sldNum" idx="12"/>
+          </p:nvPr>
+        </p:nvSpPr>
+        <p:spPr/>
+      </p:sp>
+    </p:spTree>
+  </p:cSld>
+  <p:clrMapOvr>
+    <a:masterClrMapping/>
+  </p:clrMapOvr>
+</p:notes>
+</file>
+
+<file path=ppt/notesSlides/notesSlide43.xml><?xml version="1.0" encoding="utf-8"?>
+<p:notes xmlns:a="http://schemas.openxmlformats.org/drawingml/2006/main" xmlns:p="http://schemas.openxmlformats.org/presentationml/2006/main" xmlns:r="http://schemas.openxmlformats.org/officeDocument/2006/relationships">
+  <p:cSld>
+    <p:spTree>
+      <p:nvGrpSpPr>
+        <p:cNvPr id="1" name=""/>
+        <p:cNvGrpSpPr/>
+        <p:nvPr/>
+      </p:nvGrpSpPr>
+      <p:grpSpPr>
+        <a:xfrm>
+          <a:off x="0" y="0"/>
+          <a:ext cx="0" cy="0"/>
+          <a:chOff x="0" y="0"/>
+          <a:chExt cx="0" cy="0"/>
+        </a:xfrm>
+      </p:grpSpPr>
+      <p:sp>
+        <p:nvSpPr>
+          <p:cNvPr id="2" name="Slide Image Placeholder 1"/>
+          <p:cNvSpPr>
+            <a:spLocks noGrp="1"/>
+          </p:cNvSpPr>
+          <p:nvPr>
+            <p:ph type="sldImg" idx="3"/>
+          </p:nvPr>
+        </p:nvSpPr>
+        <p:spPr/>
+      </p:sp>
+      <p:sp>
+        <p:nvSpPr>
+          <p:cNvPr id="3" name="Notes Placeholder 2"/>
+          <p:cNvSpPr>
+            <a:spLocks noGrp="1"/>
+          </p:cNvSpPr>
+          <p:nvPr>
+            <p:ph type="body" idx="1"/>
+          </p:nvPr>
+        </p:nvSpPr>
+        <p:spPr/>
+        <p:txBody>
+          <a:bodyPr/>
+          <a:lstStyle/>
+          <a:p>
+            <a:r>
+              <a:t>5 minutes. Walk through the table quickly — participants have seen all six in action. These are the same things that go in a good agency brief.</a:t>
+            </a:r>
+          </a:p>
+        </p:txBody>
+      </p:sp>
+      <p:sp>
+        <p:nvSpPr>
+          <p:cNvPr id="4" name="Slide Number Placeholder 3"/>
+          <p:cNvSpPr>
+            <a:spLocks noGrp="1"/>
+          </p:cNvSpPr>
+          <p:nvPr>
+            <p:ph type="sldNum" idx="12"/>
+          </p:nvPr>
+        </p:nvSpPr>
+        <p:spPr/>
+      </p:sp>
+    </p:spTree>
+  </p:cSld>
+  <p:clrMapOvr>
+    <a:masterClrMapping/>
+  </p:clrMapOvr>
+</p:notes>
+</file>
+
+<file path=ppt/notesSlides/notesSlide44.xml><?xml version="1.0" encoding="utf-8"?>
+<p:notes xmlns:a="http://schemas.openxmlformats.org/drawingml/2006/main" xmlns:p="http://schemas.openxmlformats.org/presentationml/2006/main" xmlns:r="http://schemas.openxmlformats.org/officeDocument/2006/relationships">
+  <p:cSld>
+    <p:spTree>
+      <p:nvGrpSpPr>
+        <p:cNvPr id="1" name=""/>
+        <p:cNvGrpSpPr/>
+        <p:nvPr/>
+      </p:nvGrpSpPr>
+      <p:grpSpPr>
+        <a:xfrm>
+          <a:off x="0" y="0"/>
+          <a:ext cx="0" cy="0"/>
+          <a:chOff x="0" y="0"/>
+          <a:chExt cx="0" cy="0"/>
+        </a:xfrm>
+      </p:grpSpPr>
+      <p:sp>
+        <p:nvSpPr>
+          <p:cNvPr id="2" name="Slide Image Placeholder 1"/>
+          <p:cNvSpPr>
+            <a:spLocks noGrp="1"/>
+          </p:cNvSpPr>
+          <p:nvPr>
+            <p:ph type="sldImg" idx="3"/>
+          </p:nvPr>
+        </p:nvSpPr>
+        <p:spPr/>
+      </p:sp>
+      <p:sp>
+        <p:nvSpPr>
+          <p:cNvPr id="3" name="Notes Placeholder 2"/>
+          <p:cNvSpPr>
+            <a:spLocks noGrp="1"/>
+          </p:cNvSpPr>
+          <p:nvPr>
+            <p:ph type="body" idx="1"/>
+          </p:nvPr>
+        </p:nvSpPr>
+        <p:spPr/>
+        <p:txBody>
+          <a:bodyPr/>
+          <a:lstStyle/>
+          <a:p>
+            <a:r>
+              <a:t>5 minutes. The four honesty checks work during the session and after. End with the wrap-up question — it forces each participant to apply judgment, not just trust the AI output.</a:t>
+            </a:r>
+          </a:p>
+        </p:txBody>
+      </p:sp>
+      <p:sp>
+        <p:nvSpPr>
+          <p:cNvPr id="4" name="Slide Number Placeholder 3"/>
+          <p:cNvSpPr>
+            <a:spLocks noGrp="1"/>
+          </p:cNvSpPr>
+          <p:nvPr>
+            <p:ph type="sldNum" idx="12"/>
+          </p:nvPr>
+        </p:nvSpPr>
+        <p:spPr/>
       </p:sp>
     </p:spTree>
   </p:cSld>
@@ -26934,7 +27917,7 @@
     </p:bg>
     <p:spTree>
       <p:nvGrpSpPr>
-        <p:cNvPr id="529" name="Shape 529"/>
+        <p:cNvPr id="1" name="Shape 1"/>
         <p:cNvGrpSpPr/>
         <p:nvPr/>
       </p:nvGrpSpPr>
@@ -26948,14 +27931,14 @@
       </p:grpSpPr>
       <p:sp>
         <p:nvSpPr>
-          <p:cNvPr id="530" name="Google Shape;530;p31"/>
+          <p:cNvPr id="10" name="label"/>
           <p:cNvSpPr/>
           <p:nvPr/>
         </p:nvSpPr>
         <p:spPr>
           <a:xfrm>
             <a:off x="812800" y="1943100"/>
-            <a:ext cx="10883400" cy="238800"/>
+            <a:ext cx="10566400" cy="238760"/>
           </a:xfrm>
           <a:prstGeom prst="rect">
             <a:avLst/>
@@ -26981,11 +27964,6 @@
               <a:spcAft>
                 <a:spcPts val="0"/>
               </a:spcAft>
-              <a:buClr>
-                <a:srgbClr val="FBF3E8"/>
-              </a:buClr>
-              <a:buSzPts val="1200"/>
-              <a:buFont typeface="DM Sans"/>
               <a:buNone/>
             </a:pPr>
             <a:r>
@@ -26998,66 +27976,21 @@
                 <a:cs typeface="DM Sans"/>
                 <a:sym typeface="DM Sans"/>
               </a:rPr>
-              <a:t>PART </a:t>
-            </a:r>
-            <a:r>
-              <a:rPr b="1" lang="en-US" sz="1200">
-                <a:solidFill>
-                  <a:srgbClr val="FBF3E8"/>
-                </a:solidFill>
-                <a:latin typeface="DM Sans"/>
-                <a:ea typeface="DM Sans"/>
-                <a:cs typeface="DM Sans"/>
-                <a:sym typeface="DM Sans"/>
-              </a:rPr>
-              <a:t>FOUR</a:t>
-            </a:r>
-            <a:r>
-              <a:rPr b="1" i="0" lang="en-US" sz="1200" u="none" cap="none" strike="noStrike">
-                <a:solidFill>
-                  <a:srgbClr val="FBF3E8"/>
-                </a:solidFill>
-                <a:latin typeface="DM Sans"/>
-                <a:ea typeface="DM Sans"/>
-                <a:cs typeface="DM Sans"/>
-                <a:sym typeface="DM Sans"/>
-              </a:rPr>
-              <a:t> </a:t>
-            </a:r>
-            <a:r>
-              <a:rPr b="1" lang="en-US" sz="1200">
-                <a:solidFill>
-                  <a:srgbClr val="FBF3E8"/>
-                </a:solidFill>
-                <a:latin typeface="DM Sans"/>
-                <a:ea typeface="DM Sans"/>
-                <a:cs typeface="DM Sans"/>
-                <a:sym typeface="DM Sans"/>
-              </a:rPr>
-              <a:t>- Analyse</a:t>
-            </a:r>
-            <a:endParaRPr b="0" i="0" sz="1200" u="none" cap="none" strike="noStrike">
-              <a:solidFill>
-                <a:schemeClr val="dk1"/>
-              </a:solidFill>
-              <a:latin typeface="Calibri"/>
-              <a:ea typeface="Calibri"/>
-              <a:cs typeface="Calibri"/>
-              <a:sym typeface="Calibri"/>
-            </a:endParaRPr>
-          </a:p>
-        </p:txBody>
-      </p:sp>
-      <p:sp>
-        <p:nvSpPr>
-          <p:cNvPr id="531" name="Google Shape;531;p31"/>
+              <a:t>PART FOUR · ANALYSE</a:t>
+            </a:r>
+          </a:p>
+        </p:txBody>
+      </p:sp>
+      <p:sp>
+        <p:nvSpPr>
+          <p:cNvPr id="11" name="title"/>
           <p:cNvSpPr/>
           <p:nvPr/>
         </p:nvSpPr>
         <p:spPr>
           <a:xfrm>
-            <a:off x="730372" y="2952183"/>
-            <a:ext cx="10883400" cy="825600"/>
+            <a:off x="812800" y="2410458"/>
+            <a:ext cx="10566400" cy="825500"/>
           </a:xfrm>
           <a:prstGeom prst="rect">
             <a:avLst/>
@@ -27083,15 +28016,10 @@
               <a:spcAft>
                 <a:spcPts val="0"/>
               </a:spcAft>
-              <a:buClr>
-                <a:srgbClr val="FBF3E8"/>
-              </a:buClr>
-              <a:buSzPts val="6000"/>
-              <a:buFont typeface="Fraunces"/>
-              <a:buNone/>
-            </a:pPr>
-            <a:r>
-              <a:rPr lang="en-US" sz="6000">
+              <a:buNone/>
+            </a:pPr>
+            <a:r>
+              <a:rPr b="0" i="0" lang="en-US" sz="6000" u="none" cap="none" strike="noStrike">
                 <a:solidFill>
                   <a:srgbClr val="FBF3E8"/>
                 </a:solidFill>
@@ -27100,30 +28028,21 @@
                 <a:cs typeface="Fraunces"/>
                 <a:sym typeface="Fraunces"/>
               </a:rPr>
-              <a:t>Take it Further</a:t>
-            </a:r>
-            <a:endParaRPr b="0" i="0" sz="6000" u="none" cap="none" strike="noStrike">
-              <a:solidFill>
-                <a:schemeClr val="dk1"/>
-              </a:solidFill>
-              <a:latin typeface="Calibri"/>
-              <a:ea typeface="Calibri"/>
-              <a:cs typeface="Calibri"/>
-              <a:sym typeface="Calibri"/>
-            </a:endParaRPr>
-          </a:p>
-        </p:txBody>
-      </p:sp>
-      <p:sp>
-        <p:nvSpPr>
-          <p:cNvPr id="532" name="Google Shape;532;p31"/>
+              <a:t>Analyse your Instagram data.</a:t>
+            </a:r>
+          </a:p>
+        </p:txBody>
+      </p:sp>
+      <p:sp>
+        <p:nvSpPr>
+          <p:cNvPr id="12" name="subtitle"/>
           <p:cNvSpPr/>
           <p:nvPr/>
         </p:nvSpPr>
         <p:spPr>
           <a:xfrm>
-            <a:off x="812800" y="4189908"/>
-            <a:ext cx="9156600" cy="751800"/>
+            <a:off x="812800" y="3464558"/>
+            <a:ext cx="10066400" cy="751840"/>
           </a:xfrm>
           <a:prstGeom prst="rect">
             <a:avLst/>
@@ -27149,15 +28068,10 @@
               <a:spcAft>
                 <a:spcPts val="0"/>
               </a:spcAft>
-              <a:buClr>
-                <a:srgbClr val="FBF3E8"/>
-              </a:buClr>
-              <a:buSzPts val="2200"/>
-              <a:buFont typeface="DM Sans"/>
-              <a:buNone/>
-            </a:pPr>
-            <a:r>
-              <a:rPr lang="en-US" sz="2200">
+              <a:buNone/>
+            </a:pPr>
+            <a:r>
+              <a:rPr b="0" i="0" lang="en-US" sz="2200" u="none" cap="none" strike="noStrike">
                 <a:solidFill>
                   <a:srgbClr val="FBF3E8"/>
                 </a:solidFill>
@@ -27166,17 +28080,8 @@
                 <a:cs typeface="DM Sans"/>
                 <a:sym typeface="DM Sans"/>
               </a:rPr>
-              <a:t>Analyse your data from the obtained campaigns</a:t>
-            </a:r>
-            <a:endParaRPr b="0" i="0" sz="2200" u="none" cap="none" strike="noStrike">
-              <a:solidFill>
-                <a:schemeClr val="dk1"/>
-              </a:solidFill>
-              <a:latin typeface="Calibri"/>
-              <a:ea typeface="Calibri"/>
-              <a:cs typeface="Calibri"/>
-              <a:sym typeface="Calibri"/>
-            </a:endParaRPr>
+              <a:t>Five questions, five prompts. Work at your own pace in ChatGPT, Claude or Gemini.</a:t>
+            </a:r>
           </a:p>
         </p:txBody>
       </p:sp>
@@ -28344,6 +29249,5849 @@
 </p:sld>
 </file>
 
+<file path=ppt/slides/slide31.xml><?xml version="1.0" encoding="utf-8"?>
+<p:sld xmlns:a="http://schemas.openxmlformats.org/drawingml/2006/main" xmlns:p="http://schemas.openxmlformats.org/presentationml/2006/main" xmlns:r="http://schemas.openxmlformats.org/officeDocument/2006/relationships">
+  <p:cSld>
+    <p:spTree xmlns:mc="http://schemas.openxmlformats.org/markup-compatibility/2006" xmlns:mv="urn:schemas-microsoft-com:mac:vml" xmlns:c="http://schemas.openxmlformats.org/drawingml/2006/chart" xmlns:dgm="http://schemas.openxmlformats.org/drawingml/2006/diagram" xmlns:o="urn:schemas-microsoft-com:office:office" xmlns:v="urn:schemas-microsoft-com:vml" xmlns:pvml="urn:schemas-microsoft-com:office:powerpoint" xmlns:com="http://schemas.openxmlformats.org/drawingml/2006/compatibility" xmlns:p14="http://schemas.microsoft.com/office/powerpoint/2010/main" xmlns:p15="http://schemas.microsoft.com/office/powerpoint/2012/main" xmlns:ahyp="http://schemas.microsoft.com/office/drawing/2018/hyperlinkcolor">
+      <p:nvGrpSpPr>
+        <p:cNvPr id="1" name="Shape 1"/>
+        <p:cNvGrpSpPr/>
+        <p:nvPr/>
+      </p:nvGrpSpPr>
+      <p:grpSpPr>
+        <a:xfrm>
+          <a:off x="0" y="0"/>
+          <a:ext cx="0" cy="0"/>
+          <a:chOff x="0" y="0"/>
+          <a:chExt cx="0" cy="0"/>
+        </a:xfrm>
+      </p:grpSpPr>
+      <p:sp>
+        <p:nvSpPr>
+          <p:cNvPr id="10" name="label"/>
+          <p:cNvSpPr/>
+          <p:nvPr/>
+        </p:nvSpPr>
+        <p:spPr>
+          <a:xfrm>
+            <a:off x="812800" y="812800"/>
+            <a:ext cx="10566400" cy="238760"/>
+          </a:xfrm>
+          <a:prstGeom prst="rect">
+            <a:avLst/>
+          </a:prstGeom>
+          <a:noFill/>
+          <a:ln>
+            <a:noFill/>
+          </a:ln>
+        </p:spPr>
+        <p:txBody>
+          <a:bodyPr anchorCtr="0" anchor="t" bIns="0" lIns="0" spcFirstLastPara="1" rIns="0" wrap="square" tIns="0">
+            <a:noAutofit/>
+          </a:bodyPr>
+          <a:lstStyle/>
+          <a:p>
+            <a:pPr indent="0" lvl="0" marL="0" marR="0" rtl="0" algn="l">
+              <a:lnSpc>
+                <a:spcPct val="140000"/>
+              </a:lnSpc>
+              <a:spcBef>
+                <a:spcPts val="0"/>
+              </a:spcBef>
+              <a:spcAft>
+                <a:spcPts val="0"/>
+              </a:spcAft>
+              <a:buNone/>
+            </a:pPr>
+            <a:r>
+              <a:rPr b="1" i="0" lang="en-US" sz="1200" u="none" cap="none" strike="noStrike">
+                <a:solidFill>
+                  <a:srgbClr val="B5532B"/>
+                </a:solidFill>
+                <a:latin typeface="DM Sans"/>
+                <a:ea typeface="DM Sans"/>
+                <a:cs typeface="DM Sans"/>
+                <a:sym typeface="DM Sans"/>
+              </a:rPr>
+              <a:t>ANALYSE · SETUP</a:t>
+            </a:r>
+          </a:p>
+        </p:txBody>
+      </p:sp>
+      <p:sp>
+        <p:nvSpPr>
+          <p:cNvPr id="11" name="title"/>
+          <p:cNvSpPr/>
+          <p:nvPr/>
+        </p:nvSpPr>
+        <p:spPr>
+          <a:xfrm>
+            <a:off x="812800" y="1280158"/>
+            <a:ext cx="10566400" cy="528320"/>
+          </a:xfrm>
+          <a:prstGeom prst="rect">
+            <a:avLst/>
+          </a:prstGeom>
+          <a:noFill/>
+          <a:ln>
+            <a:noFill/>
+          </a:ln>
+        </p:spPr>
+        <p:txBody>
+          <a:bodyPr anchorCtr="0" anchor="t" bIns="0" lIns="0" spcFirstLastPara="1" rIns="0" wrap="square" tIns="0">
+            <a:noAutofit/>
+          </a:bodyPr>
+          <a:lstStyle/>
+          <a:p>
+            <a:pPr indent="0" lvl="0" marL="0" marR="0" rtl="0" algn="l">
+              <a:lnSpc>
+                <a:spcPct val="110000"/>
+              </a:lnSpc>
+              <a:spcBef>
+                <a:spcPts val="0"/>
+              </a:spcBef>
+              <a:spcAft>
+                <a:spcPts val="0"/>
+              </a:spcAft>
+              <a:buNone/>
+            </a:pPr>
+            <a:r>
+              <a:rPr b="0" i="0" lang="en-US" sz="3600" u="none" cap="none" strike="noStrike">
+                <a:solidFill>
+                  <a:srgbClr val="1E3A2F"/>
+                </a:solidFill>
+                <a:latin typeface="Fraunces"/>
+                <a:ea typeface="Fraunces"/>
+                <a:cs typeface="Fraunces"/>
+                <a:sym typeface="Fraunces"/>
+              </a:rPr>
+              <a:t>What participants need</a:t>
+            </a:r>
+          </a:p>
+        </p:txBody>
+      </p:sp>
+      <p:cxnSp>
+        <p:nvCxnSpPr>
+          <p:cNvPr id="99" name="line"/>
+          <p:cNvCxnSpPr/>
+          <p:nvPr/>
+        </p:nvCxnSpPr>
+        <p:spPr>
+          <a:xfrm>
+            <a:off x="812800" y="2043435"/>
+            <a:ext cx="10566400" cy="0"/>
+          </a:xfrm>
+          <a:prstGeom prst="straightConnector1">
+            <a:avLst/>
+          </a:prstGeom>
+          <a:noFill/>
+          <a:ln cap="flat" cmpd="sng" w="12700">
+            <a:solidFill>
+              <a:srgbClr val="D9CDB6"/>
+            </a:solidFill>
+            <a:prstDash val="solid"/>
+          </a:ln>
+        </p:spPr>
+      </p:cxnSp>
+      <p:sp>
+        <p:nvSpPr>
+          <p:cNvPr id="13" name="left"/>
+          <p:cNvSpPr/>
+          <p:nvPr/>
+        </p:nvSpPr>
+        <p:spPr>
+          <a:xfrm>
+            <a:off x="812800" y="2151385"/>
+            <a:ext cx="5183200" cy="4506615"/>
+          </a:xfrm>
+          <a:prstGeom prst="rect">
+            <a:avLst/>
+          </a:prstGeom>
+          <a:noFill/>
+          <a:ln>
+            <a:noFill/>
+          </a:ln>
+        </p:spPr>
+        <p:txBody>
+          <a:bodyPr anchorCtr="0" anchor="t" bIns="0" lIns="0" spcFirstLastPara="1" rIns="0" wrap="square" tIns="0">
+            <a:noAutofit/>
+          </a:bodyPr>
+          <a:lstStyle/>
+          <a:p>
+            <a:pPr indent="0" lvl="0" marL="0" marR="0" rtl="0" algn="l">
+              <a:lnSpc>
+                <a:spcPct val="140000"/>
+              </a:lnSpc>
+              <a:spcBef>
+                <a:spcPts val="0"/>
+              </a:spcBef>
+              <a:spcAft>
+                <a:spcPts val="0"/>
+              </a:spcAft>
+              <a:buNone/>
+            </a:pPr>
+            <a:r>
+              <a:rPr b="1" i="0" lang="en-US" sz="1400" u="none" cap="none" strike="noStrike">
+                <a:solidFill>
+                  <a:srgbClr val="B5532B"/>
+                </a:solidFill>
+                <a:latin typeface="DM Sans"/>
+                <a:ea typeface="DM Sans"/>
+                <a:cs typeface="DM Sans"/>
+                <a:sym typeface="DM Sans"/>
+              </a:rPr>
+              <a:t>Files you need</a:t>
+            </a:r>
+          </a:p>
+          <a:p/>
+          <a:p>
+            <a:pPr indent="0" lvl="0" marL="0" marR="0" rtl="0" algn="l">
+              <a:lnSpc>
+                <a:spcPct val="130000"/>
+              </a:lnSpc>
+              <a:spcBef>
+                <a:spcPts val="0"/>
+              </a:spcBef>
+              <a:spcAft>
+                <a:spcPts val="0"/>
+              </a:spcAft>
+              <a:buNone/>
+            </a:pPr>
+            <a:r>
+              <a:rPr b="1" i="0" lang="en-US" sz="1300" u="none" cap="none" strike="noStrike">
+                <a:solidFill>
+                  <a:srgbClr val="1E3A2F"/>
+                </a:solidFill>
+                <a:latin typeface="DM Sans"/>
+                <a:ea typeface="DM Sans"/>
+                <a:cs typeface="DM Sans"/>
+                <a:sym typeface="DM Sans"/>
+              </a:rPr>
+              <a:t>loopcycle_post_kpis.csv</a:t>
+            </a:r>
+          </a:p>
+          <a:p>
+            <a:pPr indent="0" lvl="0" marL="0" marR="0" rtl="0" algn="l">
+              <a:lnSpc>
+                <a:spcPct val="130000"/>
+              </a:lnSpc>
+              <a:spcBef>
+                <a:spcPts val="0"/>
+              </a:spcBef>
+              <a:spcAft>
+                <a:spcPts val="0"/>
+              </a:spcAft>
+              <a:buNone/>
+            </a:pPr>
+            <a:r>
+              <a:rPr b="0" i="0" lang="en-US" sz="1200" u="none" cap="none" strike="noStrike">
+                <a:solidFill>
+                  <a:srgbClr val="1E3A2F"/>
+                </a:solidFill>
+                <a:latin typeface="DM Sans"/>
+                <a:ea typeface="DM Sans"/>
+                <a:cs typeface="DM Sans"/>
+                <a:sym typeface="DM Sans"/>
+              </a:rPr>
+              <a:t>Main file. One row per post: format, pillar, time, reach, engagement and rates.</a:t>
+            </a:r>
+          </a:p>
+          <a:p/>
+          <a:p>
+            <a:pPr indent="0" lvl="0" marL="0" marR="0" rtl="0" algn="l">
+              <a:lnSpc>
+                <a:spcPct val="130000"/>
+              </a:lnSpc>
+              <a:spcBef>
+                <a:spcPts val="0"/>
+              </a:spcBef>
+              <a:spcAft>
+                <a:spcPts val="0"/>
+              </a:spcAft>
+              <a:buNone/>
+            </a:pPr>
+            <a:r>
+              <a:rPr b="1" i="0" lang="en-US" sz="1300" u="none" cap="none" strike="noStrike">
+                <a:solidFill>
+                  <a:srgbClr val="1E3A2F"/>
+                </a:solidFill>
+                <a:latin typeface="DM Sans"/>
+                <a:ea typeface="DM Sans"/>
+                <a:cs typeface="DM Sans"/>
+                <a:sym typeface="DM Sans"/>
+              </a:rPr>
+              <a:t>loopcycle_instagram_posts_flat.csv</a:t>
+            </a:r>
+          </a:p>
+          <a:p>
+            <a:pPr indent="0" lvl="0" marL="0" marR="0" rtl="0" algn="l">
+              <a:lnSpc>
+                <a:spcPct val="130000"/>
+              </a:lnSpc>
+              <a:spcBef>
+                <a:spcPts val="0"/>
+              </a:spcBef>
+              <a:spcAft>
+                <a:spcPts val="0"/>
+              </a:spcAft>
+              <a:buNone/>
+            </a:pPr>
+            <a:r>
+              <a:rPr b="0" i="0" lang="en-US" sz="1200" u="none" cap="none" strike="noStrike">
+                <a:solidFill>
+                  <a:srgbClr val="1E3A2F"/>
+                </a:solidFill>
+                <a:latin typeface="DM Sans"/>
+                <a:ea typeface="DM Sans"/>
+                <a:cs typeface="DM Sans"/>
+                <a:sym typeface="DM Sans"/>
+              </a:rPr>
+              <a:t>Caption text. Join id here to post_id in the KPI file.</a:t>
+            </a:r>
+          </a:p>
+          <a:p/>
+          <a:p>
+            <a:pPr indent="0" lvl="0" marL="0" marR="0" rtl="0" algn="l">
+              <a:lnSpc>
+                <a:spcPct val="130000"/>
+              </a:lnSpc>
+              <a:spcBef>
+                <a:spcPts val="0"/>
+              </a:spcBef>
+              <a:spcAft>
+                <a:spcPts val="0"/>
+              </a:spcAft>
+              <a:buNone/>
+            </a:pPr>
+            <a:r>
+              <a:rPr b="1" i="0" lang="en-US" sz="1300" u="none" cap="none" strike="noStrike">
+                <a:solidFill>
+                  <a:srgbClr val="1E3A2F"/>
+                </a:solidFill>
+                <a:latin typeface="DM Sans"/>
+                <a:ea typeface="DM Sans"/>
+                <a:cs typeface="DM Sans"/>
+                <a:sym typeface="DM Sans"/>
+              </a:rPr>
+              <a:t>Audience files (optional, Question 4)</a:t>
+            </a:r>
+          </a:p>
+          <a:p>
+            <a:pPr indent="0" lvl="0" marL="0" marR="0" rtl="0" algn="l">
+              <a:lnSpc>
+                <a:spcPct val="130000"/>
+              </a:lnSpc>
+              <a:spcBef>
+                <a:spcPts val="0"/>
+              </a:spcBef>
+              <a:spcAft>
+                <a:spcPts val="0"/>
+              </a:spcAft>
+              <a:buNone/>
+            </a:pPr>
+            <a:r>
+              <a:rPr b="0" i="0" lang="en-US" sz="1200" u="none" cap="none" strike="noStrike">
+                <a:solidFill>
+                  <a:srgbClr val="1E3A2F"/>
+                </a:solidFill>
+                <a:latin typeface="DM Sans"/>
+                <a:ea typeface="DM Sans"/>
+                <a:cs typeface="DM Sans"/>
+                <a:sym typeface="DM Sans"/>
+              </a:rPr>
+              <a:t>loopcycle_post_audience_age_gender.csv</a:t>
+            </a:r>
+          </a:p>
+          <a:p>
+            <a:pPr indent="0" lvl="0" marL="0" marR="0" rtl="0" algn="l">
+              <a:lnSpc>
+                <a:spcPct val="130000"/>
+              </a:lnSpc>
+              <a:spcBef>
+                <a:spcPts val="0"/>
+              </a:spcBef>
+              <a:spcAft>
+                <a:spcPts val="0"/>
+              </a:spcAft>
+              <a:buNone/>
+            </a:pPr>
+            <a:r>
+              <a:rPr b="0" i="0" lang="en-US" sz="1200" u="none" cap="none" strike="noStrike">
+                <a:solidFill>
+                  <a:srgbClr val="1E3A2F"/>
+                </a:solidFill>
+                <a:latin typeface="DM Sans"/>
+                <a:ea typeface="DM Sans"/>
+                <a:cs typeface="DM Sans"/>
+                <a:sym typeface="DM Sans"/>
+              </a:rPr>
+              <a:t>loopcycle_post_audience_location.csv</a:t>
+            </a:r>
+          </a:p>
+          <a:p>
+            <a:pPr indent="0" lvl="0" marL="0" marR="0" rtl="0" algn="l">
+              <a:lnSpc>
+                <a:spcPct val="130000"/>
+              </a:lnSpc>
+              <a:spcBef>
+                <a:spcPts val="0"/>
+              </a:spcBef>
+              <a:spcAft>
+                <a:spcPts val="0"/>
+              </a:spcAft>
+              <a:buNone/>
+            </a:pPr>
+            <a:r>
+              <a:rPr b="0" i="0" lang="en-US" sz="1200" u="none" cap="none" strike="noStrike">
+                <a:solidFill>
+                  <a:srgbClr val="1E3A2F"/>
+                </a:solidFill>
+                <a:latin typeface="DM Sans"/>
+                <a:ea typeface="DM Sans"/>
+                <a:cs typeface="DM Sans"/>
+                <a:sym typeface="DM Sans"/>
+              </a:rPr>
+              <a:t>loopcycle_post_views_time.csv</a:t>
+            </a:r>
+          </a:p>
+        </p:txBody>
+      </p:sp>
+      <p:sp>
+        <p:nvSpPr>
+          <p:cNvPr id="14" name="right"/>
+          <p:cNvSpPr/>
+          <p:nvPr/>
+        </p:nvSpPr>
+        <p:spPr>
+          <a:xfrm>
+            <a:off x="6196000" y="2151385"/>
+            <a:ext cx="5183200" cy="4506615"/>
+          </a:xfrm>
+          <a:prstGeom prst="rect">
+            <a:avLst/>
+          </a:prstGeom>
+          <a:noFill/>
+          <a:ln>
+            <a:noFill/>
+          </a:ln>
+        </p:spPr>
+        <p:txBody>
+          <a:bodyPr anchorCtr="0" anchor="t" bIns="0" lIns="0" spcFirstLastPara="1" rIns="0" wrap="square" tIns="0">
+            <a:noAutofit/>
+          </a:bodyPr>
+          <a:lstStyle/>
+          <a:p>
+            <a:pPr indent="0" lvl="0" marL="0" marR="0" rtl="0" algn="l">
+              <a:lnSpc>
+                <a:spcPct val="140000"/>
+              </a:lnSpc>
+              <a:spcBef>
+                <a:spcPts val="0"/>
+              </a:spcBef>
+              <a:spcAft>
+                <a:spcPts val="0"/>
+              </a:spcAft>
+              <a:buNone/>
+            </a:pPr>
+            <a:r>
+              <a:rPr b="1" i="0" lang="en-US" sz="1400" u="none" cap="none" strike="noStrike">
+                <a:solidFill>
+                  <a:srgbClr val="B5532B"/>
+                </a:solidFill>
+                <a:latin typeface="DM Sans"/>
+                <a:ea typeface="DM Sans"/>
+                <a:cs typeface="DM Sans"/>
+                <a:sym typeface="DM Sans"/>
+              </a:rPr>
+              <a:t>Three things to tell participants</a:t>
+            </a:r>
+          </a:p>
+          <a:p/>
+          <a:p>
+            <a:pPr indent="0" lvl="0" marL="0" marR="0" rtl="0" algn="l">
+              <a:lnSpc>
+                <a:spcPct val="130000"/>
+              </a:lnSpc>
+              <a:spcBef>
+                <a:spcPts val="0"/>
+              </a:spcBef>
+              <a:spcAft>
+                <a:spcPts val="0"/>
+              </a:spcAft>
+              <a:buNone/>
+            </a:pPr>
+            <a:r>
+              <a:rPr b="1" i="0" lang="en-US" sz="1300" u="none" cap="none" strike="noStrike">
+                <a:solidFill>
+                  <a:srgbClr val="1E3A2F"/>
+                </a:solidFill>
+                <a:latin typeface="DM Sans"/>
+                <a:ea typeface="DM Sans"/>
+                <a:cs typeface="DM Sans"/>
+                <a:sym typeface="DM Sans"/>
+              </a:rPr>
+              <a:t>1  The data is synthetic.</a:t>
+            </a:r>
+          </a:p>
+          <a:p>
+            <a:pPr indent="0" lvl="0" marL="0" marR="0" rtl="0" algn="l">
+              <a:lnSpc>
+                <a:spcPct val="130000"/>
+              </a:lnSpc>
+              <a:spcBef>
+                <a:spcPts val="0"/>
+              </a:spcBef>
+              <a:spcAft>
+                <a:spcPts val="0"/>
+              </a:spcAft>
+              <a:buNone/>
+            </a:pPr>
+            <a:r>
+              <a:rPr b="0" i="0" lang="en-US" sz="1200" u="none" cap="none" strike="noStrike">
+                <a:solidFill>
+                  <a:srgbClr val="1E3A2F"/>
+                </a:solidFill>
+                <a:latin typeface="DM Sans"/>
+                <a:ea typeface="DM Sans"/>
+                <a:cs typeface="DM Sans"/>
+                <a:sym typeface="DM Sans"/>
+              </a:rPr>
+              <a:t>Do not treat any number as real.</a:t>
+            </a:r>
+          </a:p>
+          <a:p/>
+          <a:p>
+            <a:pPr indent="0" lvl="0" marL="0" marR="0" rtl="0" algn="l">
+              <a:lnSpc>
+                <a:spcPct val="130000"/>
+              </a:lnSpc>
+              <a:spcBef>
+                <a:spcPts val="0"/>
+              </a:spcBef>
+              <a:spcAft>
+                <a:spcPts val="0"/>
+              </a:spcAft>
+              <a:buNone/>
+            </a:pPr>
+            <a:r>
+              <a:rPr b="1" i="0" lang="en-US" sz="1300" u="none" cap="none" strike="noStrike">
+                <a:solidFill>
+                  <a:srgbClr val="1E3A2F"/>
+                </a:solidFill>
+                <a:latin typeface="DM Sans"/>
+                <a:ea typeface="DM Sans"/>
+                <a:cs typeface="DM Sans"/>
+                <a:sym typeface="DM Sans"/>
+              </a:rPr>
+              <a:t>2  Columns starting modeled_ are estimates.</a:t>
+            </a:r>
+          </a:p>
+          <a:p>
+            <a:pPr indent="0" lvl="0" marL="0" marR="0" rtl="0" algn="l">
+              <a:lnSpc>
+                <a:spcPct val="130000"/>
+              </a:lnSpc>
+              <a:spcBef>
+                <a:spcPts val="0"/>
+              </a:spcBef>
+              <a:spcAft>
+                <a:spcPts val="0"/>
+              </a:spcAft>
+              <a:buNone/>
+            </a:pPr>
+            <a:r>
+              <a:rPr b="0" i="0" lang="en-US" sz="1200" u="none" cap="none" strike="noStrike">
+                <a:solidFill>
+                  <a:srgbClr val="1E3A2F"/>
+                </a:solidFill>
+                <a:latin typeface="DM Sans"/>
+                <a:ea typeface="DM Sans"/>
+                <a:cs typeface="DM Sans"/>
+                <a:sym typeface="DM Sans"/>
+              </a:rPr>
+              <a:t>Instagram does not report audience, location or viewing time per post.</a:t>
+            </a:r>
+          </a:p>
+          <a:p/>
+          <a:p>
+            <a:pPr indent="0" lvl="0" marL="0" marR="0" rtl="0" algn="l">
+              <a:lnSpc>
+                <a:spcPct val="130000"/>
+              </a:lnSpc>
+              <a:spcBef>
+                <a:spcPts val="0"/>
+              </a:spcBef>
+              <a:spcAft>
+                <a:spcPts val="0"/>
+              </a:spcAft>
+              <a:buNone/>
+            </a:pPr>
+            <a:r>
+              <a:rPr b="1" i="0" lang="en-US" sz="1300" u="none" cap="none" strike="noStrike">
+                <a:solidFill>
+                  <a:srgbClr val="1E3A2F"/>
+                </a:solidFill>
+                <a:latin typeface="DM Sans"/>
+                <a:ea typeface="DM Sans"/>
+                <a:cs typeface="DM Sans"/>
+                <a:sym typeface="DM Sans"/>
+              </a:rPr>
+              <a:t>3  Reels have blank follow columns.</a:t>
+            </a:r>
+          </a:p>
+          <a:p>
+            <a:pPr indent="0" lvl="0" marL="0" marR="0" rtl="0" algn="l">
+              <a:lnSpc>
+                <a:spcPct val="130000"/>
+              </a:lnSpc>
+              <a:spcBef>
+                <a:spcPts val="0"/>
+              </a:spcBef>
+              <a:spcAft>
+                <a:spcPts val="0"/>
+              </a:spcAft>
+              <a:buNone/>
+            </a:pPr>
+            <a:r>
+              <a:rPr b="0" i="0" lang="en-US" sz="1200" u="none" cap="none" strike="noStrike">
+                <a:solidFill>
+                  <a:srgbClr val="1E3A2F"/>
+                </a:solidFill>
+                <a:latin typeface="DM Sans"/>
+                <a:ea typeface="DM Sans"/>
+                <a:cs typeface="DM Sans"/>
+                <a:sym typeface="DM Sans"/>
+              </a:rPr>
+              <a:t>follows, profile_visits and their rate columns are blank for VIDEO (Reel) posts.</a:t>
+            </a:r>
+          </a:p>
+        </p:txBody>
+      </p:sp>
+    </p:spTree>
+  </p:cSld>
+  <p:clrMapOvr>
+    <a:masterClrMapping/>
+  </p:clrMapOvr>
+</p:sld>
+</file>
+
+<file path=ppt/slides/slide32.xml><?xml version="1.0" encoding="utf-8"?>
+<p:sld xmlns:a="http://schemas.openxmlformats.org/drawingml/2006/main" xmlns:p="http://schemas.openxmlformats.org/presentationml/2006/main" xmlns:r="http://schemas.openxmlformats.org/officeDocument/2006/relationships">
+  <p:cSld>
+    <p:spTree xmlns:mc="http://schemas.openxmlformats.org/markup-compatibility/2006" xmlns:mv="urn:schemas-microsoft-com:mac:vml" xmlns:c="http://schemas.openxmlformats.org/drawingml/2006/chart" xmlns:dgm="http://schemas.openxmlformats.org/drawingml/2006/diagram" xmlns:o="urn:schemas-microsoft-com:office:office" xmlns:v="urn:schemas-microsoft-com:vml" xmlns:pvml="urn:schemas-microsoft-com:office:powerpoint" xmlns:com="http://schemas.openxmlformats.org/drawingml/2006/compatibility" xmlns:p14="http://schemas.microsoft.com/office/powerpoint/2010/main" xmlns:p15="http://schemas.microsoft.com/office/powerpoint/2012/main" xmlns:ahyp="http://schemas.microsoft.com/office/drawing/2018/hyperlinkcolor">
+      <p:nvGrpSpPr>
+        <p:cNvPr id="1" name="Shape 1"/>
+        <p:cNvGrpSpPr/>
+        <p:nvPr/>
+      </p:nvGrpSpPr>
+      <p:grpSpPr>
+        <a:xfrm>
+          <a:off x="0" y="0"/>
+          <a:ext cx="0" cy="0"/>
+          <a:chOff x="0" y="0"/>
+          <a:chExt cx="0" cy="0"/>
+        </a:xfrm>
+      </p:grpSpPr>
+      <p:sp>
+        <p:nvSpPr>
+          <p:cNvPr id="10" name="label"/>
+          <p:cNvSpPr/>
+          <p:nvPr/>
+        </p:nvSpPr>
+        <p:spPr>
+          <a:xfrm>
+            <a:off x="812800" y="812800"/>
+            <a:ext cx="10566400" cy="238760"/>
+          </a:xfrm>
+          <a:prstGeom prst="rect">
+            <a:avLst/>
+          </a:prstGeom>
+          <a:noFill/>
+          <a:ln>
+            <a:noFill/>
+          </a:ln>
+        </p:spPr>
+        <p:txBody>
+          <a:bodyPr anchorCtr="0" anchor="t" bIns="0" lIns="0" spcFirstLastPara="1" rIns="0" wrap="square" tIns="0">
+            <a:noAutofit/>
+          </a:bodyPr>
+          <a:lstStyle/>
+          <a:p>
+            <a:pPr indent="0" lvl="0" marL="0" marR="0" rtl="0" algn="l">
+              <a:lnSpc>
+                <a:spcPct val="140000"/>
+              </a:lnSpc>
+              <a:spcBef>
+                <a:spcPts val="0"/>
+              </a:spcBef>
+              <a:spcAft>
+                <a:spcPts val="0"/>
+              </a:spcAft>
+              <a:buNone/>
+            </a:pPr>
+            <a:r>
+              <a:rPr b="1" i="0" lang="en-US" sz="1200" u="none" cap="none" strike="noStrike">
+                <a:solidFill>
+                  <a:srgbClr val="B5532B"/>
+                </a:solidFill>
+                <a:latin typeface="DM Sans"/>
+                <a:ea typeface="DM Sans"/>
+                <a:cs typeface="DM Sans"/>
+                <a:sym typeface="DM Sans"/>
+              </a:rPr>
+              <a:t>ANALYSE · SHARED CONTEXT</a:t>
+            </a:r>
+          </a:p>
+        </p:txBody>
+      </p:sp>
+      <p:sp>
+        <p:nvSpPr>
+          <p:cNvPr id="11" name="title"/>
+          <p:cNvSpPr/>
+          <p:nvPr/>
+        </p:nvSpPr>
+        <p:spPr>
+          <a:xfrm>
+            <a:off x="812800" y="1280158"/>
+            <a:ext cx="10566400" cy="528320"/>
+          </a:xfrm>
+          <a:prstGeom prst="rect">
+            <a:avLst/>
+          </a:prstGeom>
+          <a:noFill/>
+          <a:ln>
+            <a:noFill/>
+          </a:ln>
+        </p:spPr>
+        <p:txBody>
+          <a:bodyPr anchorCtr="0" anchor="t" bIns="0" lIns="0" spcFirstLastPara="1" rIns="0" wrap="square" tIns="0">
+            <a:noAutofit/>
+          </a:bodyPr>
+          <a:lstStyle/>
+          <a:p>
+            <a:pPr indent="0" lvl="0" marL="0" marR="0" rtl="0" algn="l">
+              <a:lnSpc>
+                <a:spcPct val="110000"/>
+              </a:lnSpc>
+              <a:spcBef>
+                <a:spcPts val="0"/>
+              </a:spcBef>
+              <a:spcAft>
+                <a:spcPts val="0"/>
+              </a:spcAft>
+              <a:buNone/>
+            </a:pPr>
+            <a:r>
+              <a:rPr b="0" i="0" lang="en-US" sz="3000" u="none" cap="none" strike="noStrike">
+                <a:solidFill>
+                  <a:srgbClr val="1E3A2F"/>
+                </a:solidFill>
+                <a:latin typeface="Fraunces"/>
+                <a:ea typeface="Fraunces"/>
+                <a:cs typeface="Fraunces"/>
+                <a:sym typeface="Fraunces"/>
+              </a:rPr>
+              <a:t>Paste this first — before any question</a:t>
+            </a:r>
+          </a:p>
+        </p:txBody>
+      </p:sp>
+      <p:cxnSp>
+        <p:nvCxnSpPr>
+          <p:cNvPr id="99" name="line"/>
+          <p:cNvCxnSpPr/>
+          <p:nvPr/>
+        </p:nvCxnSpPr>
+        <p:spPr>
+          <a:xfrm>
+            <a:off x="812800" y="2043435"/>
+            <a:ext cx="10566400" cy="0"/>
+          </a:xfrm>
+          <a:prstGeom prst="straightConnector1">
+            <a:avLst/>
+          </a:prstGeom>
+          <a:noFill/>
+          <a:ln cap="flat" cmpd="sng" w="12700">
+            <a:solidFill>
+              <a:srgbClr val="D9CDB6"/>
+            </a:solidFill>
+            <a:prstDash val="solid"/>
+          </a:ln>
+        </p:spPr>
+      </p:cxnSp>
+      <p:sp>
+        <p:nvSpPr>
+          <p:cNvPr id="20" name="promptbg"/>
+          <p:cNvSpPr/>
+          <p:nvPr/>
+        </p:nvSpPr>
+        <p:spPr>
+          <a:xfrm>
+            <a:off x="812800" y="2170000"/>
+            <a:ext cx="6022847" cy="4508000"/>
+          </a:xfrm>
+          <a:prstGeom prst="rect">
+            <a:avLst/>
+          </a:prstGeom>
+          <a:solidFill>
+            <a:srgbClr val="1E3A2F"/>
+          </a:solidFill>
+          <a:ln>
+            <a:noFill/>
+          </a:ln>
+        </p:spPr>
+        <p:txBody>
+          <a:bodyPr/>
+          <a:lstStyle/>
+          <a:p/>
+        </p:txBody>
+      </p:sp>
+      <p:sp>
+        <p:nvSpPr>
+          <p:cNvPr id="21" name="prompt"/>
+          <p:cNvSpPr/>
+          <p:nvPr/>
+        </p:nvSpPr>
+        <p:spPr>
+          <a:xfrm>
+            <a:off x="922800" y="2280000"/>
+            <a:ext cx="5802847" cy="4288000"/>
+          </a:xfrm>
+          <a:prstGeom prst="rect">
+            <a:avLst/>
+          </a:prstGeom>
+          <a:noFill/>
+          <a:ln>
+            <a:noFill/>
+          </a:ln>
+        </p:spPr>
+        <p:txBody>
+          <a:bodyPr anchorCtr="0" anchor="t" bIns="0" lIns="0" spcFirstLastPara="1" rIns="0" wrap="square" tIns="0">
+            <a:noAutofit/>
+          </a:bodyPr>
+          <a:lstStyle/>
+          <a:p>
+            <a:pPr indent="0" lvl="0" marL="0" marR="0" rtl="0" algn="l">
+              <a:lnSpc>
+                <a:spcPct val="128000"/>
+              </a:lnSpc>
+              <a:spcBef>
+                <a:spcPts val="0"/>
+              </a:spcBef>
+              <a:spcAft>
+                <a:spcPts val="0"/>
+              </a:spcAft>
+              <a:buNone/>
+            </a:pPr>
+            <a:r>
+              <a:rPr b="0" i="0" lang="en-US" sz="1050" u="none" cap="none" strike="noStrike">
+                <a:solidFill>
+                  <a:srgbClr val="FBF3E8"/>
+                </a:solidFill>
+                <a:latin typeface="DM Sans"/>
+                <a:ea typeface="DM Sans"/>
+                <a:cs typeface="DM Sans"/>
+                <a:sym typeface="DM Sans"/>
+              </a:rPr>
+              <a:t>You are a marketing analyst helping a small social enterprise.</a:t>
+            </a:r>
+          </a:p>
+          <a:p/>
+          <a:p>
+            <a:pPr indent="0" lvl="0" marL="0" marR="0" rtl="0" algn="l">
+              <a:lnSpc>
+                <a:spcPct val="128000"/>
+              </a:lnSpc>
+              <a:spcBef>
+                <a:spcPts val="0"/>
+              </a:spcBef>
+              <a:spcAft>
+                <a:spcPts val="0"/>
+              </a:spcAft>
+              <a:buNone/>
+            </a:pPr>
+            <a:r>
+              <a:rPr b="0" i="0" lang="en-US" sz="1050" u="none" cap="none" strike="noStrike">
+                <a:solidFill>
+                  <a:srgbClr val="FBF3E8"/>
+                </a:solidFill>
+                <a:latin typeface="DM Sans"/>
+                <a:ea typeface="DM Sans"/>
+                <a:cs typeface="DM Sans"/>
+                <a:sym typeface="DM Sans"/>
+              </a:rPr>
+              <a:t>Context: LoopCycle Nusantara is a waste-to-value social enterprise in Bandung,</a:t>
+            </a:r>
+          </a:p>
+          <a:p>
+            <a:pPr indent="0" lvl="0" marL="0" marR="0" rtl="0" algn="l">
+              <a:lnSpc>
+                <a:spcPct val="128000"/>
+              </a:lnSpc>
+              <a:spcBef>
+                <a:spcPts val="0"/>
+              </a:spcBef>
+              <a:spcAft>
+                <a:spcPts val="0"/>
+              </a:spcAft>
+              <a:buNone/>
+            </a:pPr>
+            <a:r>
+              <a:rPr b="0" i="0" lang="en-US" sz="1050" u="none" cap="none" strike="noStrike">
+                <a:solidFill>
+                  <a:srgbClr val="FBF3E8"/>
+                </a:solidFill>
+                <a:latin typeface="DM Sans"/>
+                <a:ea typeface="DM Sans"/>
+                <a:cs typeface="DM Sans"/>
+                <a:sym typeface="DM Sans"/>
+              </a:rPr>
+              <a:t>Indonesia. We buy sorted plastic from 3,500 registered waste pickers, recycle it,</a:t>
+            </a:r>
+          </a:p>
+          <a:p>
+            <a:pPr indent="0" lvl="0" marL="0" marR="0" rtl="0" algn="l">
+              <a:lnSpc>
+                <a:spcPct val="128000"/>
+              </a:lnSpc>
+              <a:spcBef>
+                <a:spcPts val="0"/>
+              </a:spcBef>
+              <a:spcAft>
+                <a:spcPts val="0"/>
+              </a:spcAft>
+              <a:buNone/>
+            </a:pPr>
+            <a:r>
+              <a:rPr b="0" i="0" lang="en-US" sz="1050" u="none" cap="none" strike="noStrike">
+                <a:solidFill>
+                  <a:srgbClr val="FBF3E8"/>
+                </a:solidFill>
+                <a:latin typeface="DM Sans"/>
+                <a:ea typeface="DM Sans"/>
+                <a:cs typeface="DM Sans"/>
+                <a:sym typeface="DM Sans"/>
+              </a:rPr>
+              <a:t>and sell the Loop Tote, a tote bag made from 14 recycled bottles.</a:t>
+            </a:r>
+          </a:p>
+          <a:p>
+            <a:pPr indent="0" lvl="0" marL="0" marR="0" rtl="0" algn="l">
+              <a:lnSpc>
+                <a:spcPct val="128000"/>
+              </a:lnSpc>
+              <a:spcBef>
+                <a:spcPts val="0"/>
+              </a:spcBef>
+              <a:spcAft>
+                <a:spcPts val="0"/>
+              </a:spcAft>
+              <a:buNone/>
+            </a:pPr>
+            <a:r>
+              <a:rPr b="0" i="0" lang="en-US" sz="1050" u="none" cap="none" strike="noStrike">
+                <a:solidFill>
+                  <a:srgbClr val="FBF3E8"/>
+                </a:solidFill>
+                <a:latin typeface="DM Sans"/>
+                <a:ea typeface="DM Sans"/>
+                <a:cs typeface="DM Sans"/>
+                <a:sym typeface="DM Sans"/>
+              </a:rPr>
+              <a:t>Instagram (@loopcycle.nusantara, about 21,000 followers) is how we build trust</a:t>
+            </a:r>
+          </a:p>
+          <a:p>
+            <a:pPr indent="0" lvl="0" marL="0" marR="0" rtl="0" algn="l">
+              <a:lnSpc>
+                <a:spcPct val="128000"/>
+              </a:lnSpc>
+              <a:spcBef>
+                <a:spcPts val="0"/>
+              </a:spcBef>
+              <a:spcAft>
+                <a:spcPts val="0"/>
+              </a:spcAft>
+              <a:buNone/>
+            </a:pPr>
+            <a:r>
+              <a:rPr b="0" i="0" lang="en-US" sz="1050" u="none" cap="none" strike="noStrike">
+                <a:solidFill>
+                  <a:srgbClr val="FBF3E8"/>
+                </a:solidFill>
+                <a:latin typeface="DM Sans"/>
+                <a:ea typeface="DM Sans"/>
+                <a:cs typeface="DM Sans"/>
+                <a:sym typeface="DM Sans"/>
+              </a:rPr>
+              <a:t>and drive sales.</a:t>
+            </a:r>
+          </a:p>
+          <a:p/>
+          <a:p>
+            <a:pPr indent="0" lvl="0" marL="0" marR="0" rtl="0" algn="l">
+              <a:lnSpc>
+                <a:spcPct val="128000"/>
+              </a:lnSpc>
+              <a:spcBef>
+                <a:spcPts val="0"/>
+              </a:spcBef>
+              <a:spcAft>
+                <a:spcPts val="0"/>
+              </a:spcAft>
+              <a:buNone/>
+            </a:pPr>
+            <a:r>
+              <a:rPr b="0" i="0" lang="en-US" sz="1050" u="none" cap="none" strike="noStrike">
+                <a:solidFill>
+                  <a:srgbClr val="FBF3E8"/>
+                </a:solidFill>
+                <a:latin typeface="DM Sans"/>
+                <a:ea typeface="DM Sans"/>
+                <a:cs typeface="DM Sans"/>
+                <a:sym typeface="DM Sans"/>
+              </a:rPr>
+              <a:t>Data: the attached CSV has one row per Instagram post (30 posts, 30 Jul to 27 Sep</a:t>
+            </a:r>
+          </a:p>
+          <a:p>
+            <a:pPr indent="0" lvl="0" marL="0" marR="0" rtl="0" algn="l">
+              <a:lnSpc>
+                <a:spcPct val="128000"/>
+              </a:lnSpc>
+              <a:spcBef>
+                <a:spcPts val="0"/>
+              </a:spcBef>
+              <a:spcAft>
+                <a:spcPts val="0"/>
+              </a:spcAft>
+              <a:buNone/>
+            </a:pPr>
+            <a:r>
+              <a:rPr b="0" i="0" lang="en-US" sz="1050" u="none" cap="none" strike="noStrike">
+                <a:solidFill>
+                  <a:srgbClr val="FBF3E8"/>
+                </a:solidFill>
+                <a:latin typeface="DM Sans"/>
+                <a:ea typeface="DM Sans"/>
+                <a:cs typeface="DM Sans"/>
+                <a:sym typeface="DM Sans"/>
+              </a:rPr>
+              <a:t>2026). media_type is VIDEO (Reel), CAROUSEL_ALBUM or IMAGE. content_pillar is our</a:t>
+            </a:r>
+          </a:p>
+          <a:p>
+            <a:pPr indent="0" lvl="0" marL="0" marR="0" rtl="0" algn="l">
+              <a:lnSpc>
+                <a:spcPct val="128000"/>
+              </a:lnSpc>
+              <a:spcBef>
+                <a:spcPts val="0"/>
+              </a:spcBef>
+              <a:spcAft>
+                <a:spcPts val="0"/>
+              </a:spcAft>
+              <a:buNone/>
+            </a:pPr>
+            <a:r>
+              <a:rPr b="0" i="0" lang="en-US" sz="1050" u="none" cap="none" strike="noStrike">
+                <a:solidFill>
+                  <a:srgbClr val="FBF3E8"/>
+                </a:solidFill>
+                <a:latin typeface="DM Sans"/>
+                <a:ea typeface="DM Sans"/>
+                <a:cs typeface="DM Sans"/>
+                <a:sym typeface="DM Sans"/>
+              </a:rPr>
+              <a:t>content theme. Columns starting with modeled_ are estimates, not Instagram data.</a:t>
+            </a:r>
+          </a:p>
+          <a:p>
+            <a:pPr indent="0" lvl="0" marL="0" marR="0" rtl="0" algn="l">
+              <a:lnSpc>
+                <a:spcPct val="128000"/>
+              </a:lnSpc>
+              <a:spcBef>
+                <a:spcPts val="0"/>
+              </a:spcBef>
+              <a:spcAft>
+                <a:spcPts val="0"/>
+              </a:spcAft>
+              <a:buNone/>
+            </a:pPr>
+            <a:r>
+              <a:rPr b="0" i="0" lang="en-US" sz="1050" u="none" cap="none" strike="noStrike">
+                <a:solidFill>
+                  <a:srgbClr val="FBF3E8"/>
+                </a:solidFill>
+                <a:latin typeface="DM Sans"/>
+                <a:ea typeface="DM Sans"/>
+                <a:cs typeface="DM Sans"/>
+                <a:sym typeface="DM Sans"/>
+              </a:rPr>
+              <a:t>follows and profile_visits are blank for Reels.</a:t>
+            </a:r>
+          </a:p>
+          <a:p/>
+          <a:p>
+            <a:pPr indent="0" lvl="0" marL="0" marR="0" rtl="0" algn="l">
+              <a:lnSpc>
+                <a:spcPct val="128000"/>
+              </a:lnSpc>
+              <a:spcBef>
+                <a:spcPts val="0"/>
+              </a:spcBef>
+              <a:spcAft>
+                <a:spcPts val="0"/>
+              </a:spcAft>
+              <a:buNone/>
+            </a:pPr>
+            <a:r>
+              <a:rPr b="0" i="0" lang="en-US" sz="1050" u="none" cap="none" strike="noStrike">
+                <a:solidFill>
+                  <a:srgbClr val="FBF3E8"/>
+                </a:solidFill>
+                <a:latin typeface="DM Sans"/>
+                <a:ea typeface="DM Sans"/>
+                <a:cs typeface="DM Sans"/>
+                <a:sym typeface="DM Sans"/>
+              </a:rPr>
+              <a:t>Rules: use only the data I give you. Show how many posts are behind every figure.</a:t>
+            </a:r>
+          </a:p>
+          <a:p>
+            <a:pPr indent="0" lvl="0" marL="0" marR="0" rtl="0" algn="l">
+              <a:lnSpc>
+                <a:spcPct val="128000"/>
+              </a:lnSpc>
+              <a:spcBef>
+                <a:spcPts val="0"/>
+              </a:spcBef>
+              <a:spcAft>
+                <a:spcPts val="0"/>
+              </a:spcAft>
+              <a:buNone/>
+            </a:pPr>
+            <a:r>
+              <a:rPr b="0" i="0" lang="en-US" sz="1050" u="none" cap="none" strike="noStrike">
+                <a:solidFill>
+                  <a:srgbClr val="FBF3E8"/>
+                </a:solidFill>
+                <a:latin typeface="DM Sans"/>
+                <a:ea typeface="DM Sans"/>
+                <a:cs typeface="DM Sans"/>
+                <a:sym typeface="DM Sans"/>
+              </a:rPr>
+              <a:t>Say clearly when a sample is too small to conclude anything.</a:t>
+            </a:r>
+          </a:p>
+          <a:p>
+            <a:pPr indent="0" lvl="0" marL="0" marR="0" rtl="0" algn="l">
+              <a:lnSpc>
+                <a:spcPct val="128000"/>
+              </a:lnSpc>
+              <a:spcBef>
+                <a:spcPts val="0"/>
+              </a:spcBef>
+              <a:spcAft>
+                <a:spcPts val="0"/>
+              </a:spcAft>
+              <a:buNone/>
+            </a:pPr>
+            <a:r>
+              <a:rPr b="0" i="0" lang="en-US" sz="1050" u="none" cap="none" strike="noStrike">
+                <a:solidFill>
+                  <a:srgbClr val="FBF3E8"/>
+                </a:solidFill>
+                <a:latin typeface="DM Sans"/>
+                <a:ea typeface="DM Sans"/>
+                <a:cs typeface="DM Sans"/>
+                <a:sym typeface="DM Sans"/>
+              </a:rPr>
+              <a:t>Never invent data. Keep what the data shows separate from your interpretation.</a:t>
+            </a:r>
+          </a:p>
+        </p:txBody>
+      </p:sp>
+      <p:sp>
+        <p:nvSpPr>
+          <p:cNvPr id="22" name="steps"/>
+          <p:cNvSpPr/>
+          <p:nvPr/>
+        </p:nvSpPr>
+        <p:spPr>
+          <a:xfrm>
+            <a:off x="7035647" y="2170000"/>
+            <a:ext cx="4343553" cy="4508000"/>
+          </a:xfrm>
+          <a:prstGeom prst="rect">
+            <a:avLst/>
+          </a:prstGeom>
+          <a:noFill/>
+          <a:ln>
+            <a:noFill/>
+          </a:ln>
+        </p:spPr>
+        <p:txBody>
+          <a:bodyPr anchorCtr="0" anchor="t" bIns="0" lIns="0" spcFirstLastPara="1" rIns="0" wrap="square" tIns="0">
+            <a:noAutofit/>
+          </a:bodyPr>
+          <a:lstStyle/>
+          <a:p>
+            <a:pPr indent="0" lvl="0" marL="0" marR="0" rtl="0" algn="l">
+              <a:lnSpc>
+                <a:spcPct val="100000"/>
+              </a:lnSpc>
+              <a:spcBef>
+                <a:spcPts val="200"/>
+              </a:spcBef>
+              <a:spcAft>
+                <a:spcPts val="0"/>
+              </a:spcAft>
+              <a:buNone/>
+            </a:pPr>
+            <a:r>
+              <a:rPr b="0" i="0" lang="en-US" sz="2000" u="none" cap="none" strike="noStrike">
+                <a:solidFill>
+                  <a:srgbClr val="B5532B"/>
+                </a:solidFill>
+                <a:latin typeface="Fraunces"/>
+                <a:ea typeface="Fraunces"/>
+                <a:cs typeface="Fraunces"/>
+                <a:sym typeface="Fraunces"/>
+              </a:rPr>
+              <a:t>1</a:t>
+            </a:r>
+          </a:p>
+          <a:p>
+            <a:pPr indent="0" lvl="0" marL="0" marR="0" rtl="0" algn="l">
+              <a:lnSpc>
+                <a:spcPct val="128000"/>
+              </a:lnSpc>
+              <a:spcBef>
+                <a:spcPts val="0"/>
+              </a:spcBef>
+              <a:spcAft>
+                <a:spcPts val="0"/>
+              </a:spcAft>
+              <a:buNone/>
+            </a:pPr>
+            <a:r>
+              <a:rPr b="0" i="0" lang="en-US" sz="1300" u="none" cap="none" strike="noStrike">
+                <a:solidFill>
+                  <a:srgbClr val="1E3A2F"/>
+                </a:solidFill>
+                <a:latin typeface="DM Sans"/>
+                <a:ea typeface="DM Sans"/>
+                <a:cs typeface="DM Sans"/>
+                <a:sym typeface="DM Sans"/>
+              </a:rPr>
+              <a:t>Open a new chat in ChatGPT, Claude or Gemini.</a:t>
+            </a:r>
+          </a:p>
+          <a:p>
+            <a:pPr indent="0" lvl="0" marL="0" marR="0" rtl="0" algn="l">
+              <a:lnSpc>
+                <a:spcPct val="100000"/>
+              </a:lnSpc>
+              <a:spcBef>
+                <a:spcPts val="200"/>
+              </a:spcBef>
+              <a:spcAft>
+                <a:spcPts val="0"/>
+              </a:spcAft>
+              <a:buNone/>
+            </a:pPr>
+            <a:r>
+              <a:rPr b="0" i="0" lang="en-US" sz="2000" u="none" cap="none" strike="noStrike">
+                <a:solidFill>
+                  <a:srgbClr val="B5532B"/>
+                </a:solidFill>
+                <a:latin typeface="Fraunces"/>
+                <a:ea typeface="Fraunces"/>
+                <a:cs typeface="Fraunces"/>
+                <a:sym typeface="Fraunces"/>
+              </a:rPr>
+              <a:t>2</a:t>
+            </a:r>
+          </a:p>
+          <a:p>
+            <a:pPr indent="0" lvl="0" marL="0" marR="0" rtl="0" algn="l">
+              <a:lnSpc>
+                <a:spcPct val="128000"/>
+              </a:lnSpc>
+              <a:spcBef>
+                <a:spcPts val="0"/>
+              </a:spcBef>
+              <a:spcAft>
+                <a:spcPts val="0"/>
+              </a:spcAft>
+              <a:buNone/>
+            </a:pPr>
+            <a:r>
+              <a:rPr b="0" i="0" lang="en-US" sz="1300" u="none" cap="none" strike="noStrike">
+                <a:solidFill>
+                  <a:srgbClr val="1E3A2F"/>
+                </a:solidFill>
+                <a:latin typeface="DM Sans"/>
+                <a:ea typeface="DM Sans"/>
+                <a:cs typeface="DM Sans"/>
+                <a:sym typeface="DM Sans"/>
+              </a:rPr>
+              <a:t>Paste this context block first.</a:t>
+            </a:r>
+          </a:p>
+          <a:p>
+            <a:pPr indent="0" lvl="0" marL="0" marR="0" rtl="0" algn="l">
+              <a:lnSpc>
+                <a:spcPct val="100000"/>
+              </a:lnSpc>
+              <a:spcBef>
+                <a:spcPts val="200"/>
+              </a:spcBef>
+              <a:spcAft>
+                <a:spcPts val="0"/>
+              </a:spcAft>
+              <a:buNone/>
+            </a:pPr>
+            <a:r>
+              <a:rPr b="0" i="0" lang="en-US" sz="2000" u="none" cap="none" strike="noStrike">
+                <a:solidFill>
+                  <a:srgbClr val="B5532B"/>
+                </a:solidFill>
+                <a:latin typeface="Fraunces"/>
+                <a:ea typeface="Fraunces"/>
+                <a:cs typeface="Fraunces"/>
+                <a:sym typeface="Fraunces"/>
+              </a:rPr>
+              <a:t>3</a:t>
+            </a:r>
+          </a:p>
+          <a:p>
+            <a:pPr indent="0" lvl="0" marL="0" marR="0" rtl="0" algn="l">
+              <a:lnSpc>
+                <a:spcPct val="128000"/>
+              </a:lnSpc>
+              <a:spcBef>
+                <a:spcPts val="0"/>
+              </a:spcBef>
+              <a:spcAft>
+                <a:spcPts val="0"/>
+              </a:spcAft>
+              <a:buNone/>
+            </a:pPr>
+            <a:r>
+              <a:rPr b="0" i="0" lang="en-US" sz="1300" u="none" cap="none" strike="noStrike">
+                <a:solidFill>
+                  <a:srgbClr val="1E3A2F"/>
+                </a:solidFill>
+                <a:latin typeface="DM Sans"/>
+                <a:ea typeface="DM Sans"/>
+                <a:cs typeface="DM Sans"/>
+                <a:sym typeface="DM Sans"/>
+              </a:rPr>
+              <a:t>Attach loopcycle_post_kpis.csv.</a:t>
+            </a:r>
+          </a:p>
+          <a:p>
+            <a:pPr indent="0" lvl="0" marL="0" marR="0" rtl="0" algn="l">
+              <a:lnSpc>
+                <a:spcPct val="100000"/>
+              </a:lnSpc>
+              <a:spcBef>
+                <a:spcPts val="200"/>
+              </a:spcBef>
+              <a:spcAft>
+                <a:spcPts val="0"/>
+              </a:spcAft>
+              <a:buNone/>
+            </a:pPr>
+            <a:r>
+              <a:rPr b="0" i="0" lang="en-US" sz="2000" u="none" cap="none" strike="noStrike">
+                <a:solidFill>
+                  <a:srgbClr val="B5532B"/>
+                </a:solidFill>
+                <a:latin typeface="Fraunces"/>
+                <a:ea typeface="Fraunces"/>
+                <a:cs typeface="Fraunces"/>
+                <a:sym typeface="Fraunces"/>
+              </a:rPr>
+              <a:t>4</a:t>
+            </a:r>
+          </a:p>
+          <a:p>
+            <a:pPr indent="0" lvl="0" marL="0" marR="0" rtl="0" algn="l">
+              <a:lnSpc>
+                <a:spcPct val="128000"/>
+              </a:lnSpc>
+              <a:spcBef>
+                <a:spcPts val="0"/>
+              </a:spcBef>
+              <a:spcAft>
+                <a:spcPts val="0"/>
+              </a:spcAft>
+              <a:buNone/>
+            </a:pPr>
+            <a:r>
+              <a:rPr b="0" i="0" lang="en-US" sz="1300" u="none" cap="none" strike="noStrike">
+                <a:solidFill>
+                  <a:srgbClr val="1E3A2F"/>
+                </a:solidFill>
+                <a:latin typeface="DM Sans"/>
+                <a:ea typeface="DM Sans"/>
+                <a:cs typeface="DM Sans"/>
+                <a:sym typeface="DM Sans"/>
+              </a:rPr>
+              <a:t>Then paste your question prompt.</a:t>
+            </a:r>
+          </a:p>
+          <a:p>
+            <a:pPr indent="0" lvl="0" marL="0" marR="0" rtl="0" algn="l">
+              <a:lnSpc>
+                <a:spcPct val="100000"/>
+              </a:lnSpc>
+              <a:spcBef>
+                <a:spcPts val="200"/>
+              </a:spcBef>
+              <a:spcAft>
+                <a:spcPts val="0"/>
+              </a:spcAft>
+              <a:buNone/>
+            </a:pPr>
+            <a:r>
+              <a:rPr b="0" i="0" lang="en-US" sz="2000" u="none" cap="none" strike="noStrike">
+                <a:solidFill>
+                  <a:srgbClr val="B5532B"/>
+                </a:solidFill>
+                <a:latin typeface="Fraunces"/>
+                <a:ea typeface="Fraunces"/>
+                <a:cs typeface="Fraunces"/>
+                <a:sym typeface="Fraunces"/>
+              </a:rPr>
+              <a:t>5</a:t>
+            </a:r>
+          </a:p>
+          <a:p>
+            <a:pPr indent="0" lvl="0" marL="0" marR="0" rtl="0" algn="l">
+              <a:lnSpc>
+                <a:spcPct val="128000"/>
+              </a:lnSpc>
+              <a:spcBef>
+                <a:spcPts val="0"/>
+              </a:spcBef>
+              <a:spcAft>
+                <a:spcPts val="0"/>
+              </a:spcAft>
+              <a:buNone/>
+            </a:pPr>
+            <a:r>
+              <a:rPr b="0" i="0" lang="en-US" sz="1300" u="none" cap="none" strike="noStrike">
+                <a:solidFill>
+                  <a:srgbClr val="1E3A2F"/>
+                </a:solidFill>
+                <a:latin typeface="DM Sans"/>
+                <a:ea typeface="DM Sans"/>
+                <a:cs typeface="DM Sans"/>
+                <a:sym typeface="DM Sans"/>
+              </a:rPr>
+              <a:t>Keep the same chat open for all 5 questions.</a:t>
+            </a:r>
+          </a:p>
+        </p:txBody>
+      </p:sp>
+    </p:spTree>
+  </p:cSld>
+  <p:clrMapOvr>
+    <a:masterClrMapping/>
+  </p:clrMapOvr>
+</p:sld>
+</file>
+
+<file path=ppt/slides/slide33.xml><?xml version="1.0" encoding="utf-8"?>
+<p:sld xmlns:a="http://schemas.openxmlformats.org/drawingml/2006/main" xmlns:p="http://schemas.openxmlformats.org/presentationml/2006/main" xmlns:r="http://schemas.openxmlformats.org/officeDocument/2006/relationships">
+  <p:cSld>
+    <p:spTree xmlns:mc="http://schemas.openxmlformats.org/markup-compatibility/2006" xmlns:mv="urn:schemas-microsoft-com:mac:vml" xmlns:c="http://schemas.openxmlformats.org/drawingml/2006/chart" xmlns:dgm="http://schemas.openxmlformats.org/drawingml/2006/diagram" xmlns:o="urn:schemas-microsoft-com:office:office" xmlns:v="urn:schemas-microsoft-com:vml" xmlns:pvml="urn:schemas-microsoft-com:office:powerpoint" xmlns:com="http://schemas.openxmlformats.org/drawingml/2006/compatibility" xmlns:p14="http://schemas.microsoft.com/office/powerpoint/2010/main" xmlns:p15="http://schemas.microsoft.com/office/powerpoint/2012/main" xmlns:ahyp="http://schemas.microsoft.com/office/drawing/2018/hyperlinkcolor">
+      <p:nvGrpSpPr>
+        <p:cNvPr id="1" name="Shape 1"/>
+        <p:cNvGrpSpPr/>
+        <p:nvPr/>
+      </p:nvGrpSpPr>
+      <p:grpSpPr>
+        <a:xfrm>
+          <a:off x="0" y="0"/>
+          <a:ext cx="0" cy="0"/>
+          <a:chOff x="0" y="0"/>
+          <a:chExt cx="0" cy="0"/>
+        </a:xfrm>
+      </p:grpSpPr>
+      <p:sp>
+        <p:nvSpPr>
+          <p:cNvPr id="10" name="label"/>
+          <p:cNvSpPr/>
+          <p:nvPr/>
+        </p:nvSpPr>
+        <p:spPr>
+          <a:xfrm>
+            <a:off x="812800" y="812800"/>
+            <a:ext cx="10566400" cy="238760"/>
+          </a:xfrm>
+          <a:prstGeom prst="rect">
+            <a:avLst/>
+          </a:prstGeom>
+          <a:noFill/>
+          <a:ln>
+            <a:noFill/>
+          </a:ln>
+        </p:spPr>
+        <p:txBody>
+          <a:bodyPr anchorCtr="0" anchor="t" bIns="0" lIns="0" spcFirstLastPara="1" rIns="0" wrap="square" tIns="0">
+            <a:noAutofit/>
+          </a:bodyPr>
+          <a:lstStyle/>
+          <a:p>
+            <a:pPr indent="0" lvl="0" marL="0" marR="0" rtl="0" algn="l">
+              <a:lnSpc>
+                <a:spcPct val="140000"/>
+              </a:lnSpc>
+              <a:spcBef>
+                <a:spcPts val="0"/>
+              </a:spcBef>
+              <a:spcAft>
+                <a:spcPts val="0"/>
+              </a:spcAft>
+              <a:buNone/>
+            </a:pPr>
+            <a:r>
+              <a:rPr b="1" i="0" lang="en-US" sz="1200" u="none" cap="none" strike="noStrike">
+                <a:solidFill>
+                  <a:srgbClr val="B5532B"/>
+                </a:solidFill>
+                <a:latin typeface="DM Sans"/>
+                <a:ea typeface="DM Sans"/>
+                <a:cs typeface="DM Sans"/>
+                <a:sym typeface="DM Sans"/>
+              </a:rPr>
+              <a:t>ANALYSE · QUESTION 1 OF 5</a:t>
+            </a:r>
+          </a:p>
+        </p:txBody>
+      </p:sp>
+      <p:sp>
+        <p:nvSpPr>
+          <p:cNvPr id="11" name="title"/>
+          <p:cNvSpPr/>
+          <p:nvPr/>
+        </p:nvSpPr>
+        <p:spPr>
+          <a:xfrm>
+            <a:off x="812800" y="1280158"/>
+            <a:ext cx="10566400" cy="528320"/>
+          </a:xfrm>
+          <a:prstGeom prst="rect">
+            <a:avLst/>
+          </a:prstGeom>
+          <a:noFill/>
+          <a:ln>
+            <a:noFill/>
+          </a:ln>
+        </p:spPr>
+        <p:txBody>
+          <a:bodyPr anchorCtr="0" anchor="t" bIns="0" lIns="0" spcFirstLastPara="1" rIns="0" wrap="square" tIns="0">
+            <a:noAutofit/>
+          </a:bodyPr>
+          <a:lstStyle/>
+          <a:p>
+            <a:pPr indent="0" lvl="0" marL="0" marR="0" rtl="0" algn="l">
+              <a:lnSpc>
+                <a:spcPct val="110000"/>
+              </a:lnSpc>
+              <a:spcBef>
+                <a:spcPts val="0"/>
+              </a:spcBef>
+              <a:spcAft>
+                <a:spcPts val="0"/>
+              </a:spcAft>
+              <a:buNone/>
+            </a:pPr>
+            <a:r>
+              <a:rPr b="0" i="0" lang="en-US" sz="3000" u="none" cap="none" strike="noStrike">
+                <a:solidFill>
+                  <a:srgbClr val="1E3A2F"/>
+                </a:solidFill>
+                <a:latin typeface="Fraunces"/>
+                <a:ea typeface="Fraunces"/>
+                <a:cs typeface="Fraunces"/>
+                <a:sym typeface="Fraunces"/>
+              </a:rPr>
+              <a:t>What worked?  Which formats and themes deserve more of our time?</a:t>
+            </a:r>
+          </a:p>
+        </p:txBody>
+      </p:sp>
+      <p:cxnSp>
+        <p:nvCxnSpPr>
+          <p:cNvPr id="99" name="line"/>
+          <p:cNvCxnSpPr/>
+          <p:nvPr/>
+        </p:nvCxnSpPr>
+        <p:spPr>
+          <a:xfrm>
+            <a:off x="812800" y="2043435"/>
+            <a:ext cx="10566400" cy="0"/>
+          </a:xfrm>
+          <a:prstGeom prst="straightConnector1">
+            <a:avLst/>
+          </a:prstGeom>
+          <a:noFill/>
+          <a:ln cap="flat" cmpd="sng" w="12700">
+            <a:solidFill>
+              <a:srgbClr val="D9CDB6"/>
+            </a:solidFill>
+            <a:prstDash val="solid"/>
+          </a:ln>
+        </p:spPr>
+      </p:cxnSp>
+      <p:sp>
+        <p:nvSpPr>
+          <p:cNvPr id="20" name="promptbg"/>
+          <p:cNvSpPr/>
+          <p:nvPr/>
+        </p:nvSpPr>
+        <p:spPr>
+          <a:xfrm>
+            <a:off x="812800" y="2170000"/>
+            <a:ext cx="6022847" cy="4508000"/>
+          </a:xfrm>
+          <a:prstGeom prst="rect">
+            <a:avLst/>
+          </a:prstGeom>
+          <a:solidFill>
+            <a:srgbClr val="1E3A2F"/>
+          </a:solidFill>
+          <a:ln>
+            <a:noFill/>
+          </a:ln>
+        </p:spPr>
+        <p:txBody>
+          <a:bodyPr/>
+          <a:lstStyle/>
+          <a:p/>
+        </p:txBody>
+      </p:sp>
+      <p:sp>
+        <p:nvSpPr>
+          <p:cNvPr id="21" name="prompt"/>
+          <p:cNvSpPr/>
+          <p:nvPr/>
+        </p:nvSpPr>
+        <p:spPr>
+          <a:xfrm>
+            <a:off x="922800" y="2280000"/>
+            <a:ext cx="5802847" cy="4288000"/>
+          </a:xfrm>
+          <a:prstGeom prst="rect">
+            <a:avLst/>
+          </a:prstGeom>
+          <a:noFill/>
+          <a:ln>
+            <a:noFill/>
+          </a:ln>
+        </p:spPr>
+        <p:txBody>
+          <a:bodyPr anchorCtr="0" anchor="t" bIns="0" lIns="0" spcFirstLastPara="1" rIns="0" wrap="square" tIns="0">
+            <a:noAutofit/>
+          </a:bodyPr>
+          <a:lstStyle/>
+          <a:p>
+            <a:pPr indent="0" lvl="0" marL="0" marR="0" rtl="0" algn="l">
+              <a:lnSpc>
+                <a:spcPct val="128000"/>
+              </a:lnSpc>
+              <a:spcBef>
+                <a:spcPts val="0"/>
+              </a:spcBef>
+              <a:spcAft>
+                <a:spcPts val="0"/>
+              </a:spcAft>
+              <a:buNone/>
+            </a:pPr>
+            <a:r>
+              <a:rPr b="0" i="0" lang="en-US" sz="1050" u="none" cap="none" strike="noStrike">
+                <a:solidFill>
+                  <a:srgbClr val="FBF3E8"/>
+                </a:solidFill>
+                <a:latin typeface="DM Sans"/>
+                <a:ea typeface="DM Sans"/>
+                <a:cs typeface="DM Sans"/>
+                <a:sym typeface="DM Sans"/>
+              </a:rPr>
+              <a:t>Using the attached post data: which formats (media_type) and content pillars</a:t>
+            </a:r>
+          </a:p>
+          <a:p>
+            <a:pPr indent="0" lvl="0" marL="0" marR="0" rtl="0" algn="l">
+              <a:lnSpc>
+                <a:spcPct val="128000"/>
+              </a:lnSpc>
+              <a:spcBef>
+                <a:spcPts val="0"/>
+              </a:spcBef>
+              <a:spcAft>
+                <a:spcPts val="0"/>
+              </a:spcAft>
+              <a:buNone/>
+            </a:pPr>
+            <a:r>
+              <a:rPr b="0" i="0" lang="en-US" sz="1050" u="none" cap="none" strike="noStrike">
+                <a:solidFill>
+                  <a:srgbClr val="FBF3E8"/>
+                </a:solidFill>
+                <a:latin typeface="DM Sans"/>
+                <a:ea typeface="DM Sans"/>
+                <a:cs typeface="DM Sans"/>
+                <a:sym typeface="DM Sans"/>
+              </a:rPr>
+              <a:t>should we invest more in, and which should we do less of?</a:t>
+            </a:r>
+          </a:p>
+          <a:p/>
+          <a:p>
+            <a:pPr indent="0" lvl="0" marL="0" marR="0" rtl="0" algn="l">
+              <a:lnSpc>
+                <a:spcPct val="128000"/>
+              </a:lnSpc>
+              <a:spcBef>
+                <a:spcPts val="0"/>
+              </a:spcBef>
+              <a:spcAft>
+                <a:spcPts val="0"/>
+              </a:spcAft>
+              <a:buNone/>
+            </a:pPr>
+            <a:r>
+              <a:rPr b="0" i="0" lang="en-US" sz="1050" u="none" cap="none" strike="noStrike">
+                <a:solidFill>
+                  <a:srgbClr val="FBF3E8"/>
+                </a:solidFill>
+                <a:latin typeface="DM Sans"/>
+                <a:ea typeface="DM Sans"/>
+                <a:cs typeface="DM Sans"/>
+                <a:sym typeface="DM Sans"/>
+              </a:rPr>
+              <a:t>Compare reach, engagement_rate_by_reach_pct, save_rate_pct and share_rate_pct.</a:t>
+            </a:r>
+          </a:p>
+          <a:p/>
+          <a:p>
+            <a:pPr indent="0" lvl="0" marL="0" marR="0" rtl="0" algn="l">
+              <a:lnSpc>
+                <a:spcPct val="128000"/>
+              </a:lnSpc>
+              <a:spcBef>
+                <a:spcPts val="0"/>
+              </a:spcBef>
+              <a:spcAft>
+                <a:spcPts val="0"/>
+              </a:spcAft>
+              <a:buNone/>
+            </a:pPr>
+            <a:r>
+              <a:rPr b="0" i="0" lang="en-US" sz="1050" u="none" cap="none" strike="noStrike">
+                <a:solidFill>
+                  <a:srgbClr val="FBF3E8"/>
+                </a:solidFill>
+                <a:latin typeface="DM Sans"/>
+                <a:ea typeface="DM Sans"/>
+                <a:cs typeface="DM Sans"/>
+                <a:sym typeface="DM Sans"/>
+              </a:rPr>
+              <a:t>1. Build one table by format and one by pillar showing the number of posts and</a:t>
+            </a:r>
+          </a:p>
+          <a:p>
+            <a:pPr indent="0" lvl="0" marL="0" marR="0" rtl="0" algn="l">
+              <a:lnSpc>
+                <a:spcPct val="128000"/>
+              </a:lnSpc>
+              <a:spcBef>
+                <a:spcPts val="0"/>
+              </a:spcBef>
+              <a:spcAft>
+                <a:spcPts val="0"/>
+              </a:spcAft>
+              <a:buNone/>
+            </a:pPr>
+            <a:r>
+              <a:rPr b="0" i="0" lang="en-US" sz="1050" u="none" cap="none" strike="noStrike">
+                <a:solidFill>
+                  <a:srgbClr val="FBF3E8"/>
+                </a:solidFill>
+                <a:latin typeface="DM Sans"/>
+                <a:ea typeface="DM Sans"/>
+                <a:cs typeface="DM Sans"/>
+                <a:sym typeface="DM Sans"/>
+              </a:rPr>
+              <a:t>   the average and median of each metric.</a:t>
+            </a:r>
+          </a:p>
+          <a:p>
+            <a:pPr indent="0" lvl="0" marL="0" marR="0" rtl="0" algn="l">
+              <a:lnSpc>
+                <a:spcPct val="128000"/>
+              </a:lnSpc>
+              <a:spcBef>
+                <a:spcPts val="0"/>
+              </a:spcBef>
+              <a:spcAft>
+                <a:spcPts val="0"/>
+              </a:spcAft>
+              <a:buNone/>
+            </a:pPr>
+            <a:r>
+              <a:rPr b="0" i="0" lang="en-US" sz="1050" u="none" cap="none" strike="noStrike">
+                <a:solidFill>
+                  <a:srgbClr val="FBF3E8"/>
+                </a:solidFill>
+                <a:latin typeface="DM Sans"/>
+                <a:ea typeface="DM Sans"/>
+                <a:cs typeface="DM Sans"/>
+                <a:sym typeface="DM Sans"/>
+              </a:rPr>
+              <a:t>2. Tell me which metric matters most for each goal: awareness, engagement,</a:t>
+            </a:r>
+          </a:p>
+          <a:p>
+            <a:pPr indent="0" lvl="0" marL="0" marR="0" rtl="0" algn="l">
+              <a:lnSpc>
+                <a:spcPct val="128000"/>
+              </a:lnSpc>
+              <a:spcBef>
+                <a:spcPts val="0"/>
+              </a:spcBef>
+              <a:spcAft>
+                <a:spcPts val="0"/>
+              </a:spcAft>
+              <a:buNone/>
+            </a:pPr>
+            <a:r>
+              <a:rPr b="0" i="0" lang="en-US" sz="1050" u="none" cap="none" strike="noStrike">
+                <a:solidFill>
+                  <a:srgbClr val="FBF3E8"/>
+                </a:solidFill>
+                <a:latin typeface="DM Sans"/>
+                <a:ea typeface="DM Sans"/>
+                <a:cs typeface="DM Sans"/>
+                <a:sym typeface="DM Sans"/>
+              </a:rPr>
+              <a:t>   and purchase intent (saves).</a:t>
+            </a:r>
+          </a:p>
+          <a:p>
+            <a:pPr indent="0" lvl="0" marL="0" marR="0" rtl="0" algn="l">
+              <a:lnSpc>
+                <a:spcPct val="128000"/>
+              </a:lnSpc>
+              <a:spcBef>
+                <a:spcPts val="0"/>
+              </a:spcBef>
+              <a:spcAft>
+                <a:spcPts val="0"/>
+              </a:spcAft>
+              <a:buNone/>
+            </a:pPr>
+            <a:r>
+              <a:rPr b="0" i="0" lang="en-US" sz="1050" u="none" cap="none" strike="noStrike">
+                <a:solidFill>
+                  <a:srgbClr val="FBF3E8"/>
+                </a:solidFill>
+                <a:latin typeface="DM Sans"/>
+                <a:ea typeface="DM Sans"/>
+                <a:cs typeface="DM Sans"/>
+                <a:sym typeface="DM Sans"/>
+              </a:rPr>
+              <a:t>3. Check whether any average is being distorted by one unusual post.</a:t>
+            </a:r>
+          </a:p>
+          <a:p>
+            <a:pPr indent="0" lvl="0" marL="0" marR="0" rtl="0" algn="l">
+              <a:lnSpc>
+                <a:spcPct val="128000"/>
+              </a:lnSpc>
+              <a:spcBef>
+                <a:spcPts val="0"/>
+              </a:spcBef>
+              <a:spcAft>
+                <a:spcPts val="0"/>
+              </a:spcAft>
+              <a:buNone/>
+            </a:pPr>
+            <a:r>
+              <a:rPr b="0" i="0" lang="en-US" sz="1050" u="none" cap="none" strike="noStrike">
+                <a:solidFill>
+                  <a:srgbClr val="FBF3E8"/>
+                </a:solidFill>
+                <a:latin typeface="DM Sans"/>
+                <a:ea typeface="DM Sans"/>
+                <a:cs typeface="DM Sans"/>
+                <a:sym typeface="DM Sans"/>
+              </a:rPr>
+              <a:t>   If so, show the result without that post.</a:t>
+            </a:r>
+          </a:p>
+          <a:p>
+            <a:pPr indent="0" lvl="0" marL="0" marR="0" rtl="0" algn="l">
+              <a:lnSpc>
+                <a:spcPct val="128000"/>
+              </a:lnSpc>
+              <a:spcBef>
+                <a:spcPts val="0"/>
+              </a:spcBef>
+              <a:spcAft>
+                <a:spcPts val="0"/>
+              </a:spcAft>
+              <a:buNone/>
+            </a:pPr>
+            <a:r>
+              <a:rPr b="0" i="0" lang="en-US" sz="1050" u="none" cap="none" strike="noStrike">
+                <a:solidFill>
+                  <a:srgbClr val="FBF3E8"/>
+                </a:solidFill>
+                <a:latin typeface="DM Sans"/>
+                <a:ea typeface="DM Sans"/>
+                <a:cs typeface="DM Sans"/>
+                <a:sym typeface="DM Sans"/>
+              </a:rPr>
+              <a:t>4. Give me a 5-line recommendation for a founder who has 10 minutes.</a:t>
+            </a:r>
+          </a:p>
+          <a:p/>
+          <a:p>
+            <a:pPr indent="0" lvl="0" marL="0" marR="0" rtl="0" algn="l">
+              <a:lnSpc>
+                <a:spcPct val="128000"/>
+              </a:lnSpc>
+              <a:spcBef>
+                <a:spcPts val="0"/>
+              </a:spcBef>
+              <a:spcAft>
+                <a:spcPts val="0"/>
+              </a:spcAft>
+              <a:buNone/>
+            </a:pPr>
+            <a:r>
+              <a:rPr b="0" i="0" lang="en-US" sz="1050" u="none" cap="none" strike="noStrike">
+                <a:solidFill>
+                  <a:srgbClr val="FBF3E8"/>
+                </a:solidFill>
+                <a:latin typeface="DM Sans"/>
+                <a:ea typeface="DM Sans"/>
+                <a:cs typeface="DM Sans"/>
+                <a:sym typeface="DM Sans"/>
+              </a:rPr>
+              <a:t>Flag any comparison based on fewer than 5 posts.</a:t>
+            </a:r>
+          </a:p>
+        </p:txBody>
+      </p:sp>
+      <p:sp>
+        <p:nvSpPr>
+          <p:cNvPr id="22" name="steps"/>
+          <p:cNvSpPr/>
+          <p:nvPr/>
+        </p:nvSpPr>
+        <p:spPr>
+          <a:xfrm>
+            <a:off x="7035647" y="2170000"/>
+            <a:ext cx="4343553" cy="4508000"/>
+          </a:xfrm>
+          <a:prstGeom prst="rect">
+            <a:avLst/>
+          </a:prstGeom>
+          <a:noFill/>
+          <a:ln>
+            <a:noFill/>
+          </a:ln>
+        </p:spPr>
+        <p:txBody>
+          <a:bodyPr anchorCtr="0" anchor="t" bIns="0" lIns="0" spcFirstLastPara="1" rIns="0" wrap="square" tIns="0">
+            <a:noAutofit/>
+          </a:bodyPr>
+          <a:lstStyle/>
+          <a:p>
+            <a:pPr indent="0" lvl="0" marL="0" marR="0" rtl="0" algn="l">
+              <a:lnSpc>
+                <a:spcPct val="100000"/>
+              </a:lnSpc>
+              <a:spcBef>
+                <a:spcPts val="200"/>
+              </a:spcBef>
+              <a:spcAft>
+                <a:spcPts val="0"/>
+              </a:spcAft>
+              <a:buNone/>
+            </a:pPr>
+            <a:r>
+              <a:rPr b="0" i="0" lang="en-US" sz="2000" u="none" cap="none" strike="noStrike">
+                <a:solidFill>
+                  <a:srgbClr val="B5532B"/>
+                </a:solidFill>
+                <a:latin typeface="Fraunces"/>
+                <a:ea typeface="Fraunces"/>
+                <a:cs typeface="Fraunces"/>
+                <a:sym typeface="Fraunces"/>
+              </a:rPr>
+              <a:t>1</a:t>
+            </a:r>
+          </a:p>
+          <a:p>
+            <a:pPr indent="0" lvl="0" marL="0" marR="0" rtl="0" algn="l">
+              <a:lnSpc>
+                <a:spcPct val="128000"/>
+              </a:lnSpc>
+              <a:spcBef>
+                <a:spcPts val="0"/>
+              </a:spcBef>
+              <a:spcAft>
+                <a:spcPts val="0"/>
+              </a:spcAft>
+              <a:buNone/>
+            </a:pPr>
+            <a:r>
+              <a:rPr b="0" i="0" lang="en-US" sz="1300" u="none" cap="none" strike="noStrike">
+                <a:solidFill>
+                  <a:srgbClr val="1E3A2F"/>
+                </a:solidFill>
+                <a:latin typeface="DM Sans"/>
+                <a:ea typeface="DM Sans"/>
+                <a:cs typeface="DM Sans"/>
+                <a:sym typeface="DM Sans"/>
+              </a:rPr>
+              <a:t>Attach loopcycle_post_kpis.csv.</a:t>
+            </a:r>
+          </a:p>
+          <a:p>
+            <a:pPr indent="0" lvl="0" marL="0" marR="0" rtl="0" algn="l">
+              <a:lnSpc>
+                <a:spcPct val="100000"/>
+              </a:lnSpc>
+              <a:spcBef>
+                <a:spcPts val="200"/>
+              </a:spcBef>
+              <a:spcAft>
+                <a:spcPts val="0"/>
+              </a:spcAft>
+              <a:buNone/>
+            </a:pPr>
+            <a:r>
+              <a:rPr b="0" i="0" lang="en-US" sz="2000" u="none" cap="none" strike="noStrike">
+                <a:solidFill>
+                  <a:srgbClr val="B5532B"/>
+                </a:solidFill>
+                <a:latin typeface="Fraunces"/>
+                <a:ea typeface="Fraunces"/>
+                <a:cs typeface="Fraunces"/>
+                <a:sym typeface="Fraunces"/>
+              </a:rPr>
+              <a:t>2</a:t>
+            </a:r>
+          </a:p>
+          <a:p>
+            <a:pPr indent="0" lvl="0" marL="0" marR="0" rtl="0" algn="l">
+              <a:lnSpc>
+                <a:spcPct val="128000"/>
+              </a:lnSpc>
+              <a:spcBef>
+                <a:spcPts val="0"/>
+              </a:spcBef>
+              <a:spcAft>
+                <a:spcPts val="0"/>
+              </a:spcAft>
+              <a:buNone/>
+            </a:pPr>
+            <a:r>
+              <a:rPr b="0" i="0" lang="en-US" sz="1300" u="none" cap="none" strike="noStrike">
+                <a:solidFill>
+                  <a:srgbClr val="1E3A2F"/>
+                </a:solidFill>
+                <a:latin typeface="DM Sans"/>
+                <a:ea typeface="DM Sans"/>
+                <a:cs typeface="DM Sans"/>
+                <a:sym typeface="DM Sans"/>
+              </a:rPr>
+              <a:t>Paste the prompt. Read the tables.</a:t>
+            </a:r>
+          </a:p>
+          <a:p>
+            <a:pPr indent="0" lvl="0" marL="0" marR="0" rtl="0" algn="l">
+              <a:lnSpc>
+                <a:spcPct val="100000"/>
+              </a:lnSpc>
+              <a:spcBef>
+                <a:spcPts val="200"/>
+              </a:spcBef>
+              <a:spcAft>
+                <a:spcPts val="0"/>
+              </a:spcAft>
+              <a:buNone/>
+            </a:pPr>
+            <a:r>
+              <a:rPr b="0" i="0" lang="en-US" sz="2000" u="none" cap="none" strike="noStrike">
+                <a:solidFill>
+                  <a:srgbClr val="B5532B"/>
+                </a:solidFill>
+                <a:latin typeface="Fraunces"/>
+                <a:ea typeface="Fraunces"/>
+                <a:cs typeface="Fraunces"/>
+                <a:sym typeface="Fraunces"/>
+              </a:rPr>
+              <a:t>3</a:t>
+            </a:r>
+          </a:p>
+          <a:p>
+            <a:pPr indent="0" lvl="0" marL="0" marR="0" rtl="0" algn="l">
+              <a:lnSpc>
+                <a:spcPct val="128000"/>
+              </a:lnSpc>
+              <a:spcBef>
+                <a:spcPts val="0"/>
+              </a:spcBef>
+              <a:spcAft>
+                <a:spcPts val="0"/>
+              </a:spcAft>
+              <a:buNone/>
+            </a:pPr>
+            <a:r>
+              <a:rPr b="0" i="0" lang="en-US" sz="1300" u="none" cap="none" strike="noStrike">
+                <a:solidFill>
+                  <a:srgbClr val="1E3A2F"/>
+                </a:solidFill>
+                <a:latin typeface="DM Sans"/>
+                <a:ea typeface="DM Sans"/>
+                <a:cs typeface="DM Sans"/>
+                <a:sym typeface="DM Sans"/>
+              </a:rPr>
+              <a:t>Follow-up: "Explain in 3 sentences for a non-technical board member. Then suggest the one chart that shows it best."</a:t>
+            </a:r>
+          </a:p>
+          <a:p>
+            <a:pPr indent="0" lvl="0" marL="0" marR="0" rtl="0" algn="l">
+              <a:lnSpc>
+                <a:spcPct val="100000"/>
+              </a:lnSpc>
+              <a:spcBef>
+                <a:spcPts val="200"/>
+              </a:spcBef>
+              <a:spcAft>
+                <a:spcPts val="0"/>
+              </a:spcAft>
+              <a:buNone/>
+            </a:pPr>
+            <a:r>
+              <a:rPr b="0" i="0" lang="en-US" sz="2000" u="none" cap="none" strike="noStrike">
+                <a:solidFill>
+                  <a:srgbClr val="B5532B"/>
+                </a:solidFill>
+                <a:latin typeface="Fraunces"/>
+                <a:ea typeface="Fraunces"/>
+                <a:cs typeface="Fraunces"/>
+                <a:sym typeface="Fraunces"/>
+              </a:rPr>
+              <a:t>4</a:t>
+            </a:r>
+          </a:p>
+          <a:p>
+            <a:pPr indent="0" lvl="0" marL="0" marR="0" rtl="0" algn="l">
+              <a:lnSpc>
+                <a:spcPct val="128000"/>
+              </a:lnSpc>
+              <a:spcBef>
+                <a:spcPts val="0"/>
+              </a:spcBef>
+              <a:spcAft>
+                <a:spcPts val="0"/>
+              </a:spcAft>
+              <a:buNone/>
+            </a:pPr>
+            <a:r>
+              <a:rPr b="0" i="0" lang="en-US" sz="1300" u="none" cap="none" strike="noStrike">
+                <a:solidFill>
+                  <a:srgbClr val="1E3A2F"/>
+                </a:solidFill>
+                <a:latin typeface="DM Sans"/>
+                <a:ea typeface="DM Sans"/>
+                <a:cs typeface="DM Sans"/>
+                <a:sym typeface="DM Sans"/>
+              </a:rPr>
+              <a:t>Follow-up: "Redo the pillar comparison for Reels only."</a:t>
+            </a:r>
+          </a:p>
+        </p:txBody>
+      </p:sp>
+    </p:spTree>
+  </p:cSld>
+  <p:clrMapOvr>
+    <a:masterClrMapping/>
+  </p:clrMapOvr>
+</p:sld>
+</file>
+
+<file path=ppt/slides/slide34.xml><?xml version="1.0" encoding="utf-8"?>
+<p:sld xmlns:a="http://schemas.openxmlformats.org/drawingml/2006/main" xmlns:p="http://schemas.openxmlformats.org/presentationml/2006/main" xmlns:r="http://schemas.openxmlformats.org/officeDocument/2006/relationships">
+  <p:cSld>
+    <p:spTree xmlns:mc="http://schemas.openxmlformats.org/markup-compatibility/2006" xmlns:mv="urn:schemas-microsoft-com:mac:vml" xmlns:c="http://schemas.openxmlformats.org/drawingml/2006/chart" xmlns:dgm="http://schemas.openxmlformats.org/drawingml/2006/diagram" xmlns:o="urn:schemas-microsoft-com:office:office" xmlns:v="urn:schemas-microsoft-com:vml" xmlns:pvml="urn:schemas-microsoft-com:office:powerpoint" xmlns:com="http://schemas.openxmlformats.org/drawingml/2006/compatibility" xmlns:p14="http://schemas.microsoft.com/office/powerpoint/2010/main" xmlns:p15="http://schemas.microsoft.com/office/powerpoint/2012/main" xmlns:ahyp="http://schemas.microsoft.com/office/drawing/2018/hyperlinkcolor">
+      <p:nvGrpSpPr>
+        <p:cNvPr id="1" name="Shape 1"/>
+        <p:cNvGrpSpPr/>
+        <p:nvPr/>
+      </p:nvGrpSpPr>
+      <p:grpSpPr>
+        <a:xfrm>
+          <a:off x="0" y="0"/>
+          <a:ext cx="0" cy="0"/>
+          <a:chOff x="0" y="0"/>
+          <a:chExt cx="0" cy="0"/>
+        </a:xfrm>
+      </p:grpSpPr>
+      <p:sp>
+        <p:nvSpPr>
+          <p:cNvPr id="10" name="label"/>
+          <p:cNvSpPr/>
+          <p:nvPr/>
+        </p:nvSpPr>
+        <p:spPr>
+          <a:xfrm>
+            <a:off x="812800" y="812800"/>
+            <a:ext cx="10566400" cy="238760"/>
+          </a:xfrm>
+          <a:prstGeom prst="rect">
+            <a:avLst/>
+          </a:prstGeom>
+          <a:noFill/>
+          <a:ln>
+            <a:noFill/>
+          </a:ln>
+        </p:spPr>
+        <p:txBody>
+          <a:bodyPr anchorCtr="0" anchor="t" bIns="0" lIns="0" spcFirstLastPara="1" rIns="0" wrap="square" tIns="0">
+            <a:noAutofit/>
+          </a:bodyPr>
+          <a:lstStyle/>
+          <a:p>
+            <a:pPr indent="0" lvl="0" marL="0" marR="0" rtl="0" algn="l">
+              <a:lnSpc>
+                <a:spcPct val="140000"/>
+              </a:lnSpc>
+              <a:spcBef>
+                <a:spcPts val="0"/>
+              </a:spcBef>
+              <a:spcAft>
+                <a:spcPts val="0"/>
+              </a:spcAft>
+              <a:buNone/>
+            </a:pPr>
+            <a:r>
+              <a:rPr b="1" i="0" lang="en-US" sz="1200" u="none" cap="none" strike="noStrike">
+                <a:solidFill>
+                  <a:srgbClr val="B5532B"/>
+                </a:solidFill>
+                <a:latin typeface="DM Sans"/>
+                <a:ea typeface="DM Sans"/>
+                <a:cs typeface="DM Sans"/>
+                <a:sym typeface="DM Sans"/>
+              </a:rPr>
+              <a:t>ANALYSE · Q1 ANSWER KEY</a:t>
+            </a:r>
+          </a:p>
+        </p:txBody>
+      </p:sp>
+      <p:sp>
+        <p:nvSpPr>
+          <p:cNvPr id="11" name="title"/>
+          <p:cNvSpPr/>
+          <p:nvPr/>
+        </p:nvSpPr>
+        <p:spPr>
+          <a:xfrm>
+            <a:off x="812800" y="1280158"/>
+            <a:ext cx="10566400" cy="528320"/>
+          </a:xfrm>
+          <a:prstGeom prst="rect">
+            <a:avLst/>
+          </a:prstGeom>
+          <a:noFill/>
+          <a:ln>
+            <a:noFill/>
+          </a:ln>
+        </p:spPr>
+        <p:txBody>
+          <a:bodyPr anchorCtr="0" anchor="t" bIns="0" lIns="0" spcFirstLastPara="1" rIns="0" wrap="square" tIns="0">
+            <a:noAutofit/>
+          </a:bodyPr>
+          <a:lstStyle/>
+          <a:p>
+            <a:pPr indent="0" lvl="0" marL="0" marR="0" rtl="0" algn="l">
+              <a:lnSpc>
+                <a:spcPct val="110000"/>
+              </a:lnSpc>
+              <a:spcBef>
+                <a:spcPts val="0"/>
+              </a:spcBef>
+              <a:spcAft>
+                <a:spcPts val="0"/>
+              </a:spcAft>
+              <a:buNone/>
+            </a:pPr>
+            <a:r>
+              <a:rPr b="0" i="0" lang="en-US" sz="3000" u="none" cap="none" strike="noStrike">
+                <a:solidFill>
+                  <a:srgbClr val="1E3A2F"/>
+                </a:solidFill>
+                <a:latin typeface="Fraunces"/>
+                <a:ea typeface="Fraunces"/>
+                <a:cs typeface="Fraunces"/>
+                <a:sym typeface="Fraunces"/>
+              </a:rPr>
+              <a:t>What worked? Facilitator findings</a:t>
+            </a:r>
+          </a:p>
+        </p:txBody>
+      </p:sp>
+      <p:cxnSp>
+        <p:nvCxnSpPr>
+          <p:cNvPr id="99" name="line"/>
+          <p:cNvCxnSpPr/>
+          <p:nvPr/>
+        </p:nvCxnSpPr>
+        <p:spPr>
+          <a:xfrm>
+            <a:off x="812800" y="2043435"/>
+            <a:ext cx="10566400" cy="0"/>
+          </a:xfrm>
+          <a:prstGeom prst="straightConnector1">
+            <a:avLst/>
+          </a:prstGeom>
+          <a:noFill/>
+          <a:ln cap="flat" cmpd="sng" w="12700">
+            <a:solidFill>
+              <a:srgbClr val="D9CDB6"/>
+            </a:solidFill>
+            <a:prstDash val="solid"/>
+          </a:ln>
+        </p:spPr>
+      </p:cxnSp>
+      <p:sp>
+        <p:nvSpPr>
+          <p:cNvPr id="13" name="findings"/>
+          <p:cNvSpPr/>
+          <p:nvPr/>
+        </p:nvSpPr>
+        <p:spPr>
+          <a:xfrm>
+            <a:off x="812800" y="2151385"/>
+            <a:ext cx="6551168" cy="4506615"/>
+          </a:xfrm>
+          <a:prstGeom prst="rect">
+            <a:avLst/>
+          </a:prstGeom>
+          <a:noFill/>
+          <a:ln>
+            <a:noFill/>
+          </a:ln>
+        </p:spPr>
+        <p:txBody>
+          <a:bodyPr anchorCtr="0" anchor="t" bIns="0" lIns="0" spcFirstLastPara="1" rIns="0" wrap="square" tIns="0">
+            <a:noAutofit/>
+          </a:bodyPr>
+          <a:lstStyle/>
+          <a:p>
+            <a:pPr indent="0" lvl="0" marL="0" marR="0" rtl="0" algn="l">
+              <a:lnSpc>
+                <a:spcPct val="135000"/>
+              </a:lnSpc>
+              <a:spcBef>
+                <a:spcPts val="100"/>
+              </a:spcBef>
+              <a:spcAft>
+                <a:spcPts val="0"/>
+              </a:spcAft>
+              <a:buNone/>
+            </a:pPr>
+            <a:r>
+              <a:rPr b="0" i="0" lang="en-US" sz="1250" u="none" cap="none" strike="noStrike">
+                <a:solidFill>
+                  <a:srgbClr val="1E3A2F"/>
+                </a:solidFill>
+                <a:latin typeface="DM Sans"/>
+                <a:ea typeface="DM Sans"/>
+                <a:cs typeface="DM Sans"/>
+                <a:sym typeface="DM Sans"/>
+              </a:rPr>
+              <a:t>•  Reels: avg reach ~16.5K (median 10.7K). Carousels 4.9K. Images 2.0K.</a:t>
+            </a:r>
+          </a:p>
+          <a:p>
+            <a:pPr indent="0" lvl="0" marL="0" marR="0" rtl="0" algn="l">
+              <a:lnSpc>
+                <a:spcPct val="135000"/>
+              </a:lnSpc>
+              <a:spcBef>
+                <a:spcPts val="100"/>
+              </a:spcBef>
+              <a:spcAft>
+                <a:spcPts val="0"/>
+              </a:spcAft>
+              <a:buNone/>
+            </a:pPr>
+            <a:r>
+              <a:rPr b="0" i="0" lang="en-US" sz="1250" u="none" cap="none" strike="noStrike">
+                <a:solidFill>
+                  <a:srgbClr val="1E3A2F"/>
+                </a:solidFill>
+                <a:latin typeface="DM Sans"/>
+                <a:ea typeface="DM Sans"/>
+                <a:cs typeface="DM Sans"/>
+                <a:sym typeface="DM Sans"/>
+              </a:rPr>
+              <a:t>•  Engagement rate: Reels 8.9%, carousels 8.8%, images 5.8% — formats are close.</a:t>
+            </a:r>
+          </a:p>
+          <a:p>
+            <a:pPr indent="0" lvl="0" marL="0" marR="0" rtl="0" algn="l">
+              <a:lnSpc>
+                <a:spcPct val="135000"/>
+              </a:lnSpc>
+              <a:spcBef>
+                <a:spcPts val="100"/>
+              </a:spcBef>
+              <a:spcAft>
+                <a:spcPts val="0"/>
+              </a:spcAft>
+              <a:buNone/>
+            </a:pPr>
+            <a:r>
+              <a:rPr b="0" i="0" lang="en-US" sz="1250" u="none" cap="none" strike="noStrike">
+                <a:solidFill>
+                  <a:srgbClr val="1E3A2F"/>
+                </a:solidFill>
+                <a:latin typeface="DM Sans"/>
+                <a:ea typeface="DM Sans"/>
+                <a:cs typeface="DM Sans"/>
+                <a:sym typeface="DM Sans"/>
+              </a:rPr>
+              <a:t>•  Carousels win on save rate (3.5% vs 1.3% for Reels). Reels win on share rate (2.4% vs 0.7%).</a:t>
+            </a:r>
+          </a:p>
+          <a:p>
+            <a:pPr indent="0" lvl="0" marL="0" marR="0" rtl="0" algn="l">
+              <a:lnSpc>
+                <a:spcPct val="135000"/>
+              </a:lnSpc>
+              <a:spcBef>
+                <a:spcPts val="100"/>
+              </a:spcBef>
+              <a:spcAft>
+                <a:spcPts val="0"/>
+              </a:spcAft>
+              <a:buNone/>
+            </a:pPr>
+            <a:r>
+              <a:rPr b="0" i="0" lang="en-US" sz="1250" u="none" cap="none" strike="noStrike">
+                <a:solidFill>
+                  <a:srgbClr val="1E3A2F"/>
+                </a:solidFill>
+                <a:latin typeface="DM Sans"/>
+                <a:ea typeface="DM Sans"/>
+                <a:cs typeface="DM Sans"/>
+                <a:sym typeface="DM Sans"/>
+              </a:rPr>
+              <a:t>•  By pillar: Loop Tote best engagement (8.7%) and save rate (2.9%). Picker stories best share rate (1.8%).</a:t>
+            </a:r>
+          </a:p>
+          <a:p>
+            <a:pPr indent="0" lvl="0" marL="0" marR="0" rtl="0" algn="l">
+              <a:lnSpc>
+                <a:spcPct val="135000"/>
+              </a:lnSpc>
+              <a:spcBef>
+                <a:spcPts val="100"/>
+              </a:spcBef>
+              <a:spcAft>
+                <a:spcPts val="0"/>
+              </a:spcAft>
+              <a:buNone/>
+            </a:pPr>
+            <a:r>
+              <a:rPr b="0" i="0" lang="en-US" sz="1250" u="none" cap="none" strike="noStrike">
+                <a:solidFill>
+                  <a:srgbClr val="1E3A2F"/>
+                </a:solidFill>
+                <a:latin typeface="DM Sans"/>
+                <a:ea typeface="DM Sans"/>
+                <a:cs typeface="DM Sans"/>
+                <a:sym typeface="DM Sans"/>
+              </a:rPr>
+              <a:t>•  Behind the scenes weakest overall (6.8% engagement).</a:t>
+            </a:r>
+          </a:p>
+          <a:p>
+            <a:pPr indent="0" lvl="0" marL="0" marR="0" rtl="0" algn="l">
+              <a:lnSpc>
+                <a:spcPct val="135000"/>
+              </a:lnSpc>
+              <a:spcBef>
+                <a:spcPts val="100"/>
+              </a:spcBef>
+              <a:spcAft>
+                <a:spcPts val="0"/>
+              </a:spcAft>
+              <a:buNone/>
+            </a:pPr>
+            <a:r>
+              <a:rPr b="0" i="0" lang="en-US" sz="1250" u="none" cap="none" strike="noStrike">
+                <a:solidFill>
+                  <a:srgbClr val="1E3A2F"/>
+                </a:solidFill>
+                <a:latin typeface="DM Sans"/>
+                <a:ea typeface="DM Sans"/>
+                <a:cs typeface="DM Sans"/>
+                <a:sym typeface="DM Sans"/>
+              </a:rPr>
+              <a:t>•  TRAP: education looks top for reach (28.2K avg) but has only 3 posts. One Reel hit 76K. Without it avg ≈ 4.2K.</a:t>
+            </a:r>
+          </a:p>
+          <a:p>
+            <a:pPr indent="0" lvl="0" marL="0" marR="0" rtl="0" algn="l">
+              <a:lnSpc>
+                <a:spcPct val="135000"/>
+              </a:lnSpc>
+              <a:spcBef>
+                <a:spcPts val="100"/>
+              </a:spcBef>
+              <a:spcAft>
+                <a:spcPts val="0"/>
+              </a:spcAft>
+              <a:buNone/>
+            </a:pPr>
+            <a:r>
+              <a:rPr b="0" i="0" lang="en-US" sz="1250" u="none" cap="none" strike="noStrike">
+                <a:solidFill>
+                  <a:srgbClr val="1E3A2F"/>
+                </a:solidFill>
+                <a:latin typeface="DM Sans"/>
+                <a:ea typeface="DM Sans"/>
+                <a:cs typeface="DM Sans"/>
+                <a:sym typeface="DM Sans"/>
+              </a:rPr>
+              <a:t>•  B2B has only 2 posts — no conclusions possible.</a:t>
+            </a:r>
+          </a:p>
+        </p:txBody>
+      </p:sp>
+      <p:sp>
+        <p:nvSpPr>
+          <p:cNvPr id="20" name="tpbg"/>
+          <p:cNvSpPr/>
+          <p:nvPr/>
+        </p:nvSpPr>
+        <p:spPr>
+          <a:xfrm>
+            <a:off x="7563968" y="2151385"/>
+            <a:ext cx="3815232" cy="4506615"/>
+          </a:xfrm>
+          <a:prstGeom prst="rect">
+            <a:avLst/>
+          </a:prstGeom>
+          <a:solidFill>
+            <a:srgbClr val="1E3A2F"/>
+          </a:solidFill>
+          <a:ln>
+            <a:noFill/>
+          </a:ln>
+        </p:spPr>
+        <p:txBody>
+          <a:bodyPr/>
+          <a:lstStyle/>
+          <a:p/>
+        </p:txBody>
+      </p:sp>
+      <p:sp>
+        <p:nvSpPr>
+          <p:cNvPr id="21" name="tp"/>
+          <p:cNvSpPr/>
+          <p:nvPr/>
+        </p:nvSpPr>
+        <p:spPr>
+          <a:xfrm>
+            <a:off x="7673968" y="2261385"/>
+            <a:ext cx="3595232" cy="4286615"/>
+          </a:xfrm>
+          <a:prstGeom prst="rect">
+            <a:avLst/>
+          </a:prstGeom>
+          <a:noFill/>
+          <a:ln>
+            <a:noFill/>
+          </a:ln>
+        </p:spPr>
+        <p:txBody>
+          <a:bodyPr anchorCtr="0" anchor="t" bIns="0" lIns="0" spcFirstLastPara="1" rIns="0" wrap="square" tIns="0">
+            <a:noAutofit/>
+          </a:bodyPr>
+          <a:lstStyle/>
+          <a:p>
+            <a:pPr indent="0" lvl="0" marL="0" marR="0" rtl="0" algn="l">
+              <a:lnSpc>
+                <a:spcPct val="140000"/>
+              </a:lnSpc>
+              <a:spcBef>
+                <a:spcPts val="0"/>
+              </a:spcBef>
+              <a:spcAft>
+                <a:spcPts val="0"/>
+              </a:spcAft>
+              <a:buNone/>
+            </a:pPr>
+            <a:r>
+              <a:rPr b="1" i="0" lang="en-US" sz="1100" u="none" cap="none" strike="noStrike">
+                <a:solidFill>
+                  <a:srgbClr val="FBF3E8"/>
+                </a:solidFill>
+                <a:latin typeface="DM Sans"/>
+                <a:ea typeface="DM Sans"/>
+                <a:cs typeface="DM Sans"/>
+                <a:sym typeface="DM Sans"/>
+              </a:rPr>
+              <a:t>Teaching point</a:t>
+            </a:r>
+          </a:p>
+          <a:p/>
+          <a:p>
+            <a:pPr indent="0" lvl="0" marL="0" marR="0" rtl="0" algn="l">
+              <a:lnSpc>
+                <a:spcPct val="138000"/>
+              </a:lnSpc>
+              <a:spcBef>
+                <a:spcPts val="0"/>
+              </a:spcBef>
+              <a:spcAft>
+                <a:spcPts val="0"/>
+              </a:spcAft>
+              <a:buNone/>
+            </a:pPr>
+            <a:r>
+              <a:rPr b="0" i="0" lang="en-US" sz="1250" u="none" cap="none" strike="noStrike">
+                <a:solidFill>
+                  <a:srgbClr val="FBF3E8"/>
+                </a:solidFill>
+                <a:latin typeface="DM Sans"/>
+                <a:ea typeface="DM Sans"/>
+                <a:cs typeface="DM Sans"/>
+                <a:sym typeface="DM Sans"/>
+              </a:rPr>
+              <a:t>Averages mislead on small samples. Always ask the AI to check for outliers before drawing conclusions.</a:t>
+            </a:r>
+          </a:p>
+        </p:txBody>
+      </p:sp>
+    </p:spTree>
+  </p:cSld>
+  <p:clrMapOvr>
+    <a:masterClrMapping/>
+  </p:clrMapOvr>
+</p:sld>
+</file>
+
+<file path=ppt/slides/slide35.xml><?xml version="1.0" encoding="utf-8"?>
+<p:sld xmlns:a="http://schemas.openxmlformats.org/drawingml/2006/main" xmlns:p="http://schemas.openxmlformats.org/presentationml/2006/main" xmlns:r="http://schemas.openxmlformats.org/officeDocument/2006/relationships">
+  <p:cSld>
+    <p:spTree xmlns:mc="http://schemas.openxmlformats.org/markup-compatibility/2006" xmlns:mv="urn:schemas-microsoft-com:mac:vml" xmlns:c="http://schemas.openxmlformats.org/drawingml/2006/chart" xmlns:dgm="http://schemas.openxmlformats.org/drawingml/2006/diagram" xmlns:o="urn:schemas-microsoft-com:office:office" xmlns:v="urn:schemas-microsoft-com:vml" xmlns:pvml="urn:schemas-microsoft-com:office:powerpoint" xmlns:com="http://schemas.openxmlformats.org/drawingml/2006/compatibility" xmlns:p14="http://schemas.microsoft.com/office/powerpoint/2010/main" xmlns:p15="http://schemas.microsoft.com/office/powerpoint/2012/main" xmlns:ahyp="http://schemas.microsoft.com/office/drawing/2018/hyperlinkcolor">
+      <p:nvGrpSpPr>
+        <p:cNvPr id="1" name="Shape 1"/>
+        <p:cNvGrpSpPr/>
+        <p:nvPr/>
+      </p:nvGrpSpPr>
+      <p:grpSpPr>
+        <a:xfrm>
+          <a:off x="0" y="0"/>
+          <a:ext cx="0" cy="0"/>
+          <a:chOff x="0" y="0"/>
+          <a:chExt cx="0" cy="0"/>
+        </a:xfrm>
+      </p:grpSpPr>
+      <p:sp>
+        <p:nvSpPr>
+          <p:cNvPr id="10" name="label"/>
+          <p:cNvSpPr/>
+          <p:nvPr/>
+        </p:nvSpPr>
+        <p:spPr>
+          <a:xfrm>
+            <a:off x="812800" y="812800"/>
+            <a:ext cx="10566400" cy="238760"/>
+          </a:xfrm>
+          <a:prstGeom prst="rect">
+            <a:avLst/>
+          </a:prstGeom>
+          <a:noFill/>
+          <a:ln>
+            <a:noFill/>
+          </a:ln>
+        </p:spPr>
+        <p:txBody>
+          <a:bodyPr anchorCtr="0" anchor="t" bIns="0" lIns="0" spcFirstLastPara="1" rIns="0" wrap="square" tIns="0">
+            <a:noAutofit/>
+          </a:bodyPr>
+          <a:lstStyle/>
+          <a:p>
+            <a:pPr indent="0" lvl="0" marL="0" marR="0" rtl="0" algn="l">
+              <a:lnSpc>
+                <a:spcPct val="140000"/>
+              </a:lnSpc>
+              <a:spcBef>
+                <a:spcPts val="0"/>
+              </a:spcBef>
+              <a:spcAft>
+                <a:spcPts val="0"/>
+              </a:spcAft>
+              <a:buNone/>
+            </a:pPr>
+            <a:r>
+              <a:rPr b="1" i="0" lang="en-US" sz="1200" u="none" cap="none" strike="noStrike">
+                <a:solidFill>
+                  <a:srgbClr val="B5532B"/>
+                </a:solidFill>
+                <a:latin typeface="DM Sans"/>
+                <a:ea typeface="DM Sans"/>
+                <a:cs typeface="DM Sans"/>
+                <a:sym typeface="DM Sans"/>
+              </a:rPr>
+              <a:t>ANALYSE · QUESTION 2 OF 5</a:t>
+            </a:r>
+          </a:p>
+        </p:txBody>
+      </p:sp>
+      <p:sp>
+        <p:nvSpPr>
+          <p:cNvPr id="11" name="title"/>
+          <p:cNvSpPr/>
+          <p:nvPr/>
+        </p:nvSpPr>
+        <p:spPr>
+          <a:xfrm>
+            <a:off x="812800" y="1280158"/>
+            <a:ext cx="10566400" cy="528320"/>
+          </a:xfrm>
+          <a:prstGeom prst="rect">
+            <a:avLst/>
+          </a:prstGeom>
+          <a:noFill/>
+          <a:ln>
+            <a:noFill/>
+          </a:ln>
+        </p:spPr>
+        <p:txBody>
+          <a:bodyPr anchorCtr="0" anchor="t" bIns="0" lIns="0" spcFirstLastPara="1" rIns="0" wrap="square" tIns="0">
+            <a:noAutofit/>
+          </a:bodyPr>
+          <a:lstStyle/>
+          <a:p>
+            <a:pPr indent="0" lvl="0" marL="0" marR="0" rtl="0" algn="l">
+              <a:lnSpc>
+                <a:spcPct val="110000"/>
+              </a:lnSpc>
+              <a:spcBef>
+                <a:spcPts val="0"/>
+              </a:spcBef>
+              <a:spcAft>
+                <a:spcPts val="0"/>
+              </a:spcAft>
+              <a:buNone/>
+            </a:pPr>
+            <a:r>
+              <a:rPr b="0" i="0" lang="en-US" sz="3000" u="none" cap="none" strike="noStrike">
+                <a:solidFill>
+                  <a:srgbClr val="1E3A2F"/>
+                </a:solidFill>
+                <a:latin typeface="Fraunces"/>
+                <a:ea typeface="Fraunces"/>
+                <a:cs typeface="Fraunces"/>
+                <a:sym typeface="Fraunces"/>
+              </a:rPr>
+              <a:t>Why did our best posts break out?</a:t>
+            </a:r>
+          </a:p>
+        </p:txBody>
+      </p:sp>
+      <p:cxnSp>
+        <p:nvCxnSpPr>
+          <p:cNvPr id="99" name="line"/>
+          <p:cNvCxnSpPr/>
+          <p:nvPr/>
+        </p:nvCxnSpPr>
+        <p:spPr>
+          <a:xfrm>
+            <a:off x="812800" y="2043435"/>
+            <a:ext cx="10566400" cy="0"/>
+          </a:xfrm>
+          <a:prstGeom prst="straightConnector1">
+            <a:avLst/>
+          </a:prstGeom>
+          <a:noFill/>
+          <a:ln cap="flat" cmpd="sng" w="12700">
+            <a:solidFill>
+              <a:srgbClr val="D9CDB6"/>
+            </a:solidFill>
+            <a:prstDash val="solid"/>
+          </a:ln>
+        </p:spPr>
+      </p:cxnSp>
+      <p:sp>
+        <p:nvSpPr>
+          <p:cNvPr id="20" name="promptbg"/>
+          <p:cNvSpPr/>
+          <p:nvPr/>
+        </p:nvSpPr>
+        <p:spPr>
+          <a:xfrm>
+            <a:off x="812800" y="2170000"/>
+            <a:ext cx="6022847" cy="4508000"/>
+          </a:xfrm>
+          <a:prstGeom prst="rect">
+            <a:avLst/>
+          </a:prstGeom>
+          <a:solidFill>
+            <a:srgbClr val="1E3A2F"/>
+          </a:solidFill>
+          <a:ln>
+            <a:noFill/>
+          </a:ln>
+        </p:spPr>
+        <p:txBody>
+          <a:bodyPr/>
+          <a:lstStyle/>
+          <a:p/>
+        </p:txBody>
+      </p:sp>
+      <p:sp>
+        <p:nvSpPr>
+          <p:cNvPr id="21" name="prompt"/>
+          <p:cNvSpPr/>
+          <p:nvPr/>
+        </p:nvSpPr>
+        <p:spPr>
+          <a:xfrm>
+            <a:off x="922800" y="2280000"/>
+            <a:ext cx="5802847" cy="4288000"/>
+          </a:xfrm>
+          <a:prstGeom prst="rect">
+            <a:avLst/>
+          </a:prstGeom>
+          <a:noFill/>
+          <a:ln>
+            <a:noFill/>
+          </a:ln>
+        </p:spPr>
+        <p:txBody>
+          <a:bodyPr anchorCtr="0" anchor="t" bIns="0" lIns="0" spcFirstLastPara="1" rIns="0" wrap="square" tIns="0">
+            <a:noAutofit/>
+          </a:bodyPr>
+          <a:lstStyle/>
+          <a:p>
+            <a:pPr indent="0" lvl="0" marL="0" marR="0" rtl="0" algn="l">
+              <a:lnSpc>
+                <a:spcPct val="128000"/>
+              </a:lnSpc>
+              <a:spcBef>
+                <a:spcPts val="0"/>
+              </a:spcBef>
+              <a:spcAft>
+                <a:spcPts val="0"/>
+              </a:spcAft>
+              <a:buNone/>
+            </a:pPr>
+            <a:r>
+              <a:rPr b="0" i="0" lang="en-US" sz="1050" u="none" cap="none" strike="noStrike">
+                <a:solidFill>
+                  <a:srgbClr val="FBF3E8"/>
+                </a:solidFill>
+                <a:latin typeface="DM Sans"/>
+                <a:ea typeface="DM Sans"/>
+                <a:cs typeface="DM Sans"/>
+                <a:sym typeface="DM Sans"/>
+              </a:rPr>
+              <a:t>I attached two files: the post KPI file and a flat post file with captions.</a:t>
+            </a:r>
+          </a:p>
+          <a:p>
+            <a:pPr indent="0" lvl="0" marL="0" marR="0" rtl="0" algn="l">
+              <a:lnSpc>
+                <a:spcPct val="128000"/>
+              </a:lnSpc>
+              <a:spcBef>
+                <a:spcPts val="0"/>
+              </a:spcBef>
+              <a:spcAft>
+                <a:spcPts val="0"/>
+              </a:spcAft>
+              <a:buNone/>
+            </a:pPr>
+            <a:r>
+              <a:rPr b="0" i="0" lang="en-US" sz="1050" u="none" cap="none" strike="noStrike">
+                <a:solidFill>
+                  <a:srgbClr val="FBF3E8"/>
+                </a:solidFill>
+                <a:latin typeface="DM Sans"/>
+                <a:ea typeface="DM Sans"/>
+                <a:cs typeface="DM Sans"/>
+                <a:sym typeface="DM Sans"/>
+              </a:rPr>
+              <a:t>Join post_id in the KPI file to id in the flat file to get the caption.</a:t>
+            </a:r>
+          </a:p>
+          <a:p/>
+          <a:p>
+            <a:pPr indent="0" lvl="0" marL="0" marR="0" rtl="0" algn="l">
+              <a:lnSpc>
+                <a:spcPct val="128000"/>
+              </a:lnSpc>
+              <a:spcBef>
+                <a:spcPts val="0"/>
+              </a:spcBef>
+              <a:spcAft>
+                <a:spcPts val="0"/>
+              </a:spcAft>
+              <a:buNone/>
+            </a:pPr>
+            <a:r>
+              <a:rPr b="0" i="0" lang="en-US" sz="1050" u="none" cap="none" strike="noStrike">
+                <a:solidFill>
+                  <a:srgbClr val="FBF3E8"/>
+                </a:solidFill>
+                <a:latin typeface="DM Sans"/>
+                <a:ea typeface="DM Sans"/>
+                <a:cs typeface="DM Sans"/>
+                <a:sym typeface="DM Sans"/>
+              </a:rPr>
+              <a:t>Look at posts where performance_flag is "breakout" and compare them with</a:t>
+            </a:r>
+          </a:p>
+          <a:p>
+            <a:pPr indent="0" lvl="0" marL="0" marR="0" rtl="0" algn="l">
+              <a:lnSpc>
+                <a:spcPct val="128000"/>
+              </a:lnSpc>
+              <a:spcBef>
+                <a:spcPts val="0"/>
+              </a:spcBef>
+              <a:spcAft>
+                <a:spcPts val="0"/>
+              </a:spcAft>
+              <a:buNone/>
+            </a:pPr>
+            <a:r>
+              <a:rPr b="0" i="0" lang="en-US" sz="1050" u="none" cap="none" strike="noStrike">
+                <a:solidFill>
+                  <a:srgbClr val="FBF3E8"/>
+                </a:solidFill>
+                <a:latin typeface="DM Sans"/>
+                <a:ea typeface="DM Sans"/>
+                <a:cs typeface="DM Sans"/>
+                <a:sym typeface="DM Sans"/>
+              </a:rPr>
+              <a:t>"underperformer" posts and typical posts.</a:t>
+            </a:r>
+          </a:p>
+          <a:p/>
+          <a:p>
+            <a:pPr indent="0" lvl="0" marL="0" marR="0" rtl="0" algn="l">
+              <a:lnSpc>
+                <a:spcPct val="128000"/>
+              </a:lnSpc>
+              <a:spcBef>
+                <a:spcPts val="0"/>
+              </a:spcBef>
+              <a:spcAft>
+                <a:spcPts val="0"/>
+              </a:spcAft>
+              <a:buNone/>
+            </a:pPr>
+            <a:r>
+              <a:rPr b="0" i="0" lang="en-US" sz="1050" u="none" cap="none" strike="noStrike">
+                <a:solidFill>
+                  <a:srgbClr val="FBF3E8"/>
+                </a:solidFill>
+                <a:latin typeface="DM Sans"/>
+                <a:ea typeface="DM Sans"/>
+                <a:cs typeface="DM Sans"/>
+                <a:sym typeface="DM Sans"/>
+              </a:rPr>
+              <a:t>1. List the breakout and underperformer posts with: caption start, format, pillar,</a:t>
+            </a:r>
+          </a:p>
+          <a:p>
+            <a:pPr indent="0" lvl="0" marL="0" marR="0" rtl="0" algn="l">
+              <a:lnSpc>
+                <a:spcPct val="128000"/>
+              </a:lnSpc>
+              <a:spcBef>
+                <a:spcPts val="0"/>
+              </a:spcBef>
+              <a:spcAft>
+                <a:spcPts val="0"/>
+              </a:spcAft>
+              <a:buNone/>
+            </a:pPr>
+            <a:r>
+              <a:rPr b="0" i="0" lang="en-US" sz="1050" u="none" cap="none" strike="noStrike">
+                <a:solidFill>
+                  <a:srgbClr val="FBF3E8"/>
+                </a:solidFill>
+                <a:latin typeface="DM Sans"/>
+                <a:ea typeface="DM Sans"/>
+                <a:cs typeface="DM Sans"/>
+                <a:sym typeface="DM Sans"/>
+              </a:rPr>
+              <a:t>   weekday, hour, caption length, hashtag count and reach.</a:t>
+            </a:r>
+          </a:p>
+          <a:p>
+            <a:pPr indent="0" lvl="0" marL="0" marR="0" rtl="0" algn="l">
+              <a:lnSpc>
+                <a:spcPct val="128000"/>
+              </a:lnSpc>
+              <a:spcBef>
+                <a:spcPts val="0"/>
+              </a:spcBef>
+              <a:spcAft>
+                <a:spcPts val="0"/>
+              </a:spcAft>
+              <a:buNone/>
+            </a:pPr>
+            <a:r>
+              <a:rPr b="0" i="0" lang="en-US" sz="1050" u="none" cap="none" strike="noStrike">
+                <a:solidFill>
+                  <a:srgbClr val="FBF3E8"/>
+                </a:solidFill>
+                <a:latin typeface="DM Sans"/>
+                <a:ea typeface="DM Sans"/>
+                <a:cs typeface="DM Sans"/>
+                <a:sym typeface="DM Sans"/>
+              </a:rPr>
+              <a:t>2. What do the breakouts have in common and how do they differ from underperformers?</a:t>
+            </a:r>
+          </a:p>
+          <a:p>
+            <a:pPr indent="0" lvl="0" marL="0" marR="0" rtl="0" algn="l">
+              <a:lnSpc>
+                <a:spcPct val="128000"/>
+              </a:lnSpc>
+              <a:spcBef>
+                <a:spcPts val="0"/>
+              </a:spcBef>
+              <a:spcAft>
+                <a:spcPts val="0"/>
+              </a:spcAft>
+              <a:buNone/>
+            </a:pPr>
+            <a:r>
+              <a:rPr b="0" i="0" lang="en-US" sz="1050" u="none" cap="none" strike="noStrike">
+                <a:solidFill>
+                  <a:srgbClr val="FBF3E8"/>
+                </a:solidFill>
+                <a:latin typeface="DM Sans"/>
+                <a:ea typeface="DM Sans"/>
+                <a:cs typeface="DM Sans"/>
+                <a:sym typeface="DM Sans"/>
+              </a:rPr>
+              <a:t>   Consider format, caption topic, posting time and caption length.</a:t>
+            </a:r>
+          </a:p>
+          <a:p>
+            <a:pPr indent="0" lvl="0" marL="0" marR="0" rtl="0" algn="l">
+              <a:lnSpc>
+                <a:spcPct val="128000"/>
+              </a:lnSpc>
+              <a:spcBef>
+                <a:spcPts val="0"/>
+              </a:spcBef>
+              <a:spcAft>
+                <a:spcPts val="0"/>
+              </a:spcAft>
+              <a:buNone/>
+            </a:pPr>
+            <a:r>
+              <a:rPr b="0" i="0" lang="en-US" sz="1050" u="none" cap="none" strike="noStrike">
+                <a:solidFill>
+                  <a:srgbClr val="FBF3E8"/>
+                </a:solidFill>
+                <a:latin typeface="DM Sans"/>
+                <a:ea typeface="DM Sans"/>
+                <a:cs typeface="DM Sans"/>
+                <a:sym typeface="DM Sans"/>
+              </a:rPr>
+              <a:t>3. For each factor, say whether the data can support a conclusion.</a:t>
+            </a:r>
+          </a:p>
+          <a:p>
+            <a:pPr indent="0" lvl="0" marL="0" marR="0" rtl="0" algn="l">
+              <a:lnSpc>
+                <a:spcPct val="128000"/>
+              </a:lnSpc>
+              <a:spcBef>
+                <a:spcPts val="0"/>
+              </a:spcBef>
+              <a:spcAft>
+                <a:spcPts val="0"/>
+              </a:spcAft>
+              <a:buNone/>
+            </a:pPr>
+            <a:r>
+              <a:rPr b="0" i="0" lang="en-US" sz="1050" u="none" cap="none" strike="noStrike">
+                <a:solidFill>
+                  <a:srgbClr val="FBF3E8"/>
+                </a:solidFill>
+                <a:latin typeface="DM Sans"/>
+                <a:ea typeface="DM Sans"/>
+                <a:cs typeface="DM Sans"/>
+                <a:sym typeface="DM Sans"/>
+              </a:rPr>
+              <a:t>   Consider how few breakouts there are and whether the factor varies at all.</a:t>
+            </a:r>
+          </a:p>
+          <a:p>
+            <a:pPr indent="0" lvl="0" marL="0" marR="0" rtl="0" algn="l">
+              <a:lnSpc>
+                <a:spcPct val="128000"/>
+              </a:lnSpc>
+              <a:spcBef>
+                <a:spcPts val="0"/>
+              </a:spcBef>
+              <a:spcAft>
+                <a:spcPts val="0"/>
+              </a:spcAft>
+              <a:buNone/>
+            </a:pPr>
+            <a:r>
+              <a:rPr b="0" i="0" lang="en-US" sz="1050" u="none" cap="none" strike="noStrike">
+                <a:solidFill>
+                  <a:srgbClr val="FBF3E8"/>
+                </a:solidFill>
+                <a:latin typeface="DM Sans"/>
+                <a:ea typeface="DM Sans"/>
+                <a:cs typeface="DM Sans"/>
+                <a:sym typeface="DM Sans"/>
+              </a:rPr>
+              <a:t>4. Suggest 3 hypotheses we could test next month. For each: the change we make</a:t>
+            </a:r>
+          </a:p>
+          <a:p>
+            <a:pPr indent="0" lvl="0" marL="0" marR="0" rtl="0" algn="l">
+              <a:lnSpc>
+                <a:spcPct val="128000"/>
+              </a:lnSpc>
+              <a:spcBef>
+                <a:spcPts val="0"/>
+              </a:spcBef>
+              <a:spcAft>
+                <a:spcPts val="0"/>
+              </a:spcAft>
+              <a:buNone/>
+            </a:pPr>
+            <a:r>
+              <a:rPr b="0" i="0" lang="en-US" sz="1050" u="none" cap="none" strike="noStrike">
+                <a:solidFill>
+                  <a:srgbClr val="FBF3E8"/>
+                </a:solidFill>
+                <a:latin typeface="DM Sans"/>
+                <a:ea typeface="DM Sans"/>
+                <a:cs typeface="DM Sans"/>
+                <a:sym typeface="DM Sans"/>
+              </a:rPr>
+              <a:t>   and the metric that would show it worked.</a:t>
+            </a:r>
+          </a:p>
+          <a:p/>
+          <a:p>
+            <a:pPr indent="0" lvl="0" marL="0" marR="0" rtl="0" algn="l">
+              <a:lnSpc>
+                <a:spcPct val="128000"/>
+              </a:lnSpc>
+              <a:spcBef>
+                <a:spcPts val="0"/>
+              </a:spcBef>
+              <a:spcAft>
+                <a:spcPts val="0"/>
+              </a:spcAft>
+              <a:buNone/>
+            </a:pPr>
+            <a:r>
+              <a:rPr b="0" i="0" lang="en-US" sz="1050" u="none" cap="none" strike="noStrike">
+                <a:solidFill>
+                  <a:srgbClr val="FBF3E8"/>
+                </a:solidFill>
+                <a:latin typeface="DM Sans"/>
+                <a:ea typeface="DM Sans"/>
+                <a:cs typeface="DM Sans"/>
+                <a:sym typeface="DM Sans"/>
+              </a:rPr>
+              <a:t>Do not claim that any factor caused the result.</a:t>
+            </a:r>
+          </a:p>
+        </p:txBody>
+      </p:sp>
+      <p:sp>
+        <p:nvSpPr>
+          <p:cNvPr id="22" name="steps"/>
+          <p:cNvSpPr/>
+          <p:nvPr/>
+        </p:nvSpPr>
+        <p:spPr>
+          <a:xfrm>
+            <a:off x="7035647" y="2170000"/>
+            <a:ext cx="4343553" cy="4508000"/>
+          </a:xfrm>
+          <a:prstGeom prst="rect">
+            <a:avLst/>
+          </a:prstGeom>
+          <a:noFill/>
+          <a:ln>
+            <a:noFill/>
+          </a:ln>
+        </p:spPr>
+        <p:txBody>
+          <a:bodyPr anchorCtr="0" anchor="t" bIns="0" lIns="0" spcFirstLastPara="1" rIns="0" wrap="square" tIns="0">
+            <a:noAutofit/>
+          </a:bodyPr>
+          <a:lstStyle/>
+          <a:p>
+            <a:pPr indent="0" lvl="0" marL="0" marR="0" rtl="0" algn="l">
+              <a:lnSpc>
+                <a:spcPct val="100000"/>
+              </a:lnSpc>
+              <a:spcBef>
+                <a:spcPts val="200"/>
+              </a:spcBef>
+              <a:spcAft>
+                <a:spcPts val="0"/>
+              </a:spcAft>
+              <a:buNone/>
+            </a:pPr>
+            <a:r>
+              <a:rPr b="0" i="0" lang="en-US" sz="2000" u="none" cap="none" strike="noStrike">
+                <a:solidFill>
+                  <a:srgbClr val="B5532B"/>
+                </a:solidFill>
+                <a:latin typeface="Fraunces"/>
+                <a:ea typeface="Fraunces"/>
+                <a:cs typeface="Fraunces"/>
+                <a:sym typeface="Fraunces"/>
+              </a:rPr>
+              <a:t>1</a:t>
+            </a:r>
+          </a:p>
+          <a:p>
+            <a:pPr indent="0" lvl="0" marL="0" marR="0" rtl="0" algn="l">
+              <a:lnSpc>
+                <a:spcPct val="128000"/>
+              </a:lnSpc>
+              <a:spcBef>
+                <a:spcPts val="0"/>
+              </a:spcBef>
+              <a:spcAft>
+                <a:spcPts val="0"/>
+              </a:spcAft>
+              <a:buNone/>
+            </a:pPr>
+            <a:r>
+              <a:rPr b="0" i="0" lang="en-US" sz="1300" u="none" cap="none" strike="noStrike">
+                <a:solidFill>
+                  <a:srgbClr val="1E3A2F"/>
+                </a:solidFill>
+                <a:latin typeface="DM Sans"/>
+                <a:ea typeface="DM Sans"/>
+                <a:cs typeface="DM Sans"/>
+                <a:sym typeface="DM Sans"/>
+              </a:rPr>
+              <a:t>Attach both CSV files.</a:t>
+            </a:r>
+          </a:p>
+          <a:p>
+            <a:pPr indent="0" lvl="0" marL="0" marR="0" rtl="0" algn="l">
+              <a:lnSpc>
+                <a:spcPct val="100000"/>
+              </a:lnSpc>
+              <a:spcBef>
+                <a:spcPts val="200"/>
+              </a:spcBef>
+              <a:spcAft>
+                <a:spcPts val="0"/>
+              </a:spcAft>
+              <a:buNone/>
+            </a:pPr>
+            <a:r>
+              <a:rPr b="0" i="0" lang="en-US" sz="2000" u="none" cap="none" strike="noStrike">
+                <a:solidFill>
+                  <a:srgbClr val="B5532B"/>
+                </a:solidFill>
+                <a:latin typeface="Fraunces"/>
+                <a:ea typeface="Fraunces"/>
+                <a:cs typeface="Fraunces"/>
+                <a:sym typeface="Fraunces"/>
+              </a:rPr>
+              <a:t>2</a:t>
+            </a:r>
+          </a:p>
+          <a:p>
+            <a:pPr indent="0" lvl="0" marL="0" marR="0" rtl="0" algn="l">
+              <a:lnSpc>
+                <a:spcPct val="128000"/>
+              </a:lnSpc>
+              <a:spcBef>
+                <a:spcPts val="0"/>
+              </a:spcBef>
+              <a:spcAft>
+                <a:spcPts val="0"/>
+              </a:spcAft>
+              <a:buNone/>
+            </a:pPr>
+            <a:r>
+              <a:rPr b="0" i="0" lang="en-US" sz="1300" u="none" cap="none" strike="noStrike">
+                <a:solidFill>
+                  <a:srgbClr val="1E3A2F"/>
+                </a:solidFill>
+                <a:latin typeface="DM Sans"/>
+                <a:ea typeface="DM Sans"/>
+                <a:cs typeface="DM Sans"/>
+                <a:sym typeface="DM Sans"/>
+              </a:rPr>
+              <a:t>Paste the prompt.</a:t>
+            </a:r>
+          </a:p>
+          <a:p>
+            <a:pPr indent="0" lvl="0" marL="0" marR="0" rtl="0" algn="l">
+              <a:lnSpc>
+                <a:spcPct val="100000"/>
+              </a:lnSpc>
+              <a:spcBef>
+                <a:spcPts val="200"/>
+              </a:spcBef>
+              <a:spcAft>
+                <a:spcPts val="0"/>
+              </a:spcAft>
+              <a:buNone/>
+            </a:pPr>
+            <a:r>
+              <a:rPr b="0" i="0" lang="en-US" sz="2000" u="none" cap="none" strike="noStrike">
+                <a:solidFill>
+                  <a:srgbClr val="B5532B"/>
+                </a:solidFill>
+                <a:latin typeface="Fraunces"/>
+                <a:ea typeface="Fraunces"/>
+                <a:cs typeface="Fraunces"/>
+                <a:sym typeface="Fraunces"/>
+              </a:rPr>
+              <a:t>3</a:t>
+            </a:r>
+          </a:p>
+          <a:p>
+            <a:pPr indent="0" lvl="0" marL="0" marR="0" rtl="0" algn="l">
+              <a:lnSpc>
+                <a:spcPct val="128000"/>
+              </a:lnSpc>
+              <a:spcBef>
+                <a:spcPts val="0"/>
+              </a:spcBef>
+              <a:spcAft>
+                <a:spcPts val="0"/>
+              </a:spcAft>
+              <a:buNone/>
+            </a:pPr>
+            <a:r>
+              <a:rPr b="0" i="0" lang="en-US" sz="1300" u="none" cap="none" strike="noStrike">
+                <a:solidFill>
+                  <a:srgbClr val="1E3A2F"/>
+                </a:solidFill>
+                <a:latin typeface="DM Sans"/>
+                <a:ea typeface="DM Sans"/>
+                <a:cs typeface="DM Sans"/>
+                <a:sym typeface="DM Sans"/>
+              </a:rPr>
+              <a:t>Follow-up: "Rank the factors from most to least trustworthy and explain why."</a:t>
+            </a:r>
+          </a:p>
+          <a:p>
+            <a:pPr indent="0" lvl="0" marL="0" marR="0" rtl="0" algn="l">
+              <a:lnSpc>
+                <a:spcPct val="100000"/>
+              </a:lnSpc>
+              <a:spcBef>
+                <a:spcPts val="200"/>
+              </a:spcBef>
+              <a:spcAft>
+                <a:spcPts val="0"/>
+              </a:spcAft>
+              <a:buNone/>
+            </a:pPr>
+            <a:r>
+              <a:rPr b="0" i="0" lang="en-US" sz="2000" u="none" cap="none" strike="noStrike">
+                <a:solidFill>
+                  <a:srgbClr val="B5532B"/>
+                </a:solidFill>
+                <a:latin typeface="Fraunces"/>
+                <a:ea typeface="Fraunces"/>
+                <a:cs typeface="Fraunces"/>
+                <a:sym typeface="Fraunces"/>
+              </a:rPr>
+              <a:t>4</a:t>
+            </a:r>
+          </a:p>
+          <a:p>
+            <a:pPr indent="0" lvl="0" marL="0" marR="0" rtl="0" algn="l">
+              <a:lnSpc>
+                <a:spcPct val="128000"/>
+              </a:lnSpc>
+              <a:spcBef>
+                <a:spcPts val="0"/>
+              </a:spcBef>
+              <a:spcAft>
+                <a:spcPts val="0"/>
+              </a:spcAft>
+              <a:buNone/>
+            </a:pPr>
+            <a:r>
+              <a:rPr b="0" i="0" lang="en-US" sz="1300" u="none" cap="none" strike="noStrike">
+                <a:solidFill>
+                  <a:srgbClr val="1E3A2F"/>
+                </a:solidFill>
+                <a:latin typeface="DM Sans"/>
+                <a:ea typeface="DM Sans"/>
+                <a:cs typeface="DM Sans"/>
+                <a:sym typeface="DM Sans"/>
+              </a:rPr>
+              <a:t>Follow-up: "Write 5 caption ideas that apply the hypotheses."</a:t>
+            </a:r>
+          </a:p>
+        </p:txBody>
+      </p:sp>
+    </p:spTree>
+  </p:cSld>
+  <p:clrMapOvr>
+    <a:masterClrMapping/>
+  </p:clrMapOvr>
+</p:sld>
+</file>
+
+<file path=ppt/slides/slide36.xml><?xml version="1.0" encoding="utf-8"?>
+<p:sld xmlns:a="http://schemas.openxmlformats.org/drawingml/2006/main" xmlns:p="http://schemas.openxmlformats.org/presentationml/2006/main" xmlns:r="http://schemas.openxmlformats.org/officeDocument/2006/relationships">
+  <p:cSld>
+    <p:spTree xmlns:mc="http://schemas.openxmlformats.org/markup-compatibility/2006" xmlns:mv="urn:schemas-microsoft-com:mac:vml" xmlns:c="http://schemas.openxmlformats.org/drawingml/2006/chart" xmlns:dgm="http://schemas.openxmlformats.org/drawingml/2006/diagram" xmlns:o="urn:schemas-microsoft-com:office:office" xmlns:v="urn:schemas-microsoft-com:vml" xmlns:pvml="urn:schemas-microsoft-com:office:powerpoint" xmlns:com="http://schemas.openxmlformats.org/drawingml/2006/compatibility" xmlns:p14="http://schemas.microsoft.com/office/powerpoint/2010/main" xmlns:p15="http://schemas.microsoft.com/office/powerpoint/2012/main" xmlns:ahyp="http://schemas.microsoft.com/office/drawing/2018/hyperlinkcolor">
+      <p:nvGrpSpPr>
+        <p:cNvPr id="1" name="Shape 1"/>
+        <p:cNvGrpSpPr/>
+        <p:nvPr/>
+      </p:nvGrpSpPr>
+      <p:grpSpPr>
+        <a:xfrm>
+          <a:off x="0" y="0"/>
+          <a:ext cx="0" cy="0"/>
+          <a:chOff x="0" y="0"/>
+          <a:chExt cx="0" cy="0"/>
+        </a:xfrm>
+      </p:grpSpPr>
+      <p:sp>
+        <p:nvSpPr>
+          <p:cNvPr id="10" name="label"/>
+          <p:cNvSpPr/>
+          <p:nvPr/>
+        </p:nvSpPr>
+        <p:spPr>
+          <a:xfrm>
+            <a:off x="812800" y="812800"/>
+            <a:ext cx="10566400" cy="238760"/>
+          </a:xfrm>
+          <a:prstGeom prst="rect">
+            <a:avLst/>
+          </a:prstGeom>
+          <a:noFill/>
+          <a:ln>
+            <a:noFill/>
+          </a:ln>
+        </p:spPr>
+        <p:txBody>
+          <a:bodyPr anchorCtr="0" anchor="t" bIns="0" lIns="0" spcFirstLastPara="1" rIns="0" wrap="square" tIns="0">
+            <a:noAutofit/>
+          </a:bodyPr>
+          <a:lstStyle/>
+          <a:p>
+            <a:pPr indent="0" lvl="0" marL="0" marR="0" rtl="0" algn="l">
+              <a:lnSpc>
+                <a:spcPct val="140000"/>
+              </a:lnSpc>
+              <a:spcBef>
+                <a:spcPts val="0"/>
+              </a:spcBef>
+              <a:spcAft>
+                <a:spcPts val="0"/>
+              </a:spcAft>
+              <a:buNone/>
+            </a:pPr>
+            <a:r>
+              <a:rPr b="1" i="0" lang="en-US" sz="1200" u="none" cap="none" strike="noStrike">
+                <a:solidFill>
+                  <a:srgbClr val="B5532B"/>
+                </a:solidFill>
+                <a:latin typeface="DM Sans"/>
+                <a:ea typeface="DM Sans"/>
+                <a:cs typeface="DM Sans"/>
+                <a:sym typeface="DM Sans"/>
+              </a:rPr>
+              <a:t>ANALYSE · Q2 ANSWER KEY</a:t>
+            </a:r>
+          </a:p>
+        </p:txBody>
+      </p:sp>
+      <p:sp>
+        <p:nvSpPr>
+          <p:cNvPr id="11" name="title"/>
+          <p:cNvSpPr/>
+          <p:nvPr/>
+        </p:nvSpPr>
+        <p:spPr>
+          <a:xfrm>
+            <a:off x="812800" y="1280158"/>
+            <a:ext cx="10566400" cy="528320"/>
+          </a:xfrm>
+          <a:prstGeom prst="rect">
+            <a:avLst/>
+          </a:prstGeom>
+          <a:noFill/>
+          <a:ln>
+            <a:noFill/>
+          </a:ln>
+        </p:spPr>
+        <p:txBody>
+          <a:bodyPr anchorCtr="0" anchor="t" bIns="0" lIns="0" spcFirstLastPara="1" rIns="0" wrap="square" tIns="0">
+            <a:noAutofit/>
+          </a:bodyPr>
+          <a:lstStyle/>
+          <a:p>
+            <a:pPr indent="0" lvl="0" marL="0" marR="0" rtl="0" algn="l">
+              <a:lnSpc>
+                <a:spcPct val="110000"/>
+              </a:lnSpc>
+              <a:spcBef>
+                <a:spcPts val="0"/>
+              </a:spcBef>
+              <a:spcAft>
+                <a:spcPts val="0"/>
+              </a:spcAft>
+              <a:buNone/>
+            </a:pPr>
+            <a:r>
+              <a:rPr b="0" i="0" lang="en-US" sz="3000" u="none" cap="none" strike="noStrike">
+                <a:solidFill>
+                  <a:srgbClr val="1E3A2F"/>
+                </a:solidFill>
+                <a:latin typeface="Fraunces"/>
+                <a:ea typeface="Fraunces"/>
+                <a:cs typeface="Fraunces"/>
+                <a:sym typeface="Fraunces"/>
+              </a:rPr>
+              <a:t>Why did our best posts break out? Facilitator findings</a:t>
+            </a:r>
+          </a:p>
+        </p:txBody>
+      </p:sp>
+      <p:cxnSp>
+        <p:nvCxnSpPr>
+          <p:cNvPr id="99" name="line"/>
+          <p:cNvCxnSpPr/>
+          <p:nvPr/>
+        </p:nvCxnSpPr>
+        <p:spPr>
+          <a:xfrm>
+            <a:off x="812800" y="2043435"/>
+            <a:ext cx="10566400" cy="0"/>
+          </a:xfrm>
+          <a:prstGeom prst="straightConnector1">
+            <a:avLst/>
+          </a:prstGeom>
+          <a:noFill/>
+          <a:ln cap="flat" cmpd="sng" w="12700">
+            <a:solidFill>
+              <a:srgbClr val="D9CDB6"/>
+            </a:solidFill>
+            <a:prstDash val="solid"/>
+          </a:ln>
+        </p:spPr>
+      </p:cxnSp>
+      <p:sp>
+        <p:nvSpPr>
+          <p:cNvPr id="13" name="findings"/>
+          <p:cNvSpPr/>
+          <p:nvPr/>
+        </p:nvSpPr>
+        <p:spPr>
+          <a:xfrm>
+            <a:off x="812800" y="2151385"/>
+            <a:ext cx="6551168" cy="4506615"/>
+          </a:xfrm>
+          <a:prstGeom prst="rect">
+            <a:avLst/>
+          </a:prstGeom>
+          <a:noFill/>
+          <a:ln>
+            <a:noFill/>
+          </a:ln>
+        </p:spPr>
+        <p:txBody>
+          <a:bodyPr anchorCtr="0" anchor="t" bIns="0" lIns="0" spcFirstLastPara="1" rIns="0" wrap="square" tIns="0">
+            <a:noAutofit/>
+          </a:bodyPr>
+          <a:lstStyle/>
+          <a:p>
+            <a:pPr indent="0" lvl="0" marL="0" marR="0" rtl="0" algn="l">
+              <a:lnSpc>
+                <a:spcPct val="135000"/>
+              </a:lnSpc>
+              <a:spcBef>
+                <a:spcPts val="100"/>
+              </a:spcBef>
+              <a:spcAft>
+                <a:spcPts val="0"/>
+              </a:spcAft>
+              <a:buNone/>
+            </a:pPr>
+            <a:r>
+              <a:rPr b="0" i="0" lang="en-US" sz="1250" u="none" cap="none" strike="noStrike">
+                <a:solidFill>
+                  <a:srgbClr val="1E3A2F"/>
+                </a:solidFill>
+                <a:latin typeface="DM Sans"/>
+                <a:ea typeface="DM Sans"/>
+                <a:cs typeface="DM Sans"/>
+                <a:sym typeface="DM Sans"/>
+              </a:rPr>
+              <a:t>•  performance_flag is relative to format median reach (~2x = breakout, ~0.6x = underperformer).</a:t>
+            </a:r>
+          </a:p>
+          <a:p>
+            <a:pPr indent="0" lvl="0" marL="0" marR="0" rtl="0" algn="l">
+              <a:lnSpc>
+                <a:spcPct val="135000"/>
+              </a:lnSpc>
+              <a:spcBef>
+                <a:spcPts val="100"/>
+              </a:spcBef>
+              <a:spcAft>
+                <a:spcPts val="0"/>
+              </a:spcAft>
+              <a:buNone/>
+            </a:pPr>
+            <a:r>
+              <a:rPr b="0" i="0" lang="en-US" sz="1250" u="none" cap="none" strike="noStrike">
+                <a:solidFill>
+                  <a:srgbClr val="1E3A2F"/>
+                </a:solidFill>
+                <a:latin typeface="DM Sans"/>
+                <a:ea typeface="DM Sans"/>
+                <a:cs typeface="DM Sans"/>
+                <a:sym typeface="DM Sans"/>
+              </a:rPr>
+              <a:t>•  Breakouts (3): "bottle journey" Reel Tue 08:00 76K; "1 tonne recycled PET" carousel Fri 20:00 10.6K; river clean-up image Wed 20:00 4.1K.</a:t>
+            </a:r>
+          </a:p>
+          <a:p>
+            <a:pPr indent="0" lvl="0" marL="0" marR="0" rtl="0" algn="l">
+              <a:lnSpc>
+                <a:spcPct val="135000"/>
+              </a:lnSpc>
+              <a:spcBef>
+                <a:spcPts val="100"/>
+              </a:spcBef>
+              <a:spcAft>
+                <a:spcPts val="0"/>
+              </a:spcAft>
+              <a:buNone/>
+            </a:pPr>
+            <a:r>
+              <a:rPr b="0" i="0" lang="en-US" sz="1250" u="none" cap="none" strike="noStrike">
+                <a:solidFill>
+                  <a:srgbClr val="1E3A2F"/>
+                </a:solidFill>
+                <a:latin typeface="DM Sans"/>
+                <a:ea typeface="DM Sans"/>
+                <a:cs typeface="DM Sans"/>
+                <a:sym typeface="DM Sans"/>
+              </a:rPr>
+              <a:t>•  Underperformers (2): Pak Asep story Reel Sat 09:00 4.4K; "fair-trade payment" carousel Wed 20:00 2.4K.</a:t>
+            </a:r>
+          </a:p>
+          <a:p>
+            <a:pPr indent="0" lvl="0" marL="0" marR="0" rtl="0" algn="l">
+              <a:lnSpc>
+                <a:spcPct val="135000"/>
+              </a:lnSpc>
+              <a:spcBef>
+                <a:spcPts val="100"/>
+              </a:spcBef>
+              <a:spcAft>
+                <a:spcPts val="0"/>
+              </a:spcAft>
+              <a:buNone/>
+            </a:pPr>
+            <a:r>
+              <a:rPr b="0" i="0" lang="en-US" sz="1250" u="none" cap="none" strike="noStrike">
+                <a:solidFill>
+                  <a:srgbClr val="1E3A2F"/>
+                </a:solidFill>
+                <a:latin typeface="DM Sans"/>
+                <a:ea typeface="DM Sans"/>
+                <a:cs typeface="DM Sans"/>
+                <a:sym typeface="DM Sans"/>
+              </a:rPr>
+              <a:t>•  Possible pattern: explainers + concrete numbers + community action outperformed personal stories. Only 5 posts — hypothesis only.</a:t>
+            </a:r>
+          </a:p>
+          <a:p>
+            <a:pPr indent="0" lvl="0" marL="0" marR="0" rtl="0" algn="l">
+              <a:lnSpc>
+                <a:spcPct val="135000"/>
+              </a:lnSpc>
+              <a:spcBef>
+                <a:spcPts val="100"/>
+              </a:spcBef>
+              <a:spcAft>
+                <a:spcPts val="0"/>
+              </a:spcAft>
+              <a:buNone/>
+            </a:pPr>
+            <a:r>
+              <a:rPr b="0" i="0" lang="en-US" sz="1250" u="none" cap="none" strike="noStrike">
+                <a:solidFill>
+                  <a:srgbClr val="1E3A2F"/>
+                </a:solidFill>
+                <a:latin typeface="DM Sans"/>
+                <a:ea typeface="DM Sans"/>
+                <a:cs typeface="DM Sans"/>
+                <a:sym typeface="DM Sans"/>
+              </a:rPr>
+              <a:t>•  Hashtag count: 2 for 28 of 30 posts — cannot be tested.</a:t>
+            </a:r>
+          </a:p>
+          <a:p>
+            <a:pPr indent="0" lvl="0" marL="0" marR="0" rtl="0" algn="l">
+              <a:lnSpc>
+                <a:spcPct val="135000"/>
+              </a:lnSpc>
+              <a:spcBef>
+                <a:spcPts val="100"/>
+              </a:spcBef>
+              <a:spcAft>
+                <a:spcPts val="0"/>
+              </a:spcAft>
+              <a:buNone/>
+            </a:pPr>
+            <a:r>
+              <a:rPr b="0" i="0" lang="en-US" sz="1250" u="none" cap="none" strike="noStrike">
+                <a:solidFill>
+                  <a:srgbClr val="1E3A2F"/>
+                </a:solidFill>
+                <a:latin typeface="DM Sans"/>
+                <a:ea typeface="DM Sans"/>
+                <a:cs typeface="DM Sans"/>
+                <a:sym typeface="DM Sans"/>
+              </a:rPr>
+              <a:t>•  Caption length: ~0 correlation with engagement, ~0.23 with reach — barely useful.</a:t>
+            </a:r>
+          </a:p>
+        </p:txBody>
+      </p:sp>
+      <p:sp>
+        <p:nvSpPr>
+          <p:cNvPr id="20" name="tpbg"/>
+          <p:cNvSpPr/>
+          <p:nvPr/>
+        </p:nvSpPr>
+        <p:spPr>
+          <a:xfrm>
+            <a:off x="7563968" y="2151385"/>
+            <a:ext cx="3815232" cy="4506615"/>
+          </a:xfrm>
+          <a:prstGeom prst="rect">
+            <a:avLst/>
+          </a:prstGeom>
+          <a:solidFill>
+            <a:srgbClr val="1E3A2F"/>
+          </a:solidFill>
+          <a:ln>
+            <a:noFill/>
+          </a:ln>
+        </p:spPr>
+        <p:txBody>
+          <a:bodyPr/>
+          <a:lstStyle/>
+          <a:p/>
+        </p:txBody>
+      </p:sp>
+      <p:sp>
+        <p:nvSpPr>
+          <p:cNvPr id="21" name="tp"/>
+          <p:cNvSpPr/>
+          <p:nvPr/>
+        </p:nvSpPr>
+        <p:spPr>
+          <a:xfrm>
+            <a:off x="7673968" y="2261385"/>
+            <a:ext cx="3595232" cy="4286615"/>
+          </a:xfrm>
+          <a:prstGeom prst="rect">
+            <a:avLst/>
+          </a:prstGeom>
+          <a:noFill/>
+          <a:ln>
+            <a:noFill/>
+          </a:ln>
+        </p:spPr>
+        <p:txBody>
+          <a:bodyPr anchorCtr="0" anchor="t" bIns="0" lIns="0" spcFirstLastPara="1" rIns="0" wrap="square" tIns="0">
+            <a:noAutofit/>
+          </a:bodyPr>
+          <a:lstStyle/>
+          <a:p>
+            <a:pPr indent="0" lvl="0" marL="0" marR="0" rtl="0" algn="l">
+              <a:lnSpc>
+                <a:spcPct val="140000"/>
+              </a:lnSpc>
+              <a:spcBef>
+                <a:spcPts val="0"/>
+              </a:spcBef>
+              <a:spcAft>
+                <a:spcPts val="0"/>
+              </a:spcAft>
+              <a:buNone/>
+            </a:pPr>
+            <a:r>
+              <a:rPr b="1" i="0" lang="en-US" sz="1100" u="none" cap="none" strike="noStrike">
+                <a:solidFill>
+                  <a:srgbClr val="FBF3E8"/>
+                </a:solidFill>
+                <a:latin typeface="DM Sans"/>
+                <a:ea typeface="DM Sans"/>
+                <a:cs typeface="DM Sans"/>
+                <a:sym typeface="DM Sans"/>
+              </a:rPr>
+              <a:t>Teaching point</a:t>
+            </a:r>
+          </a:p>
+          <a:p/>
+          <a:p>
+            <a:pPr indent="0" lvl="0" marL="0" marR="0" rtl="0" algn="l">
+              <a:lnSpc>
+                <a:spcPct val="138000"/>
+              </a:lnSpc>
+              <a:spcBef>
+                <a:spcPts val="0"/>
+              </a:spcBef>
+              <a:spcAft>
+                <a:spcPts val="0"/>
+              </a:spcAft>
+              <a:buNone/>
+            </a:pPr>
+            <a:r>
+              <a:rPr b="0" i="0" lang="en-US" sz="1250" u="none" cap="none" strike="noStrike">
+                <a:solidFill>
+                  <a:srgbClr val="FBF3E8"/>
+                </a:solidFill>
+                <a:latin typeface="DM Sans"/>
+                <a:ea typeface="DM Sans"/>
+                <a:cs typeface="DM Sans"/>
+                <a:sym typeface="DM Sans"/>
+              </a:rPr>
+              <a:t>Good analysis tells you what it cannot conclude. "Hashtags don't vary — can't test" is more honest than "hashtags don't matter".</a:t>
+            </a:r>
+          </a:p>
+        </p:txBody>
+      </p:sp>
+    </p:spTree>
+  </p:cSld>
+  <p:clrMapOvr>
+    <a:masterClrMapping/>
+  </p:clrMapOvr>
+</p:sld>
+</file>
+
+<file path=ppt/slides/slide37.xml><?xml version="1.0" encoding="utf-8"?>
+<p:sld xmlns:a="http://schemas.openxmlformats.org/drawingml/2006/main" xmlns:p="http://schemas.openxmlformats.org/presentationml/2006/main" xmlns:r="http://schemas.openxmlformats.org/officeDocument/2006/relationships">
+  <p:cSld>
+    <p:spTree xmlns:mc="http://schemas.openxmlformats.org/markup-compatibility/2006" xmlns:mv="urn:schemas-microsoft-com:mac:vml" xmlns:c="http://schemas.openxmlformats.org/drawingml/2006/chart" xmlns:dgm="http://schemas.openxmlformats.org/drawingml/2006/diagram" xmlns:o="urn:schemas-microsoft-com:office:office" xmlns:v="urn:schemas-microsoft-com:vml" xmlns:pvml="urn:schemas-microsoft-com:office:powerpoint" xmlns:com="http://schemas.openxmlformats.org/drawingml/2006/compatibility" xmlns:p14="http://schemas.microsoft.com/office/powerpoint/2010/main" xmlns:p15="http://schemas.microsoft.com/office/powerpoint/2012/main" xmlns:ahyp="http://schemas.microsoft.com/office/drawing/2018/hyperlinkcolor">
+      <p:nvGrpSpPr>
+        <p:cNvPr id="1" name="Shape 1"/>
+        <p:cNvGrpSpPr/>
+        <p:nvPr/>
+      </p:nvGrpSpPr>
+      <p:grpSpPr>
+        <a:xfrm>
+          <a:off x="0" y="0"/>
+          <a:ext cx="0" cy="0"/>
+          <a:chOff x="0" y="0"/>
+          <a:chExt cx="0" cy="0"/>
+        </a:xfrm>
+      </p:grpSpPr>
+      <p:sp>
+        <p:nvSpPr>
+          <p:cNvPr id="10" name="label"/>
+          <p:cNvSpPr/>
+          <p:nvPr/>
+        </p:nvSpPr>
+        <p:spPr>
+          <a:xfrm>
+            <a:off x="812800" y="812800"/>
+            <a:ext cx="10566400" cy="238760"/>
+          </a:xfrm>
+          <a:prstGeom prst="rect">
+            <a:avLst/>
+          </a:prstGeom>
+          <a:noFill/>
+          <a:ln>
+            <a:noFill/>
+          </a:ln>
+        </p:spPr>
+        <p:txBody>
+          <a:bodyPr anchorCtr="0" anchor="t" bIns="0" lIns="0" spcFirstLastPara="1" rIns="0" wrap="square" tIns="0">
+            <a:noAutofit/>
+          </a:bodyPr>
+          <a:lstStyle/>
+          <a:p>
+            <a:pPr indent="0" lvl="0" marL="0" marR="0" rtl="0" algn="l">
+              <a:lnSpc>
+                <a:spcPct val="140000"/>
+              </a:lnSpc>
+              <a:spcBef>
+                <a:spcPts val="0"/>
+              </a:spcBef>
+              <a:spcAft>
+                <a:spcPts val="0"/>
+              </a:spcAft>
+              <a:buNone/>
+            </a:pPr>
+            <a:r>
+              <a:rPr b="1" i="0" lang="en-US" sz="1200" u="none" cap="none" strike="noStrike">
+                <a:solidFill>
+                  <a:srgbClr val="B5532B"/>
+                </a:solidFill>
+                <a:latin typeface="DM Sans"/>
+                <a:ea typeface="DM Sans"/>
+                <a:cs typeface="DM Sans"/>
+                <a:sym typeface="DM Sans"/>
+              </a:rPr>
+              <a:t>ANALYSE · QUESTION 3 OF 5</a:t>
+            </a:r>
+          </a:p>
+        </p:txBody>
+      </p:sp>
+      <p:sp>
+        <p:nvSpPr>
+          <p:cNvPr id="11" name="title"/>
+          <p:cNvSpPr/>
+          <p:nvPr/>
+        </p:nvSpPr>
+        <p:spPr>
+          <a:xfrm>
+            <a:off x="812800" y="1280158"/>
+            <a:ext cx="10566400" cy="528320"/>
+          </a:xfrm>
+          <a:prstGeom prst="rect">
+            <a:avLst/>
+          </a:prstGeom>
+          <a:noFill/>
+          <a:ln>
+            <a:noFill/>
+          </a:ln>
+        </p:spPr>
+        <p:txBody>
+          <a:bodyPr anchorCtr="0" anchor="t" bIns="0" lIns="0" spcFirstLastPara="1" rIns="0" wrap="square" tIns="0">
+            <a:noAutofit/>
+          </a:bodyPr>
+          <a:lstStyle/>
+          <a:p>
+            <a:pPr indent="0" lvl="0" marL="0" marR="0" rtl="0" algn="l">
+              <a:lnSpc>
+                <a:spcPct val="110000"/>
+              </a:lnSpc>
+              <a:spcBef>
+                <a:spcPts val="0"/>
+              </a:spcBef>
+              <a:spcAft>
+                <a:spcPts val="0"/>
+              </a:spcAft>
+              <a:buNone/>
+            </a:pPr>
+            <a:r>
+              <a:rPr b="0" i="0" lang="en-US" sz="3000" u="none" cap="none" strike="noStrike">
+                <a:solidFill>
+                  <a:srgbClr val="1E3A2F"/>
+                </a:solidFill>
+                <a:latin typeface="Fraunces"/>
+                <a:ea typeface="Fraunces"/>
+                <a:cs typeface="Fraunces"/>
+                <a:sym typeface="Fraunces"/>
+              </a:rPr>
+              <a:t>When should we post?</a:t>
+            </a:r>
+          </a:p>
+        </p:txBody>
+      </p:sp>
+      <p:cxnSp>
+        <p:nvCxnSpPr>
+          <p:cNvPr id="99" name="line"/>
+          <p:cNvCxnSpPr/>
+          <p:nvPr/>
+        </p:nvCxnSpPr>
+        <p:spPr>
+          <a:xfrm>
+            <a:off x="812800" y="2043435"/>
+            <a:ext cx="10566400" cy="0"/>
+          </a:xfrm>
+          <a:prstGeom prst="straightConnector1">
+            <a:avLst/>
+          </a:prstGeom>
+          <a:noFill/>
+          <a:ln cap="flat" cmpd="sng" w="12700">
+            <a:solidFill>
+              <a:srgbClr val="D9CDB6"/>
+            </a:solidFill>
+            <a:prstDash val="solid"/>
+          </a:ln>
+        </p:spPr>
+      </p:cxnSp>
+      <p:sp>
+        <p:nvSpPr>
+          <p:cNvPr id="20" name="promptbg"/>
+          <p:cNvSpPr/>
+          <p:nvPr/>
+        </p:nvSpPr>
+        <p:spPr>
+          <a:xfrm>
+            <a:off x="812800" y="2170000"/>
+            <a:ext cx="6022847" cy="4508000"/>
+          </a:xfrm>
+          <a:prstGeom prst="rect">
+            <a:avLst/>
+          </a:prstGeom>
+          <a:solidFill>
+            <a:srgbClr val="1E3A2F"/>
+          </a:solidFill>
+          <a:ln>
+            <a:noFill/>
+          </a:ln>
+        </p:spPr>
+        <p:txBody>
+          <a:bodyPr/>
+          <a:lstStyle/>
+          <a:p/>
+        </p:txBody>
+      </p:sp>
+      <p:sp>
+        <p:nvSpPr>
+          <p:cNvPr id="21" name="prompt"/>
+          <p:cNvSpPr/>
+          <p:nvPr/>
+        </p:nvSpPr>
+        <p:spPr>
+          <a:xfrm>
+            <a:off x="922800" y="2280000"/>
+            <a:ext cx="5802847" cy="4288000"/>
+          </a:xfrm>
+          <a:prstGeom prst="rect">
+            <a:avLst/>
+          </a:prstGeom>
+          <a:noFill/>
+          <a:ln>
+            <a:noFill/>
+          </a:ln>
+        </p:spPr>
+        <p:txBody>
+          <a:bodyPr anchorCtr="0" anchor="t" bIns="0" lIns="0" spcFirstLastPara="1" rIns="0" wrap="square" tIns="0">
+            <a:noAutofit/>
+          </a:bodyPr>
+          <a:lstStyle/>
+          <a:p>
+            <a:pPr indent="0" lvl="0" marL="0" marR="0" rtl="0" algn="l">
+              <a:lnSpc>
+                <a:spcPct val="128000"/>
+              </a:lnSpc>
+              <a:spcBef>
+                <a:spcPts val="0"/>
+              </a:spcBef>
+              <a:spcAft>
+                <a:spcPts val="0"/>
+              </a:spcAft>
+              <a:buNone/>
+            </a:pPr>
+            <a:r>
+              <a:rPr b="0" i="0" lang="en-US" sz="1050" u="none" cap="none" strike="noStrike">
+                <a:solidFill>
+                  <a:srgbClr val="FBF3E8"/>
+                </a:solidFill>
+                <a:latin typeface="DM Sans"/>
+                <a:ea typeface="DM Sans"/>
+                <a:cs typeface="DM Sans"/>
+                <a:sym typeface="DM Sans"/>
+              </a:rPr>
+              <a:t>Using the attached post data, analyse whether posting time affects results.</a:t>
+            </a:r>
+          </a:p>
+          <a:p>
+            <a:pPr indent="0" lvl="0" marL="0" marR="0" rtl="0" algn="l">
+              <a:lnSpc>
+                <a:spcPct val="128000"/>
+              </a:lnSpc>
+              <a:spcBef>
+                <a:spcPts val="0"/>
+              </a:spcBef>
+              <a:spcAft>
+                <a:spcPts val="0"/>
+              </a:spcAft>
+              <a:buNone/>
+            </a:pPr>
+            <a:r>
+              <a:rPr b="0" i="0" lang="en-US" sz="1050" u="none" cap="none" strike="noStrike">
+                <a:solidFill>
+                  <a:srgbClr val="FBF3E8"/>
+                </a:solidFill>
+                <a:latin typeface="DM Sans"/>
+                <a:ea typeface="DM Sans"/>
+                <a:cs typeface="DM Sans"/>
+                <a:sym typeface="DM Sans"/>
+              </a:rPr>
+              <a:t>Use post_weekday_wib, post_hour_wib, reach and engagement_rate_by_reach_pct.</a:t>
+            </a:r>
+          </a:p>
+          <a:p/>
+          <a:p>
+            <a:pPr indent="0" lvl="0" marL="0" marR="0" rtl="0" algn="l">
+              <a:lnSpc>
+                <a:spcPct val="128000"/>
+              </a:lnSpc>
+              <a:spcBef>
+                <a:spcPts val="0"/>
+              </a:spcBef>
+              <a:spcAft>
+                <a:spcPts val="0"/>
+              </a:spcAft>
+              <a:buNone/>
+            </a:pPr>
+            <a:r>
+              <a:rPr b="0" i="0" lang="en-US" sz="1050" u="none" cap="none" strike="noStrike">
+                <a:solidFill>
+                  <a:srgbClr val="FBF3E8"/>
+                </a:solidFill>
+                <a:latin typeface="DM Sans"/>
+                <a:ea typeface="DM Sans"/>
+                <a:cs typeface="DM Sans"/>
+                <a:sym typeface="DM Sans"/>
+              </a:rPr>
+              <a:t>1. Show the average and median reach and engagement rate by hour and by weekday,</a:t>
+            </a:r>
+          </a:p>
+          <a:p>
+            <a:pPr indent="0" lvl="0" marL="0" marR="0" rtl="0" algn="l">
+              <a:lnSpc>
+                <a:spcPct val="128000"/>
+              </a:lnSpc>
+              <a:spcBef>
+                <a:spcPts val="0"/>
+              </a:spcBef>
+              <a:spcAft>
+                <a:spcPts val="0"/>
+              </a:spcAft>
+              <a:buNone/>
+            </a:pPr>
+            <a:r>
+              <a:rPr b="0" i="0" lang="en-US" sz="1050" u="none" cap="none" strike="noStrike">
+                <a:solidFill>
+                  <a:srgbClr val="FBF3E8"/>
+                </a:solidFill>
+                <a:latin typeface="DM Sans"/>
+                <a:ea typeface="DM Sans"/>
+                <a:cs typeface="DM Sans"/>
+                <a:sym typeface="DM Sans"/>
+              </a:rPr>
+              <a:t>   with the number of posts in each group.</a:t>
+            </a:r>
+          </a:p>
+          <a:p>
+            <a:pPr indent="0" lvl="0" marL="0" marR="0" rtl="0" algn="l">
+              <a:lnSpc>
+                <a:spcPct val="128000"/>
+              </a:lnSpc>
+              <a:spcBef>
+                <a:spcPts val="0"/>
+              </a:spcBef>
+              <a:spcAft>
+                <a:spcPts val="0"/>
+              </a:spcAft>
+              <a:buNone/>
+            </a:pPr>
+            <a:r>
+              <a:rPr b="0" i="0" lang="en-US" sz="1050" u="none" cap="none" strike="noStrike">
+                <a:solidFill>
+                  <a:srgbClr val="FBF3E8"/>
+                </a:solidFill>
+                <a:latin typeface="DM Sans"/>
+                <a:ea typeface="DM Sans"/>
+                <a:cs typeface="DM Sans"/>
+                <a:sym typeface="DM Sans"/>
+              </a:rPr>
+              <a:t>2. Check whether posting time is tangled up with format — for example which</a:t>
+            </a:r>
+          </a:p>
+          <a:p>
+            <a:pPr indent="0" lvl="0" marL="0" marR="0" rtl="0" algn="l">
+              <a:lnSpc>
+                <a:spcPct val="128000"/>
+              </a:lnSpc>
+              <a:spcBef>
+                <a:spcPts val="0"/>
+              </a:spcBef>
+              <a:spcAft>
+                <a:spcPts val="0"/>
+              </a:spcAft>
+              <a:buNone/>
+            </a:pPr>
+            <a:r>
+              <a:rPr b="0" i="0" lang="en-US" sz="1050" u="none" cap="none" strike="noStrike">
+                <a:solidFill>
+                  <a:srgbClr val="FBF3E8"/>
+                </a:solidFill>
+                <a:latin typeface="DM Sans"/>
+                <a:ea typeface="DM Sans"/>
+                <a:cs typeface="DM Sans"/>
+                <a:sym typeface="DM Sans"/>
+              </a:rPr>
+              <a:t>   formats we tend to post at which hours. Repeat the comparison within a single format.</a:t>
+            </a:r>
+          </a:p>
+          <a:p>
+            <a:pPr indent="0" lvl="0" marL="0" marR="0" rtl="0" algn="l">
+              <a:lnSpc>
+                <a:spcPct val="128000"/>
+              </a:lnSpc>
+              <a:spcBef>
+                <a:spcPts val="0"/>
+              </a:spcBef>
+              <a:spcAft>
+                <a:spcPts val="0"/>
+              </a:spcAft>
+              <a:buNone/>
+            </a:pPr>
+            <a:r>
+              <a:rPr b="0" i="0" lang="en-US" sz="1050" u="none" cap="none" strike="noStrike">
+                <a:solidFill>
+                  <a:srgbClr val="FBF3E8"/>
+                </a:solidFill>
+                <a:latin typeface="DM Sans"/>
+                <a:ea typeface="DM Sans"/>
+                <a:cs typeface="DM Sans"/>
+                <a:sym typeface="DM Sans"/>
+              </a:rPr>
+              <a:t>3. Compare mean and median and identify any single post that creates an apparent</a:t>
+            </a:r>
+          </a:p>
+          <a:p>
+            <a:pPr indent="0" lvl="0" marL="0" marR="0" rtl="0" algn="l">
+              <a:lnSpc>
+                <a:spcPct val="128000"/>
+              </a:lnSpc>
+              <a:spcBef>
+                <a:spcPts val="0"/>
+              </a:spcBef>
+              <a:spcAft>
+                <a:spcPts val="0"/>
+              </a:spcAft>
+              <a:buNone/>
+            </a:pPr>
+            <a:r>
+              <a:rPr b="0" i="0" lang="en-US" sz="1050" u="none" cap="none" strike="noStrike">
+                <a:solidFill>
+                  <a:srgbClr val="FBF3E8"/>
+                </a:solidFill>
+                <a:latin typeface="DM Sans"/>
+                <a:ea typeface="DM Sans"/>
+                <a:cs typeface="DM Sans"/>
+                <a:sym typeface="DM Sans"/>
+              </a:rPr>
+              <a:t>   "best time".</a:t>
+            </a:r>
+          </a:p>
+          <a:p>
+            <a:pPr indent="0" lvl="0" marL="0" marR="0" rtl="0" algn="l">
+              <a:lnSpc>
+                <a:spcPct val="128000"/>
+              </a:lnSpc>
+              <a:spcBef>
+                <a:spcPts val="0"/>
+              </a:spcBef>
+              <a:spcAft>
+                <a:spcPts val="0"/>
+              </a:spcAft>
+              <a:buNone/>
+            </a:pPr>
+            <a:r>
+              <a:rPr b="0" i="0" lang="en-US" sz="1050" u="none" cap="none" strike="noStrike">
+                <a:solidFill>
+                  <a:srgbClr val="FBF3E8"/>
+                </a:solidFill>
+                <a:latin typeface="DM Sans"/>
+                <a:ea typeface="DM Sans"/>
+                <a:cs typeface="DM Sans"/>
+                <a:sym typeface="DM Sans"/>
+              </a:rPr>
+              <a:t>4. Tell me what we can and cannot conclude. Then design a simple 4-week posting</a:t>
+            </a:r>
+          </a:p>
+          <a:p>
+            <a:pPr indent="0" lvl="0" marL="0" marR="0" rtl="0" algn="l">
+              <a:lnSpc>
+                <a:spcPct val="128000"/>
+              </a:lnSpc>
+              <a:spcBef>
+                <a:spcPts val="0"/>
+              </a:spcBef>
+              <a:spcAft>
+                <a:spcPts val="0"/>
+              </a:spcAft>
+              <a:buNone/>
+            </a:pPr>
+            <a:r>
+              <a:rPr b="0" i="0" lang="en-US" sz="1050" u="none" cap="none" strike="noStrike">
+                <a:solidFill>
+                  <a:srgbClr val="FBF3E8"/>
+                </a:solidFill>
+                <a:latin typeface="DM Sans"/>
+                <a:ea typeface="DM Sans"/>
+                <a:cs typeface="DM Sans"/>
+                <a:sym typeface="DM Sans"/>
+              </a:rPr>
+              <a:t>   experiment: what to vary, what to keep fixed, how many posts, and how we will</a:t>
+            </a:r>
+          </a:p>
+          <a:p>
+            <a:pPr indent="0" lvl="0" marL="0" marR="0" rtl="0" algn="l">
+              <a:lnSpc>
+                <a:spcPct val="128000"/>
+              </a:lnSpc>
+              <a:spcBef>
+                <a:spcPts val="0"/>
+              </a:spcBef>
+              <a:spcAft>
+                <a:spcPts val="0"/>
+              </a:spcAft>
+              <a:buNone/>
+            </a:pPr>
+            <a:r>
+              <a:rPr b="0" i="0" lang="en-US" sz="1050" u="none" cap="none" strike="noStrike">
+                <a:solidFill>
+                  <a:srgbClr val="FBF3E8"/>
+                </a:solidFill>
+                <a:latin typeface="DM Sans"/>
+                <a:ea typeface="DM Sans"/>
+                <a:cs typeface="DM Sans"/>
+                <a:sym typeface="DM Sans"/>
+              </a:rPr>
+              <a:t>   decide the result.</a:t>
+            </a:r>
+          </a:p>
+        </p:txBody>
+      </p:sp>
+      <p:sp>
+        <p:nvSpPr>
+          <p:cNvPr id="22" name="steps"/>
+          <p:cNvSpPr/>
+          <p:nvPr/>
+        </p:nvSpPr>
+        <p:spPr>
+          <a:xfrm>
+            <a:off x="7035647" y="2170000"/>
+            <a:ext cx="4343553" cy="4508000"/>
+          </a:xfrm>
+          <a:prstGeom prst="rect">
+            <a:avLst/>
+          </a:prstGeom>
+          <a:noFill/>
+          <a:ln>
+            <a:noFill/>
+          </a:ln>
+        </p:spPr>
+        <p:txBody>
+          <a:bodyPr anchorCtr="0" anchor="t" bIns="0" lIns="0" spcFirstLastPara="1" rIns="0" wrap="square" tIns="0">
+            <a:noAutofit/>
+          </a:bodyPr>
+          <a:lstStyle/>
+          <a:p>
+            <a:pPr indent="0" lvl="0" marL="0" marR="0" rtl="0" algn="l">
+              <a:lnSpc>
+                <a:spcPct val="100000"/>
+              </a:lnSpc>
+              <a:spcBef>
+                <a:spcPts val="200"/>
+              </a:spcBef>
+              <a:spcAft>
+                <a:spcPts val="0"/>
+              </a:spcAft>
+              <a:buNone/>
+            </a:pPr>
+            <a:r>
+              <a:rPr b="0" i="0" lang="en-US" sz="2000" u="none" cap="none" strike="noStrike">
+                <a:solidFill>
+                  <a:srgbClr val="B5532B"/>
+                </a:solidFill>
+                <a:latin typeface="Fraunces"/>
+                <a:ea typeface="Fraunces"/>
+                <a:cs typeface="Fraunces"/>
+                <a:sym typeface="Fraunces"/>
+              </a:rPr>
+              <a:t>1</a:t>
+            </a:r>
+          </a:p>
+          <a:p>
+            <a:pPr indent="0" lvl="0" marL="0" marR="0" rtl="0" algn="l">
+              <a:lnSpc>
+                <a:spcPct val="128000"/>
+              </a:lnSpc>
+              <a:spcBef>
+                <a:spcPts val="0"/>
+              </a:spcBef>
+              <a:spcAft>
+                <a:spcPts val="0"/>
+              </a:spcAft>
+              <a:buNone/>
+            </a:pPr>
+            <a:r>
+              <a:rPr b="0" i="0" lang="en-US" sz="1300" u="none" cap="none" strike="noStrike">
+                <a:solidFill>
+                  <a:srgbClr val="1E3A2F"/>
+                </a:solidFill>
+                <a:latin typeface="DM Sans"/>
+                <a:ea typeface="DM Sans"/>
+                <a:cs typeface="DM Sans"/>
+                <a:sym typeface="DM Sans"/>
+              </a:rPr>
+              <a:t>Attach loopcycle_post_kpis.csv.</a:t>
+            </a:r>
+          </a:p>
+          <a:p>
+            <a:pPr indent="0" lvl="0" marL="0" marR="0" rtl="0" algn="l">
+              <a:lnSpc>
+                <a:spcPct val="100000"/>
+              </a:lnSpc>
+              <a:spcBef>
+                <a:spcPts val="200"/>
+              </a:spcBef>
+              <a:spcAft>
+                <a:spcPts val="0"/>
+              </a:spcAft>
+              <a:buNone/>
+            </a:pPr>
+            <a:r>
+              <a:rPr b="0" i="0" lang="en-US" sz="2000" u="none" cap="none" strike="noStrike">
+                <a:solidFill>
+                  <a:srgbClr val="B5532B"/>
+                </a:solidFill>
+                <a:latin typeface="Fraunces"/>
+                <a:ea typeface="Fraunces"/>
+                <a:cs typeface="Fraunces"/>
+                <a:sym typeface="Fraunces"/>
+              </a:rPr>
+              <a:t>2</a:t>
+            </a:r>
+          </a:p>
+          <a:p>
+            <a:pPr indent="0" lvl="0" marL="0" marR="0" rtl="0" algn="l">
+              <a:lnSpc>
+                <a:spcPct val="128000"/>
+              </a:lnSpc>
+              <a:spcBef>
+                <a:spcPts val="0"/>
+              </a:spcBef>
+              <a:spcAft>
+                <a:spcPts val="0"/>
+              </a:spcAft>
+              <a:buNone/>
+            </a:pPr>
+            <a:r>
+              <a:rPr b="0" i="0" lang="en-US" sz="1300" u="none" cap="none" strike="noStrike">
+                <a:solidFill>
+                  <a:srgbClr val="1E3A2F"/>
+                </a:solidFill>
+                <a:latin typeface="DM Sans"/>
+                <a:ea typeface="DM Sans"/>
+                <a:cs typeface="DM Sans"/>
+                <a:sym typeface="DM Sans"/>
+              </a:rPr>
+              <a:t>Paste the prompt.</a:t>
+            </a:r>
+          </a:p>
+          <a:p>
+            <a:pPr indent="0" lvl="0" marL="0" marR="0" rtl="0" algn="l">
+              <a:lnSpc>
+                <a:spcPct val="100000"/>
+              </a:lnSpc>
+              <a:spcBef>
+                <a:spcPts val="200"/>
+              </a:spcBef>
+              <a:spcAft>
+                <a:spcPts val="0"/>
+              </a:spcAft>
+              <a:buNone/>
+            </a:pPr>
+            <a:r>
+              <a:rPr b="0" i="0" lang="en-US" sz="2000" u="none" cap="none" strike="noStrike">
+                <a:solidFill>
+                  <a:srgbClr val="B5532B"/>
+                </a:solidFill>
+                <a:latin typeface="Fraunces"/>
+                <a:ea typeface="Fraunces"/>
+                <a:cs typeface="Fraunces"/>
+                <a:sym typeface="Fraunces"/>
+              </a:rPr>
+              <a:t>3</a:t>
+            </a:r>
+          </a:p>
+          <a:p>
+            <a:pPr indent="0" lvl="0" marL="0" marR="0" rtl="0" algn="l">
+              <a:lnSpc>
+                <a:spcPct val="128000"/>
+              </a:lnSpc>
+              <a:spcBef>
+                <a:spcPts val="0"/>
+              </a:spcBef>
+              <a:spcAft>
+                <a:spcPts val="0"/>
+              </a:spcAft>
+              <a:buNone/>
+            </a:pPr>
+            <a:r>
+              <a:rPr b="0" i="0" lang="en-US" sz="1300" u="none" cap="none" strike="noStrike">
+                <a:solidFill>
+                  <a:srgbClr val="1E3A2F"/>
+                </a:solidFill>
+                <a:latin typeface="DM Sans"/>
+                <a:ea typeface="DM Sans"/>
+                <a:cs typeface="DM Sans"/>
+                <a:sym typeface="DM Sans"/>
+              </a:rPr>
+              <a:t>Follow-up: "Draw a chart of median reach by weekday and format, and mark groups with fewer than 3 posts."</a:t>
+            </a:r>
+          </a:p>
+          <a:p>
+            <a:pPr indent="0" lvl="0" marL="0" marR="0" rtl="0" algn="l">
+              <a:lnSpc>
+                <a:spcPct val="100000"/>
+              </a:lnSpc>
+              <a:spcBef>
+                <a:spcPts val="200"/>
+              </a:spcBef>
+              <a:spcAft>
+                <a:spcPts val="0"/>
+              </a:spcAft>
+              <a:buNone/>
+            </a:pPr>
+            <a:r>
+              <a:rPr b="0" i="0" lang="en-US" sz="2000" u="none" cap="none" strike="noStrike">
+                <a:solidFill>
+                  <a:srgbClr val="B5532B"/>
+                </a:solidFill>
+                <a:latin typeface="Fraunces"/>
+                <a:ea typeface="Fraunces"/>
+                <a:cs typeface="Fraunces"/>
+                <a:sym typeface="Fraunces"/>
+              </a:rPr>
+              <a:t>4</a:t>
+            </a:r>
+          </a:p>
+          <a:p>
+            <a:pPr indent="0" lvl="0" marL="0" marR="0" rtl="0" algn="l">
+              <a:lnSpc>
+                <a:spcPct val="128000"/>
+              </a:lnSpc>
+              <a:spcBef>
+                <a:spcPts val="0"/>
+              </a:spcBef>
+              <a:spcAft>
+                <a:spcPts val="0"/>
+              </a:spcAft>
+              <a:buNone/>
+            </a:pPr>
+            <a:r>
+              <a:rPr b="0" i="0" lang="en-US" sz="1300" u="none" cap="none" strike="noStrike">
+                <a:solidFill>
+                  <a:srgbClr val="1E3A2F"/>
+                </a:solidFill>
+                <a:latin typeface="DM Sans"/>
+                <a:ea typeface="DM Sans"/>
+                <a:cs typeface="DM Sans"/>
+                <a:sym typeface="DM Sans"/>
+              </a:rPr>
+              <a:t>Ask: what would a fair experiment look like?</a:t>
+            </a:r>
+          </a:p>
+        </p:txBody>
+      </p:sp>
+    </p:spTree>
+  </p:cSld>
+  <p:clrMapOvr>
+    <a:masterClrMapping/>
+  </p:clrMapOvr>
+</p:sld>
+</file>
+
+<file path=ppt/slides/slide38.xml><?xml version="1.0" encoding="utf-8"?>
+<p:sld xmlns:a="http://schemas.openxmlformats.org/drawingml/2006/main" xmlns:p="http://schemas.openxmlformats.org/presentationml/2006/main" xmlns:r="http://schemas.openxmlformats.org/officeDocument/2006/relationships">
+  <p:cSld>
+    <p:spTree xmlns:mc="http://schemas.openxmlformats.org/markup-compatibility/2006" xmlns:mv="urn:schemas-microsoft-com:mac:vml" xmlns:c="http://schemas.openxmlformats.org/drawingml/2006/chart" xmlns:dgm="http://schemas.openxmlformats.org/drawingml/2006/diagram" xmlns:o="urn:schemas-microsoft-com:office:office" xmlns:v="urn:schemas-microsoft-com:vml" xmlns:pvml="urn:schemas-microsoft-com:office:powerpoint" xmlns:com="http://schemas.openxmlformats.org/drawingml/2006/compatibility" xmlns:p14="http://schemas.microsoft.com/office/powerpoint/2010/main" xmlns:p15="http://schemas.microsoft.com/office/powerpoint/2012/main" xmlns:ahyp="http://schemas.microsoft.com/office/drawing/2018/hyperlinkcolor">
+      <p:nvGrpSpPr>
+        <p:cNvPr id="1" name="Shape 1"/>
+        <p:cNvGrpSpPr/>
+        <p:nvPr/>
+      </p:nvGrpSpPr>
+      <p:grpSpPr>
+        <a:xfrm>
+          <a:off x="0" y="0"/>
+          <a:ext cx="0" cy="0"/>
+          <a:chOff x="0" y="0"/>
+          <a:chExt cx="0" cy="0"/>
+        </a:xfrm>
+      </p:grpSpPr>
+      <p:sp>
+        <p:nvSpPr>
+          <p:cNvPr id="10" name="label"/>
+          <p:cNvSpPr/>
+          <p:nvPr/>
+        </p:nvSpPr>
+        <p:spPr>
+          <a:xfrm>
+            <a:off x="812800" y="812800"/>
+            <a:ext cx="10566400" cy="238760"/>
+          </a:xfrm>
+          <a:prstGeom prst="rect">
+            <a:avLst/>
+          </a:prstGeom>
+          <a:noFill/>
+          <a:ln>
+            <a:noFill/>
+          </a:ln>
+        </p:spPr>
+        <p:txBody>
+          <a:bodyPr anchorCtr="0" anchor="t" bIns="0" lIns="0" spcFirstLastPara="1" rIns="0" wrap="square" tIns="0">
+            <a:noAutofit/>
+          </a:bodyPr>
+          <a:lstStyle/>
+          <a:p>
+            <a:pPr indent="0" lvl="0" marL="0" marR="0" rtl="0" algn="l">
+              <a:lnSpc>
+                <a:spcPct val="140000"/>
+              </a:lnSpc>
+              <a:spcBef>
+                <a:spcPts val="0"/>
+              </a:spcBef>
+              <a:spcAft>
+                <a:spcPts val="0"/>
+              </a:spcAft>
+              <a:buNone/>
+            </a:pPr>
+            <a:r>
+              <a:rPr b="1" i="0" lang="en-US" sz="1200" u="none" cap="none" strike="noStrike">
+                <a:solidFill>
+                  <a:srgbClr val="B5532B"/>
+                </a:solidFill>
+                <a:latin typeface="DM Sans"/>
+                <a:ea typeface="DM Sans"/>
+                <a:cs typeface="DM Sans"/>
+                <a:sym typeface="DM Sans"/>
+              </a:rPr>
+              <a:t>ANALYSE · Q3 ANSWER KEY</a:t>
+            </a:r>
+          </a:p>
+        </p:txBody>
+      </p:sp>
+      <p:sp>
+        <p:nvSpPr>
+          <p:cNvPr id="11" name="title"/>
+          <p:cNvSpPr/>
+          <p:nvPr/>
+        </p:nvSpPr>
+        <p:spPr>
+          <a:xfrm>
+            <a:off x="812800" y="1280158"/>
+            <a:ext cx="10566400" cy="528320"/>
+          </a:xfrm>
+          <a:prstGeom prst="rect">
+            <a:avLst/>
+          </a:prstGeom>
+          <a:noFill/>
+          <a:ln>
+            <a:noFill/>
+          </a:ln>
+        </p:spPr>
+        <p:txBody>
+          <a:bodyPr anchorCtr="0" anchor="t" bIns="0" lIns="0" spcFirstLastPara="1" rIns="0" wrap="square" tIns="0">
+            <a:noAutofit/>
+          </a:bodyPr>
+          <a:lstStyle/>
+          <a:p>
+            <a:pPr indent="0" lvl="0" marL="0" marR="0" rtl="0" algn="l">
+              <a:lnSpc>
+                <a:spcPct val="110000"/>
+              </a:lnSpc>
+              <a:spcBef>
+                <a:spcPts val="0"/>
+              </a:spcBef>
+              <a:spcAft>
+                <a:spcPts val="0"/>
+              </a:spcAft>
+              <a:buNone/>
+            </a:pPr>
+            <a:r>
+              <a:rPr b="0" i="0" lang="en-US" sz="3000" u="none" cap="none" strike="noStrike">
+                <a:solidFill>
+                  <a:srgbClr val="1E3A2F"/>
+                </a:solidFill>
+                <a:latin typeface="Fraunces"/>
+                <a:ea typeface="Fraunces"/>
+                <a:cs typeface="Fraunces"/>
+                <a:sym typeface="Fraunces"/>
+              </a:rPr>
+              <a:t>When should we post? Facilitator findings</a:t>
+            </a:r>
+          </a:p>
+        </p:txBody>
+      </p:sp>
+      <p:cxnSp>
+        <p:nvCxnSpPr>
+          <p:cNvPr id="99" name="line"/>
+          <p:cNvCxnSpPr/>
+          <p:nvPr/>
+        </p:nvCxnSpPr>
+        <p:spPr>
+          <a:xfrm>
+            <a:off x="812800" y="2043435"/>
+            <a:ext cx="10566400" cy="0"/>
+          </a:xfrm>
+          <a:prstGeom prst="straightConnector1">
+            <a:avLst/>
+          </a:prstGeom>
+          <a:noFill/>
+          <a:ln cap="flat" cmpd="sng" w="12700">
+            <a:solidFill>
+              <a:srgbClr val="D9CDB6"/>
+            </a:solidFill>
+            <a:prstDash val="solid"/>
+          </a:ln>
+        </p:spPr>
+      </p:cxnSp>
+      <p:sp>
+        <p:nvSpPr>
+          <p:cNvPr id="13" name="findings"/>
+          <p:cNvSpPr/>
+          <p:nvPr/>
+        </p:nvSpPr>
+        <p:spPr>
+          <a:xfrm>
+            <a:off x="812800" y="2151385"/>
+            <a:ext cx="6551168" cy="4506615"/>
+          </a:xfrm>
+          <a:prstGeom prst="rect">
+            <a:avLst/>
+          </a:prstGeom>
+          <a:noFill/>
+          <a:ln>
+            <a:noFill/>
+          </a:ln>
+        </p:spPr>
+        <p:txBody>
+          <a:bodyPr anchorCtr="0" anchor="t" bIns="0" lIns="0" spcFirstLastPara="1" rIns="0" wrap="square" tIns="0">
+            <a:noAutofit/>
+          </a:bodyPr>
+          <a:lstStyle/>
+          <a:p>
+            <a:pPr indent="0" lvl="0" marL="0" marR="0" rtl="0" algn="l">
+              <a:lnSpc>
+                <a:spcPct val="135000"/>
+              </a:lnSpc>
+              <a:spcBef>
+                <a:spcPts val="100"/>
+              </a:spcBef>
+              <a:spcAft>
+                <a:spcPts val="0"/>
+              </a:spcAft>
+              <a:buNone/>
+            </a:pPr>
+            <a:r>
+              <a:rPr b="0" i="0" lang="en-US" sz="1250" u="none" cap="none" strike="noStrike">
+                <a:solidFill>
+                  <a:srgbClr val="1E3A2F"/>
+                </a:solidFill>
+                <a:latin typeface="DM Sans"/>
+                <a:ea typeface="DM Sans"/>
+                <a:cs typeface="DM Sans"/>
+                <a:sym typeface="DM Sans"/>
+              </a:rPr>
+              <a:t>•  08:00 WIB looks best (avg reach ~20.8K vs 3-5K for lunchtime/evening). Tuesday looks best (23.6K avg).</a:t>
+            </a:r>
+          </a:p>
+          <a:p>
+            <a:pPr indent="0" lvl="0" marL="0" marR="0" rtl="0" algn="l">
+              <a:lnSpc>
+                <a:spcPct val="135000"/>
+              </a:lnSpc>
+              <a:spcBef>
+                <a:spcPts val="100"/>
+              </a:spcBef>
+              <a:spcAft>
+                <a:spcPts val="0"/>
+              </a:spcAft>
+              <a:buNone/>
+            </a:pPr>
+            <a:r>
+              <a:rPr b="0" i="0" lang="en-US" sz="1250" u="none" cap="none" strike="noStrike">
+                <a:solidFill>
+                  <a:srgbClr val="1E3A2F"/>
+                </a:solidFill>
+                <a:latin typeface="DM Sans"/>
+                <a:ea typeface="DM Sans"/>
+                <a:cs typeface="DM Sans"/>
+                <a:sym typeface="DM Sans"/>
+              </a:rPr>
+              <a:t>•  THE CATCH: nearly all Reels were at 08:00-09:00; most carousels/images at 12:00-20:00. Time is confounded with format.</a:t>
+            </a:r>
+          </a:p>
+          <a:p>
+            <a:pPr indent="0" lvl="0" marL="0" marR="0" rtl="0" algn="l">
+              <a:lnSpc>
+                <a:spcPct val="135000"/>
+              </a:lnSpc>
+              <a:spcBef>
+                <a:spcPts val="100"/>
+              </a:spcBef>
+              <a:spcAft>
+                <a:spcPts val="0"/>
+              </a:spcAft>
+              <a:buNone/>
+            </a:pPr>
+            <a:r>
+              <a:rPr b="0" i="0" lang="en-US" sz="1250" u="none" cap="none" strike="noStrike">
+                <a:solidFill>
+                  <a:srgbClr val="1E3A2F"/>
+                </a:solidFill>
+                <a:latin typeface="DM Sans"/>
+                <a:ea typeface="DM Sans"/>
+                <a:cs typeface="DM Sans"/>
+                <a:sym typeface="DM Sans"/>
+              </a:rPr>
+              <a:t>•  One viral Reel inflates the 08:00 and Tuesday averages.</a:t>
+            </a:r>
+          </a:p>
+          <a:p>
+            <a:pPr indent="0" lvl="0" marL="0" marR="0" rtl="0" algn="l">
+              <a:lnSpc>
+                <a:spcPct val="135000"/>
+              </a:lnSpc>
+              <a:spcBef>
+                <a:spcPts val="100"/>
+              </a:spcBef>
+              <a:spcAft>
+                <a:spcPts val="0"/>
+              </a:spcAft>
+              <a:buNone/>
+            </a:pPr>
+            <a:r>
+              <a:rPr b="0" i="0" lang="en-US" sz="1250" u="none" cap="none" strike="noStrike">
+                <a:solidFill>
+                  <a:srgbClr val="1E3A2F"/>
+                </a:solidFill>
+                <a:latin typeface="DM Sans"/>
+                <a:ea typeface="DM Sans"/>
+                <a:cs typeface="DM Sans"/>
+                <a:sym typeface="DM Sans"/>
+              </a:rPr>
+              <a:t>•  Among Reels only: median reach 10.4K at 08:00 vs 10.8K at 09:00 — no real difference.</a:t>
+            </a:r>
+          </a:p>
+          <a:p>
+            <a:pPr indent="0" lvl="0" marL="0" marR="0" rtl="0" algn="l">
+              <a:lnSpc>
+                <a:spcPct val="135000"/>
+              </a:lnSpc>
+              <a:spcBef>
+                <a:spcPts val="100"/>
+              </a:spcBef>
+              <a:spcAft>
+                <a:spcPts val="0"/>
+              </a:spcAft>
+              <a:buNone/>
+            </a:pPr>
+            <a:r>
+              <a:rPr b="0" i="0" lang="en-US" sz="1250" u="none" cap="none" strike="noStrike">
+                <a:solidFill>
+                  <a:srgbClr val="1E3A2F"/>
+                </a:solidFill>
+                <a:latin typeface="DM Sans"/>
+                <a:ea typeface="DM Sans"/>
+                <a:cs typeface="DM Sans"/>
+                <a:sym typeface="DM Sans"/>
+              </a:rPr>
+              <a:t>•  Engagement rate barely changes by weekday (~7.7% to 8.8%).</a:t>
+            </a:r>
+          </a:p>
+          <a:p>
+            <a:pPr indent="0" lvl="0" marL="0" marR="0" rtl="0" algn="l">
+              <a:lnSpc>
+                <a:spcPct val="135000"/>
+              </a:lnSpc>
+              <a:spcBef>
+                <a:spcPts val="100"/>
+              </a:spcBef>
+              <a:spcAft>
+                <a:spcPts val="0"/>
+              </a:spcAft>
+              <a:buNone/>
+            </a:pPr>
+            <a:r>
+              <a:rPr b="0" i="0" lang="en-US" sz="1250" u="none" cap="none" strike="noStrike">
+                <a:solidFill>
+                  <a:srgbClr val="1E3A2F"/>
+                </a:solidFill>
+                <a:latin typeface="DM Sans"/>
+                <a:ea typeface="DM Sans"/>
+                <a:cs typeface="DM Sans"/>
+                <a:sym typeface="DM Sans"/>
+              </a:rPr>
+              <a:t>•  modeled_peak_view_hour_wib mostly mirrors posting hour — says little about when audience is active.</a:t>
+            </a:r>
+          </a:p>
+          <a:p>
+            <a:pPr indent="0" lvl="0" marL="0" marR="0" rtl="0" algn="l">
+              <a:lnSpc>
+                <a:spcPct val="135000"/>
+              </a:lnSpc>
+              <a:spcBef>
+                <a:spcPts val="100"/>
+              </a:spcBef>
+              <a:spcAft>
+                <a:spcPts val="0"/>
+              </a:spcAft>
+              <a:buNone/>
+            </a:pPr>
+            <a:r>
+              <a:rPr b="0" i="0" lang="en-US" sz="1250" u="none" cap="none" strike="noStrike">
+                <a:solidFill>
+                  <a:srgbClr val="1E3A2F"/>
+                </a:solidFill>
+                <a:latin typeface="DM Sans"/>
+                <a:ea typeface="DM Sans"/>
+                <a:cs typeface="DM Sans"/>
+                <a:sym typeface="DM Sans"/>
+              </a:rPr>
+              <a:t>•  A good experiment posts the SAME FORMAT at two different times over several weeks.</a:t>
+            </a:r>
+          </a:p>
+        </p:txBody>
+      </p:sp>
+      <p:sp>
+        <p:nvSpPr>
+          <p:cNvPr id="20" name="tpbg"/>
+          <p:cNvSpPr/>
+          <p:nvPr/>
+        </p:nvSpPr>
+        <p:spPr>
+          <a:xfrm>
+            <a:off x="7563968" y="2151385"/>
+            <a:ext cx="3815232" cy="4506615"/>
+          </a:xfrm>
+          <a:prstGeom prst="rect">
+            <a:avLst/>
+          </a:prstGeom>
+          <a:solidFill>
+            <a:srgbClr val="1E3A2F"/>
+          </a:solidFill>
+          <a:ln>
+            <a:noFill/>
+          </a:ln>
+        </p:spPr>
+        <p:txBody>
+          <a:bodyPr/>
+          <a:lstStyle/>
+          <a:p/>
+        </p:txBody>
+      </p:sp>
+      <p:sp>
+        <p:nvSpPr>
+          <p:cNvPr id="21" name="tp"/>
+          <p:cNvSpPr/>
+          <p:nvPr/>
+        </p:nvSpPr>
+        <p:spPr>
+          <a:xfrm>
+            <a:off x="7673968" y="2261385"/>
+            <a:ext cx="3595232" cy="4286615"/>
+          </a:xfrm>
+          <a:prstGeom prst="rect">
+            <a:avLst/>
+          </a:prstGeom>
+          <a:noFill/>
+          <a:ln>
+            <a:noFill/>
+          </a:ln>
+        </p:spPr>
+        <p:txBody>
+          <a:bodyPr anchorCtr="0" anchor="t" bIns="0" lIns="0" spcFirstLastPara="1" rIns="0" wrap="square" tIns="0">
+            <a:noAutofit/>
+          </a:bodyPr>
+          <a:lstStyle/>
+          <a:p>
+            <a:pPr indent="0" lvl="0" marL="0" marR="0" rtl="0" algn="l">
+              <a:lnSpc>
+                <a:spcPct val="140000"/>
+              </a:lnSpc>
+              <a:spcBef>
+                <a:spcPts val="0"/>
+              </a:spcBef>
+              <a:spcAft>
+                <a:spcPts val="0"/>
+              </a:spcAft>
+              <a:buNone/>
+            </a:pPr>
+            <a:r>
+              <a:rPr b="1" i="0" lang="en-US" sz="1100" u="none" cap="none" strike="noStrike">
+                <a:solidFill>
+                  <a:srgbClr val="FBF3E8"/>
+                </a:solidFill>
+                <a:latin typeface="DM Sans"/>
+                <a:ea typeface="DM Sans"/>
+                <a:cs typeface="DM Sans"/>
+                <a:sym typeface="DM Sans"/>
+              </a:rPr>
+              <a:t>Teaching point</a:t>
+            </a:r>
+          </a:p>
+          <a:p/>
+          <a:p>
+            <a:pPr indent="0" lvl="0" marL="0" marR="0" rtl="0" algn="l">
+              <a:lnSpc>
+                <a:spcPct val="138000"/>
+              </a:lnSpc>
+              <a:spcBef>
+                <a:spcPts val="0"/>
+              </a:spcBef>
+              <a:spcAft>
+                <a:spcPts val="0"/>
+              </a:spcAft>
+              <a:buNone/>
+            </a:pPr>
+            <a:r>
+              <a:rPr b="0" i="0" lang="en-US" sz="1250" u="none" cap="none" strike="noStrike">
+                <a:solidFill>
+                  <a:srgbClr val="FBF3E8"/>
+                </a:solidFill>
+                <a:latin typeface="DM Sans"/>
+                <a:ea typeface="DM Sans"/>
+                <a:cs typeface="DM Sans"/>
+                <a:sym typeface="DM Sans"/>
+              </a:rPr>
+              <a:t>Confounding variables. Always ask the AI to check whether time mixes with format before claiming a "best time".</a:t>
+            </a:r>
+          </a:p>
+        </p:txBody>
+      </p:sp>
+    </p:spTree>
+  </p:cSld>
+  <p:clrMapOvr>
+    <a:masterClrMapping/>
+  </p:clrMapOvr>
+</p:sld>
+</file>
+
+<file path=ppt/slides/slide39.xml><?xml version="1.0" encoding="utf-8"?>
+<p:sld xmlns:a="http://schemas.openxmlformats.org/drawingml/2006/main" xmlns:p="http://schemas.openxmlformats.org/presentationml/2006/main" xmlns:r="http://schemas.openxmlformats.org/officeDocument/2006/relationships">
+  <p:cSld>
+    <p:spTree xmlns:mc="http://schemas.openxmlformats.org/markup-compatibility/2006" xmlns:mv="urn:schemas-microsoft-com:mac:vml" xmlns:c="http://schemas.openxmlformats.org/drawingml/2006/chart" xmlns:dgm="http://schemas.openxmlformats.org/drawingml/2006/diagram" xmlns:o="urn:schemas-microsoft-com:office:office" xmlns:v="urn:schemas-microsoft-com:vml" xmlns:pvml="urn:schemas-microsoft-com:office:powerpoint" xmlns:com="http://schemas.openxmlformats.org/drawingml/2006/compatibility" xmlns:p14="http://schemas.microsoft.com/office/powerpoint/2010/main" xmlns:p15="http://schemas.microsoft.com/office/powerpoint/2012/main" xmlns:ahyp="http://schemas.microsoft.com/office/drawing/2018/hyperlinkcolor">
+      <p:nvGrpSpPr>
+        <p:cNvPr id="1" name="Shape 1"/>
+        <p:cNvGrpSpPr/>
+        <p:nvPr/>
+      </p:nvGrpSpPr>
+      <p:grpSpPr>
+        <a:xfrm>
+          <a:off x="0" y="0"/>
+          <a:ext cx="0" cy="0"/>
+          <a:chOff x="0" y="0"/>
+          <a:chExt cx="0" cy="0"/>
+        </a:xfrm>
+      </p:grpSpPr>
+      <p:sp>
+        <p:nvSpPr>
+          <p:cNvPr id="10" name="label"/>
+          <p:cNvSpPr/>
+          <p:nvPr/>
+        </p:nvSpPr>
+        <p:spPr>
+          <a:xfrm>
+            <a:off x="812800" y="812800"/>
+            <a:ext cx="10566400" cy="238760"/>
+          </a:xfrm>
+          <a:prstGeom prst="rect">
+            <a:avLst/>
+          </a:prstGeom>
+          <a:noFill/>
+          <a:ln>
+            <a:noFill/>
+          </a:ln>
+        </p:spPr>
+        <p:txBody>
+          <a:bodyPr anchorCtr="0" anchor="t" bIns="0" lIns="0" spcFirstLastPara="1" rIns="0" wrap="square" tIns="0">
+            <a:noAutofit/>
+          </a:bodyPr>
+          <a:lstStyle/>
+          <a:p>
+            <a:pPr indent="0" lvl="0" marL="0" marR="0" rtl="0" algn="l">
+              <a:lnSpc>
+                <a:spcPct val="140000"/>
+              </a:lnSpc>
+              <a:spcBef>
+                <a:spcPts val="0"/>
+              </a:spcBef>
+              <a:spcAft>
+                <a:spcPts val="0"/>
+              </a:spcAft>
+              <a:buNone/>
+            </a:pPr>
+            <a:r>
+              <a:rPr b="1" i="0" lang="en-US" sz="1200" u="none" cap="none" strike="noStrike">
+                <a:solidFill>
+                  <a:srgbClr val="B5532B"/>
+                </a:solidFill>
+                <a:latin typeface="DM Sans"/>
+                <a:ea typeface="DM Sans"/>
+                <a:cs typeface="DM Sans"/>
+                <a:sym typeface="DM Sans"/>
+              </a:rPr>
+              <a:t>ANALYSE · QUESTION 4 OF 5</a:t>
+            </a:r>
+          </a:p>
+        </p:txBody>
+      </p:sp>
+      <p:sp>
+        <p:nvSpPr>
+          <p:cNvPr id="11" name="title"/>
+          <p:cNvSpPr/>
+          <p:nvPr/>
+        </p:nvSpPr>
+        <p:spPr>
+          <a:xfrm>
+            <a:off x="812800" y="1280158"/>
+            <a:ext cx="10566400" cy="528320"/>
+          </a:xfrm>
+          <a:prstGeom prst="rect">
+            <a:avLst/>
+          </a:prstGeom>
+          <a:noFill/>
+          <a:ln>
+            <a:noFill/>
+          </a:ln>
+        </p:spPr>
+        <p:txBody>
+          <a:bodyPr anchorCtr="0" anchor="t" bIns="0" lIns="0" spcFirstLastPara="1" rIns="0" wrap="square" tIns="0">
+            <a:noAutofit/>
+          </a:bodyPr>
+          <a:lstStyle/>
+          <a:p>
+            <a:pPr indent="0" lvl="0" marL="0" marR="0" rtl="0" algn="l">
+              <a:lnSpc>
+                <a:spcPct val="110000"/>
+              </a:lnSpc>
+              <a:spcBef>
+                <a:spcPts val="0"/>
+              </a:spcBef>
+              <a:spcAft>
+                <a:spcPts val="0"/>
+              </a:spcAft>
+              <a:buNone/>
+            </a:pPr>
+            <a:r>
+              <a:rPr b="0" i="0" lang="en-US" sz="3000" u="none" cap="none" strike="noStrike">
+                <a:solidFill>
+                  <a:srgbClr val="1E3A2F"/>
+                </a:solidFill>
+                <a:latin typeface="Fraunces"/>
+                <a:ea typeface="Fraunces"/>
+                <a:cs typeface="Fraunces"/>
+                <a:sym typeface="Fraunces"/>
+              </a:rPr>
+              <a:t>Who are we reaching, and are they the right people?</a:t>
+            </a:r>
+          </a:p>
+        </p:txBody>
+      </p:sp>
+      <p:cxnSp>
+        <p:nvCxnSpPr>
+          <p:cNvPr id="99" name="line"/>
+          <p:cNvCxnSpPr/>
+          <p:nvPr/>
+        </p:nvCxnSpPr>
+        <p:spPr>
+          <a:xfrm>
+            <a:off x="812800" y="2043435"/>
+            <a:ext cx="10566400" cy="0"/>
+          </a:xfrm>
+          <a:prstGeom prst="straightConnector1">
+            <a:avLst/>
+          </a:prstGeom>
+          <a:noFill/>
+          <a:ln cap="flat" cmpd="sng" w="12700">
+            <a:solidFill>
+              <a:srgbClr val="D9CDB6"/>
+            </a:solidFill>
+            <a:prstDash val="solid"/>
+          </a:ln>
+        </p:spPr>
+      </p:cxnSp>
+      <p:sp>
+        <p:nvSpPr>
+          <p:cNvPr id="20" name="promptbg"/>
+          <p:cNvSpPr/>
+          <p:nvPr/>
+        </p:nvSpPr>
+        <p:spPr>
+          <a:xfrm>
+            <a:off x="812800" y="2170000"/>
+            <a:ext cx="6022847" cy="4508000"/>
+          </a:xfrm>
+          <a:prstGeom prst="rect">
+            <a:avLst/>
+          </a:prstGeom>
+          <a:solidFill>
+            <a:srgbClr val="1E3A2F"/>
+          </a:solidFill>
+          <a:ln>
+            <a:noFill/>
+          </a:ln>
+        </p:spPr>
+        <p:txBody>
+          <a:bodyPr/>
+          <a:lstStyle/>
+          <a:p/>
+        </p:txBody>
+      </p:sp>
+      <p:sp>
+        <p:nvSpPr>
+          <p:cNvPr id="21" name="prompt"/>
+          <p:cNvSpPr/>
+          <p:nvPr/>
+        </p:nvSpPr>
+        <p:spPr>
+          <a:xfrm>
+            <a:off x="922800" y="2280000"/>
+            <a:ext cx="5802847" cy="4288000"/>
+          </a:xfrm>
+          <a:prstGeom prst="rect">
+            <a:avLst/>
+          </a:prstGeom>
+          <a:noFill/>
+          <a:ln>
+            <a:noFill/>
+          </a:ln>
+        </p:spPr>
+        <p:txBody>
+          <a:bodyPr anchorCtr="0" anchor="t" bIns="0" lIns="0" spcFirstLastPara="1" rIns="0" wrap="square" tIns="0">
+            <a:noAutofit/>
+          </a:bodyPr>
+          <a:lstStyle/>
+          <a:p>
+            <a:pPr indent="0" lvl="0" marL="0" marR="0" rtl="0" algn="l">
+              <a:lnSpc>
+                <a:spcPct val="128000"/>
+              </a:lnSpc>
+              <a:spcBef>
+                <a:spcPts val="0"/>
+              </a:spcBef>
+              <a:spcAft>
+                <a:spcPts val="0"/>
+              </a:spcAft>
+              <a:buNone/>
+            </a:pPr>
+            <a:r>
+              <a:rPr b="0" i="0" lang="en-US" sz="1050" u="none" cap="none" strike="noStrike">
+                <a:solidFill>
+                  <a:srgbClr val="FBF3E8"/>
+                </a:solidFill>
+                <a:latin typeface="DM Sans"/>
+                <a:ea typeface="DM Sans"/>
+                <a:cs typeface="DM Sans"/>
+                <a:sym typeface="DM Sans"/>
+              </a:rPr>
+              <a:t>Using the attached post data. Note: columns starting modeled_ are estimates —</a:t>
+            </a:r>
+          </a:p>
+          <a:p>
+            <a:pPr indent="0" lvl="0" marL="0" marR="0" rtl="0" algn="l">
+              <a:lnSpc>
+                <a:spcPct val="128000"/>
+              </a:lnSpc>
+              <a:spcBef>
+                <a:spcPts val="0"/>
+              </a:spcBef>
+              <a:spcAft>
+                <a:spcPts val="0"/>
+              </a:spcAft>
+              <a:buNone/>
+            </a:pPr>
+            <a:r>
+              <a:rPr b="0" i="0" lang="en-US" sz="1050" u="none" cap="none" strike="noStrike">
+                <a:solidFill>
+                  <a:srgbClr val="FBF3E8"/>
+                </a:solidFill>
+                <a:latin typeface="DM Sans"/>
+                <a:ea typeface="DM Sans"/>
+                <a:cs typeface="DM Sans"/>
+                <a:sym typeface="DM Sans"/>
+              </a:rPr>
+              <a:t>Instagram does not give audience data per post.</a:t>
+            </a:r>
+          </a:p>
+          <a:p/>
+          <a:p>
+            <a:pPr indent="0" lvl="0" marL="0" marR="0" rtl="0" algn="l">
+              <a:lnSpc>
+                <a:spcPct val="128000"/>
+              </a:lnSpc>
+              <a:spcBef>
+                <a:spcPts val="0"/>
+              </a:spcBef>
+              <a:spcAft>
+                <a:spcPts val="0"/>
+              </a:spcAft>
+              <a:buNone/>
+            </a:pPr>
+            <a:r>
+              <a:rPr b="0" i="0" lang="en-US" sz="1050" u="none" cap="none" strike="noStrike">
+                <a:solidFill>
+                  <a:srgbClr val="FBF3E8"/>
+                </a:solidFill>
+                <a:latin typeface="DM Sans"/>
+                <a:ea typeface="DM Sans"/>
+                <a:cs typeface="DM Sans"/>
+                <a:sym typeface="DM Sans"/>
+              </a:rPr>
+              <a:t>Our goals: grow beyond Bandung, reach working adults aged 25-44, attract packaging buyers.</a:t>
+            </a:r>
+          </a:p>
+          <a:p/>
+          <a:p>
+            <a:pPr indent="0" lvl="0" marL="0" marR="0" rtl="0" algn="l">
+              <a:lnSpc>
+                <a:spcPct val="128000"/>
+              </a:lnSpc>
+              <a:spcBef>
+                <a:spcPts val="0"/>
+              </a:spcBef>
+              <a:spcAft>
+                <a:spcPts val="0"/>
+              </a:spcAft>
+              <a:buNone/>
+            </a:pPr>
+            <a:r>
+              <a:rPr b="0" i="0" lang="en-US" sz="1050" u="none" cap="none" strike="noStrike">
+                <a:solidFill>
+                  <a:srgbClr val="FBF3E8"/>
+                </a:solidFill>
+                <a:latin typeface="DM Sans"/>
+                <a:ea typeface="DM Sans"/>
+                <a:cs typeface="DM Sans"/>
+                <a:sym typeface="DM Sans"/>
+              </a:rPr>
+              <a:t>1. Show how much of each format's and pillar's reach is estimated to come from</a:t>
+            </a:r>
+          </a:p>
+          <a:p>
+            <a:pPr indent="0" lvl="0" marL="0" marR="0" rtl="0" algn="l">
+              <a:lnSpc>
+                <a:spcPct val="128000"/>
+              </a:lnSpc>
+              <a:spcBef>
+                <a:spcPts val="0"/>
+              </a:spcBef>
+              <a:spcAft>
+                <a:spcPts val="0"/>
+              </a:spcAft>
+              <a:buNone/>
+            </a:pPr>
+            <a:r>
+              <a:rPr b="0" i="0" lang="en-US" sz="1050" u="none" cap="none" strike="noStrike">
+                <a:solidFill>
+                  <a:srgbClr val="FBF3E8"/>
+                </a:solidFill>
+                <a:latin typeface="DM Sans"/>
+                <a:ea typeface="DM Sans"/>
+                <a:cs typeface="DM Sans"/>
+                <a:sym typeface="DM Sans"/>
+              </a:rPr>
+              <a:t>   followers vs non-followers (modeled_follower_reach_pct).</a:t>
+            </a:r>
+          </a:p>
+          <a:p>
+            <a:pPr indent="0" lvl="0" marL="0" marR="0" rtl="0" algn="l">
+              <a:lnSpc>
+                <a:spcPct val="128000"/>
+              </a:lnSpc>
+              <a:spcBef>
+                <a:spcPts val="0"/>
+              </a:spcBef>
+              <a:spcAft>
+                <a:spcPts val="0"/>
+              </a:spcAft>
+              <a:buNone/>
+            </a:pPr>
+            <a:r>
+              <a:rPr b="0" i="0" lang="en-US" sz="1050" u="none" cap="none" strike="noStrike">
+                <a:solidFill>
+                  <a:srgbClr val="FBF3E8"/>
+                </a:solidFill>
+                <a:latin typeface="DM Sans"/>
+                <a:ea typeface="DM Sans"/>
+                <a:cs typeface="DM Sans"/>
+                <a:sym typeface="DM Sans"/>
+              </a:rPr>
+              <a:t>2. Show estimated audience by content pillar: top age group, female share, top region.</a:t>
+            </a:r>
+          </a:p>
+          <a:p>
+            <a:pPr indent="0" lvl="0" marL="0" marR="0" rtl="0" algn="l">
+              <a:lnSpc>
+                <a:spcPct val="128000"/>
+              </a:lnSpc>
+              <a:spcBef>
+                <a:spcPts val="0"/>
+              </a:spcBef>
+              <a:spcAft>
+                <a:spcPts val="0"/>
+              </a:spcAft>
+              <a:buNone/>
+            </a:pPr>
+            <a:r>
+              <a:rPr b="0" i="0" lang="en-US" sz="1050" u="none" cap="none" strike="noStrike">
+                <a:solidFill>
+                  <a:srgbClr val="FBF3E8"/>
+                </a:solidFill>
+                <a:latin typeface="DM Sans"/>
+                <a:ea typeface="DM Sans"/>
+                <a:cs typeface="DM Sans"/>
+                <a:sym typeface="DM Sans"/>
+              </a:rPr>
+              <a:t>   Which pillars reach a different audience from our usual one?</a:t>
+            </a:r>
+          </a:p>
+          <a:p>
+            <a:pPr indent="0" lvl="0" marL="0" marR="0" rtl="0" algn="l">
+              <a:lnSpc>
+                <a:spcPct val="128000"/>
+              </a:lnSpc>
+              <a:spcBef>
+                <a:spcPts val="0"/>
+              </a:spcBef>
+              <a:spcAft>
+                <a:spcPts val="0"/>
+              </a:spcAft>
+              <a:buNone/>
+            </a:pPr>
+            <a:r>
+              <a:rPr b="0" i="0" lang="en-US" sz="1050" u="none" cap="none" strike="noStrike">
+                <a:solidFill>
+                  <a:srgbClr val="FBF3E8"/>
+                </a:solidFill>
+                <a:latin typeface="DM Sans"/>
+                <a:ea typeface="DM Sans"/>
+                <a:cs typeface="DM Sans"/>
+                <a:sym typeface="DM Sans"/>
+              </a:rPr>
+              <a:t>3. For feed posts only (carousels and images), compare follows_per_1k_reach and</a:t>
+            </a:r>
+          </a:p>
+          <a:p>
+            <a:pPr indent="0" lvl="0" marL="0" marR="0" rtl="0" algn="l">
+              <a:lnSpc>
+                <a:spcPct val="128000"/>
+              </a:lnSpc>
+              <a:spcBef>
+                <a:spcPts val="0"/>
+              </a:spcBef>
+              <a:spcAft>
+                <a:spcPts val="0"/>
+              </a:spcAft>
+              <a:buNone/>
+            </a:pPr>
+            <a:r>
+              <a:rPr b="0" i="0" lang="en-US" sz="1050" u="none" cap="none" strike="noStrike">
+                <a:solidFill>
+                  <a:srgbClr val="FBF3E8"/>
+                </a:solidFill>
+                <a:latin typeface="DM Sans"/>
+                <a:ea typeface="DM Sans"/>
+                <a:cs typeface="DM Sans"/>
+                <a:sym typeface="DM Sans"/>
+              </a:rPr>
+              <a:t>   profile_visit_rate_pct by format and pillar. Reels do not report these —</a:t>
+            </a:r>
+          </a:p>
+          <a:p>
+            <a:pPr indent="0" lvl="0" marL="0" marR="0" rtl="0" algn="l">
+              <a:lnSpc>
+                <a:spcPct val="128000"/>
+              </a:lnSpc>
+              <a:spcBef>
+                <a:spcPts val="0"/>
+              </a:spcBef>
+              <a:spcAft>
+                <a:spcPts val="0"/>
+              </a:spcAft>
+              <a:buNone/>
+            </a:pPr>
+            <a:r>
+              <a:rPr b="0" i="0" lang="en-US" sz="1050" u="none" cap="none" strike="noStrike">
+                <a:solidFill>
+                  <a:srgbClr val="FBF3E8"/>
+                </a:solidFill>
+                <a:latin typeface="DM Sans"/>
+                <a:ea typeface="DM Sans"/>
+                <a:cs typeface="DM Sans"/>
+                <a:sym typeface="DM Sans"/>
+              </a:rPr>
+              <a:t>   say what that limits.</a:t>
+            </a:r>
+          </a:p>
+          <a:p>
+            <a:pPr indent="0" lvl="0" marL="0" marR="0" rtl="0" algn="l">
+              <a:lnSpc>
+                <a:spcPct val="128000"/>
+              </a:lnSpc>
+              <a:spcBef>
+                <a:spcPts val="0"/>
+              </a:spcBef>
+              <a:spcAft>
+                <a:spcPts val="0"/>
+              </a:spcAft>
+              <a:buNone/>
+            </a:pPr>
+            <a:r>
+              <a:rPr b="0" i="0" lang="en-US" sz="1050" u="none" cap="none" strike="noStrike">
+                <a:solidFill>
+                  <a:srgbClr val="FBF3E8"/>
+                </a:solidFill>
+                <a:latin typeface="DM Sans"/>
+                <a:ea typeface="DM Sans"/>
+                <a:cs typeface="DM Sans"/>
+                <a:sym typeface="DM Sans"/>
+              </a:rPr>
+              <a:t>4. Explain what the modeled columns can responsibly be used for,</a:t>
+            </a:r>
+          </a:p>
+          <a:p>
+            <a:pPr indent="0" lvl="0" marL="0" marR="0" rtl="0" algn="l">
+              <a:lnSpc>
+                <a:spcPct val="128000"/>
+              </a:lnSpc>
+              <a:spcBef>
+                <a:spcPts val="0"/>
+              </a:spcBef>
+              <a:spcAft>
+                <a:spcPts val="0"/>
+              </a:spcAft>
+              <a:buNone/>
+            </a:pPr>
+            <a:r>
+              <a:rPr b="0" i="0" lang="en-US" sz="1050" u="none" cap="none" strike="noStrike">
+                <a:solidFill>
+                  <a:srgbClr val="FBF3E8"/>
+                </a:solidFill>
+                <a:latin typeface="DM Sans"/>
+                <a:ea typeface="DM Sans"/>
+                <a:cs typeface="DM Sans"/>
+                <a:sym typeface="DM Sans"/>
+              </a:rPr>
+              <a:t>   and what we would need to measure for real.</a:t>
+            </a:r>
+          </a:p>
+          <a:p>
+            <a:pPr indent="0" lvl="0" marL="0" marR="0" rtl="0" algn="l">
+              <a:lnSpc>
+                <a:spcPct val="128000"/>
+              </a:lnSpc>
+              <a:spcBef>
+                <a:spcPts val="0"/>
+              </a:spcBef>
+              <a:spcAft>
+                <a:spcPts val="0"/>
+              </a:spcAft>
+              <a:buNone/>
+            </a:pPr>
+            <a:r>
+              <a:rPr b="0" i="0" lang="en-US" sz="1050" u="none" cap="none" strike="noStrike">
+                <a:solidFill>
+                  <a:srgbClr val="FBF3E8"/>
+                </a:solidFill>
+                <a:latin typeface="DM Sans"/>
+                <a:ea typeface="DM Sans"/>
+                <a:cs typeface="DM Sans"/>
+                <a:sym typeface="DM Sans"/>
+              </a:rPr>
+              <a:t>5. Give me two audience recommendations and one risk.</a:t>
+            </a:r>
+          </a:p>
+        </p:txBody>
+      </p:sp>
+      <p:sp>
+        <p:nvSpPr>
+          <p:cNvPr id="22" name="steps"/>
+          <p:cNvSpPr/>
+          <p:nvPr/>
+        </p:nvSpPr>
+        <p:spPr>
+          <a:xfrm>
+            <a:off x="7035647" y="2170000"/>
+            <a:ext cx="4343553" cy="4508000"/>
+          </a:xfrm>
+          <a:prstGeom prst="rect">
+            <a:avLst/>
+          </a:prstGeom>
+          <a:noFill/>
+          <a:ln>
+            <a:noFill/>
+          </a:ln>
+        </p:spPr>
+        <p:txBody>
+          <a:bodyPr anchorCtr="0" anchor="t" bIns="0" lIns="0" spcFirstLastPara="1" rIns="0" wrap="square" tIns="0">
+            <a:noAutofit/>
+          </a:bodyPr>
+          <a:lstStyle/>
+          <a:p>
+            <a:pPr indent="0" lvl="0" marL="0" marR="0" rtl="0" algn="l">
+              <a:lnSpc>
+                <a:spcPct val="100000"/>
+              </a:lnSpc>
+              <a:spcBef>
+                <a:spcPts val="200"/>
+              </a:spcBef>
+              <a:spcAft>
+                <a:spcPts val="0"/>
+              </a:spcAft>
+              <a:buNone/>
+            </a:pPr>
+            <a:r>
+              <a:rPr b="0" i="0" lang="en-US" sz="2000" u="none" cap="none" strike="noStrike">
+                <a:solidFill>
+                  <a:srgbClr val="B5532B"/>
+                </a:solidFill>
+                <a:latin typeface="Fraunces"/>
+                <a:ea typeface="Fraunces"/>
+                <a:cs typeface="Fraunces"/>
+                <a:sym typeface="Fraunces"/>
+              </a:rPr>
+              <a:t>1</a:t>
+            </a:r>
+          </a:p>
+          <a:p>
+            <a:pPr indent="0" lvl="0" marL="0" marR="0" rtl="0" algn="l">
+              <a:lnSpc>
+                <a:spcPct val="128000"/>
+              </a:lnSpc>
+              <a:spcBef>
+                <a:spcPts val="0"/>
+              </a:spcBef>
+              <a:spcAft>
+                <a:spcPts val="0"/>
+              </a:spcAft>
+              <a:buNone/>
+            </a:pPr>
+            <a:r>
+              <a:rPr b="0" i="0" lang="en-US" sz="1300" u="none" cap="none" strike="noStrike">
+                <a:solidFill>
+                  <a:srgbClr val="1E3A2F"/>
+                </a:solidFill>
+                <a:latin typeface="DM Sans"/>
+                <a:ea typeface="DM Sans"/>
+                <a:cs typeface="DM Sans"/>
+                <a:sym typeface="DM Sans"/>
+              </a:rPr>
+              <a:t>Attach loopcycle_post_kpis.csv (plus audience CSVs if time allows).</a:t>
+            </a:r>
+          </a:p>
+          <a:p>
+            <a:pPr indent="0" lvl="0" marL="0" marR="0" rtl="0" algn="l">
+              <a:lnSpc>
+                <a:spcPct val="100000"/>
+              </a:lnSpc>
+              <a:spcBef>
+                <a:spcPts val="200"/>
+              </a:spcBef>
+              <a:spcAft>
+                <a:spcPts val="0"/>
+              </a:spcAft>
+              <a:buNone/>
+            </a:pPr>
+            <a:r>
+              <a:rPr b="0" i="0" lang="en-US" sz="2000" u="none" cap="none" strike="noStrike">
+                <a:solidFill>
+                  <a:srgbClr val="B5532B"/>
+                </a:solidFill>
+                <a:latin typeface="Fraunces"/>
+                <a:ea typeface="Fraunces"/>
+                <a:cs typeface="Fraunces"/>
+                <a:sym typeface="Fraunces"/>
+              </a:rPr>
+              <a:t>2</a:t>
+            </a:r>
+          </a:p>
+          <a:p>
+            <a:pPr indent="0" lvl="0" marL="0" marR="0" rtl="0" algn="l">
+              <a:lnSpc>
+                <a:spcPct val="128000"/>
+              </a:lnSpc>
+              <a:spcBef>
+                <a:spcPts val="0"/>
+              </a:spcBef>
+              <a:spcAft>
+                <a:spcPts val="0"/>
+              </a:spcAft>
+              <a:buNone/>
+            </a:pPr>
+            <a:r>
+              <a:rPr b="0" i="0" lang="en-US" sz="1300" u="none" cap="none" strike="noStrike">
+                <a:solidFill>
+                  <a:srgbClr val="1E3A2F"/>
+                </a:solidFill>
+                <a:latin typeface="DM Sans"/>
+                <a:ea typeface="DM Sans"/>
+                <a:cs typeface="DM Sans"/>
+                <a:sym typeface="DM Sans"/>
+              </a:rPr>
+              <a:t>Paste the prompt.</a:t>
+            </a:r>
+          </a:p>
+          <a:p>
+            <a:pPr indent="0" lvl="0" marL="0" marR="0" rtl="0" algn="l">
+              <a:lnSpc>
+                <a:spcPct val="100000"/>
+              </a:lnSpc>
+              <a:spcBef>
+                <a:spcPts val="200"/>
+              </a:spcBef>
+              <a:spcAft>
+                <a:spcPts val="0"/>
+              </a:spcAft>
+              <a:buNone/>
+            </a:pPr>
+            <a:r>
+              <a:rPr b="0" i="0" lang="en-US" sz="2000" u="none" cap="none" strike="noStrike">
+                <a:solidFill>
+                  <a:srgbClr val="B5532B"/>
+                </a:solidFill>
+                <a:latin typeface="Fraunces"/>
+                <a:ea typeface="Fraunces"/>
+                <a:cs typeface="Fraunces"/>
+                <a:sym typeface="Fraunces"/>
+              </a:rPr>
+              <a:t>3</a:t>
+            </a:r>
+          </a:p>
+          <a:p>
+            <a:pPr indent="0" lvl="0" marL="0" marR="0" rtl="0" algn="l">
+              <a:lnSpc>
+                <a:spcPct val="128000"/>
+              </a:lnSpc>
+              <a:spcBef>
+                <a:spcPts val="0"/>
+              </a:spcBef>
+              <a:spcAft>
+                <a:spcPts val="0"/>
+              </a:spcAft>
+              <a:buNone/>
+            </a:pPr>
+            <a:r>
+              <a:rPr b="0" i="0" lang="en-US" sz="1300" u="none" cap="none" strike="noStrike">
+                <a:solidFill>
+                  <a:srgbClr val="1E3A2F"/>
+                </a:solidFill>
+                <a:latin typeface="DM Sans"/>
+                <a:ea typeface="DM Sans"/>
+                <a:cs typeface="DM Sans"/>
+                <a:sym typeface="DM Sans"/>
+              </a:rPr>
+              <a:t>Follow-up: "Turn this into a one-page audience summary my team can use when planning content."</a:t>
+            </a:r>
+          </a:p>
+          <a:p>
+            <a:pPr indent="0" lvl="0" marL="0" marR="0" rtl="0" algn="l">
+              <a:lnSpc>
+                <a:spcPct val="100000"/>
+              </a:lnSpc>
+              <a:spcBef>
+                <a:spcPts val="200"/>
+              </a:spcBef>
+              <a:spcAft>
+                <a:spcPts val="0"/>
+              </a:spcAft>
+              <a:buNone/>
+            </a:pPr>
+            <a:r>
+              <a:rPr b="0" i="0" lang="en-US" sz="2000" u="none" cap="none" strike="noStrike">
+                <a:solidFill>
+                  <a:srgbClr val="B5532B"/>
+                </a:solidFill>
+                <a:latin typeface="Fraunces"/>
+                <a:ea typeface="Fraunces"/>
+                <a:cs typeface="Fraunces"/>
+                <a:sym typeface="Fraunces"/>
+              </a:rPr>
+              <a:t>4</a:t>
+            </a:r>
+          </a:p>
+          <a:p>
+            <a:pPr indent="0" lvl="0" marL="0" marR="0" rtl="0" algn="l">
+              <a:lnSpc>
+                <a:spcPct val="128000"/>
+              </a:lnSpc>
+              <a:spcBef>
+                <a:spcPts val="0"/>
+              </a:spcBef>
+              <a:spcAft>
+                <a:spcPts val="0"/>
+              </a:spcAft>
+              <a:buNone/>
+            </a:pPr>
+            <a:r>
+              <a:rPr b="0" i="0" lang="en-US" sz="1300" u="none" cap="none" strike="noStrike">
+                <a:solidFill>
+                  <a:srgbClr val="1E3A2F"/>
+                </a:solidFill>
+                <a:latin typeface="DM Sans"/>
+                <a:ea typeface="DM Sans"/>
+                <a:cs typeface="DM Sans"/>
+                <a:sym typeface="DM Sans"/>
+              </a:rPr>
+              <a:t>Ask: what is the difference between estimated and measured data?</a:t>
+            </a:r>
+          </a:p>
+        </p:txBody>
+      </p:sp>
+    </p:spTree>
+  </p:cSld>
+  <p:clrMapOvr>
+    <a:masterClrMapping/>
+  </p:clrMapOvr>
+</p:sld>
+</file>
+
 <file path=ppt/slides/slide4.xml><?xml version="1.0" encoding="utf-8"?>
 <p:sld xmlns:a="http://schemas.openxmlformats.org/drawingml/2006/main" xmlns:r="http://schemas.openxmlformats.org/officeDocument/2006/relationships" xmlns:mc="http://schemas.openxmlformats.org/markup-compatibility/2006" xmlns:mv="urn:schemas-microsoft-com:mac:vml" xmlns:p="http://schemas.openxmlformats.org/presentationml/2006/main" xmlns:c="http://schemas.openxmlformats.org/drawingml/2006/chart" xmlns:dgm="http://schemas.openxmlformats.org/drawingml/2006/diagram" xmlns:o="urn:schemas-microsoft-com:office:office" xmlns:v="urn:schemas-microsoft-com:vml" xmlns:pvml="urn:schemas-microsoft-com:office:powerpoint" xmlns:com="http://schemas.openxmlformats.org/drawingml/2006/compatibility" xmlns:p14="http://schemas.microsoft.com/office/powerpoint/2010/main" xmlns:p15="http://schemas.microsoft.com/office/powerpoint/2012/main" xmlns:ahyp="http://schemas.microsoft.com/office/drawing/2018/hyperlinkcolor">
   <p:cSld>
@@ -29151,6 +35899,2624 @@
               <a:cs typeface="Calibri"/>
               <a:sym typeface="Calibri"/>
             </a:endParaRPr>
+          </a:p>
+        </p:txBody>
+      </p:sp>
+    </p:spTree>
+  </p:cSld>
+  <p:clrMapOvr>
+    <a:masterClrMapping/>
+  </p:clrMapOvr>
+</p:sld>
+</file>
+
+<file path=ppt/slides/slide40.xml><?xml version="1.0" encoding="utf-8"?>
+<p:sld xmlns:a="http://schemas.openxmlformats.org/drawingml/2006/main" xmlns:p="http://schemas.openxmlformats.org/presentationml/2006/main" xmlns:r="http://schemas.openxmlformats.org/officeDocument/2006/relationships">
+  <p:cSld>
+    <p:spTree xmlns:mc="http://schemas.openxmlformats.org/markup-compatibility/2006" xmlns:mv="urn:schemas-microsoft-com:mac:vml" xmlns:c="http://schemas.openxmlformats.org/drawingml/2006/chart" xmlns:dgm="http://schemas.openxmlformats.org/drawingml/2006/diagram" xmlns:o="urn:schemas-microsoft-com:office:office" xmlns:v="urn:schemas-microsoft-com:vml" xmlns:pvml="urn:schemas-microsoft-com:office:powerpoint" xmlns:com="http://schemas.openxmlformats.org/drawingml/2006/compatibility" xmlns:p14="http://schemas.microsoft.com/office/powerpoint/2010/main" xmlns:p15="http://schemas.microsoft.com/office/powerpoint/2012/main" xmlns:ahyp="http://schemas.microsoft.com/office/drawing/2018/hyperlinkcolor">
+      <p:nvGrpSpPr>
+        <p:cNvPr id="1" name="Shape 1"/>
+        <p:cNvGrpSpPr/>
+        <p:nvPr/>
+      </p:nvGrpSpPr>
+      <p:grpSpPr>
+        <a:xfrm>
+          <a:off x="0" y="0"/>
+          <a:ext cx="0" cy="0"/>
+          <a:chOff x="0" y="0"/>
+          <a:chExt cx="0" cy="0"/>
+        </a:xfrm>
+      </p:grpSpPr>
+      <p:sp>
+        <p:nvSpPr>
+          <p:cNvPr id="10" name="label"/>
+          <p:cNvSpPr/>
+          <p:nvPr/>
+        </p:nvSpPr>
+        <p:spPr>
+          <a:xfrm>
+            <a:off x="812800" y="812800"/>
+            <a:ext cx="10566400" cy="238760"/>
+          </a:xfrm>
+          <a:prstGeom prst="rect">
+            <a:avLst/>
+          </a:prstGeom>
+          <a:noFill/>
+          <a:ln>
+            <a:noFill/>
+          </a:ln>
+        </p:spPr>
+        <p:txBody>
+          <a:bodyPr anchorCtr="0" anchor="t" bIns="0" lIns="0" spcFirstLastPara="1" rIns="0" wrap="square" tIns="0">
+            <a:noAutofit/>
+          </a:bodyPr>
+          <a:lstStyle/>
+          <a:p>
+            <a:pPr indent="0" lvl="0" marL="0" marR="0" rtl="0" algn="l">
+              <a:lnSpc>
+                <a:spcPct val="140000"/>
+              </a:lnSpc>
+              <a:spcBef>
+                <a:spcPts val="0"/>
+              </a:spcBef>
+              <a:spcAft>
+                <a:spcPts val="0"/>
+              </a:spcAft>
+              <a:buNone/>
+            </a:pPr>
+            <a:r>
+              <a:rPr b="1" i="0" lang="en-US" sz="1200" u="none" cap="none" strike="noStrike">
+                <a:solidFill>
+                  <a:srgbClr val="B5532B"/>
+                </a:solidFill>
+                <a:latin typeface="DM Sans"/>
+                <a:ea typeface="DM Sans"/>
+                <a:cs typeface="DM Sans"/>
+                <a:sym typeface="DM Sans"/>
+              </a:rPr>
+              <a:t>ANALYSE · Q4 ANSWER KEY</a:t>
+            </a:r>
+          </a:p>
+        </p:txBody>
+      </p:sp>
+      <p:sp>
+        <p:nvSpPr>
+          <p:cNvPr id="11" name="title"/>
+          <p:cNvSpPr/>
+          <p:nvPr/>
+        </p:nvSpPr>
+        <p:spPr>
+          <a:xfrm>
+            <a:off x="812800" y="1280158"/>
+            <a:ext cx="10566400" cy="528320"/>
+          </a:xfrm>
+          <a:prstGeom prst="rect">
+            <a:avLst/>
+          </a:prstGeom>
+          <a:noFill/>
+          <a:ln>
+            <a:noFill/>
+          </a:ln>
+        </p:spPr>
+        <p:txBody>
+          <a:bodyPr anchorCtr="0" anchor="t" bIns="0" lIns="0" spcFirstLastPara="1" rIns="0" wrap="square" tIns="0">
+            <a:noAutofit/>
+          </a:bodyPr>
+          <a:lstStyle/>
+          <a:p>
+            <a:pPr indent="0" lvl="0" marL="0" marR="0" rtl="0" algn="l">
+              <a:lnSpc>
+                <a:spcPct val="110000"/>
+              </a:lnSpc>
+              <a:spcBef>
+                <a:spcPts val="0"/>
+              </a:spcBef>
+              <a:spcAft>
+                <a:spcPts val="0"/>
+              </a:spcAft>
+              <a:buNone/>
+            </a:pPr>
+            <a:r>
+              <a:rPr b="0" i="0" lang="en-US" sz="3000" u="none" cap="none" strike="noStrike">
+                <a:solidFill>
+                  <a:srgbClr val="1E3A2F"/>
+                </a:solidFill>
+                <a:latin typeface="Fraunces"/>
+                <a:ea typeface="Fraunces"/>
+                <a:cs typeface="Fraunces"/>
+                <a:sym typeface="Fraunces"/>
+              </a:rPr>
+              <a:t>Who are we reaching? Facilitator findings</a:t>
+            </a:r>
+          </a:p>
+        </p:txBody>
+      </p:sp>
+      <p:cxnSp>
+        <p:nvCxnSpPr>
+          <p:cNvPr id="99" name="line"/>
+          <p:cNvCxnSpPr/>
+          <p:nvPr/>
+        </p:nvCxnSpPr>
+        <p:spPr>
+          <a:xfrm>
+            <a:off x="812800" y="2043435"/>
+            <a:ext cx="10566400" cy="0"/>
+          </a:xfrm>
+          <a:prstGeom prst="straightConnector1">
+            <a:avLst/>
+          </a:prstGeom>
+          <a:noFill/>
+          <a:ln cap="flat" cmpd="sng" w="12700">
+            <a:solidFill>
+              <a:srgbClr val="D9CDB6"/>
+            </a:solidFill>
+            <a:prstDash val="solid"/>
+          </a:ln>
+        </p:spPr>
+      </p:cxnSp>
+      <p:sp>
+        <p:nvSpPr>
+          <p:cNvPr id="13" name="findings"/>
+          <p:cNvSpPr/>
+          <p:nvPr/>
+        </p:nvSpPr>
+        <p:spPr>
+          <a:xfrm>
+            <a:off x="812800" y="2151385"/>
+            <a:ext cx="6551168" cy="4506615"/>
+          </a:xfrm>
+          <a:prstGeom prst="rect">
+            <a:avLst/>
+          </a:prstGeom>
+          <a:noFill/>
+          <a:ln>
+            <a:noFill/>
+          </a:ln>
+        </p:spPr>
+        <p:txBody>
+          <a:bodyPr anchorCtr="0" anchor="t" bIns="0" lIns="0" spcFirstLastPara="1" rIns="0" wrap="square" tIns="0">
+            <a:noAutofit/>
+          </a:bodyPr>
+          <a:lstStyle/>
+          <a:p>
+            <a:pPr indent="0" lvl="0" marL="0" marR="0" rtl="0" algn="l">
+              <a:lnSpc>
+                <a:spcPct val="135000"/>
+              </a:lnSpc>
+              <a:spcBef>
+                <a:spcPts val="100"/>
+              </a:spcBef>
+              <a:spcAft>
+                <a:spcPts val="0"/>
+              </a:spcAft>
+              <a:buNone/>
+            </a:pPr>
+            <a:r>
+              <a:rPr b="0" i="0" lang="en-US" sz="1250" u="none" cap="none" strike="noStrike">
+                <a:solidFill>
+                  <a:srgbClr val="1E3A2F"/>
+                </a:solidFill>
+                <a:latin typeface="DM Sans"/>
+                <a:ea typeface="DM Sans"/>
+                <a:cs typeface="DM Sans"/>
+                <a:sym typeface="DM Sans"/>
+              </a:rPr>
+              <a:t>•  Estimated follower share: images ~70%, carousels ~50%, Reels ~28% — Reels mostly reach new audiences.</a:t>
+            </a:r>
+          </a:p>
+          <a:p>
+            <a:pPr indent="0" lvl="0" marL="0" marR="0" rtl="0" algn="l">
+              <a:lnSpc>
+                <a:spcPct val="135000"/>
+              </a:lnSpc>
+              <a:spcBef>
+                <a:spcPts val="100"/>
+              </a:spcBef>
+              <a:spcAft>
+                <a:spcPts val="0"/>
+              </a:spcAft>
+              <a:buNone/>
+            </a:pPr>
+            <a:r>
+              <a:rPr b="0" i="0" lang="en-US" sz="1250" u="none" cap="none" strike="noStrike">
+                <a:solidFill>
+                  <a:srgbClr val="1E3A2F"/>
+                </a:solidFill>
+                <a:latin typeface="DM Sans"/>
+                <a:ea typeface="DM Sans"/>
+                <a:cs typeface="DM Sans"/>
+                <a:sym typeface="DM Sans"/>
+              </a:rPr>
+              <a:t>•  Follows per 1K reach (feed only): carousels 3.4, images 1.8. Reels cannot be compared — real measurement gap.</a:t>
+            </a:r>
+          </a:p>
+          <a:p>
+            <a:pPr indent="0" lvl="0" marL="0" marR="0" rtl="0" algn="l">
+              <a:lnSpc>
+                <a:spcPct val="135000"/>
+              </a:lnSpc>
+              <a:spcBef>
+                <a:spcPts val="100"/>
+              </a:spcBef>
+              <a:spcAft>
+                <a:spcPts val="0"/>
+              </a:spcAft>
+              <a:buNone/>
+            </a:pPr>
+            <a:r>
+              <a:rPr b="0" i="0" lang="en-US" sz="1250" u="none" cap="none" strike="noStrike">
+                <a:solidFill>
+                  <a:srgbClr val="1E3A2F"/>
+                </a:solidFill>
+                <a:latin typeface="DM Sans"/>
+                <a:ea typeface="DM Sans"/>
+                <a:cs typeface="DM Sans"/>
+                <a:sym typeface="DM Sans"/>
+              </a:rPr>
+              <a:t>•  Estimated top age group: 25-34 for 26 of 30 posts. Education posts skew 18-24.</a:t>
+            </a:r>
+          </a:p>
+          <a:p>
+            <a:pPr indent="0" lvl="0" marL="0" marR="0" rtl="0" algn="l">
+              <a:lnSpc>
+                <a:spcPct val="135000"/>
+              </a:lnSpc>
+              <a:spcBef>
+                <a:spcPts val="100"/>
+              </a:spcBef>
+              <a:spcAft>
+                <a:spcPts val="0"/>
+              </a:spcAft>
+              <a:buNone/>
+            </a:pPr>
+            <a:r>
+              <a:rPr b="0" i="0" lang="en-US" sz="1250" u="none" cap="none" strike="noStrike">
+                <a:solidFill>
+                  <a:srgbClr val="1E3A2F"/>
+                </a:solidFill>
+                <a:latin typeface="DM Sans"/>
+                <a:ea typeface="DM Sans"/>
+                <a:cs typeface="DM Sans"/>
+                <a:sym typeface="DM Sans"/>
+              </a:rPr>
+              <a:t>•  Female share: highest Loop Tote posts (~62%), lowest B2B posts (~42%).</a:t>
+            </a:r>
+          </a:p>
+          <a:p>
+            <a:pPr indent="0" lvl="0" marL="0" marR="0" rtl="0" algn="l">
+              <a:lnSpc>
+                <a:spcPct val="135000"/>
+              </a:lnSpc>
+              <a:spcBef>
+                <a:spcPts val="100"/>
+              </a:spcBef>
+              <a:spcAft>
+                <a:spcPts val="0"/>
+              </a:spcAft>
+              <a:buNone/>
+            </a:pPr>
+            <a:r>
+              <a:rPr b="0" i="0" lang="en-US" sz="1250" u="none" cap="none" strike="noStrike">
+                <a:solidFill>
+                  <a:srgbClr val="1E3A2F"/>
+                </a:solidFill>
+                <a:latin typeface="DM Sans"/>
+                <a:ea typeface="DM Sans"/>
+                <a:cs typeface="DM Sans"/>
+                <a:sym typeface="DM Sans"/>
+              </a:rPr>
+              <a:t>•  Greater Jakarta top estimated region for most posts. Behind-the-scenes posts skew to Bandung.</a:t>
+            </a:r>
+          </a:p>
+          <a:p>
+            <a:pPr indent="0" lvl="0" marL="0" marR="0" rtl="0" algn="l">
+              <a:lnSpc>
+                <a:spcPct val="135000"/>
+              </a:lnSpc>
+              <a:spcBef>
+                <a:spcPts val="100"/>
+              </a:spcBef>
+              <a:spcAft>
+                <a:spcPts val="0"/>
+              </a:spcAft>
+              <a:buNone/>
+            </a:pPr>
+            <a:r>
+              <a:rPr b="0" i="0" lang="en-US" sz="1250" u="none" cap="none" strike="noStrike">
+                <a:solidFill>
+                  <a:srgbClr val="1E3A2F"/>
+                </a:solidFill>
+                <a:latin typeface="DM Sans"/>
+                <a:ea typeface="DM Sans"/>
+                <a:cs typeface="DM Sans"/>
+                <a:sym typeface="DM Sans"/>
+              </a:rPr>
+              <a:t>•  TRAP: modeled audience is largely the follower base blended with general reach — not independent evidence.</a:t>
+            </a:r>
+          </a:p>
+        </p:txBody>
+      </p:sp>
+      <p:sp>
+        <p:nvSpPr>
+          <p:cNvPr id="20" name="tpbg"/>
+          <p:cNvSpPr/>
+          <p:nvPr/>
+        </p:nvSpPr>
+        <p:spPr>
+          <a:xfrm>
+            <a:off x="7563968" y="2151385"/>
+            <a:ext cx="3815232" cy="4506615"/>
+          </a:xfrm>
+          <a:prstGeom prst="rect">
+            <a:avLst/>
+          </a:prstGeom>
+          <a:solidFill>
+            <a:srgbClr val="1E3A2F"/>
+          </a:solidFill>
+          <a:ln>
+            <a:noFill/>
+          </a:ln>
+        </p:spPr>
+        <p:txBody>
+          <a:bodyPr/>
+          <a:lstStyle/>
+          <a:p/>
+        </p:txBody>
+      </p:sp>
+      <p:sp>
+        <p:nvSpPr>
+          <p:cNvPr id="21" name="tp"/>
+          <p:cNvSpPr/>
+          <p:nvPr/>
+        </p:nvSpPr>
+        <p:spPr>
+          <a:xfrm>
+            <a:off x="7673968" y="2261385"/>
+            <a:ext cx="3595232" cy="4286615"/>
+          </a:xfrm>
+          <a:prstGeom prst="rect">
+            <a:avLst/>
+          </a:prstGeom>
+          <a:noFill/>
+          <a:ln>
+            <a:noFill/>
+          </a:ln>
+        </p:spPr>
+        <p:txBody>
+          <a:bodyPr anchorCtr="0" anchor="t" bIns="0" lIns="0" spcFirstLastPara="1" rIns="0" wrap="square" tIns="0">
+            <a:noAutofit/>
+          </a:bodyPr>
+          <a:lstStyle/>
+          <a:p>
+            <a:pPr indent="0" lvl="0" marL="0" marR="0" rtl="0" algn="l">
+              <a:lnSpc>
+                <a:spcPct val="140000"/>
+              </a:lnSpc>
+              <a:spcBef>
+                <a:spcPts val="0"/>
+              </a:spcBef>
+              <a:spcAft>
+                <a:spcPts val="0"/>
+              </a:spcAft>
+              <a:buNone/>
+            </a:pPr>
+            <a:r>
+              <a:rPr b="1" i="0" lang="en-US" sz="1100" u="none" cap="none" strike="noStrike">
+                <a:solidFill>
+                  <a:srgbClr val="FBF3E8"/>
+                </a:solidFill>
+                <a:latin typeface="DM Sans"/>
+                <a:ea typeface="DM Sans"/>
+                <a:cs typeface="DM Sans"/>
+                <a:sym typeface="DM Sans"/>
+              </a:rPr>
+              <a:t>Teaching point</a:t>
+            </a:r>
+          </a:p>
+          <a:p/>
+          <a:p>
+            <a:pPr indent="0" lvl="0" marL="0" marR="0" rtl="0" algn="l">
+              <a:lnSpc>
+                <a:spcPct val="138000"/>
+              </a:lnSpc>
+              <a:spcBef>
+                <a:spcPts val="0"/>
+              </a:spcBef>
+              <a:spcAft>
+                <a:spcPts val="0"/>
+              </a:spcAft>
+              <a:buNone/>
+            </a:pPr>
+            <a:r>
+              <a:rPr b="0" i="0" lang="en-US" sz="1250" u="none" cap="none" strike="noStrike">
+                <a:solidFill>
+                  <a:srgbClr val="FBF3E8"/>
+                </a:solidFill>
+                <a:latin typeface="DM Sans"/>
+                <a:ea typeface="DM Sans"/>
+                <a:cs typeface="DM Sans"/>
+                <a:sym typeface="DM Sans"/>
+              </a:rPr>
+              <a:t>Ask the AI to separate real from estimated data, and to say what it would take to measure the gap for real.</a:t>
+            </a:r>
+          </a:p>
+        </p:txBody>
+      </p:sp>
+    </p:spTree>
+  </p:cSld>
+  <p:clrMapOvr>
+    <a:masterClrMapping/>
+  </p:clrMapOvr>
+</p:sld>
+</file>
+
+<file path=ppt/slides/slide41.xml><?xml version="1.0" encoding="utf-8"?>
+<p:sld xmlns:a="http://schemas.openxmlformats.org/drawingml/2006/main" xmlns:p="http://schemas.openxmlformats.org/presentationml/2006/main" xmlns:r="http://schemas.openxmlformats.org/officeDocument/2006/relationships">
+  <p:cSld>
+    <p:spTree xmlns:mc="http://schemas.openxmlformats.org/markup-compatibility/2006" xmlns:mv="urn:schemas-microsoft-com:mac:vml" xmlns:c="http://schemas.openxmlformats.org/drawingml/2006/chart" xmlns:dgm="http://schemas.openxmlformats.org/drawingml/2006/diagram" xmlns:o="urn:schemas-microsoft-com:office:office" xmlns:v="urn:schemas-microsoft-com:vml" xmlns:pvml="urn:schemas-microsoft-com:office:powerpoint" xmlns:com="http://schemas.openxmlformats.org/drawingml/2006/compatibility" xmlns:p14="http://schemas.microsoft.com/office/powerpoint/2010/main" xmlns:p15="http://schemas.microsoft.com/office/powerpoint/2012/main" xmlns:ahyp="http://schemas.microsoft.com/office/drawing/2018/hyperlinkcolor">
+      <p:nvGrpSpPr>
+        <p:cNvPr id="1" name="Shape 1"/>
+        <p:cNvGrpSpPr/>
+        <p:nvPr/>
+      </p:nvGrpSpPr>
+      <p:grpSpPr>
+        <a:xfrm>
+          <a:off x="0" y="0"/>
+          <a:ext cx="0" cy="0"/>
+          <a:chOff x="0" y="0"/>
+          <a:chExt cx="0" cy="0"/>
+        </a:xfrm>
+      </p:grpSpPr>
+      <p:sp>
+        <p:nvSpPr>
+          <p:cNvPr id="10" name="label"/>
+          <p:cNvSpPr/>
+          <p:nvPr/>
+        </p:nvSpPr>
+        <p:spPr>
+          <a:xfrm>
+            <a:off x="812800" y="812800"/>
+            <a:ext cx="10566400" cy="238760"/>
+          </a:xfrm>
+          <a:prstGeom prst="rect">
+            <a:avLst/>
+          </a:prstGeom>
+          <a:noFill/>
+          <a:ln>
+            <a:noFill/>
+          </a:ln>
+        </p:spPr>
+        <p:txBody>
+          <a:bodyPr anchorCtr="0" anchor="t" bIns="0" lIns="0" spcFirstLastPara="1" rIns="0" wrap="square" tIns="0">
+            <a:noAutofit/>
+          </a:bodyPr>
+          <a:lstStyle/>
+          <a:p>
+            <a:pPr indent="0" lvl="0" marL="0" marR="0" rtl="0" algn="l">
+              <a:lnSpc>
+                <a:spcPct val="140000"/>
+              </a:lnSpc>
+              <a:spcBef>
+                <a:spcPts val="0"/>
+              </a:spcBef>
+              <a:spcAft>
+                <a:spcPts val="0"/>
+              </a:spcAft>
+              <a:buNone/>
+            </a:pPr>
+            <a:r>
+              <a:rPr b="1" i="0" lang="en-US" sz="1200" u="none" cap="none" strike="noStrike">
+                <a:solidFill>
+                  <a:srgbClr val="B5532B"/>
+                </a:solidFill>
+                <a:latin typeface="DM Sans"/>
+                <a:ea typeface="DM Sans"/>
+                <a:cs typeface="DM Sans"/>
+                <a:sym typeface="DM Sans"/>
+              </a:rPr>
+              <a:t>ANALYSE · QUESTION 5 OF 5</a:t>
+            </a:r>
+          </a:p>
+        </p:txBody>
+      </p:sp>
+      <p:sp>
+        <p:nvSpPr>
+          <p:cNvPr id="11" name="title"/>
+          <p:cNvSpPr/>
+          <p:nvPr/>
+        </p:nvSpPr>
+        <p:spPr>
+          <a:xfrm>
+            <a:off x="812800" y="1280158"/>
+            <a:ext cx="10566400" cy="528320"/>
+          </a:xfrm>
+          <a:prstGeom prst="rect">
+            <a:avLst/>
+          </a:prstGeom>
+          <a:noFill/>
+          <a:ln>
+            <a:noFill/>
+          </a:ln>
+        </p:spPr>
+        <p:txBody>
+          <a:bodyPr anchorCtr="0" anchor="t" bIns="0" lIns="0" spcFirstLastPara="1" rIns="0" wrap="square" tIns="0">
+            <a:noAutofit/>
+          </a:bodyPr>
+          <a:lstStyle/>
+          <a:p>
+            <a:pPr indent="0" lvl="0" marL="0" marR="0" rtl="0" algn="l">
+              <a:lnSpc>
+                <a:spcPct val="110000"/>
+              </a:lnSpc>
+              <a:spcBef>
+                <a:spcPts val="0"/>
+              </a:spcBef>
+              <a:spcAft>
+                <a:spcPts val="0"/>
+              </a:spcAft>
+              <a:buNone/>
+            </a:pPr>
+            <a:r>
+              <a:rPr b="0" i="0" lang="en-US" sz="3000" u="none" cap="none" strike="noStrike">
+                <a:solidFill>
+                  <a:srgbClr val="1E3A2F"/>
+                </a:solidFill>
+                <a:latin typeface="Fraunces"/>
+                <a:ea typeface="Fraunces"/>
+                <a:cs typeface="Fraunces"/>
+                <a:sym typeface="Fraunces"/>
+              </a:rPr>
+              <a:t>What should we post next month?</a:t>
+            </a:r>
+          </a:p>
+        </p:txBody>
+      </p:sp>
+      <p:cxnSp>
+        <p:nvCxnSpPr>
+          <p:cNvPr id="99" name="line"/>
+          <p:cNvCxnSpPr/>
+          <p:nvPr/>
+        </p:nvCxnSpPr>
+        <p:spPr>
+          <a:xfrm>
+            <a:off x="812800" y="2043435"/>
+            <a:ext cx="10566400" cy="0"/>
+          </a:xfrm>
+          <a:prstGeom prst="straightConnector1">
+            <a:avLst/>
+          </a:prstGeom>
+          <a:noFill/>
+          <a:ln cap="flat" cmpd="sng" w="12700">
+            <a:solidFill>
+              <a:srgbClr val="D9CDB6"/>
+            </a:solidFill>
+            <a:prstDash val="solid"/>
+          </a:ln>
+        </p:spPr>
+      </p:cxnSp>
+      <p:sp>
+        <p:nvSpPr>
+          <p:cNvPr id="20" name="promptbg"/>
+          <p:cNvSpPr/>
+          <p:nvPr/>
+        </p:nvSpPr>
+        <p:spPr>
+          <a:xfrm>
+            <a:off x="812800" y="2170000"/>
+            <a:ext cx="6022847" cy="4508000"/>
+          </a:xfrm>
+          <a:prstGeom prst="rect">
+            <a:avLst/>
+          </a:prstGeom>
+          <a:solidFill>
+            <a:srgbClr val="1E3A2F"/>
+          </a:solidFill>
+          <a:ln>
+            <a:noFill/>
+          </a:ln>
+        </p:spPr>
+        <p:txBody>
+          <a:bodyPr/>
+          <a:lstStyle/>
+          <a:p/>
+        </p:txBody>
+      </p:sp>
+      <p:sp>
+        <p:nvSpPr>
+          <p:cNvPr id="21" name="prompt"/>
+          <p:cNvSpPr/>
+          <p:nvPr/>
+        </p:nvSpPr>
+        <p:spPr>
+          <a:xfrm>
+            <a:off x="922800" y="2280000"/>
+            <a:ext cx="5802847" cy="4288000"/>
+          </a:xfrm>
+          <a:prstGeom prst="rect">
+            <a:avLst/>
+          </a:prstGeom>
+          <a:noFill/>
+          <a:ln>
+            <a:noFill/>
+          </a:ln>
+        </p:spPr>
+        <p:txBody>
+          <a:bodyPr anchorCtr="0" anchor="t" bIns="0" lIns="0" spcFirstLastPara="1" rIns="0" wrap="square" tIns="0">
+            <a:noAutofit/>
+          </a:bodyPr>
+          <a:lstStyle/>
+          <a:p>
+            <a:pPr indent="0" lvl="0" marL="0" marR="0" rtl="0" algn="l">
+              <a:lnSpc>
+                <a:spcPct val="128000"/>
+              </a:lnSpc>
+              <a:spcBef>
+                <a:spcPts val="0"/>
+              </a:spcBef>
+              <a:spcAft>
+                <a:spcPts val="0"/>
+              </a:spcAft>
+              <a:buNone/>
+            </a:pPr>
+            <a:r>
+              <a:rPr b="0" i="0" lang="en-US" sz="1050" u="none" cap="none" strike="noStrike">
+                <a:solidFill>
+                  <a:srgbClr val="FBF3E8"/>
+                </a:solidFill>
+                <a:latin typeface="DM Sans"/>
+                <a:ea typeface="DM Sans"/>
+                <a:cs typeface="DM Sans"/>
+                <a:sym typeface="DM Sans"/>
+              </a:rPr>
+              <a:t>Based on everything we found in this conversation, create a 4-week Instagram plan</a:t>
+            </a:r>
+          </a:p>
+          <a:p>
+            <a:pPr indent="0" lvl="0" marL="0" marR="0" rtl="0" algn="l">
+              <a:lnSpc>
+                <a:spcPct val="128000"/>
+              </a:lnSpc>
+              <a:spcBef>
+                <a:spcPts val="0"/>
+              </a:spcBef>
+              <a:spcAft>
+                <a:spcPts val="0"/>
+              </a:spcAft>
+              <a:buNone/>
+            </a:pPr>
+            <a:r>
+              <a:rPr b="0" i="0" lang="en-US" sz="1050" u="none" cap="none" strike="noStrike">
+                <a:solidFill>
+                  <a:srgbClr val="FBF3E8"/>
+                </a:solidFill>
+                <a:latin typeface="DM Sans"/>
+                <a:ea typeface="DM Sans"/>
+                <a:cs typeface="DM Sans"/>
+                <a:sym typeface="DM Sans"/>
+              </a:rPr>
+              <a:t>for @loopcycle.nusantara with 12 posts.</a:t>
+            </a:r>
+          </a:p>
+          <a:p/>
+          <a:p>
+            <a:pPr indent="0" lvl="0" marL="0" marR="0" rtl="0" algn="l">
+              <a:lnSpc>
+                <a:spcPct val="128000"/>
+              </a:lnSpc>
+              <a:spcBef>
+                <a:spcPts val="0"/>
+              </a:spcBef>
+              <a:spcAft>
+                <a:spcPts val="0"/>
+              </a:spcAft>
+              <a:buNone/>
+            </a:pPr>
+            <a:r>
+              <a:rPr b="0" i="0" lang="en-US" sz="1050" u="none" cap="none" strike="noStrike">
+                <a:solidFill>
+                  <a:srgbClr val="FBF3E8"/>
+                </a:solidFill>
+                <a:latin typeface="DM Sans"/>
+                <a:ea typeface="DM Sans"/>
+                <a:cs typeface="DM Sans"/>
+                <a:sym typeface="DM Sans"/>
+              </a:rPr>
+              <a:t>Constraints: we post ~3 times a week and have one person making content.</a:t>
+            </a:r>
+          </a:p>
+          <a:p>
+            <a:pPr indent="0" lvl="0" marL="0" marR="0" rtl="0" algn="l">
+              <a:lnSpc>
+                <a:spcPct val="128000"/>
+              </a:lnSpc>
+              <a:spcBef>
+                <a:spcPts val="0"/>
+              </a:spcBef>
+              <a:spcAft>
+                <a:spcPts val="0"/>
+              </a:spcAft>
+              <a:buNone/>
+            </a:pPr>
+            <a:r>
+              <a:rPr b="0" i="0" lang="en-US" sz="1050" u="none" cap="none" strike="noStrike">
+                <a:solidFill>
+                  <a:srgbClr val="FBF3E8"/>
+                </a:solidFill>
+                <a:latin typeface="DM Sans"/>
+                <a:ea typeface="DM Sans"/>
+                <a:cs typeface="DM Sans"/>
+                <a:sym typeface="DM Sans"/>
+              </a:rPr>
+              <a:t>Goals in order: (1) sell more Loop Totes, (2) build trust through waste-picker</a:t>
+            </a:r>
+          </a:p>
+          <a:p>
+            <a:pPr indent="0" lvl="0" marL="0" marR="0" rtl="0" algn="l">
+              <a:lnSpc>
+                <a:spcPct val="128000"/>
+              </a:lnSpc>
+              <a:spcBef>
+                <a:spcPts val="0"/>
+              </a:spcBef>
+              <a:spcAft>
+                <a:spcPts val="0"/>
+              </a:spcAft>
+              <a:buNone/>
+            </a:pPr>
+            <a:r>
+              <a:rPr b="0" i="0" lang="en-US" sz="1050" u="none" cap="none" strike="noStrike">
+                <a:solidFill>
+                  <a:srgbClr val="FBF3E8"/>
+                </a:solidFill>
+                <a:latin typeface="DM Sans"/>
+                <a:ea typeface="DM Sans"/>
+                <a:cs typeface="DM Sans"/>
+                <a:sym typeface="DM Sans"/>
+              </a:rPr>
+              <a:t>stories, (3) attract packaging buyers.</a:t>
+            </a:r>
+          </a:p>
+          <a:p/>
+          <a:p>
+            <a:pPr indent="0" lvl="0" marL="0" marR="0" rtl="0" algn="l">
+              <a:lnSpc>
+                <a:spcPct val="128000"/>
+              </a:lnSpc>
+              <a:spcBef>
+                <a:spcPts val="0"/>
+              </a:spcBef>
+              <a:spcAft>
+                <a:spcPts val="0"/>
+              </a:spcAft>
+              <a:buNone/>
+            </a:pPr>
+            <a:r>
+              <a:rPr b="0" i="0" lang="en-US" sz="1050" u="none" cap="none" strike="noStrike">
+                <a:solidFill>
+                  <a:srgbClr val="FBF3E8"/>
+                </a:solidFill>
+                <a:latin typeface="DM Sans"/>
+                <a:ea typeface="DM Sans"/>
+                <a:cs typeface="DM Sans"/>
+                <a:sym typeface="DM Sans"/>
+              </a:rPr>
+              <a:t>Output:</a:t>
+            </a:r>
+          </a:p>
+          <a:p>
+            <a:pPr indent="0" lvl="0" marL="0" marR="0" rtl="0" algn="l">
+              <a:lnSpc>
+                <a:spcPct val="128000"/>
+              </a:lnSpc>
+              <a:spcBef>
+                <a:spcPts val="0"/>
+              </a:spcBef>
+              <a:spcAft>
+                <a:spcPts val="0"/>
+              </a:spcAft>
+              <a:buNone/>
+            </a:pPr>
+            <a:r>
+              <a:rPr b="0" i="0" lang="en-US" sz="1050" u="none" cap="none" strike="noStrike">
+                <a:solidFill>
+                  <a:srgbClr val="FBF3E8"/>
+                </a:solidFill>
+                <a:latin typeface="DM Sans"/>
+                <a:ea typeface="DM Sans"/>
+                <a:cs typeface="DM Sans"/>
+                <a:sym typeface="DM Sans"/>
+              </a:rPr>
+              <a:t>1. A table: week, day, time (WIB), format, pillar, topic idea, goal, metric.</a:t>
+            </a:r>
+          </a:p>
+          <a:p>
+            <a:pPr indent="0" lvl="0" marL="0" marR="0" rtl="0" algn="l">
+              <a:lnSpc>
+                <a:spcPct val="128000"/>
+              </a:lnSpc>
+              <a:spcBef>
+                <a:spcPts val="0"/>
+              </a:spcBef>
+              <a:spcAft>
+                <a:spcPts val="0"/>
+              </a:spcAft>
+              <a:buNone/>
+            </a:pPr>
+            <a:r>
+              <a:rPr b="0" i="0" lang="en-US" sz="1050" u="none" cap="none" strike="noStrike">
+                <a:solidFill>
+                  <a:srgbClr val="FBF3E8"/>
+                </a:solidFill>
+                <a:latin typeface="DM Sans"/>
+                <a:ea typeface="DM Sans"/>
+                <a:cs typeface="DM Sans"/>
+                <a:sym typeface="DM Sans"/>
+              </a:rPr>
+              <a:t>2. For each row, one line starting "Because the data showed..." that points to</a:t>
+            </a:r>
+          </a:p>
+          <a:p>
+            <a:pPr indent="0" lvl="0" marL="0" marR="0" rtl="0" algn="l">
+              <a:lnSpc>
+                <a:spcPct val="128000"/>
+              </a:lnSpc>
+              <a:spcBef>
+                <a:spcPts val="0"/>
+              </a:spcBef>
+              <a:spcAft>
+                <a:spcPts val="0"/>
+              </a:spcAft>
+              <a:buNone/>
+            </a:pPr>
+            <a:r>
+              <a:rPr b="0" i="0" lang="en-US" sz="1050" u="none" cap="none" strike="noStrike">
+                <a:solidFill>
+                  <a:srgbClr val="FBF3E8"/>
+                </a:solidFill>
+                <a:latin typeface="DM Sans"/>
+                <a:ea typeface="DM Sans"/>
+                <a:cs typeface="DM Sans"/>
+                <a:sym typeface="DM Sans"/>
+              </a:rPr>
+              <a:t>   a specific finding. If there is no evidence, say "test".</a:t>
+            </a:r>
+          </a:p>
+          <a:p>
+            <a:pPr indent="0" lvl="0" marL="0" marR="0" rtl="0" algn="l">
+              <a:lnSpc>
+                <a:spcPct val="128000"/>
+              </a:lnSpc>
+              <a:spcBef>
+                <a:spcPts val="0"/>
+              </a:spcBef>
+              <a:spcAft>
+                <a:spcPts val="0"/>
+              </a:spcAft>
+              <a:buNone/>
+            </a:pPr>
+            <a:r>
+              <a:rPr b="0" i="0" lang="en-US" sz="1050" u="none" cap="none" strike="noStrike">
+                <a:solidFill>
+                  <a:srgbClr val="FBF3E8"/>
+                </a:solidFill>
+                <a:latin typeface="DM Sans"/>
+                <a:ea typeface="DM Sans"/>
+                <a:cs typeface="DM Sans"/>
+                <a:sym typeface="DM Sans"/>
+              </a:rPr>
+              <a:t>3. Two experiments, each with a decision rule (what result keeps or drops the idea).</a:t>
+            </a:r>
+          </a:p>
+          <a:p>
+            <a:pPr indent="0" lvl="0" marL="0" marR="0" rtl="0" algn="l">
+              <a:lnSpc>
+                <a:spcPct val="128000"/>
+              </a:lnSpc>
+              <a:spcBef>
+                <a:spcPts val="0"/>
+              </a:spcBef>
+              <a:spcAft>
+                <a:spcPts val="0"/>
+              </a:spcAft>
+              <a:buNone/>
+            </a:pPr>
+            <a:r>
+              <a:rPr b="0" i="0" lang="en-US" sz="1050" u="none" cap="none" strike="noStrike">
+                <a:solidFill>
+                  <a:srgbClr val="FBF3E8"/>
+                </a:solidFill>
+                <a:latin typeface="DM Sans"/>
+                <a:ea typeface="DM Sans"/>
+                <a:cs typeface="DM Sans"/>
+                <a:sym typeface="DM Sans"/>
+              </a:rPr>
+              <a:t>4. The three biggest limits of this data.</a:t>
+            </a:r>
+          </a:p>
+          <a:p>
+            <a:pPr indent="0" lvl="0" marL="0" marR="0" rtl="0" algn="l">
+              <a:lnSpc>
+                <a:spcPct val="128000"/>
+              </a:lnSpc>
+              <a:spcBef>
+                <a:spcPts val="0"/>
+              </a:spcBef>
+              <a:spcAft>
+                <a:spcPts val="0"/>
+              </a:spcAft>
+              <a:buNone/>
+            </a:pPr>
+            <a:r>
+              <a:rPr b="0" i="0" lang="en-US" sz="1050" u="none" cap="none" strike="noStrike">
+                <a:solidFill>
+                  <a:srgbClr val="FBF3E8"/>
+                </a:solidFill>
+                <a:latin typeface="DM Sans"/>
+                <a:ea typeface="DM Sans"/>
+                <a:cs typeface="DM Sans"/>
+                <a:sym typeface="DM Sans"/>
+              </a:rPr>
+              <a:t>5. Finally, argue against your own plan: what could make it wrong?</a:t>
+            </a:r>
+          </a:p>
+        </p:txBody>
+      </p:sp>
+      <p:sp>
+        <p:nvSpPr>
+          <p:cNvPr id="22" name="steps"/>
+          <p:cNvSpPr/>
+          <p:nvPr/>
+        </p:nvSpPr>
+        <p:spPr>
+          <a:xfrm>
+            <a:off x="7035647" y="2170000"/>
+            <a:ext cx="4343553" cy="4508000"/>
+          </a:xfrm>
+          <a:prstGeom prst="rect">
+            <a:avLst/>
+          </a:prstGeom>
+          <a:noFill/>
+          <a:ln>
+            <a:noFill/>
+          </a:ln>
+        </p:spPr>
+        <p:txBody>
+          <a:bodyPr anchorCtr="0" anchor="t" bIns="0" lIns="0" spcFirstLastPara="1" rIns="0" wrap="square" tIns="0">
+            <a:noAutofit/>
+          </a:bodyPr>
+          <a:lstStyle/>
+          <a:p>
+            <a:pPr indent="0" lvl="0" marL="0" marR="0" rtl="0" algn="l">
+              <a:lnSpc>
+                <a:spcPct val="100000"/>
+              </a:lnSpc>
+              <a:spcBef>
+                <a:spcPts val="200"/>
+              </a:spcBef>
+              <a:spcAft>
+                <a:spcPts val="0"/>
+              </a:spcAft>
+              <a:buNone/>
+            </a:pPr>
+            <a:r>
+              <a:rPr b="0" i="0" lang="en-US" sz="2000" u="none" cap="none" strike="noStrike">
+                <a:solidFill>
+                  <a:srgbClr val="B5532B"/>
+                </a:solidFill>
+                <a:latin typeface="Fraunces"/>
+                <a:ea typeface="Fraunces"/>
+                <a:cs typeface="Fraunces"/>
+                <a:sym typeface="Fraunces"/>
+              </a:rPr>
+              <a:t>1</a:t>
+            </a:r>
+          </a:p>
+          <a:p>
+            <a:pPr indent="0" lvl="0" marL="0" marR="0" rtl="0" algn="l">
+              <a:lnSpc>
+                <a:spcPct val="128000"/>
+              </a:lnSpc>
+              <a:spcBef>
+                <a:spcPts val="0"/>
+              </a:spcBef>
+              <a:spcAft>
+                <a:spcPts val="0"/>
+              </a:spcAft>
+              <a:buNone/>
+            </a:pPr>
+            <a:r>
+              <a:rPr b="0" i="0" lang="en-US" sz="1300" u="none" cap="none" strike="noStrike">
+                <a:solidFill>
+                  <a:srgbClr val="1E3A2F"/>
+                </a:solidFill>
+                <a:latin typeface="DM Sans"/>
+                <a:ea typeface="DM Sans"/>
+                <a:cs typeface="DM Sans"/>
+                <a:sym typeface="DM Sans"/>
+              </a:rPr>
+              <a:t>Stay in the same chat (all 5 questions in context).</a:t>
+            </a:r>
+          </a:p>
+          <a:p>
+            <a:pPr indent="0" lvl="0" marL="0" marR="0" rtl="0" algn="l">
+              <a:lnSpc>
+                <a:spcPct val="100000"/>
+              </a:lnSpc>
+              <a:spcBef>
+                <a:spcPts val="200"/>
+              </a:spcBef>
+              <a:spcAft>
+                <a:spcPts val="0"/>
+              </a:spcAft>
+              <a:buNone/>
+            </a:pPr>
+            <a:r>
+              <a:rPr b="0" i="0" lang="en-US" sz="2000" u="none" cap="none" strike="noStrike">
+                <a:solidFill>
+                  <a:srgbClr val="B5532B"/>
+                </a:solidFill>
+                <a:latin typeface="Fraunces"/>
+                <a:ea typeface="Fraunces"/>
+                <a:cs typeface="Fraunces"/>
+                <a:sym typeface="Fraunces"/>
+              </a:rPr>
+              <a:t>2</a:t>
+            </a:r>
+          </a:p>
+          <a:p>
+            <a:pPr indent="0" lvl="0" marL="0" marR="0" rtl="0" algn="l">
+              <a:lnSpc>
+                <a:spcPct val="128000"/>
+              </a:lnSpc>
+              <a:spcBef>
+                <a:spcPts val="0"/>
+              </a:spcBef>
+              <a:spcAft>
+                <a:spcPts val="0"/>
+              </a:spcAft>
+              <a:buNone/>
+            </a:pPr>
+            <a:r>
+              <a:rPr b="0" i="0" lang="en-US" sz="1300" u="none" cap="none" strike="noStrike">
+                <a:solidFill>
+                  <a:srgbClr val="1E3A2F"/>
+                </a:solidFill>
+                <a:latin typeface="DM Sans"/>
+                <a:ea typeface="DM Sans"/>
+                <a:cs typeface="DM Sans"/>
+                <a:sym typeface="DM Sans"/>
+              </a:rPr>
+              <a:t>Paste the prompt.</a:t>
+            </a:r>
+          </a:p>
+          <a:p>
+            <a:pPr indent="0" lvl="0" marL="0" marR="0" rtl="0" algn="l">
+              <a:lnSpc>
+                <a:spcPct val="100000"/>
+              </a:lnSpc>
+              <a:spcBef>
+                <a:spcPts val="200"/>
+              </a:spcBef>
+              <a:spcAft>
+                <a:spcPts val="0"/>
+              </a:spcAft>
+              <a:buNone/>
+            </a:pPr>
+            <a:r>
+              <a:rPr b="0" i="0" lang="en-US" sz="2000" u="none" cap="none" strike="noStrike">
+                <a:solidFill>
+                  <a:srgbClr val="B5532B"/>
+                </a:solidFill>
+                <a:latin typeface="Fraunces"/>
+                <a:ea typeface="Fraunces"/>
+                <a:cs typeface="Fraunces"/>
+                <a:sym typeface="Fraunces"/>
+              </a:rPr>
+              <a:t>3</a:t>
+            </a:r>
+          </a:p>
+          <a:p>
+            <a:pPr indent="0" lvl="0" marL="0" marR="0" rtl="0" algn="l">
+              <a:lnSpc>
+                <a:spcPct val="128000"/>
+              </a:lnSpc>
+              <a:spcBef>
+                <a:spcPts val="0"/>
+              </a:spcBef>
+              <a:spcAft>
+                <a:spcPts val="0"/>
+              </a:spcAft>
+              <a:buNone/>
+            </a:pPr>
+            <a:r>
+              <a:rPr b="0" i="0" lang="en-US" sz="1300" u="none" cap="none" strike="noStrike">
+                <a:solidFill>
+                  <a:srgbClr val="1E3A2F"/>
+                </a:solidFill>
+                <a:latin typeface="DM Sans"/>
+                <a:ea typeface="DM Sans"/>
+                <a:cs typeface="DM Sans"/>
+                <a:sym typeface="DM Sans"/>
+              </a:rPr>
+              <a:t>Follow-up: "Turn the plan into a CSV I can import into a content calendar."</a:t>
+            </a:r>
+          </a:p>
+          <a:p>
+            <a:pPr indent="0" lvl="0" marL="0" marR="0" rtl="0" algn="l">
+              <a:lnSpc>
+                <a:spcPct val="100000"/>
+              </a:lnSpc>
+              <a:spcBef>
+                <a:spcPts val="200"/>
+              </a:spcBef>
+              <a:spcAft>
+                <a:spcPts val="0"/>
+              </a:spcAft>
+              <a:buNone/>
+            </a:pPr>
+            <a:r>
+              <a:rPr b="0" i="0" lang="en-US" sz="2000" u="none" cap="none" strike="noStrike">
+                <a:solidFill>
+                  <a:srgbClr val="B5532B"/>
+                </a:solidFill>
+                <a:latin typeface="Fraunces"/>
+                <a:ea typeface="Fraunces"/>
+                <a:cs typeface="Fraunces"/>
+                <a:sym typeface="Fraunces"/>
+              </a:rPr>
+              <a:t>4</a:t>
+            </a:r>
+          </a:p>
+          <a:p>
+            <a:pPr indent="0" lvl="0" marL="0" marR="0" rtl="0" algn="l">
+              <a:lnSpc>
+                <a:spcPct val="128000"/>
+              </a:lnSpc>
+              <a:spcBef>
+                <a:spcPts val="0"/>
+              </a:spcBef>
+              <a:spcAft>
+                <a:spcPts val="0"/>
+              </a:spcAft>
+              <a:buNone/>
+            </a:pPr>
+            <a:r>
+              <a:rPr b="0" i="0" lang="en-US" sz="1300" u="none" cap="none" strike="noStrike">
+                <a:solidFill>
+                  <a:srgbClr val="1E3A2F"/>
+                </a:solidFill>
+                <a:latin typeface="DM Sans"/>
+                <a:ea typeface="DM Sans"/>
+                <a:cs typeface="DM Sans"/>
+                <a:sym typeface="DM Sans"/>
+              </a:rPr>
+              <a:t>Follow-up: "Write caption drafts for week 1 in our brand voice: warm, direct, no jargon."</a:t>
+            </a:r>
+          </a:p>
+        </p:txBody>
+      </p:sp>
+    </p:spTree>
+  </p:cSld>
+  <p:clrMapOvr>
+    <a:masterClrMapping/>
+  </p:clrMapOvr>
+</p:sld>
+</file>
+
+<file path=ppt/slides/slide42.xml><?xml version="1.0" encoding="utf-8"?>
+<p:sld xmlns:a="http://schemas.openxmlformats.org/drawingml/2006/main" xmlns:p="http://schemas.openxmlformats.org/presentationml/2006/main" xmlns:r="http://schemas.openxmlformats.org/officeDocument/2006/relationships">
+  <p:cSld>
+    <p:spTree xmlns:mc="http://schemas.openxmlformats.org/markup-compatibility/2006" xmlns:mv="urn:schemas-microsoft-com:mac:vml" xmlns:c="http://schemas.openxmlformats.org/drawingml/2006/chart" xmlns:dgm="http://schemas.openxmlformats.org/drawingml/2006/diagram" xmlns:o="urn:schemas-microsoft-com:office:office" xmlns:v="urn:schemas-microsoft-com:vml" xmlns:pvml="urn:schemas-microsoft-com:office:powerpoint" xmlns:com="http://schemas.openxmlformats.org/drawingml/2006/compatibility" xmlns:p14="http://schemas.microsoft.com/office/powerpoint/2010/main" xmlns:p15="http://schemas.microsoft.com/office/powerpoint/2012/main" xmlns:ahyp="http://schemas.microsoft.com/office/drawing/2018/hyperlinkcolor">
+      <p:nvGrpSpPr>
+        <p:cNvPr id="1" name="Shape 1"/>
+        <p:cNvGrpSpPr/>
+        <p:nvPr/>
+      </p:nvGrpSpPr>
+      <p:grpSpPr>
+        <a:xfrm>
+          <a:off x="0" y="0"/>
+          <a:ext cx="0" cy="0"/>
+          <a:chOff x="0" y="0"/>
+          <a:chExt cx="0" cy="0"/>
+        </a:xfrm>
+      </p:grpSpPr>
+      <p:sp>
+        <p:nvSpPr>
+          <p:cNvPr id="10" name="label"/>
+          <p:cNvSpPr/>
+          <p:nvPr/>
+        </p:nvSpPr>
+        <p:spPr>
+          <a:xfrm>
+            <a:off x="812800" y="812800"/>
+            <a:ext cx="10566400" cy="238760"/>
+          </a:xfrm>
+          <a:prstGeom prst="rect">
+            <a:avLst/>
+          </a:prstGeom>
+          <a:noFill/>
+          <a:ln>
+            <a:noFill/>
+          </a:ln>
+        </p:spPr>
+        <p:txBody>
+          <a:bodyPr anchorCtr="0" anchor="t" bIns="0" lIns="0" spcFirstLastPara="1" rIns="0" wrap="square" tIns="0">
+            <a:noAutofit/>
+          </a:bodyPr>
+          <a:lstStyle/>
+          <a:p>
+            <a:pPr indent="0" lvl="0" marL="0" marR="0" rtl="0" algn="l">
+              <a:lnSpc>
+                <a:spcPct val="140000"/>
+              </a:lnSpc>
+              <a:spcBef>
+                <a:spcPts val="0"/>
+              </a:spcBef>
+              <a:spcAft>
+                <a:spcPts val="0"/>
+              </a:spcAft>
+              <a:buNone/>
+            </a:pPr>
+            <a:r>
+              <a:rPr b="1" i="0" lang="en-US" sz="1200" u="none" cap="none" strike="noStrike">
+                <a:solidFill>
+                  <a:srgbClr val="B5532B"/>
+                </a:solidFill>
+                <a:latin typeface="DM Sans"/>
+                <a:ea typeface="DM Sans"/>
+                <a:cs typeface="DM Sans"/>
+                <a:sym typeface="DM Sans"/>
+              </a:rPr>
+              <a:t>ANALYSE · Q5 ANSWER KEY</a:t>
+            </a:r>
+          </a:p>
+        </p:txBody>
+      </p:sp>
+      <p:sp>
+        <p:nvSpPr>
+          <p:cNvPr id="11" name="title"/>
+          <p:cNvSpPr/>
+          <p:nvPr/>
+        </p:nvSpPr>
+        <p:spPr>
+          <a:xfrm>
+            <a:off x="812800" y="1280158"/>
+            <a:ext cx="10566400" cy="528320"/>
+          </a:xfrm>
+          <a:prstGeom prst="rect">
+            <a:avLst/>
+          </a:prstGeom>
+          <a:noFill/>
+          <a:ln>
+            <a:noFill/>
+          </a:ln>
+        </p:spPr>
+        <p:txBody>
+          <a:bodyPr anchorCtr="0" anchor="t" bIns="0" lIns="0" spcFirstLastPara="1" rIns="0" wrap="square" tIns="0">
+            <a:noAutofit/>
+          </a:bodyPr>
+          <a:lstStyle/>
+          <a:p>
+            <a:pPr indent="0" lvl="0" marL="0" marR="0" rtl="0" algn="l">
+              <a:lnSpc>
+                <a:spcPct val="110000"/>
+              </a:lnSpc>
+              <a:spcBef>
+                <a:spcPts val="0"/>
+              </a:spcBef>
+              <a:spcAft>
+                <a:spcPts val="0"/>
+              </a:spcAft>
+              <a:buNone/>
+            </a:pPr>
+            <a:r>
+              <a:rPr b="0" i="0" lang="en-US" sz="3000" u="none" cap="none" strike="noStrike">
+                <a:solidFill>
+                  <a:srgbClr val="1E3A2F"/>
+                </a:solidFill>
+                <a:latin typeface="Fraunces"/>
+                <a:ea typeface="Fraunces"/>
+                <a:cs typeface="Fraunces"/>
+                <a:sym typeface="Fraunces"/>
+              </a:rPr>
+              <a:t>What should we post next month? What good looks like</a:t>
+            </a:r>
+          </a:p>
+        </p:txBody>
+      </p:sp>
+      <p:cxnSp>
+        <p:nvCxnSpPr>
+          <p:cNvPr id="99" name="line"/>
+          <p:cNvCxnSpPr/>
+          <p:nvPr/>
+        </p:nvCxnSpPr>
+        <p:spPr>
+          <a:xfrm>
+            <a:off x="812800" y="2043435"/>
+            <a:ext cx="10566400" cy="0"/>
+          </a:xfrm>
+          <a:prstGeom prst="straightConnector1">
+            <a:avLst/>
+          </a:prstGeom>
+          <a:noFill/>
+          <a:ln cap="flat" cmpd="sng" w="12700">
+            <a:solidFill>
+              <a:srgbClr val="D9CDB6"/>
+            </a:solidFill>
+            <a:prstDash val="solid"/>
+          </a:ln>
+        </p:spPr>
+      </p:cxnSp>
+      <p:sp>
+        <p:nvSpPr>
+          <p:cNvPr id="13" name="findings"/>
+          <p:cNvSpPr/>
+          <p:nvPr/>
+        </p:nvSpPr>
+        <p:spPr>
+          <a:xfrm>
+            <a:off x="812800" y="2151385"/>
+            <a:ext cx="6551168" cy="4506615"/>
+          </a:xfrm>
+          <a:prstGeom prst="rect">
+            <a:avLst/>
+          </a:prstGeom>
+          <a:noFill/>
+          <a:ln>
+            <a:noFill/>
+          </a:ln>
+        </p:spPr>
+        <p:txBody>
+          <a:bodyPr anchorCtr="0" anchor="t" bIns="0" lIns="0" spcFirstLastPara="1" rIns="0" wrap="square" tIns="0">
+            <a:noAutofit/>
+          </a:bodyPr>
+          <a:lstStyle/>
+          <a:p>
+            <a:pPr indent="0" lvl="0" marL="0" marR="0" rtl="0" algn="l">
+              <a:lnSpc>
+                <a:spcPct val="135000"/>
+              </a:lnSpc>
+              <a:spcBef>
+                <a:spcPts val="100"/>
+              </a:spcBef>
+              <a:spcAft>
+                <a:spcPts val="0"/>
+              </a:spcAft>
+              <a:buNone/>
+            </a:pPr>
+            <a:r>
+              <a:rPr b="0" i="0" lang="en-US" sz="1250" u="none" cap="none" strike="noStrike">
+                <a:solidFill>
+                  <a:srgbClr val="1E3A2F"/>
+                </a:solidFill>
+                <a:latin typeface="DM Sans"/>
+                <a:ea typeface="DM Sans"/>
+                <a:cs typeface="DM Sans"/>
+                <a:sym typeface="DM Sans"/>
+              </a:rPr>
+              <a:t>•  Mixes Reels (reach, new audiences) with carousels (saves, purchase intent).</a:t>
+            </a:r>
+          </a:p>
+          <a:p>
+            <a:pPr indent="0" lvl="0" marL="0" marR="0" rtl="0" algn="l">
+              <a:lnSpc>
+                <a:spcPct val="135000"/>
+              </a:lnSpc>
+              <a:spcBef>
+                <a:spcPts val="100"/>
+              </a:spcBef>
+              <a:spcAft>
+                <a:spcPts val="0"/>
+              </a:spcAft>
+              <a:buNone/>
+            </a:pPr>
+            <a:r>
+              <a:rPr b="0" i="0" lang="en-US" sz="1250" u="none" cap="none" strike="noStrike">
+                <a:solidFill>
+                  <a:srgbClr val="1E3A2F"/>
+                </a:solidFill>
+                <a:latin typeface="DM Sans"/>
+                <a:ea typeface="DM Sans"/>
+                <a:cs typeface="DM Sans"/>
+                <a:sym typeface="DM Sans"/>
+              </a:rPr>
+              <a:t>•  Uses Loop Tote content for purchase goal; picker stories for trust-building.</a:t>
+            </a:r>
+          </a:p>
+          <a:p>
+            <a:pPr indent="0" lvl="0" marL="0" marR="0" rtl="0" algn="l">
+              <a:lnSpc>
+                <a:spcPct val="135000"/>
+              </a:lnSpc>
+              <a:spcBef>
+                <a:spcPts val="100"/>
+              </a:spcBef>
+              <a:spcAft>
+                <a:spcPts val="0"/>
+              </a:spcAft>
+              <a:buNone/>
+            </a:pPr>
+            <a:r>
+              <a:rPr b="0" i="0" lang="en-US" sz="1250" u="none" cap="none" strike="noStrike">
+                <a:solidFill>
+                  <a:srgbClr val="1E3A2F"/>
+                </a:solidFill>
+                <a:latin typeface="DM Sans"/>
+                <a:ea typeface="DM Sans"/>
+                <a:cs typeface="DM Sans"/>
+                <a:sym typeface="DM Sans"/>
+              </a:rPr>
+              <a:t>•  Links every choice to a real Q1-Q4 finding; marks the rest as "test".</a:t>
+            </a:r>
+          </a:p>
+          <a:p>
+            <a:pPr indent="0" lvl="0" marL="0" marR="0" rtl="0" algn="l">
+              <a:lnSpc>
+                <a:spcPct val="135000"/>
+              </a:lnSpc>
+              <a:spcBef>
+                <a:spcPts val="100"/>
+              </a:spcBef>
+              <a:spcAft>
+                <a:spcPts val="0"/>
+              </a:spcAft>
+              <a:buNone/>
+            </a:pPr>
+            <a:r>
+              <a:rPr b="0" i="0" lang="en-US" sz="1250" u="none" cap="none" strike="noStrike">
+                <a:solidFill>
+                  <a:srgbClr val="1E3A2F"/>
+                </a:solidFill>
+                <a:latin typeface="DM Sans"/>
+                <a:ea typeface="DM Sans"/>
+                <a:cs typeface="DM Sans"/>
+                <a:sym typeface="DM Sans"/>
+              </a:rPr>
+              <a:t>•  Includes a fair experiment: same format, different time, defined success metric.</a:t>
+            </a:r>
+          </a:p>
+          <a:p>
+            <a:pPr indent="0" lvl="0" marL="0" marR="0" rtl="0" algn="l">
+              <a:lnSpc>
+                <a:spcPct val="135000"/>
+              </a:lnSpc>
+              <a:spcBef>
+                <a:spcPts val="100"/>
+              </a:spcBef>
+              <a:spcAft>
+                <a:spcPts val="0"/>
+              </a:spcAft>
+              <a:buNone/>
+            </a:pPr>
+            <a:r>
+              <a:rPr b="0" i="0" lang="en-US" sz="1250" u="none" cap="none" strike="noStrike">
+                <a:solidFill>
+                  <a:srgbClr val="1E3A2F"/>
+                </a:solidFill>
+                <a:latin typeface="DM Sans"/>
+                <a:ea typeface="DM Sans"/>
+                <a:cs typeface="DM Sans"/>
+                <a:sym typeface="DM Sans"/>
+              </a:rPr>
+              <a:t>•  Does NOT invent numbers such as sales targets or follower projections.</a:t>
+            </a:r>
+          </a:p>
+          <a:p>
+            <a:pPr indent="0" lvl="0" marL="0" marR="0" rtl="0" algn="l">
+              <a:lnSpc>
+                <a:spcPct val="135000"/>
+              </a:lnSpc>
+              <a:spcBef>
+                <a:spcPts val="100"/>
+              </a:spcBef>
+              <a:spcAft>
+                <a:spcPts val="0"/>
+              </a:spcAft>
+              <a:buNone/>
+            </a:pPr>
+            <a:r>
+              <a:rPr b="0" i="0" lang="en-US" sz="1250" u="none" cap="none" strike="noStrike">
+                <a:solidFill>
+                  <a:srgbClr val="1E3A2F"/>
+                </a:solidFill>
+                <a:latin typeface="DM Sans"/>
+                <a:ea typeface="DM Sans"/>
+                <a:cs typeface="DM Sans"/>
+                <a:sym typeface="DM Sans"/>
+              </a:rPr>
+              <a:t>•  Argues against its own plan: e.g. "sample patterns from 30 posts may not hold".</a:t>
+            </a:r>
+          </a:p>
+        </p:txBody>
+      </p:sp>
+      <p:sp>
+        <p:nvSpPr>
+          <p:cNvPr id="20" name="tpbg"/>
+          <p:cNvSpPr/>
+          <p:nvPr/>
+        </p:nvSpPr>
+        <p:spPr>
+          <a:xfrm>
+            <a:off x="7563968" y="2151385"/>
+            <a:ext cx="3815232" cy="4506615"/>
+          </a:xfrm>
+          <a:prstGeom prst="rect">
+            <a:avLst/>
+          </a:prstGeom>
+          <a:solidFill>
+            <a:srgbClr val="1E3A2F"/>
+          </a:solidFill>
+          <a:ln>
+            <a:noFill/>
+          </a:ln>
+        </p:spPr>
+        <p:txBody>
+          <a:bodyPr/>
+          <a:lstStyle/>
+          <a:p/>
+        </p:txBody>
+      </p:sp>
+      <p:sp>
+        <p:nvSpPr>
+          <p:cNvPr id="21" name="tp"/>
+          <p:cNvSpPr/>
+          <p:nvPr/>
+        </p:nvSpPr>
+        <p:spPr>
+          <a:xfrm>
+            <a:off x="7673968" y="2261385"/>
+            <a:ext cx="3595232" cy="4286615"/>
+          </a:xfrm>
+          <a:prstGeom prst="rect">
+            <a:avLst/>
+          </a:prstGeom>
+          <a:noFill/>
+          <a:ln>
+            <a:noFill/>
+          </a:ln>
+        </p:spPr>
+        <p:txBody>
+          <a:bodyPr anchorCtr="0" anchor="t" bIns="0" lIns="0" spcFirstLastPara="1" rIns="0" wrap="square" tIns="0">
+            <a:noAutofit/>
+          </a:bodyPr>
+          <a:lstStyle/>
+          <a:p>
+            <a:pPr indent="0" lvl="0" marL="0" marR="0" rtl="0" algn="l">
+              <a:lnSpc>
+                <a:spcPct val="140000"/>
+              </a:lnSpc>
+              <a:spcBef>
+                <a:spcPts val="0"/>
+              </a:spcBef>
+              <a:spcAft>
+                <a:spcPts val="0"/>
+              </a:spcAft>
+              <a:buNone/>
+            </a:pPr>
+            <a:r>
+              <a:rPr b="1" i="0" lang="en-US" sz="1100" u="none" cap="none" strike="noStrike">
+                <a:solidFill>
+                  <a:srgbClr val="FBF3E8"/>
+                </a:solidFill>
+                <a:latin typeface="DM Sans"/>
+                <a:ea typeface="DM Sans"/>
+                <a:cs typeface="DM Sans"/>
+                <a:sym typeface="DM Sans"/>
+              </a:rPr>
+              <a:t>Teaching point</a:t>
+            </a:r>
+          </a:p>
+          <a:p/>
+          <a:p>
+            <a:pPr indent="0" lvl="0" marL="0" marR="0" rtl="0" algn="l">
+              <a:lnSpc>
+                <a:spcPct val="138000"/>
+              </a:lnSpc>
+              <a:spcBef>
+                <a:spcPts val="0"/>
+              </a:spcBef>
+              <a:spcAft>
+                <a:spcPts val="0"/>
+              </a:spcAft>
+              <a:buNone/>
+            </a:pPr>
+            <a:r>
+              <a:rPr b="0" i="0" lang="en-US" sz="1250" u="none" cap="none" strike="noStrike">
+                <a:solidFill>
+                  <a:srgbClr val="FBF3E8"/>
+                </a:solidFill>
+                <a:latin typeface="DM Sans"/>
+                <a:ea typeface="DM Sans"/>
+                <a:cs typeface="DM Sans"/>
+                <a:sym typeface="DM Sans"/>
+              </a:rPr>
+              <a:t>Ask the AI to critique itself. The data tells you what happened. You decide what it means for next month.</a:t>
+            </a:r>
+          </a:p>
+        </p:txBody>
+      </p:sp>
+    </p:spTree>
+  </p:cSld>
+  <p:clrMapOvr>
+    <a:masterClrMapping/>
+  </p:clrMapOvr>
+</p:sld>
+</file>
+
+<file path=ppt/slides/slide43.xml><?xml version="1.0" encoding="utf-8"?>
+<p:sld xmlns:a="http://schemas.openxmlformats.org/drawingml/2006/main" xmlns:p="http://schemas.openxmlformats.org/presentationml/2006/main" xmlns:r="http://schemas.openxmlformats.org/officeDocument/2006/relationships">
+  <p:cSld>
+    <p:spTree xmlns:mc="http://schemas.openxmlformats.org/markup-compatibility/2006" xmlns:mv="urn:schemas-microsoft-com:mac:vml" xmlns:c="http://schemas.openxmlformats.org/drawingml/2006/chart" xmlns:dgm="http://schemas.openxmlformats.org/drawingml/2006/diagram" xmlns:o="urn:schemas-microsoft-com:office:office" xmlns:v="urn:schemas-microsoft-com:vml" xmlns:pvml="urn:schemas-microsoft-com:office:powerpoint" xmlns:com="http://schemas.openxmlformats.org/drawingml/2006/compatibility" xmlns:p14="http://schemas.microsoft.com/office/powerpoint/2010/main" xmlns:p15="http://schemas.microsoft.com/office/powerpoint/2012/main" xmlns:ahyp="http://schemas.microsoft.com/office/drawing/2018/hyperlinkcolor">
+      <p:nvGrpSpPr>
+        <p:cNvPr id="1" name="Shape 1"/>
+        <p:cNvGrpSpPr/>
+        <p:nvPr/>
+      </p:nvGrpSpPr>
+      <p:grpSpPr>
+        <a:xfrm>
+          <a:off x="0" y="0"/>
+          <a:ext cx="0" cy="0"/>
+          <a:chOff x="0" y="0"/>
+          <a:chExt cx="0" cy="0"/>
+        </a:xfrm>
+      </p:grpSpPr>
+      <p:sp>
+        <p:nvSpPr>
+          <p:cNvPr id="10" name="label"/>
+          <p:cNvSpPr/>
+          <p:nvPr/>
+        </p:nvSpPr>
+        <p:spPr>
+          <a:xfrm>
+            <a:off x="812800" y="812800"/>
+            <a:ext cx="10566400" cy="238760"/>
+          </a:xfrm>
+          <a:prstGeom prst="rect">
+            <a:avLst/>
+          </a:prstGeom>
+          <a:noFill/>
+          <a:ln>
+            <a:noFill/>
+          </a:ln>
+        </p:spPr>
+        <p:txBody>
+          <a:bodyPr anchorCtr="0" anchor="t" bIns="0" lIns="0" spcFirstLastPara="1" rIns="0" wrap="square" tIns="0">
+            <a:noAutofit/>
+          </a:bodyPr>
+          <a:lstStyle/>
+          <a:p>
+            <a:pPr indent="0" lvl="0" marL="0" marR="0" rtl="0" algn="l">
+              <a:lnSpc>
+                <a:spcPct val="140000"/>
+              </a:lnSpc>
+              <a:spcBef>
+                <a:spcPts val="0"/>
+              </a:spcBef>
+              <a:spcAft>
+                <a:spcPts val="0"/>
+              </a:spcAft>
+              <a:buNone/>
+            </a:pPr>
+            <a:r>
+              <a:rPr b="1" i="0" lang="en-US" sz="1200" u="none" cap="none" strike="noStrike">
+                <a:solidFill>
+                  <a:srgbClr val="B5532B"/>
+                </a:solidFill>
+                <a:latin typeface="DM Sans"/>
+                <a:ea typeface="DM Sans"/>
+                <a:cs typeface="DM Sans"/>
+                <a:sym typeface="DM Sans"/>
+              </a:rPr>
+              <a:t>ANALYSE · WRAP-UP</a:t>
+            </a:r>
+          </a:p>
+        </p:txBody>
+      </p:sp>
+      <p:sp>
+        <p:nvSpPr>
+          <p:cNvPr id="11" name="title"/>
+          <p:cNvSpPr/>
+          <p:nvPr/>
+        </p:nvSpPr>
+        <p:spPr>
+          <a:xfrm>
+            <a:off x="812800" y="1280158"/>
+            <a:ext cx="10566400" cy="528320"/>
+          </a:xfrm>
+          <a:prstGeom prst="rect">
+            <a:avLst/>
+          </a:prstGeom>
+          <a:noFill/>
+          <a:ln>
+            <a:noFill/>
+          </a:ln>
+        </p:spPr>
+        <p:txBody>
+          <a:bodyPr anchorCtr="0" anchor="t" bIns="0" lIns="0" spcFirstLastPara="1" rIns="0" wrap="square" tIns="0">
+            <a:noAutofit/>
+          </a:bodyPr>
+          <a:lstStyle/>
+          <a:p>
+            <a:pPr indent="0" lvl="0" marL="0" marR="0" rtl="0" algn="l">
+              <a:lnSpc>
+                <a:spcPct val="110000"/>
+              </a:lnSpc>
+              <a:spcBef>
+                <a:spcPts val="0"/>
+              </a:spcBef>
+              <a:spcAft>
+                <a:spcPts val="0"/>
+              </a:spcAft>
+              <a:buNone/>
+            </a:pPr>
+            <a:r>
+              <a:rPr b="0" i="0" lang="en-US" sz="3600" u="none" cap="none" strike="noStrike">
+                <a:solidFill>
+                  <a:srgbClr val="1E3A2F"/>
+                </a:solidFill>
+                <a:latin typeface="Fraunces"/>
+                <a:ea typeface="Fraunces"/>
+                <a:cs typeface="Fraunces"/>
+                <a:sym typeface="Fraunces"/>
+              </a:rPr>
+              <a:t>What makes these prompts work</a:t>
+            </a:r>
+          </a:p>
+        </p:txBody>
+      </p:sp>
+      <p:cxnSp>
+        <p:nvCxnSpPr>
+          <p:cNvPr id="99" name="line"/>
+          <p:cNvCxnSpPr/>
+          <p:nvPr/>
+        </p:nvCxnSpPr>
+        <p:spPr>
+          <a:xfrm>
+            <a:off x="812800" y="2043435"/>
+            <a:ext cx="10566400" cy="0"/>
+          </a:xfrm>
+          <a:prstGeom prst="straightConnector1">
+            <a:avLst/>
+          </a:prstGeom>
+          <a:noFill/>
+          <a:ln cap="flat" cmpd="sng" w="12700">
+            <a:solidFill>
+              <a:srgbClr val="D9CDB6"/>
+            </a:solidFill>
+            <a:prstDash val="solid"/>
+          </a:ln>
+        </p:spPr>
+      </p:cxnSp>
+      <p:sp>
+        <p:nvSpPr>
+          <p:cNvPr id="13" name="body"/>
+          <p:cNvSpPr/>
+          <p:nvPr/>
+        </p:nvSpPr>
+        <p:spPr>
+          <a:xfrm>
+            <a:off x="812800" y="2151385"/>
+            <a:ext cx="10566400" cy="4506615"/>
+          </a:xfrm>
+          <a:prstGeom prst="rect">
+            <a:avLst/>
+          </a:prstGeom>
+          <a:noFill/>
+          <a:ln>
+            <a:noFill/>
+          </a:ln>
+        </p:spPr>
+        <p:txBody>
+          <a:bodyPr anchorCtr="0" anchor="t" bIns="0" lIns="0" spcFirstLastPara="1" rIns="0" wrap="square" tIns="0">
+            <a:noAutofit/>
+          </a:bodyPr>
+          <a:lstStyle/>
+          <a:p>
+            <a:pPr indent="0" lvl="0" marL="0" marR="0" rtl="0" algn="l">
+              <a:lnSpc>
+                <a:spcPct val="140000"/>
+              </a:lnSpc>
+              <a:spcBef>
+                <a:spcPts val="0"/>
+              </a:spcBef>
+              <a:spcAft>
+                <a:spcPts val="0"/>
+              </a:spcAft>
+              <a:buNone/>
+            </a:pPr>
+            <a:r>
+              <a:rPr b="1" i="0" lang="en-US" sz="1600" u="none" cap="none" strike="noStrike">
+                <a:solidFill>
+                  <a:srgbClr val="1E3A2F"/>
+                </a:solidFill>
+                <a:latin typeface="DM Sans"/>
+                <a:ea typeface="DM Sans"/>
+                <a:cs typeface="DM Sans"/>
+                <a:sym typeface="DM Sans"/>
+              </a:rPr>
+              <a:t>Six ingredients of a useful data prompt</a:t>
+            </a:r>
+          </a:p>
+          <a:p/>
+          <a:p>
+            <a:pPr indent="0" lvl="0" marL="0" marR="0" rtl="0" algn="l">
+              <a:lnSpc>
+                <a:spcPct val="120000"/>
+              </a:lnSpc>
+              <a:spcBef>
+                <a:spcPts val="150"/>
+              </a:spcBef>
+              <a:spcAft>
+                <a:spcPts val="0"/>
+              </a:spcAft>
+              <a:buNone/>
+            </a:pPr>
+            <a:r>
+              <a:rPr b="1" i="0" lang="en-US" sz="1300" u="none" cap="none" strike="noStrike">
+                <a:solidFill>
+                  <a:srgbClr val="B5532B"/>
+                </a:solidFill>
+                <a:latin typeface="DM Sans"/>
+                <a:ea typeface="DM Sans"/>
+                <a:cs typeface="DM Sans"/>
+                <a:sym typeface="DM Sans"/>
+              </a:rPr>
+              <a:t>Business question first</a:t>
+            </a:r>
+          </a:p>
+          <a:p>
+            <a:pPr indent="0" lvl="0" marL="0" marR="0" rtl="0" algn="l">
+              <a:lnSpc>
+                <a:spcPct val="120000"/>
+              </a:lnSpc>
+              <a:spcBef>
+                <a:spcPts val="0"/>
+              </a:spcBef>
+              <a:spcAft>
+                <a:spcPts val="0"/>
+              </a:spcAft>
+              <a:buNone/>
+            </a:pPr>
+            <a:r>
+              <a:rPr b="0" i="0" lang="en-US" sz="1200" u="none" cap="none" strike="noStrike">
+                <a:solidFill>
+                  <a:srgbClr val="1E3A2F"/>
+                </a:solidFill>
+                <a:latin typeface="DM Sans"/>
+                <a:ea typeface="DM Sans"/>
+                <a:cs typeface="DM Sans"/>
+                <a:sym typeface="DM Sans"/>
+              </a:rPr>
+              <a:t>   "Which formats should we invest more in?"</a:t>
+            </a:r>
+          </a:p>
+          <a:p>
+            <a:pPr indent="0" lvl="0" marL="0" marR="0" rtl="0" algn="l">
+              <a:lnSpc>
+                <a:spcPct val="120000"/>
+              </a:lnSpc>
+              <a:spcBef>
+                <a:spcPts val="150"/>
+              </a:spcBef>
+              <a:spcAft>
+                <a:spcPts val="0"/>
+              </a:spcAft>
+              <a:buNone/>
+            </a:pPr>
+            <a:r>
+              <a:rPr b="1" i="0" lang="en-US" sz="1300" u="none" cap="none" strike="noStrike">
+                <a:solidFill>
+                  <a:srgbClr val="B5532B"/>
+                </a:solidFill>
+                <a:latin typeface="DM Sans"/>
+                <a:ea typeface="DM Sans"/>
+                <a:cs typeface="DM Sans"/>
+                <a:sym typeface="DM Sans"/>
+              </a:rPr>
+              <a:t>Context</a:t>
+            </a:r>
+          </a:p>
+          <a:p>
+            <a:pPr indent="0" lvl="0" marL="0" marR="0" rtl="0" algn="l">
+              <a:lnSpc>
+                <a:spcPct val="120000"/>
+              </a:lnSpc>
+              <a:spcBef>
+                <a:spcPts val="0"/>
+              </a:spcBef>
+              <a:spcAft>
+                <a:spcPts val="0"/>
+              </a:spcAft>
+              <a:buNone/>
+            </a:pPr>
+            <a:r>
+              <a:rPr b="0" i="0" lang="en-US" sz="1200" u="none" cap="none" strike="noStrike">
+                <a:solidFill>
+                  <a:srgbClr val="1E3A2F"/>
+                </a:solidFill>
+                <a:latin typeface="DM Sans"/>
+                <a:ea typeface="DM Sans"/>
+                <a:cs typeface="DM Sans"/>
+                <a:sym typeface="DM Sans"/>
+              </a:rPr>
+              <a:t>   Who you are, what you sell, what Instagram does for you</a:t>
+            </a:r>
+          </a:p>
+          <a:p>
+            <a:pPr indent="0" lvl="0" marL="0" marR="0" rtl="0" algn="l">
+              <a:lnSpc>
+                <a:spcPct val="120000"/>
+              </a:lnSpc>
+              <a:spcBef>
+                <a:spcPts val="150"/>
+              </a:spcBef>
+              <a:spcAft>
+                <a:spcPts val="0"/>
+              </a:spcAft>
+              <a:buNone/>
+            </a:pPr>
+            <a:r>
+              <a:rPr b="1" i="0" lang="en-US" sz="1300" u="none" cap="none" strike="noStrike">
+                <a:solidFill>
+                  <a:srgbClr val="B5532B"/>
+                </a:solidFill>
+                <a:latin typeface="DM Sans"/>
+                <a:ea typeface="DM Sans"/>
+                <a:cs typeface="DM Sans"/>
+                <a:sym typeface="DM Sans"/>
+              </a:rPr>
+              <a:t>Data described</a:t>
+            </a:r>
+          </a:p>
+          <a:p>
+            <a:pPr indent="0" lvl="0" marL="0" marR="0" rtl="0" algn="l">
+              <a:lnSpc>
+                <a:spcPct val="120000"/>
+              </a:lnSpc>
+              <a:spcBef>
+                <a:spcPts val="0"/>
+              </a:spcBef>
+              <a:spcAft>
+                <a:spcPts val="0"/>
+              </a:spcAft>
+              <a:buNone/>
+            </a:pPr>
+            <a:r>
+              <a:rPr b="0" i="0" lang="en-US" sz="1200" u="none" cap="none" strike="noStrike">
+                <a:solidFill>
+                  <a:srgbClr val="1E3A2F"/>
+                </a:solidFill>
+                <a:latin typeface="DM Sans"/>
+                <a:ea typeface="DM Sans"/>
+                <a:cs typeface="DM Sans"/>
+                <a:sym typeface="DM Sans"/>
+              </a:rPr>
+              <a:t>   What each column means, what is blank and why</a:t>
+            </a:r>
+          </a:p>
+          <a:p>
+            <a:pPr indent="0" lvl="0" marL="0" marR="0" rtl="0" algn="l">
+              <a:lnSpc>
+                <a:spcPct val="120000"/>
+              </a:lnSpc>
+              <a:spcBef>
+                <a:spcPts val="150"/>
+              </a:spcBef>
+              <a:spcAft>
+                <a:spcPts val="0"/>
+              </a:spcAft>
+              <a:buNone/>
+            </a:pPr>
+            <a:r>
+              <a:rPr b="1" i="0" lang="en-US" sz="1300" u="none" cap="none" strike="noStrike">
+                <a:solidFill>
+                  <a:srgbClr val="B5532B"/>
+                </a:solidFill>
+                <a:latin typeface="DM Sans"/>
+                <a:ea typeface="DM Sans"/>
+                <a:cs typeface="DM Sans"/>
+                <a:sym typeface="DM Sans"/>
+              </a:rPr>
+              <a:t>Specific steps</a:t>
+            </a:r>
+          </a:p>
+          <a:p>
+            <a:pPr indent="0" lvl="0" marL="0" marR="0" rtl="0" algn="l">
+              <a:lnSpc>
+                <a:spcPct val="120000"/>
+              </a:lnSpc>
+              <a:spcBef>
+                <a:spcPts val="0"/>
+              </a:spcBef>
+              <a:spcAft>
+                <a:spcPts val="0"/>
+              </a:spcAft>
+              <a:buNone/>
+            </a:pPr>
+            <a:r>
+              <a:rPr b="0" i="0" lang="en-US" sz="1200" u="none" cap="none" strike="noStrike">
+                <a:solidFill>
+                  <a:srgbClr val="1E3A2F"/>
+                </a:solidFill>
+                <a:latin typeface="DM Sans"/>
+                <a:ea typeface="DM Sans"/>
+                <a:cs typeface="DM Sans"/>
+                <a:sym typeface="DM Sans"/>
+              </a:rPr>
+              <a:t>   Numbered tasks with named columns</a:t>
+            </a:r>
+          </a:p>
+          <a:p>
+            <a:pPr indent="0" lvl="0" marL="0" marR="0" rtl="0" algn="l">
+              <a:lnSpc>
+                <a:spcPct val="120000"/>
+              </a:lnSpc>
+              <a:spcBef>
+                <a:spcPts val="150"/>
+              </a:spcBef>
+              <a:spcAft>
+                <a:spcPts val="0"/>
+              </a:spcAft>
+              <a:buNone/>
+            </a:pPr>
+            <a:r>
+              <a:rPr b="1" i="0" lang="en-US" sz="1300" u="none" cap="none" strike="noStrike">
+                <a:solidFill>
+                  <a:srgbClr val="B5532B"/>
+                </a:solidFill>
+                <a:latin typeface="DM Sans"/>
+                <a:ea typeface="DM Sans"/>
+                <a:cs typeface="DM Sans"/>
+                <a:sym typeface="DM Sans"/>
+              </a:rPr>
+              <a:t>Checks built in</a:t>
+            </a:r>
+          </a:p>
+          <a:p>
+            <a:pPr indent="0" lvl="0" marL="0" marR="0" rtl="0" algn="l">
+              <a:lnSpc>
+                <a:spcPct val="120000"/>
+              </a:lnSpc>
+              <a:spcBef>
+                <a:spcPts val="0"/>
+              </a:spcBef>
+              <a:spcAft>
+                <a:spcPts val="0"/>
+              </a:spcAft>
+              <a:buNone/>
+            </a:pPr>
+            <a:r>
+              <a:rPr b="0" i="0" lang="en-US" sz="1200" u="none" cap="none" strike="noStrike">
+                <a:solidFill>
+                  <a:srgbClr val="1E3A2F"/>
+                </a:solidFill>
+                <a:latin typeface="DM Sans"/>
+                <a:ea typeface="DM Sans"/>
+                <a:cs typeface="DM Sans"/>
+                <a:sym typeface="DM Sans"/>
+              </a:rPr>
+              <a:t>   Sample sizes, outliers, confounds, what cannot be concluded</a:t>
+            </a:r>
+          </a:p>
+          <a:p>
+            <a:pPr indent="0" lvl="0" marL="0" marR="0" rtl="0" algn="l">
+              <a:lnSpc>
+                <a:spcPct val="120000"/>
+              </a:lnSpc>
+              <a:spcBef>
+                <a:spcPts val="150"/>
+              </a:spcBef>
+              <a:spcAft>
+                <a:spcPts val="0"/>
+              </a:spcAft>
+              <a:buNone/>
+            </a:pPr>
+            <a:r>
+              <a:rPr b="1" i="0" lang="en-US" sz="1300" u="none" cap="none" strike="noStrike">
+                <a:solidFill>
+                  <a:srgbClr val="B5532B"/>
+                </a:solidFill>
+                <a:latin typeface="DM Sans"/>
+                <a:ea typeface="DM Sans"/>
+                <a:cs typeface="DM Sans"/>
+                <a:sym typeface="DM Sans"/>
+              </a:rPr>
+              <a:t>A decision at the end</a:t>
+            </a:r>
+          </a:p>
+          <a:p>
+            <a:pPr indent="0" lvl="0" marL="0" marR="0" rtl="0" algn="l">
+              <a:lnSpc>
+                <a:spcPct val="120000"/>
+              </a:lnSpc>
+              <a:spcBef>
+                <a:spcPts val="0"/>
+              </a:spcBef>
+              <a:spcAft>
+                <a:spcPts val="0"/>
+              </a:spcAft>
+              <a:buNone/>
+            </a:pPr>
+            <a:r>
+              <a:rPr b="0" i="0" lang="en-US" sz="1200" u="none" cap="none" strike="noStrike">
+                <a:solidFill>
+                  <a:srgbClr val="1E3A2F"/>
+                </a:solidFill>
+                <a:latin typeface="DM Sans"/>
+                <a:ea typeface="DM Sans"/>
+                <a:cs typeface="DM Sans"/>
+                <a:sym typeface="DM Sans"/>
+              </a:rPr>
+              <a:t>   Recommendation, content plan, or experiment design</a:t>
+            </a:r>
+          </a:p>
+        </p:txBody>
+      </p:sp>
+    </p:spTree>
+  </p:cSld>
+  <p:clrMapOvr>
+    <a:masterClrMapping/>
+  </p:clrMapOvr>
+</p:sld>
+</file>
+
+<file path=ppt/slides/slide44.xml><?xml version="1.0" encoding="utf-8"?>
+<p:sld xmlns:a="http://schemas.openxmlformats.org/drawingml/2006/main" xmlns:p="http://schemas.openxmlformats.org/presentationml/2006/main" xmlns:r="http://schemas.openxmlformats.org/officeDocument/2006/relationships">
+  <p:cSld>
+    <p:spTree xmlns:mc="http://schemas.openxmlformats.org/markup-compatibility/2006" xmlns:mv="urn:schemas-microsoft-com:mac:vml" xmlns:c="http://schemas.openxmlformats.org/drawingml/2006/chart" xmlns:dgm="http://schemas.openxmlformats.org/drawingml/2006/diagram" xmlns:o="urn:schemas-microsoft-com:office:office" xmlns:v="urn:schemas-microsoft-com:vml" xmlns:pvml="urn:schemas-microsoft-com:office:powerpoint" xmlns:com="http://schemas.openxmlformats.org/drawingml/2006/compatibility" xmlns:p14="http://schemas.microsoft.com/office/powerpoint/2010/main" xmlns:p15="http://schemas.microsoft.com/office/powerpoint/2012/main" xmlns:ahyp="http://schemas.microsoft.com/office/drawing/2018/hyperlinkcolor">
+      <p:nvGrpSpPr>
+        <p:cNvPr id="1" name="Shape 1"/>
+        <p:cNvGrpSpPr/>
+        <p:nvPr/>
+      </p:nvGrpSpPr>
+      <p:grpSpPr>
+        <a:xfrm>
+          <a:off x="0" y="0"/>
+          <a:ext cx="0" cy="0"/>
+          <a:chOff x="0" y="0"/>
+          <a:chExt cx="0" cy="0"/>
+        </a:xfrm>
+      </p:grpSpPr>
+      <p:sp>
+        <p:nvSpPr>
+          <p:cNvPr id="10" name="label"/>
+          <p:cNvSpPr/>
+          <p:nvPr/>
+        </p:nvSpPr>
+        <p:spPr>
+          <a:xfrm>
+            <a:off x="812800" y="812800"/>
+            <a:ext cx="10566400" cy="238760"/>
+          </a:xfrm>
+          <a:prstGeom prst="rect">
+            <a:avLst/>
+          </a:prstGeom>
+          <a:noFill/>
+          <a:ln>
+            <a:noFill/>
+          </a:ln>
+        </p:spPr>
+        <p:txBody>
+          <a:bodyPr anchorCtr="0" anchor="t" bIns="0" lIns="0" spcFirstLastPara="1" rIns="0" wrap="square" tIns="0">
+            <a:noAutofit/>
+          </a:bodyPr>
+          <a:lstStyle/>
+          <a:p>
+            <a:pPr indent="0" lvl="0" marL="0" marR="0" rtl="0" algn="l">
+              <a:lnSpc>
+                <a:spcPct val="140000"/>
+              </a:lnSpc>
+              <a:spcBef>
+                <a:spcPts val="0"/>
+              </a:spcBef>
+              <a:spcAft>
+                <a:spcPts val="0"/>
+              </a:spcAft>
+              <a:buNone/>
+            </a:pPr>
+            <a:r>
+              <a:rPr b="1" i="0" lang="en-US" sz="1200" u="none" cap="none" strike="noStrike">
+                <a:solidFill>
+                  <a:srgbClr val="B5532B"/>
+                </a:solidFill>
+                <a:latin typeface="DM Sans"/>
+                <a:ea typeface="DM Sans"/>
+                <a:cs typeface="DM Sans"/>
+                <a:sym typeface="DM Sans"/>
+              </a:rPr>
+              <a:t>ANALYSE · WRAP-UP</a:t>
+            </a:r>
+          </a:p>
+        </p:txBody>
+      </p:sp>
+      <p:sp>
+        <p:nvSpPr>
+          <p:cNvPr id="11" name="title"/>
+          <p:cNvSpPr/>
+          <p:nvPr/>
+        </p:nvSpPr>
+        <p:spPr>
+          <a:xfrm>
+            <a:off x="812800" y="1280158"/>
+            <a:ext cx="10566400" cy="528320"/>
+          </a:xfrm>
+          <a:prstGeom prst="rect">
+            <a:avLst/>
+          </a:prstGeom>
+          <a:noFill/>
+          <a:ln>
+            <a:noFill/>
+          </a:ln>
+        </p:spPr>
+        <p:txBody>
+          <a:bodyPr anchorCtr="0" anchor="t" bIns="0" lIns="0" spcFirstLastPara="1" rIns="0" wrap="square" tIns="0">
+            <a:noAutofit/>
+          </a:bodyPr>
+          <a:lstStyle/>
+          <a:p>
+            <a:pPr indent="0" lvl="0" marL="0" marR="0" rtl="0" algn="l">
+              <a:lnSpc>
+                <a:spcPct val="110000"/>
+              </a:lnSpc>
+              <a:spcBef>
+                <a:spcPts val="0"/>
+              </a:spcBef>
+              <a:spcAft>
+                <a:spcPts val="0"/>
+              </a:spcAft>
+              <a:buNone/>
+            </a:pPr>
+            <a:r>
+              <a:rPr b="0" i="0" lang="en-US" sz="3600" u="none" cap="none" strike="noStrike">
+                <a:solidFill>
+                  <a:srgbClr val="1E3A2F"/>
+                </a:solidFill>
+                <a:latin typeface="Fraunces"/>
+                <a:ea typeface="Fraunces"/>
+                <a:cs typeface="Fraunces"/>
+                <a:sym typeface="Fraunces"/>
+              </a:rPr>
+              <a:t>Keeping yourself honest</a:t>
+            </a:r>
+          </a:p>
+        </p:txBody>
+      </p:sp>
+      <p:cxnSp>
+        <p:nvCxnSpPr>
+          <p:cNvPr id="99" name="line"/>
+          <p:cNvCxnSpPr/>
+          <p:nvPr/>
+        </p:nvCxnSpPr>
+        <p:spPr>
+          <a:xfrm>
+            <a:off x="812800" y="2043435"/>
+            <a:ext cx="10566400" cy="0"/>
+          </a:xfrm>
+          <a:prstGeom prst="straightConnector1">
+            <a:avLst/>
+          </a:prstGeom>
+          <a:noFill/>
+          <a:ln cap="flat" cmpd="sng" w="12700">
+            <a:solidFill>
+              <a:srgbClr val="D9CDB6"/>
+            </a:solidFill>
+            <a:prstDash val="solid"/>
+          </a:ln>
+        </p:spPr>
+      </p:cxnSp>
+      <p:sp>
+        <p:nvSpPr>
+          <p:cNvPr id="13" name="body"/>
+          <p:cNvSpPr/>
+          <p:nvPr/>
+        </p:nvSpPr>
+        <p:spPr>
+          <a:xfrm>
+            <a:off x="812800" y="2151385"/>
+            <a:ext cx="10566400" cy="4506615"/>
+          </a:xfrm>
+          <a:prstGeom prst="rect">
+            <a:avLst/>
+          </a:prstGeom>
+          <a:noFill/>
+          <a:ln>
+            <a:noFill/>
+          </a:ln>
+        </p:spPr>
+        <p:txBody>
+          <a:bodyPr anchorCtr="0" anchor="t" bIns="0" lIns="0" spcFirstLastPara="1" rIns="0" wrap="square" tIns="0">
+            <a:noAutofit/>
+          </a:bodyPr>
+          <a:lstStyle/>
+          <a:p>
+            <a:pPr indent="0" lvl="0" marL="0" marR="0" rtl="0" algn="l">
+              <a:lnSpc>
+                <a:spcPct val="130000"/>
+              </a:lnSpc>
+              <a:spcBef>
+                <a:spcPts val="0"/>
+              </a:spcBef>
+              <a:spcAft>
+                <a:spcPts val="0"/>
+              </a:spcAft>
+              <a:buNone/>
+            </a:pPr>
+            <a:r>
+              <a:rPr b="1" i="0" lang="en-US" sz="1300" u="none" cap="none" strike="noStrike">
+                <a:solidFill>
+                  <a:srgbClr val="B5532B"/>
+                </a:solidFill>
+                <a:latin typeface="DM Sans"/>
+                <a:ea typeface="DM Sans"/>
+                <a:cs typeface="DM Sans"/>
+                <a:sym typeface="DM Sans"/>
+              </a:rPr>
+              <a:t>1  Spot-check a number</a:t>
+            </a:r>
+          </a:p>
+          <a:p>
+            <a:pPr indent="0" lvl="0" marL="0" marR="0" rtl="0" algn="l">
+              <a:lnSpc>
+                <a:spcPct val="130000"/>
+              </a:lnSpc>
+              <a:spcBef>
+                <a:spcPts val="0"/>
+              </a:spcBef>
+              <a:spcAft>
+                <a:spcPts val="0"/>
+              </a:spcAft>
+              <a:buNone/>
+            </a:pPr>
+            <a:r>
+              <a:rPr b="0" i="0" lang="en-US" sz="1200" u="none" cap="none" strike="noStrike">
+                <a:solidFill>
+                  <a:srgbClr val="1E3A2F"/>
+                </a:solidFill>
+                <a:latin typeface="DM Sans"/>
+                <a:ea typeface="DM Sans"/>
+                <a:cs typeface="DM Sans"/>
+                <a:sym typeface="DM Sans"/>
+              </a:rPr>
+              <a:t>   Pick one figure and recompute it in Excel or Sheets.</a:t>
+            </a:r>
+          </a:p>
+          <a:p/>
+          <a:p>
+            <a:pPr indent="0" lvl="0" marL="0" marR="0" rtl="0" algn="l">
+              <a:lnSpc>
+                <a:spcPct val="130000"/>
+              </a:lnSpc>
+              <a:spcBef>
+                <a:spcPts val="0"/>
+              </a:spcBef>
+              <a:spcAft>
+                <a:spcPts val="0"/>
+              </a:spcAft>
+              <a:buNone/>
+            </a:pPr>
+            <a:r>
+              <a:rPr b="1" i="0" lang="en-US" sz="1300" u="none" cap="none" strike="noStrike">
+                <a:solidFill>
+                  <a:srgbClr val="B5532B"/>
+                </a:solidFill>
+                <a:latin typeface="DM Sans"/>
+                <a:ea typeface="DM Sans"/>
+                <a:cs typeface="DM Sans"/>
+                <a:sym typeface="DM Sans"/>
+              </a:rPr>
+              <a:t>2  Ask for the working</a:t>
+            </a:r>
+          </a:p>
+          <a:p>
+            <a:pPr indent="0" lvl="0" marL="0" marR="0" rtl="0" algn="l">
+              <a:lnSpc>
+                <a:spcPct val="130000"/>
+              </a:lnSpc>
+              <a:spcBef>
+                <a:spcPts val="0"/>
+              </a:spcBef>
+              <a:spcAft>
+                <a:spcPts val="0"/>
+              </a:spcAft>
+              <a:buNone/>
+            </a:pPr>
+            <a:r>
+              <a:rPr b="0" i="0" lang="en-US" sz="1200" u="none" cap="none" strike="noStrike">
+                <a:solidFill>
+                  <a:srgbClr val="1E3A2F"/>
+                </a:solidFill>
+                <a:latin typeface="DM Sans"/>
+                <a:ea typeface="DM Sans"/>
+                <a:cs typeface="DM Sans"/>
+                <a:sym typeface="DM Sans"/>
+              </a:rPr>
+              <a:t>   "Show the calculation and the posts you used."</a:t>
+            </a:r>
+          </a:p>
+          <a:p/>
+          <a:p>
+            <a:pPr indent="0" lvl="0" marL="0" marR="0" rtl="0" algn="l">
+              <a:lnSpc>
+                <a:spcPct val="130000"/>
+              </a:lnSpc>
+              <a:spcBef>
+                <a:spcPts val="0"/>
+              </a:spcBef>
+              <a:spcAft>
+                <a:spcPts val="0"/>
+              </a:spcAft>
+              <a:buNone/>
+            </a:pPr>
+            <a:r>
+              <a:rPr b="1" i="0" lang="en-US" sz="1300" u="none" cap="none" strike="noStrike">
+                <a:solidFill>
+                  <a:srgbClr val="B5532B"/>
+                </a:solidFill>
+                <a:latin typeface="DM Sans"/>
+                <a:ea typeface="DM Sans"/>
+                <a:cs typeface="DM Sans"/>
+                <a:sym typeface="DM Sans"/>
+              </a:rPr>
+              <a:t>3  Ask for the opposite view</a:t>
+            </a:r>
+          </a:p>
+          <a:p>
+            <a:pPr indent="0" lvl="0" marL="0" marR="0" rtl="0" algn="l">
+              <a:lnSpc>
+                <a:spcPct val="130000"/>
+              </a:lnSpc>
+              <a:spcBef>
+                <a:spcPts val="0"/>
+              </a:spcBef>
+              <a:spcAft>
+                <a:spcPts val="0"/>
+              </a:spcAft>
+              <a:buNone/>
+            </a:pPr>
+            <a:r>
+              <a:rPr b="0" i="0" lang="en-US" sz="1200" u="none" cap="none" strike="noStrike">
+                <a:solidFill>
+                  <a:srgbClr val="1E3A2F"/>
+                </a:solidFill>
+                <a:latin typeface="DM Sans"/>
+                <a:ea typeface="DM Sans"/>
+                <a:cs typeface="DM Sans"/>
+                <a:sym typeface="DM Sans"/>
+              </a:rPr>
+              <a:t>   "What would someone who disagrees with this recommendation say?"</a:t>
+            </a:r>
+          </a:p>
+          <a:p/>
+          <a:p>
+            <a:pPr indent="0" lvl="0" marL="0" marR="0" rtl="0" algn="l">
+              <a:lnSpc>
+                <a:spcPct val="130000"/>
+              </a:lnSpc>
+              <a:spcBef>
+                <a:spcPts val="0"/>
+              </a:spcBef>
+              <a:spcAft>
+                <a:spcPts val="0"/>
+              </a:spcAft>
+              <a:buNone/>
+            </a:pPr>
+            <a:r>
+              <a:rPr b="1" i="0" lang="en-US" sz="1300" u="none" cap="none" strike="noStrike">
+                <a:solidFill>
+                  <a:srgbClr val="B5532B"/>
+                </a:solidFill>
+                <a:latin typeface="DM Sans"/>
+                <a:ea typeface="DM Sans"/>
+                <a:cs typeface="DM Sans"/>
+                <a:sym typeface="DM Sans"/>
+              </a:rPr>
+              <a:t>4  Watch for confident language on small samples</a:t>
+            </a:r>
+          </a:p>
+          <a:p>
+            <a:pPr indent="0" lvl="0" marL="0" marR="0" rtl="0" algn="l">
+              <a:lnSpc>
+                <a:spcPct val="130000"/>
+              </a:lnSpc>
+              <a:spcBef>
+                <a:spcPts val="0"/>
+              </a:spcBef>
+              <a:spcAft>
+                <a:spcPts val="0"/>
+              </a:spcAft>
+              <a:buNone/>
+            </a:pPr>
+            <a:r>
+              <a:rPr b="0" i="0" lang="en-US" sz="1200" u="none" cap="none" strike="noStrike">
+                <a:solidFill>
+                  <a:srgbClr val="1E3A2F"/>
+                </a:solidFill>
+                <a:latin typeface="DM Sans"/>
+                <a:ea typeface="DM Sans"/>
+                <a:cs typeface="DM Sans"/>
+                <a:sym typeface="DM Sans"/>
+              </a:rPr>
+              <a:t>   Words like "proves" or "clearly shows" on fewer than 5 posts are red flags.</a:t>
+            </a:r>
+          </a:p>
+          <a:p/>
+          <a:p>
+            <a:pPr indent="0" lvl="0" marL="0" marR="0" rtl="0" algn="l">
+              <a:lnSpc>
+                <a:spcPct val="140000"/>
+              </a:lnSpc>
+              <a:spcBef>
+                <a:spcPts val="0"/>
+              </a:spcBef>
+              <a:spcAft>
+                <a:spcPts val="0"/>
+              </a:spcAft>
+              <a:buNone/>
+            </a:pPr>
+            <a:r>
+              <a:rPr b="1" i="0" lang="en-US" sz="1400" u="none" cap="none" strike="noStrike">
+                <a:solidFill>
+                  <a:srgbClr val="1E3A2F"/>
+                </a:solidFill>
+                <a:latin typeface="DM Sans"/>
+                <a:ea typeface="DM Sans"/>
+                <a:cs typeface="DM Sans"/>
+                <a:sym typeface="DM Sans"/>
+              </a:rPr>
+              <a:t>Wrap-up question for the room</a:t>
+            </a:r>
+          </a:p>
+          <a:p>
+            <a:pPr indent="0" lvl="0" marL="0" marR="0" rtl="0" algn="l">
+              <a:lnSpc>
+                <a:spcPct val="130000"/>
+              </a:lnSpc>
+              <a:spcBef>
+                <a:spcPts val="0"/>
+              </a:spcBef>
+              <a:spcAft>
+                <a:spcPts val="0"/>
+              </a:spcAft>
+              <a:buNone/>
+            </a:pPr>
+            <a:r>
+              <a:rPr b="0" i="1" lang="en-US" sz="1300" u="none" cap="none" strike="noStrike">
+                <a:solidFill>
+                  <a:srgbClr val="1E3A2F"/>
+                </a:solidFill>
+                <a:latin typeface="DM Sans"/>
+                <a:ea typeface="DM Sans"/>
+                <a:cs typeface="DM Sans"/>
+                <a:sym typeface="DM Sans"/>
+              </a:rPr>
+              <a:t>"Which of the five answers would you act on tomorrow, which would you test first,</a:t>
+            </a:r>
+          </a:p>
+          <a:p>
+            <a:pPr indent="0" lvl="0" marL="0" marR="0" rtl="0" algn="l">
+              <a:lnSpc>
+                <a:spcPct val="130000"/>
+              </a:lnSpc>
+              <a:spcBef>
+                <a:spcPts val="0"/>
+              </a:spcBef>
+              <a:spcAft>
+                <a:spcPts val="0"/>
+              </a:spcAft>
+              <a:buNone/>
+            </a:pPr>
+            <a:r>
+              <a:rPr b="0" i="1" lang="en-US" sz="1300" u="none" cap="none" strike="noStrike">
+                <a:solidFill>
+                  <a:srgbClr val="1E3A2F"/>
+                </a:solidFill>
+                <a:latin typeface="DM Sans"/>
+                <a:ea typeface="DM Sans"/>
+                <a:cs typeface="DM Sans"/>
+                <a:sym typeface="DM Sans"/>
+              </a:rPr>
+              <a:t> and which would you ignore because the data cannot support it?"</a:t>
+            </a:r>
           </a:p>
         </p:txBody>
       </p:sp>

--- a/Prestentations/AI for Content Creation — The Basics.pptx
+++ b/Prestentations/AI for Content Creation — The Basics.pptx
@@ -59,7 +59,7 @@
       <p:boldItalic r:id="rId45"/>
     </p:embeddedFont>
     <p:embeddedFont>
-      <p:font typeface="Fraunces"/>
+      <p:font typeface="Fraunces" pitchFamily="2" charset="77"/>
       <p:regular r:id="rId46"/>
       <p:bold r:id="rId47"/>
       <p:italic r:id="rId48"/>
@@ -5012,10 +5012,10 @@
               <a:buNone/>
             </a:pPr>
             <a:r>
-              <a:rPr lang="en-US"/>
+              <a:rPr lang="en-US" dirty="0"/>
               <a:t>Demo framing, about 30 seconds. Tell people they do not need to type along; the hands-on repeats exactly these four steps with the Loop Tote. Ask them to watch two things: how the prompt is built, and what you check before accepting the output.</a:t>
             </a:r>
-            <a:endParaRPr/>
+            <a:endParaRPr dirty="0"/>
           </a:p>
         </p:txBody>
       </p:sp>
@@ -11545,7 +11545,7 @@
 </file>
 
 <file path=ppt/slides/slide14.xml><?xml version="1.0" encoding="utf-8"?>
-<p:sld xmlns:a="http://schemas.openxmlformats.org/drawingml/2006/main" xmlns:r="http://schemas.openxmlformats.org/officeDocument/2006/relationships" xmlns:p="http://schemas.openxmlformats.org/presentationml/2006/main">
+<p:sld xmlns:a="http://schemas.openxmlformats.org/drawingml/2006/main" xmlns:r="http://schemas.openxmlformats.org/officeDocument/2006/relationships" xmlns:p="http://schemas.openxmlformats.org/presentationml/2006/main" show="0">
   <p:cSld>
     <p:bg>
       <p:bgPr>
@@ -11923,7 +11923,7 @@
 </file>
 
 <file path=ppt/slides/slide15.xml><?xml version="1.0" encoding="utf-8"?>
-<p:sld xmlns:a="http://schemas.openxmlformats.org/drawingml/2006/main" xmlns:r="http://schemas.openxmlformats.org/officeDocument/2006/relationships" xmlns:p="http://schemas.openxmlformats.org/presentationml/2006/main">
+<p:sld xmlns:a="http://schemas.openxmlformats.org/drawingml/2006/main" xmlns:r="http://schemas.openxmlformats.org/officeDocument/2006/relationships" xmlns:p="http://schemas.openxmlformats.org/presentationml/2006/main" show="0">
   <p:cSld>
     <p:bg>
       <p:bgPr>
@@ -12474,7 +12474,7 @@
 </file>
 
 <file path=ppt/slides/slide16.xml><?xml version="1.0" encoding="utf-8"?>
-<p:sld xmlns:a="http://schemas.openxmlformats.org/drawingml/2006/main" xmlns:r="http://schemas.openxmlformats.org/officeDocument/2006/relationships" xmlns:p="http://schemas.openxmlformats.org/presentationml/2006/main">
+<p:sld xmlns:a="http://schemas.openxmlformats.org/drawingml/2006/main" xmlns:r="http://schemas.openxmlformats.org/officeDocument/2006/relationships" xmlns:p="http://schemas.openxmlformats.org/presentationml/2006/main" show="0">
   <p:cSld>
     <p:bg>
       <p:bgPr>
@@ -13983,7 +13983,7 @@
 </file>
 
 <file path=ppt/slides/slide17.xml><?xml version="1.0" encoding="utf-8"?>
-<p:sld xmlns:a="http://schemas.openxmlformats.org/drawingml/2006/main" xmlns:r="http://schemas.openxmlformats.org/officeDocument/2006/relationships" xmlns:p="http://schemas.openxmlformats.org/presentationml/2006/main">
+<p:sld xmlns:a="http://schemas.openxmlformats.org/drawingml/2006/main" xmlns:r="http://schemas.openxmlformats.org/officeDocument/2006/relationships" xmlns:p="http://schemas.openxmlformats.org/presentationml/2006/main" show="0">
   <p:cSld>
     <p:bg>
       <p:bgPr>
@@ -15134,7 +15134,7 @@
 </file>
 
 <file path=ppt/slides/slide18.xml><?xml version="1.0" encoding="utf-8"?>
-<p:sld xmlns:a="http://schemas.openxmlformats.org/drawingml/2006/main" xmlns:r="http://schemas.openxmlformats.org/officeDocument/2006/relationships" xmlns:p="http://schemas.openxmlformats.org/presentationml/2006/main">
+<p:sld xmlns:a="http://schemas.openxmlformats.org/drawingml/2006/main" xmlns:r="http://schemas.openxmlformats.org/officeDocument/2006/relationships" xmlns:p="http://schemas.openxmlformats.org/presentationml/2006/main" show="0">
   <p:cSld>
     <p:bg>
       <p:bgPr>
@@ -16301,7 +16301,7 @@
 </file>
 
 <file path=ppt/slides/slide19.xml><?xml version="1.0" encoding="utf-8"?>
-<p:sld xmlns:a="http://schemas.openxmlformats.org/drawingml/2006/main" xmlns:r="http://schemas.openxmlformats.org/officeDocument/2006/relationships" xmlns:p="http://schemas.openxmlformats.org/presentationml/2006/main">
+<p:sld xmlns:a="http://schemas.openxmlformats.org/drawingml/2006/main" xmlns:r="http://schemas.openxmlformats.org/officeDocument/2006/relationships" xmlns:p="http://schemas.openxmlformats.org/presentationml/2006/main" show="0">
   <p:cSld>
     <p:bg>
       <p:bgPr>
@@ -17602,7 +17602,7 @@
 </file>
 
 <file path=ppt/slides/slide20.xml><?xml version="1.0" encoding="utf-8"?>
-<p:sld xmlns:a="http://schemas.openxmlformats.org/drawingml/2006/main" xmlns:r="http://schemas.openxmlformats.org/officeDocument/2006/relationships" xmlns:p="http://schemas.openxmlformats.org/presentationml/2006/main">
+<p:sld xmlns:a="http://schemas.openxmlformats.org/drawingml/2006/main" xmlns:r="http://schemas.openxmlformats.org/officeDocument/2006/relationships" xmlns:p="http://schemas.openxmlformats.org/presentationml/2006/main" show="0">
   <p:cSld>
     <p:bg>
       <p:bgPr>
@@ -18725,7 +18725,7 @@
 </file>
 
 <file path=ppt/slides/slide21.xml><?xml version="1.0" encoding="utf-8"?>
-<p:sld xmlns:a="http://schemas.openxmlformats.org/drawingml/2006/main" xmlns:r="http://schemas.openxmlformats.org/officeDocument/2006/relationships" xmlns:p="http://schemas.openxmlformats.org/presentationml/2006/main">
+<p:sld xmlns:a="http://schemas.openxmlformats.org/drawingml/2006/main" xmlns:r="http://schemas.openxmlformats.org/officeDocument/2006/relationships" xmlns:p="http://schemas.openxmlformats.org/presentationml/2006/main" show="0">
   <p:cSld>
     <p:bg>
       <p:bgPr>
@@ -19224,7 +19224,7 @@
 </file>
 
 <file path=ppt/slides/slide22.xml><?xml version="1.0" encoding="utf-8"?>
-<p:sld xmlns:a="http://schemas.openxmlformats.org/drawingml/2006/main" xmlns:r="http://schemas.openxmlformats.org/officeDocument/2006/relationships" xmlns:p="http://schemas.openxmlformats.org/presentationml/2006/main">
+<p:sld xmlns:a="http://schemas.openxmlformats.org/drawingml/2006/main" xmlns:r="http://schemas.openxmlformats.org/officeDocument/2006/relationships" xmlns:p="http://schemas.openxmlformats.org/presentationml/2006/main" show="0">
   <p:cSld>
     <p:bg>
       <p:bgPr>
@@ -20915,7 +20915,7 @@
 </file>
 
 <file path=ppt/slides/slide23.xml><?xml version="1.0" encoding="utf-8"?>
-<p:sld xmlns:a="http://schemas.openxmlformats.org/drawingml/2006/main" xmlns:r="http://schemas.openxmlformats.org/officeDocument/2006/relationships" xmlns:p="http://schemas.openxmlformats.org/presentationml/2006/main">
+<p:sld xmlns:a="http://schemas.openxmlformats.org/drawingml/2006/main" xmlns:r="http://schemas.openxmlformats.org/officeDocument/2006/relationships" xmlns:p="http://schemas.openxmlformats.org/presentationml/2006/main" show="0">
   <p:cSld>
     <p:bg>
       <p:bgPr>
@@ -22066,7 +22066,7 @@
 </file>
 
 <file path=ppt/slides/slide24.xml><?xml version="1.0" encoding="utf-8"?>
-<p:sld xmlns:a="http://schemas.openxmlformats.org/drawingml/2006/main" xmlns:r="http://schemas.openxmlformats.org/officeDocument/2006/relationships" xmlns:p="http://schemas.openxmlformats.org/presentationml/2006/main">
+<p:sld xmlns:a="http://schemas.openxmlformats.org/drawingml/2006/main" xmlns:r="http://schemas.openxmlformats.org/officeDocument/2006/relationships" xmlns:p="http://schemas.openxmlformats.org/presentationml/2006/main" show="0">
   <p:cSld>
     <p:bg>
       <p:bgPr>
@@ -23161,7 +23161,7 @@
 </file>
 
 <file path=ppt/slides/slide25.xml><?xml version="1.0" encoding="utf-8"?>
-<p:sld xmlns:a="http://schemas.openxmlformats.org/drawingml/2006/main" xmlns:r="http://schemas.openxmlformats.org/officeDocument/2006/relationships" xmlns:p="http://schemas.openxmlformats.org/presentationml/2006/main">
+<p:sld xmlns:a="http://schemas.openxmlformats.org/drawingml/2006/main" xmlns:r="http://schemas.openxmlformats.org/officeDocument/2006/relationships" xmlns:p="http://schemas.openxmlformats.org/presentationml/2006/main" show="0">
   <p:cSld>
     <p:bg>
       <p:bgPr>
@@ -24216,7 +24216,7 @@
 </file>
 
 <file path=ppt/slides/slide26.xml><?xml version="1.0" encoding="utf-8"?>
-<p:sld xmlns:a="http://schemas.openxmlformats.org/drawingml/2006/main" xmlns:r="http://schemas.openxmlformats.org/officeDocument/2006/relationships" xmlns:p="http://schemas.openxmlformats.org/presentationml/2006/main">
+<p:sld xmlns:a="http://schemas.openxmlformats.org/drawingml/2006/main" xmlns:r="http://schemas.openxmlformats.org/officeDocument/2006/relationships" xmlns:p="http://schemas.openxmlformats.org/presentationml/2006/main" show="0">
   <p:cSld>
     <p:bg>
       <p:bgPr>
@@ -25339,7 +25339,7 @@
 </file>
 
 <file path=ppt/slides/slide27.xml><?xml version="1.0" encoding="utf-8"?>
-<p:sld xmlns:a="http://schemas.openxmlformats.org/drawingml/2006/main" xmlns:r="http://schemas.openxmlformats.org/officeDocument/2006/relationships" xmlns:p="http://schemas.openxmlformats.org/presentationml/2006/main">
+<p:sld xmlns:a="http://schemas.openxmlformats.org/drawingml/2006/main" xmlns:r="http://schemas.openxmlformats.org/officeDocument/2006/relationships" xmlns:p="http://schemas.openxmlformats.org/presentationml/2006/main" show="0">
   <p:cSld>
     <p:bg>
       <p:bgPr>
@@ -28395,7 +28395,7 @@
         <p:spPr>
           <a:xfrm>
             <a:off x="813816" y="2148840"/>
-            <a:ext cx="5184648" cy="4185761"/>
+            <a:ext cx="5184648" cy="3754874"/>
           </a:xfrm>
           <a:prstGeom prst="rect">
             <a:avLst/>
@@ -28643,36 +28643,6 @@
                 <a:srgbClr val="1E3A2F"/>
               </a:solidFill>
             </a:endParaRPr>
-          </a:p>
-          <a:p>
-            <a:pPr algn="l"/>
-            <a:r>
-              <a:rPr b="1" dirty="0" err="1">
-                <a:solidFill>
-                  <a:srgbClr val="1E3A2F"/>
-                </a:solidFill>
-              </a:rPr>
-              <a:t>loopcycle_tote_orders.csv</a:t>
-            </a:r>
-            <a:r>
-              <a:rPr b="1" dirty="0">
-                <a:solidFill>
-                  <a:srgbClr val="1E3A2F"/>
-                </a:solidFill>
-              </a:rPr>
-              <a:t>  (optional)</a:t>
-            </a:r>
-          </a:p>
-          <a:p>
-            <a:pPr algn="l"/>
-            <a:r>
-              <a:rPr b="0" dirty="0">
-                <a:solidFill>
-                  <a:srgbClr val="1E3A2F"/>
-                </a:solidFill>
-              </a:rPr>
-              <a:t>Link reviews to orders for delivery-time follow-ups.</a:t>
-            </a:r>
           </a:p>
         </p:txBody>
       </p:sp>
@@ -30650,7 +30620,7 @@
         <p:spPr>
           <a:xfrm>
             <a:off x="923544" y="2258568"/>
-            <a:ext cx="6016752" cy="3182859"/>
+            <a:ext cx="6016752" cy="2559611"/>
           </a:xfrm>
           <a:prstGeom prst="rect">
             <a:avLst/>
@@ -30907,89 +30877,6 @@
                 <a:srgbClr val="FBF3E8"/>
               </a:solidFill>
             </a:endParaRPr>
-          </a:p>
-          <a:p>
-            <a:pPr algn="l">
-              <a:lnSpc>
-                <a:spcPct val="150000"/>
-              </a:lnSpc>
-            </a:pPr>
-            <a:r>
-              <a:rPr sz="900" dirty="0">
-                <a:solidFill>
-                  <a:srgbClr val="FBF3E8"/>
-                </a:solidFill>
-              </a:rPr>
-              <a:t>Follow-up: </a:t>
-            </a:r>
-            <a:endParaRPr lang="en-US" sz="900" dirty="0">
-              <a:solidFill>
-                <a:srgbClr val="FBF3E8"/>
-              </a:solidFill>
-            </a:endParaRPr>
-          </a:p>
-          <a:p>
-            <a:pPr algn="l">
-              <a:lnSpc>
-                <a:spcPct val="150000"/>
-              </a:lnSpc>
-            </a:pPr>
-            <a:r>
-              <a:rPr sz="900" dirty="0">
-                <a:solidFill>
-                  <a:srgbClr val="FBF3E8"/>
-                </a:solidFill>
-              </a:rPr>
-              <a:t>if I also give you </a:t>
-            </a:r>
-            <a:r>
-              <a:rPr sz="900" dirty="0" err="1">
-                <a:solidFill>
-                  <a:srgbClr val="FBF3E8"/>
-                </a:solidFill>
-              </a:rPr>
-              <a:t>loopcycle_tote_orders.csv</a:t>
-            </a:r>
-            <a:r>
-              <a:rPr sz="900" dirty="0">
-                <a:solidFill>
-                  <a:srgbClr val="FBF3E8"/>
-                </a:solidFill>
-              </a:rPr>
-              <a:t>, how</a:t>
-            </a:r>
-            <a:r>
-              <a:rPr lang="en-US" sz="900" dirty="0">
-                <a:solidFill>
-                  <a:srgbClr val="FBF3E8"/>
-                </a:solidFill>
-              </a:rPr>
-              <a:t> </a:t>
-            </a:r>
-            <a:r>
-              <a:rPr sz="900" dirty="0">
-                <a:solidFill>
-                  <a:srgbClr val="FBF3E8"/>
-                </a:solidFill>
-              </a:rPr>
-              <a:t>would you check whether delivery complaints match longer delivery</a:t>
-            </a:r>
-            <a:r>
-              <a:rPr lang="en-US" sz="900" dirty="0">
-                <a:solidFill>
-                  <a:srgbClr val="FBF3E8"/>
-                </a:solidFill>
-              </a:rPr>
-              <a:t> </a:t>
-            </a:r>
-            <a:r>
-              <a:rPr sz="900" dirty="0">
-                <a:solidFill>
-                  <a:srgbClr val="FBF3E8"/>
-                </a:solidFill>
-              </a:rPr>
-              <a:t>times? Describe the join and columns, then do it.</a:t>
-            </a:r>
           </a:p>
         </p:txBody>
       </p:sp>
@@ -33164,7 +33051,7 @@
         </p:nvSpPr>
         <p:spPr>
           <a:xfrm>
-            <a:off x="715523" y="2870279"/>
+            <a:off x="812800" y="2844807"/>
             <a:ext cx="10883392" cy="1625600"/>
           </a:xfrm>
           <a:prstGeom prst="rect">
@@ -33216,7 +33103,25 @@
                 <a:cs typeface="Fraunces"/>
                 <a:sym typeface="Fraunces"/>
               </a:rPr>
-              <a:t>Chatbot Agent</a:t>
+              <a:t>Chatbot Agent using </a:t>
+            </a:r>
+            <a:r>
+              <a:rPr kumimoji="0" lang="en-US" sz="6000" b="0" i="0" u="none" strike="noStrike" kern="0" cap="none" spc="0" normalizeH="0" baseline="0" noProof="0" dirty="0" err="1">
+                <a:ln>
+                  <a:noFill/>
+                </a:ln>
+                <a:solidFill>
+                  <a:srgbClr val="1E3A2F"/>
+                </a:solidFill>
+                <a:effectLst/>
+                <a:uLnTx/>
+                <a:uFillTx/>
+                <a:latin typeface="Fraunces"/>
+                <a:ea typeface="Fraunces"/>
+                <a:cs typeface="Fraunces"/>
+                <a:sym typeface="Fraunces"/>
+              </a:rPr>
+              <a:t>elevenLabs</a:t>
             </a:r>
             <a:endParaRPr kumimoji="0" sz="6000" b="0" i="0" u="none" strike="noStrike" kern="0" cap="none" spc="0" normalizeH="0" baseline="0" noProof="0" dirty="0">
               <a:ln>
@@ -33250,7 +33155,7 @@
         </p:nvSpPr>
         <p:spPr>
           <a:xfrm>
-            <a:off x="715523" y="4342795"/>
+            <a:off x="728493" y="5558382"/>
             <a:ext cx="1319100" cy="469800"/>
           </a:xfrm>
           <a:prstGeom prst="roundRect">
@@ -33340,7 +33245,7 @@
         </p:nvSpPr>
         <p:spPr>
           <a:xfrm>
-            <a:off x="2187136" y="4342795"/>
+            <a:off x="2200106" y="5558382"/>
             <a:ext cx="1603500" cy="469800"/>
           </a:xfrm>
           <a:prstGeom prst="roundRect">
@@ -33442,7 +33347,7 @@
         </p:nvSpPr>
         <p:spPr>
           <a:xfrm>
-            <a:off x="3943122" y="4342795"/>
+            <a:off x="3956092" y="5558382"/>
             <a:ext cx="1493100" cy="469800"/>
           </a:xfrm>
           <a:prstGeom prst="roundRect">
@@ -33532,7 +33437,7 @@
         </p:nvSpPr>
         <p:spPr>
           <a:xfrm>
-            <a:off x="5588619" y="4342795"/>
+            <a:off x="5601589" y="5558382"/>
             <a:ext cx="2108100" cy="469800"/>
           </a:xfrm>
           <a:prstGeom prst="roundRect">
@@ -33605,6 +33510,90 @@
               <a:cs typeface="Calibri"/>
               <a:sym typeface="Calibri"/>
             </a:endParaRPr>
+          </a:p>
+        </p:txBody>
+      </p:sp>
+      <p:sp>
+        <p:nvSpPr>
+          <p:cNvPr id="5" name="TextBox 4">
+            <a:extLst>
+              <a:ext uri="{FF2B5EF4-FFF2-40B4-BE49-F238E27FC236}">
+                <a16:creationId xmlns:a16="http://schemas.microsoft.com/office/drawing/2014/main" id="{3433939A-87D9-5689-2186-41414946ABBC}"/>
+              </a:ext>
+            </a:extLst>
+          </p:cNvPr>
+          <p:cNvSpPr txBox="1"/>
+          <p:nvPr/>
+        </p:nvSpPr>
+        <p:spPr>
+          <a:xfrm>
+            <a:off x="812800" y="4936919"/>
+            <a:ext cx="6096000" cy="330219"/>
+          </a:xfrm>
+          <a:prstGeom prst="rect">
+            <a:avLst/>
+          </a:prstGeom>
+          <a:noFill/>
+          <a:ln>
+            <a:noFill/>
+          </a:ln>
+        </p:spPr>
+        <p:txBody>
+          <a:bodyPr spcFirstLastPara="1" wrap="square" lIns="0" tIns="0" rIns="0" bIns="0" anchor="t" anchorCtr="0">
+            <a:noAutofit/>
+          </a:bodyPr>
+          <a:lstStyle>
+            <a:defPPr marR="0" lvl="0" algn="l" rtl="0">
+              <a:lnSpc>
+                <a:spcPct val="100000"/>
+              </a:lnSpc>
+              <a:spcBef>
+                <a:spcPts val="0"/>
+              </a:spcBef>
+              <a:spcAft>
+                <a:spcPts val="0"/>
+              </a:spcAft>
+            </a:defPPr>
+            <a:lvl1pPr marL="0" indent="0" defTabSz="914400" eaLnBrk="1" fontAlgn="auto" latinLnBrk="0" hangingPunct="1">
+              <a:lnSpc>
+                <a:spcPct val="140000"/>
+              </a:lnSpc>
+              <a:buClr>
+                <a:srgbClr val="1E3A2F"/>
+              </a:buClr>
+              <a:buSzPts val="1200"/>
+              <a:buFont typeface="DM Sans"/>
+              <a:buNone/>
+              <a:tabLst/>
+              <a:defRPr kumimoji="0" sz="1200" b="1" kern="0" normalizeH="0" baseline="0">
+                <a:ln>
+                  <a:noFill/>
+                </a:ln>
+                <a:solidFill>
+                  <a:srgbClr val="1E3A2F"/>
+                </a:solidFill>
+                <a:effectLst/>
+                <a:uLnTx/>
+                <a:uFillTx/>
+                <a:latin typeface="DM Sans"/>
+                <a:ea typeface="DM Sans"/>
+                <a:cs typeface="DM Sans"/>
+              </a:defRPr>
+            </a:lvl1pPr>
+          </a:lstStyle>
+          <a:p>
+            <a:r>
+              <a:rPr lang="en-US" dirty="0"/>
+              <a:t>https://</a:t>
+            </a:r>
+            <a:r>
+              <a:rPr lang="en-US" dirty="0" err="1"/>
+              <a:t>elevenlabs.io</a:t>
+            </a:r>
+            <a:r>
+              <a:rPr lang="en-US" dirty="0"/>
+              <a:t>/</a:t>
+            </a:r>
           </a:p>
         </p:txBody>
       </p:sp>
